--- a/modules/module-01-industrial-demand-generation/delivery-pack/slide-decks/exports/lesson-08-measurement-cadence-and-90-day-pilot.pptx
+++ b/modules/module-01-industrial-demand-generation/delivery-pack/slide-decks/exports/lesson-08-measurement-cadence-and-90-day-pilot.pptx
@@ -2,27 +2,27 @@
 <file path=ppt/presentation.xml><?xml version="1.0" encoding="utf-8"?>
 <p:presentation xmlns:p="http://schemas.openxmlformats.org/presentationml/2006/main">
   <p:sldMasterIdLst>
-    <p:sldMasterId xmlns:r="http://schemas.openxmlformats.org/officeDocument/2006/relationships" id="2147483648" r:id="Rf73d3e96b3204684"/>
+    <p:sldMasterId xmlns:r="http://schemas.openxmlformats.org/officeDocument/2006/relationships" id="2147483648" r:id="Rbdf681ec51524dd4"/>
   </p:sldMasterIdLst>
   <p:notesMasterIdLst>
-    <p:notesMasterId xmlns:r="http://schemas.openxmlformats.org/officeDocument/2006/relationships" r:id="R0a7cc7d17dd1402c"/>
+    <p:notesMasterId xmlns:r="http://schemas.openxmlformats.org/officeDocument/2006/relationships" r:id="Rbf18ac5c011a4008"/>
   </p:notesMasterIdLst>
   <p:sldIdLst>
-    <p:sldId xmlns:r="http://schemas.openxmlformats.org/officeDocument/2006/relationships" id="256" r:id="R89b8521a108f4d08"/>
-    <p:sldId xmlns:r="http://schemas.openxmlformats.org/officeDocument/2006/relationships" id="257" r:id="R91411d8b80744593"/>
-    <p:sldId xmlns:r="http://schemas.openxmlformats.org/officeDocument/2006/relationships" id="258" r:id="Re7960e5718f14778"/>
-    <p:sldId xmlns:r="http://schemas.openxmlformats.org/officeDocument/2006/relationships" id="259" r:id="R5da9001d42c0401f"/>
-    <p:sldId xmlns:r="http://schemas.openxmlformats.org/officeDocument/2006/relationships" id="260" r:id="R3a5d6aec33aa4a9d"/>
-    <p:sldId xmlns:r="http://schemas.openxmlformats.org/officeDocument/2006/relationships" id="261" r:id="R3c279283846944a5"/>
-    <p:sldId xmlns:r="http://schemas.openxmlformats.org/officeDocument/2006/relationships" id="262" r:id="Rc04fad3793c14868"/>
-    <p:sldId xmlns:r="http://schemas.openxmlformats.org/officeDocument/2006/relationships" id="263" r:id="Rf14ca6f8039444dc"/>
-    <p:sldId xmlns:r="http://schemas.openxmlformats.org/officeDocument/2006/relationships" id="264" r:id="R4e1c093ddf0f4e88"/>
-    <p:sldId xmlns:r="http://schemas.openxmlformats.org/officeDocument/2006/relationships" id="265" r:id="R641a38c6a3c54da0"/>
-    <p:sldId xmlns:r="http://schemas.openxmlformats.org/officeDocument/2006/relationships" id="266" r:id="Rbaaa580380f9435c"/>
-    <p:sldId xmlns:r="http://schemas.openxmlformats.org/officeDocument/2006/relationships" id="267" r:id="Rbd2a85f6ee904b81"/>
-    <p:sldId xmlns:r="http://schemas.openxmlformats.org/officeDocument/2006/relationships" id="268" r:id="Rabaf038745044ac4"/>
-    <p:sldId xmlns:r="http://schemas.openxmlformats.org/officeDocument/2006/relationships" id="269" r:id="R8b1a80f8707a417c"/>
-    <p:sldId xmlns:r="http://schemas.openxmlformats.org/officeDocument/2006/relationships" id="270" r:id="R0f339a38e667426e"/>
+    <p:sldId xmlns:r="http://schemas.openxmlformats.org/officeDocument/2006/relationships" id="256" r:id="R0e25f56c69c7405a"/>
+    <p:sldId xmlns:r="http://schemas.openxmlformats.org/officeDocument/2006/relationships" id="257" r:id="Rcaf28f70dfda4338"/>
+    <p:sldId xmlns:r="http://schemas.openxmlformats.org/officeDocument/2006/relationships" id="258" r:id="Rbbbd387b2b5c4a03"/>
+    <p:sldId xmlns:r="http://schemas.openxmlformats.org/officeDocument/2006/relationships" id="259" r:id="Re4cc640e355d49de"/>
+    <p:sldId xmlns:r="http://schemas.openxmlformats.org/officeDocument/2006/relationships" id="260" r:id="Rb154b7947d0e4971"/>
+    <p:sldId xmlns:r="http://schemas.openxmlformats.org/officeDocument/2006/relationships" id="261" r:id="R30e8e7dddd9a4d6f"/>
+    <p:sldId xmlns:r="http://schemas.openxmlformats.org/officeDocument/2006/relationships" id="262" r:id="Rfe571a3d04f04170"/>
+    <p:sldId xmlns:r="http://schemas.openxmlformats.org/officeDocument/2006/relationships" id="263" r:id="R26749eb7e3904c4d"/>
+    <p:sldId xmlns:r="http://schemas.openxmlformats.org/officeDocument/2006/relationships" id="264" r:id="R4ef6fde977a449e6"/>
+    <p:sldId xmlns:r="http://schemas.openxmlformats.org/officeDocument/2006/relationships" id="265" r:id="R9d6b4bb7394644ce"/>
+    <p:sldId xmlns:r="http://schemas.openxmlformats.org/officeDocument/2006/relationships" id="266" r:id="R2399adbff8ae4878"/>
+    <p:sldId xmlns:r="http://schemas.openxmlformats.org/officeDocument/2006/relationships" id="267" r:id="R1bdfed826423494b"/>
+    <p:sldId xmlns:r="http://schemas.openxmlformats.org/officeDocument/2006/relationships" id="268" r:id="R79bd1d86e5e0474f"/>
+    <p:sldId xmlns:r="http://schemas.openxmlformats.org/officeDocument/2006/relationships" id="269" r:id="R85587f3783ea4c19"/>
+    <p:sldId xmlns:r="http://schemas.openxmlformats.org/officeDocument/2006/relationships" id="270" r:id="R7cc98ffd9de94e19"/>
   </p:sldIdLst>
   <p:sldSz cx="12192000" cy="6858000"/>
   <p:notesSz cx="6858000" cy="9144000"/>
@@ -1493,7 +1493,7 @@
   </p:cSld>
   <p:clrMap bg1="lt1" tx1="dk1" bg2="lt2" tx2="dk2" accent1="accent1" accent2="accent2" accent3="accent3" accent4="accent4" accent5="accent5" accent6="accent6" hlink="hlink" folHlink="folHlink"/>
   <p:sldLayoutIdLst>
-    <p:sldLayoutId xmlns:r="http://schemas.openxmlformats.org/officeDocument/2006/relationships" id="2147483649" r:id="Rc382996babb145a7"/>
+    <p:sldLayoutId xmlns:r="http://schemas.openxmlformats.org/officeDocument/2006/relationships" id="2147483649" r:id="R26affb0d9e394092"/>
   </p:sldLayoutIdLst>
   <p:txStyles>
     <p:titleStyle>
@@ -1792,7 +1792,7 @@
           <p:cNvPr id="1" name="">
             <a:extLst xmlns:a="http://schemas.openxmlformats.org/drawingml/2006/main">
               <a:ext uri="{FF2B5EF4-FFF2-40B4-BE49-F238E27FC236}">
-                <a16:creationId xmlns:a16="http://schemas.microsoft.com/office/drawing/2014/main" id="{46874B48-B03B-45DF-9334-41DA741C854A}"/>
+                <a16:creationId xmlns:a16="http://schemas.microsoft.com/office/drawing/2014/main" id="{A63A8EA9-CDA3-42F6-893B-6C54DDF5C79F}"/>
               </a:ext>
             </a:extLst>
           </p:cNvPr>
@@ -1827,7 +1827,7 @@
           <p:cNvPr id="2" name="">
             <a:extLst xmlns:a="http://schemas.openxmlformats.org/drawingml/2006/main">
               <a:ext uri="{FF2B5EF4-FFF2-40B4-BE49-F238E27FC236}">
-                <a16:creationId xmlns:a16="http://schemas.microsoft.com/office/drawing/2014/main" id="{2DCAFF31-3E68-431F-A928-6BCE8139D727}"/>
+                <a16:creationId xmlns:a16="http://schemas.microsoft.com/office/drawing/2014/main" id="{0D8118AC-C46F-461E-88C6-E8E255D9D9AA}"/>
               </a:ext>
             </a:extLst>
           </p:cNvPr>
@@ -1862,7 +1862,7 @@
           <p:cNvPr id="3" name="">
             <a:extLst xmlns:a="http://schemas.openxmlformats.org/drawingml/2006/main">
               <a:ext uri="{FF2B5EF4-FFF2-40B4-BE49-F238E27FC236}">
-                <a16:creationId xmlns:a16="http://schemas.microsoft.com/office/drawing/2014/main" id="{4089B798-EB52-4404-918E-1FE5AB557B81}"/>
+                <a16:creationId xmlns:a16="http://schemas.microsoft.com/office/drawing/2014/main" id="{A9103C41-1B29-454A-ADC3-2EE185DF4556}"/>
               </a:ext>
             </a:extLst>
           </p:cNvPr>
@@ -1897,7 +1897,7 @@
           <p:cNvPr id="4" name="kicker-08-marker">
             <a:extLst xmlns:a="http://schemas.openxmlformats.org/drawingml/2006/main">
               <a:ext uri="{FF2B5EF4-FFF2-40B4-BE49-F238E27FC236}">
-                <a16:creationId xmlns:a16="http://schemas.microsoft.com/office/drawing/2014/main" id="{BFA54A6F-6D5C-4FD3-B990-FAE95E906EF6}"/>
+                <a16:creationId xmlns:a16="http://schemas.microsoft.com/office/drawing/2014/main" id="{D253EF3A-B1B5-4D9B-AE7F-81BF204B8A87}"/>
               </a:ext>
             </a:extLst>
           </p:cNvPr>
@@ -1932,7 +1932,7 @@
           <p:cNvPr id="5" name="kicker-08-label">
             <a:extLst xmlns:a="http://schemas.openxmlformats.org/drawingml/2006/main">
               <a:ext uri="{FF2B5EF4-FFF2-40B4-BE49-F238E27FC236}">
-                <a16:creationId xmlns:a16="http://schemas.microsoft.com/office/drawing/2014/main" id="{E4F71018-1F93-4629-B0D2-31C19347F1A2}"/>
+                <a16:creationId xmlns:a16="http://schemas.microsoft.com/office/drawing/2014/main" id="{0016EF5B-0B28-4ACB-B5BD-28B05DEC356D}"/>
               </a:ext>
             </a:extLst>
           </p:cNvPr>
@@ -1996,7 +1996,7 @@
           <p:cNvPr id="6" name="">
             <a:extLst xmlns:a="http://schemas.openxmlformats.org/drawingml/2006/main">
               <a:ext uri="{FF2B5EF4-FFF2-40B4-BE49-F238E27FC236}">
-                <a16:creationId xmlns:a16="http://schemas.microsoft.com/office/drawing/2014/main" id="{C6744A6F-3F19-42CB-92EC-7BAF745391CF}"/>
+                <a16:creationId xmlns:a16="http://schemas.microsoft.com/office/drawing/2014/main" id="{C3C4CCCE-E7B7-4A23-A5E9-410B832AF91A}"/>
               </a:ext>
             </a:extLst>
           </p:cNvPr>
@@ -2060,7 +2060,7 @@
           <p:cNvPr id="7" name="">
             <a:extLst xmlns:a="http://schemas.openxmlformats.org/drawingml/2006/main">
               <a:ext uri="{FF2B5EF4-FFF2-40B4-BE49-F238E27FC236}">
-                <a16:creationId xmlns:a16="http://schemas.microsoft.com/office/drawing/2014/main" id="{DF8D854D-65F2-473D-9525-829444B4B733}"/>
+                <a16:creationId xmlns:a16="http://schemas.microsoft.com/office/drawing/2014/main" id="{3CD49D30-AA0E-4E1F-881B-844904A0BAAE}"/>
               </a:ext>
             </a:extLst>
           </p:cNvPr>
@@ -2124,7 +2124,7 @@
           <p:cNvPr id="8" name="">
             <a:extLst xmlns:a="http://schemas.openxmlformats.org/drawingml/2006/main">
               <a:ext uri="{FF2B5EF4-FFF2-40B4-BE49-F238E27FC236}">
-                <a16:creationId xmlns:a16="http://schemas.microsoft.com/office/drawing/2014/main" id="{2405A09F-9F2B-4DBE-A82E-ED5150331236}"/>
+                <a16:creationId xmlns:a16="http://schemas.microsoft.com/office/drawing/2014/main" id="{55AA0B1A-FE48-4FD2-A951-3A53B0476757}"/>
               </a:ext>
             </a:extLst>
           </p:cNvPr>
@@ -2157,7 +2157,7 @@
           <p:cNvPr id="9" name="">
             <a:extLst xmlns:a="http://schemas.openxmlformats.org/drawingml/2006/main">
               <a:ext uri="{FF2B5EF4-FFF2-40B4-BE49-F238E27FC236}">
-                <a16:creationId xmlns:a16="http://schemas.microsoft.com/office/drawing/2014/main" id="{C0935E01-C105-4EA7-B956-526438064297}"/>
+                <a16:creationId xmlns:a16="http://schemas.microsoft.com/office/drawing/2014/main" id="{60301395-F04F-46A0-92BE-FEDFD5C976FA}"/>
               </a:ext>
             </a:extLst>
           </p:cNvPr>
@@ -2221,7 +2221,7 @@
           <p:cNvPr id="10" name="">
             <a:extLst xmlns:a="http://schemas.openxmlformats.org/drawingml/2006/main">
               <a:ext uri="{FF2B5EF4-FFF2-40B4-BE49-F238E27FC236}">
-                <a16:creationId xmlns:a16="http://schemas.microsoft.com/office/drawing/2014/main" id="{2BFFA2A7-CBB1-421D-9085-6E81210B3A22}"/>
+                <a16:creationId xmlns:a16="http://schemas.microsoft.com/office/drawing/2014/main" id="{BDA5E08D-6E35-4C66-BE9D-83F22F8123BA}"/>
               </a:ext>
             </a:extLst>
           </p:cNvPr>
@@ -2254,7 +2254,7 @@
           <p:cNvPr id="11" name="">
             <a:extLst xmlns:a="http://schemas.openxmlformats.org/drawingml/2006/main">
               <a:ext uri="{FF2B5EF4-FFF2-40B4-BE49-F238E27FC236}">
-                <a16:creationId xmlns:a16="http://schemas.microsoft.com/office/drawing/2014/main" id="{70F0B067-4A81-46BF-B525-FBA6441613AD}"/>
+                <a16:creationId xmlns:a16="http://schemas.microsoft.com/office/drawing/2014/main" id="{E298D274-8976-4C10-BA5B-8E48EEF2A7E8}"/>
               </a:ext>
             </a:extLst>
           </p:cNvPr>
@@ -2318,7 +2318,7 @@
           <p:cNvPr id="12" name="">
             <a:extLst xmlns:a="http://schemas.openxmlformats.org/drawingml/2006/main">
               <a:ext uri="{FF2B5EF4-FFF2-40B4-BE49-F238E27FC236}">
-                <a16:creationId xmlns:a16="http://schemas.microsoft.com/office/drawing/2014/main" id="{8F99853F-32AB-4306-A54E-CC2A7EA13C38}"/>
+                <a16:creationId xmlns:a16="http://schemas.microsoft.com/office/drawing/2014/main" id="{9172C52A-7BC4-43AE-BBE4-70A22B30A438}"/>
               </a:ext>
             </a:extLst>
           </p:cNvPr>
@@ -2351,7 +2351,7 @@
           <p:cNvPr id="13" name="">
             <a:extLst xmlns:a="http://schemas.openxmlformats.org/drawingml/2006/main">
               <a:ext uri="{FF2B5EF4-FFF2-40B4-BE49-F238E27FC236}">
-                <a16:creationId xmlns:a16="http://schemas.microsoft.com/office/drawing/2014/main" id="{E8C68BCD-6C40-4770-830C-BF1D2F8CE8A6}"/>
+                <a16:creationId xmlns:a16="http://schemas.microsoft.com/office/drawing/2014/main" id="{F5FBB306-C8B8-48CF-B498-5483F409A367}"/>
               </a:ext>
             </a:extLst>
           </p:cNvPr>
@@ -2415,7 +2415,7 @@
           <p:cNvPr id="14" name="">
             <a:extLst xmlns:a="http://schemas.openxmlformats.org/drawingml/2006/main">
               <a:ext uri="{FF2B5EF4-FFF2-40B4-BE49-F238E27FC236}">
-                <a16:creationId xmlns:a16="http://schemas.microsoft.com/office/drawing/2014/main" id="{C5AE6AF0-8AB8-4D81-AC2B-5A1777CE43C4}"/>
+                <a16:creationId xmlns:a16="http://schemas.microsoft.com/office/drawing/2014/main" id="{D211DE49-4BFF-4A4A-8531-94028403911E}"/>
               </a:ext>
             </a:extLst>
           </p:cNvPr>
@@ -2448,7 +2448,7 @@
           <p:cNvPr id="15" name="">
             <a:extLst xmlns:a="http://schemas.openxmlformats.org/drawingml/2006/main">
               <a:ext uri="{FF2B5EF4-FFF2-40B4-BE49-F238E27FC236}">
-                <a16:creationId xmlns:a16="http://schemas.microsoft.com/office/drawing/2014/main" id="{FC68106B-657C-449E-BBD6-9FE555F0BE0A}"/>
+                <a16:creationId xmlns:a16="http://schemas.microsoft.com/office/drawing/2014/main" id="{DE9A6965-24DA-44E4-BEE5-802935CCD312}"/>
               </a:ext>
             </a:extLst>
           </p:cNvPr>
@@ -2483,7 +2483,7 @@
           <p:cNvPr id="16" name="">
             <a:extLst xmlns:a="http://schemas.openxmlformats.org/drawingml/2006/main">
               <a:ext uri="{FF2B5EF4-FFF2-40B4-BE49-F238E27FC236}">
-                <a16:creationId xmlns:a16="http://schemas.microsoft.com/office/drawing/2014/main" id="{F8228037-45AA-484C-A17F-B61C096340EB}"/>
+                <a16:creationId xmlns:a16="http://schemas.microsoft.com/office/drawing/2014/main" id="{44B0B35E-05E4-404A-9D8D-94CF8FA9D282}"/>
               </a:ext>
             </a:extLst>
           </p:cNvPr>
@@ -2547,7 +2547,7 @@
           <p:cNvPr id="17" name="">
             <a:extLst xmlns:a="http://schemas.openxmlformats.org/drawingml/2006/main">
               <a:ext uri="{FF2B5EF4-FFF2-40B4-BE49-F238E27FC236}">
-                <a16:creationId xmlns:a16="http://schemas.microsoft.com/office/drawing/2014/main" id="{946165B2-7754-458D-A1EA-9CB6A0C0F7AE}"/>
+                <a16:creationId xmlns:a16="http://schemas.microsoft.com/office/drawing/2014/main" id="{C93A1AAB-D61B-401C-8605-24ABA06C7162}"/>
               </a:ext>
             </a:extLst>
           </p:cNvPr>
@@ -2611,7 +2611,7 @@
           <p:cNvPr id="18" name="">
             <a:extLst xmlns:a="http://schemas.openxmlformats.org/drawingml/2006/main">
               <a:ext uri="{FF2B5EF4-FFF2-40B4-BE49-F238E27FC236}">
-                <a16:creationId xmlns:a16="http://schemas.microsoft.com/office/drawing/2014/main" id="{25D2E328-96AD-4682-A0A8-5B03A16F360C}"/>
+                <a16:creationId xmlns:a16="http://schemas.microsoft.com/office/drawing/2014/main" id="{B428F43D-F935-4A49-AF08-A9C2D1A92D0E}"/>
               </a:ext>
             </a:extLst>
           </p:cNvPr>
@@ -2646,7 +2646,7 @@
           <p:cNvPr id="19" name="">
             <a:extLst xmlns:a="http://schemas.openxmlformats.org/drawingml/2006/main">
               <a:ext uri="{FF2B5EF4-FFF2-40B4-BE49-F238E27FC236}">
-                <a16:creationId xmlns:a16="http://schemas.microsoft.com/office/drawing/2014/main" id="{31E6C83D-676D-491A-A5E4-3D5798DA8A56}"/>
+                <a16:creationId xmlns:a16="http://schemas.microsoft.com/office/drawing/2014/main" id="{3B566249-5B85-4EFE-BB60-7AA79604D690}"/>
               </a:ext>
             </a:extLst>
           </p:cNvPr>
@@ -2710,7 +2710,7 @@
           <p:cNvPr id="20" name="">
             <a:extLst xmlns:a="http://schemas.openxmlformats.org/drawingml/2006/main">
               <a:ext uri="{FF2B5EF4-FFF2-40B4-BE49-F238E27FC236}">
-                <a16:creationId xmlns:a16="http://schemas.microsoft.com/office/drawing/2014/main" id="{4B432940-E2EF-4ED5-9CB9-0E5DCABC6F78}"/>
+                <a16:creationId xmlns:a16="http://schemas.microsoft.com/office/drawing/2014/main" id="{BE243AF5-AAA9-4865-A17F-5D8A0578C1EB}"/>
               </a:ext>
             </a:extLst>
           </p:cNvPr>
@@ -2764,7 +2764,7 @@
                 <a:ea typeface="Aptos"/>
                 <a:cs typeface="Aptos"/>
               </a:rPr>
-              <a:t>Teach the operating decision, run the diagnostic, then force a usable artifact. The slide is a prompt, not the handout.</a:t>
+              <a:t>Teach the operating decision, run the diagnostic, then force a usable artifact. The slide is a teaching cue, not the handout.</a:t>
             </a:r>
           </a:p>
         </p:txBody>
@@ -2774,7 +2774,7 @@
           <p:cNvPr id="21" name="">
             <a:extLst xmlns:a="http://schemas.openxmlformats.org/drawingml/2006/main">
               <a:ext uri="{FF2B5EF4-FFF2-40B4-BE49-F238E27FC236}">
-                <a16:creationId xmlns:a16="http://schemas.microsoft.com/office/drawing/2014/main" id="{B01511C6-DA6B-49B7-B493-E535B4E7B248}"/>
+                <a16:creationId xmlns:a16="http://schemas.microsoft.com/office/drawing/2014/main" id="{42728AA7-0C88-4F5E-B336-1FA6B2BC50AB}"/>
               </a:ext>
             </a:extLst>
           </p:cNvPr>
@@ -2809,7 +2809,7 @@
           <p:cNvPr id="22" name="">
             <a:extLst xmlns:a="http://schemas.openxmlformats.org/drawingml/2006/main">
               <a:ext uri="{FF2B5EF4-FFF2-40B4-BE49-F238E27FC236}">
-                <a16:creationId xmlns:a16="http://schemas.microsoft.com/office/drawing/2014/main" id="{8D7E5C12-4EA9-411A-9C06-90FFB0CF5F5A}"/>
+                <a16:creationId xmlns:a16="http://schemas.microsoft.com/office/drawing/2014/main" id="{21C7DCFC-A2D1-4A1F-BA8A-D444AB1BF722}"/>
               </a:ext>
             </a:extLst>
           </p:cNvPr>
@@ -2873,7 +2873,7 @@
           <p:cNvPr id="23" name="">
             <a:extLst xmlns:a="http://schemas.openxmlformats.org/drawingml/2006/main">
               <a:ext uri="{FF2B5EF4-FFF2-40B4-BE49-F238E27FC236}">
-                <a16:creationId xmlns:a16="http://schemas.microsoft.com/office/drawing/2014/main" id="{32559CA8-3335-4348-ABA7-CD43EE666B37}"/>
+                <a16:creationId xmlns:a16="http://schemas.microsoft.com/office/drawing/2014/main" id="{EFAE1EC5-3155-484F-976F-A17AA35ED95F}"/>
               </a:ext>
             </a:extLst>
           </p:cNvPr>
@@ -2937,7 +2937,7 @@
           <p:cNvPr id="24" name="">
             <a:extLst xmlns:a="http://schemas.openxmlformats.org/drawingml/2006/main">
               <a:ext uri="{FF2B5EF4-FFF2-40B4-BE49-F238E27FC236}">
-                <a16:creationId xmlns:a16="http://schemas.microsoft.com/office/drawing/2014/main" id="{86888A98-6837-43AF-AB7F-031D59693E1B}"/>
+                <a16:creationId xmlns:a16="http://schemas.microsoft.com/office/drawing/2014/main" id="{9260C861-7BF6-4AC0-89E9-0B05E948202B}"/>
               </a:ext>
             </a:extLst>
           </p:cNvPr>
@@ -2972,7 +2972,7 @@
           <p:cNvPr id="25" name="">
             <a:extLst xmlns:a="http://schemas.openxmlformats.org/drawingml/2006/main">
               <a:ext uri="{FF2B5EF4-FFF2-40B4-BE49-F238E27FC236}">
-                <a16:creationId xmlns:a16="http://schemas.microsoft.com/office/drawing/2014/main" id="{3950B858-B9A5-4BB4-B3E6-F2AEC6F17CFA}"/>
+                <a16:creationId xmlns:a16="http://schemas.microsoft.com/office/drawing/2014/main" id="{87FA7210-6DE1-42AF-931E-DB80F560457C}"/>
               </a:ext>
             </a:extLst>
           </p:cNvPr>
@@ -3036,7 +3036,7 @@
           <p:cNvPr id="26" name="">
             <a:extLst xmlns:a="http://schemas.openxmlformats.org/drawingml/2006/main">
               <a:ext uri="{FF2B5EF4-FFF2-40B4-BE49-F238E27FC236}">
-                <a16:creationId xmlns:a16="http://schemas.microsoft.com/office/drawing/2014/main" id="{A8B29F66-2B63-4408-AD12-824DCCE5C33E}"/>
+                <a16:creationId xmlns:a16="http://schemas.microsoft.com/office/drawing/2014/main" id="{592B71A4-38B5-44F2-A3F8-A236FFEB3225}"/>
               </a:ext>
             </a:extLst>
           </p:cNvPr>
@@ -3100,7 +3100,7 @@
           <p:cNvPr id="27" name="">
             <a:extLst xmlns:a="http://schemas.openxmlformats.org/drawingml/2006/main">
               <a:ext uri="{FF2B5EF4-FFF2-40B4-BE49-F238E27FC236}">
-                <a16:creationId xmlns:a16="http://schemas.microsoft.com/office/drawing/2014/main" id="{0E821DAF-DC43-41D2-9A8D-B73ABA29BA8C}"/>
+                <a16:creationId xmlns:a16="http://schemas.microsoft.com/office/drawing/2014/main" id="{943F7604-1197-4947-94D0-74EB2A195CF0}"/>
               </a:ext>
             </a:extLst>
           </p:cNvPr>
@@ -3162,7 +3162,7 @@
     </p:spTree>
     <p:extLst>
       <p:ext uri="{BB962C8B-B14F-4D97-AF65-F5344CB8AC3E}">
-        <p14:creationId xmlns:p14="http://schemas.microsoft.com/office/powerpoint/2010/main" val="1164336008"/>
+        <p14:creationId xmlns:p14="http://schemas.microsoft.com/office/powerpoint/2010/main" val="1210606019"/>
       </p:ext>
     </p:extLst>
   </p:cSld>
@@ -3186,7 +3186,7 @@
           <p:cNvPr id="1" name="">
             <a:extLst xmlns:a="http://schemas.openxmlformats.org/drawingml/2006/main">
               <a:ext uri="{FF2B5EF4-FFF2-40B4-BE49-F238E27FC236}">
-                <a16:creationId xmlns:a16="http://schemas.microsoft.com/office/drawing/2014/main" id="{7149C1AE-A19F-4B62-A2A8-F8196B20E244}"/>
+                <a16:creationId xmlns:a16="http://schemas.microsoft.com/office/drawing/2014/main" id="{65114A80-2BC3-4828-81F7-2EC668394943}"/>
               </a:ext>
             </a:extLst>
           </p:cNvPr>
@@ -3221,7 +3221,7 @@
           <p:cNvPr id="2" name="">
             <a:extLst xmlns:a="http://schemas.openxmlformats.org/drawingml/2006/main">
               <a:ext uri="{FF2B5EF4-FFF2-40B4-BE49-F238E27FC236}">
-                <a16:creationId xmlns:a16="http://schemas.microsoft.com/office/drawing/2014/main" id="{1EF647B2-8AB9-4A7A-9E31-625E8A55CCA0}"/>
+                <a16:creationId xmlns:a16="http://schemas.microsoft.com/office/drawing/2014/main" id="{EC48C4EC-A968-4B0A-B03B-867362EA6CA9}"/>
               </a:ext>
             </a:extLst>
           </p:cNvPr>
@@ -3256,7 +3256,7 @@
           <p:cNvPr id="3" name="">
             <a:extLst xmlns:a="http://schemas.openxmlformats.org/drawingml/2006/main">
               <a:ext uri="{FF2B5EF4-FFF2-40B4-BE49-F238E27FC236}">
-                <a16:creationId xmlns:a16="http://schemas.microsoft.com/office/drawing/2014/main" id="{EBA05693-C082-41F0-BCBE-A81733C4FC1E}"/>
+                <a16:creationId xmlns:a16="http://schemas.microsoft.com/office/drawing/2014/main" id="{D528C807-34AC-41FC-B01F-D1AA647D1213}"/>
               </a:ext>
             </a:extLst>
           </p:cNvPr>
@@ -3291,7 +3291,7 @@
           <p:cNvPr id="4" name="kicker-08-marker">
             <a:extLst xmlns:a="http://schemas.openxmlformats.org/drawingml/2006/main">
               <a:ext uri="{FF2B5EF4-FFF2-40B4-BE49-F238E27FC236}">
-                <a16:creationId xmlns:a16="http://schemas.microsoft.com/office/drawing/2014/main" id="{EC2A0A7D-D97A-4529-AC3B-5052282D71B5}"/>
+                <a16:creationId xmlns:a16="http://schemas.microsoft.com/office/drawing/2014/main" id="{EAB4E32F-58F8-4177-9DDD-E38157A67B48}"/>
               </a:ext>
             </a:extLst>
           </p:cNvPr>
@@ -3326,7 +3326,7 @@
           <p:cNvPr id="5" name="kicker-08-label">
             <a:extLst xmlns:a="http://schemas.openxmlformats.org/drawingml/2006/main">
               <a:ext uri="{FF2B5EF4-FFF2-40B4-BE49-F238E27FC236}">
-                <a16:creationId xmlns:a16="http://schemas.microsoft.com/office/drawing/2014/main" id="{7FDFFDC3-C624-4B24-8B51-FC92921A6B94}"/>
+                <a16:creationId xmlns:a16="http://schemas.microsoft.com/office/drawing/2014/main" id="{EAF60560-2D4B-40BC-A3FC-5F157318908C}"/>
               </a:ext>
             </a:extLst>
           </p:cNvPr>
@@ -3380,7 +3380,7 @@
                 <a:ea typeface="Aptos"/>
                 <a:cs typeface="Aptos"/>
               </a:rPr>
-              <a:t>MODULE 1 / LESSON 08 / AI-ASSISTED EXERCISE</a:t>
+              <a:t>MODULE 1 / LESSON 08 / STRUCTURED DRAFTING DRILL</a:t>
             </a:r>
           </a:p>
         </p:txBody>
@@ -3390,7 +3390,7 @@
           <p:cNvPr id="6" name="">
             <a:extLst xmlns:a="http://schemas.openxmlformats.org/drawingml/2006/main">
               <a:ext uri="{FF2B5EF4-FFF2-40B4-BE49-F238E27FC236}">
-                <a16:creationId xmlns:a16="http://schemas.microsoft.com/office/drawing/2014/main" id="{33ED1E12-875D-4CB4-B314-871ED7D12C2F}"/>
+                <a16:creationId xmlns:a16="http://schemas.microsoft.com/office/drawing/2014/main" id="{5E91D981-DD28-4D12-BDF2-BFB93BADEE7E}"/>
               </a:ext>
             </a:extLst>
           </p:cNvPr>
@@ -3444,7 +3444,7 @@
                 <a:ea typeface="Aptos Display"/>
                 <a:cs typeface="Aptos Display"/>
               </a:rPr>
-              <a:t>Use AI to structure the attempt, then make humans responsible for judgment.</a:t>
+              <a:t>Structure the first draft before the room critiques it.</a:t>
             </a:r>
           </a:p>
         </p:txBody>
@@ -3454,7 +3454,7 @@
           <p:cNvPr id="7" name="">
             <a:extLst xmlns:a="http://schemas.openxmlformats.org/drawingml/2006/main">
               <a:ext uri="{FF2B5EF4-FFF2-40B4-BE49-F238E27FC236}">
-                <a16:creationId xmlns:a16="http://schemas.microsoft.com/office/drawing/2014/main" id="{12DFCE58-277C-44BB-B9FA-B46A3632BFB2}"/>
+                <a16:creationId xmlns:a16="http://schemas.microsoft.com/office/drawing/2014/main" id="{15D27031-50EB-4D67-A08D-F7479453ECE4}"/>
               </a:ext>
             </a:extLst>
           </p:cNvPr>
@@ -3508,7 +3508,7 @@
                 <a:ea typeface="Aptos"/>
                 <a:cs typeface="Aptos"/>
               </a:rPr>
-              <a:t>The prompt is constrained by source, assumptions, output standard, and human validation.</a:t>
+              <a:t>The brief is constrained by source evidence, assumptions, output standard, and validation.</a:t>
             </a:r>
           </a:p>
         </p:txBody>
@@ -3518,7 +3518,7 @@
           <p:cNvPr id="8" name="">
             <a:extLst xmlns:a="http://schemas.openxmlformats.org/drawingml/2006/main">
               <a:ext uri="{FF2B5EF4-FFF2-40B4-BE49-F238E27FC236}">
-                <a16:creationId xmlns:a16="http://schemas.microsoft.com/office/drawing/2014/main" id="{70FB815F-D98A-4313-895B-B24A74A90102}"/>
+                <a16:creationId xmlns:a16="http://schemas.microsoft.com/office/drawing/2014/main" id="{85123625-3A61-4784-A94F-F6689F27F091}"/>
               </a:ext>
             </a:extLst>
           </p:cNvPr>
@@ -3553,7 +3553,7 @@
           <p:cNvPr id="9" name="">
             <a:extLst xmlns:a="http://schemas.openxmlformats.org/drawingml/2006/main">
               <a:ext uri="{FF2B5EF4-FFF2-40B4-BE49-F238E27FC236}">
-                <a16:creationId xmlns:a16="http://schemas.microsoft.com/office/drawing/2014/main" id="{4FAFC502-B7B6-4453-A5BC-4D119F088537}"/>
+                <a16:creationId xmlns:a16="http://schemas.microsoft.com/office/drawing/2014/main" id="{1CB12F0C-4F8A-4BEF-8715-91D31F8A44B7}"/>
               </a:ext>
             </a:extLst>
           </p:cNvPr>
@@ -3617,7 +3617,7 @@
           <p:cNvPr id="10" name="">
             <a:extLst xmlns:a="http://schemas.openxmlformats.org/drawingml/2006/main">
               <a:ext uri="{FF2B5EF4-FFF2-40B4-BE49-F238E27FC236}">
-                <a16:creationId xmlns:a16="http://schemas.microsoft.com/office/drawing/2014/main" id="{E80897C7-CACE-4811-BAB6-B0898D0BD9D4}"/>
+                <a16:creationId xmlns:a16="http://schemas.microsoft.com/office/drawing/2014/main" id="{D92F104F-A270-4460-9A20-BC7458349CB9}"/>
               </a:ext>
             </a:extLst>
           </p:cNvPr>
@@ -3681,7 +3681,7 @@
           <p:cNvPr id="11" name="">
             <a:extLst xmlns:a="http://schemas.openxmlformats.org/drawingml/2006/main">
               <a:ext uri="{FF2B5EF4-FFF2-40B4-BE49-F238E27FC236}">
-                <a16:creationId xmlns:a16="http://schemas.microsoft.com/office/drawing/2014/main" id="{11E8DC50-AAD3-47B1-9D0D-4A58394EC509}"/>
+                <a16:creationId xmlns:a16="http://schemas.microsoft.com/office/drawing/2014/main" id="{2EC4302D-4756-410E-BB4F-6D2AACB0D527}"/>
               </a:ext>
             </a:extLst>
           </p:cNvPr>
@@ -3745,19 +3745,19 @@
           <p:cNvPr id="12" name="">
             <a:extLst xmlns:a="http://schemas.openxmlformats.org/drawingml/2006/main">
               <a:ext uri="{FF2B5EF4-FFF2-40B4-BE49-F238E27FC236}">
-                <a16:creationId xmlns:a16="http://schemas.microsoft.com/office/drawing/2014/main" id="{3484C1EF-0A3E-4A2E-A4C2-BA4CC6034E2F}"/>
-              </a:ext>
-            </a:extLst>
-          </p:cNvPr>
-          <p:cNvSpPr>
-            <a:spLocks xmlns:a="http://schemas.openxmlformats.org/drawingml/2006/main" noGrp="1"/>
-          </p:cNvSpPr>
-          <p:nvPr/>
-        </p:nvSpPr>
-        <p:spPr>
-          <a:xfrm xmlns:a="http://schemas.openxmlformats.org/drawingml/2006/main">
-            <a:off x="228600" y="1809750"/>
-            <a:ext cx="11963400" cy="4591050"/>
+                <a16:creationId xmlns:a16="http://schemas.microsoft.com/office/drawing/2014/main" id="{6BCEAB64-552B-4019-AA9F-1F2A750BBA5A}"/>
+              </a:ext>
+            </a:extLst>
+          </p:cNvPr>
+          <p:cNvSpPr>
+            <a:spLocks xmlns:a="http://schemas.openxmlformats.org/drawingml/2006/main" noGrp="1"/>
+          </p:cNvSpPr>
+          <p:nvPr/>
+        </p:nvSpPr>
+        <p:spPr>
+          <a:xfrm xmlns:a="http://schemas.openxmlformats.org/drawingml/2006/main">
+            <a:off x="0" y="1809750"/>
+            <a:ext cx="12192000" cy="4591050"/>
           </a:xfrm>
           <a:prstGeom xmlns:a="http://schemas.openxmlformats.org/drawingml/2006/main" prst="rect">
             <a:avLst/>
@@ -3765,11 +3765,9 @@
           <a:solidFill xmlns:a="http://schemas.openxmlformats.org/drawingml/2006/main">
             <a:srgbClr val="F5F6F2"/>
           </a:solidFill>
-          <a:ln xmlns:a="http://schemas.openxmlformats.org/drawingml/2006/main" w="0">
-            <a:solidFill>
-              <a:srgbClr val="000000">
-                <a:alpha val="0"/>
-              </a:srgbClr>
+          <a:ln xmlns:a="http://schemas.openxmlformats.org/drawingml/2006/main" w="9525">
+            <a:solidFill>
+              <a:srgbClr val="F5F6F2"/>
             </a:solidFill>
             <a:prstDash val="solid"/>
           </a:ln>
@@ -3780,29 +3778,29 @@
           <p:cNvPr id="13" name="">
             <a:extLst xmlns:a="http://schemas.openxmlformats.org/drawingml/2006/main">
               <a:ext uri="{FF2B5EF4-FFF2-40B4-BE49-F238E27FC236}">
-                <a16:creationId xmlns:a16="http://schemas.microsoft.com/office/drawing/2014/main" id="{092D8479-976C-46B2-BDE8-E84FB3E72894}"/>
-              </a:ext>
-            </a:extLst>
-          </p:cNvPr>
-          <p:cNvSpPr>
-            <a:spLocks xmlns:a="http://schemas.openxmlformats.org/drawingml/2006/main" noGrp="1"/>
-          </p:cNvSpPr>
-          <p:nvPr/>
-        </p:nvSpPr>
-        <p:spPr>
-          <a:xfrm xmlns:a="http://schemas.openxmlformats.org/drawingml/2006/main">
-            <a:off x="228600" y="1809750"/>
-            <a:ext cx="6096000" cy="4591050"/>
-          </a:xfrm>
-          <a:prstGeom xmlns:a="http://schemas.openxmlformats.org/drawingml/2006/main" prst="rect">
-            <a:avLst/>
-          </a:prstGeom>
-          <a:solidFill xmlns:a="http://schemas.openxmlformats.org/drawingml/2006/main">
-            <a:srgbClr val="12232B"/>
+                <a16:creationId xmlns:a16="http://schemas.microsoft.com/office/drawing/2014/main" id="{2E81D9C3-AC4A-41FB-878D-F62E1CF62C25}"/>
+              </a:ext>
+            </a:extLst>
+          </p:cNvPr>
+          <p:cNvSpPr>
+            <a:spLocks xmlns:a="http://schemas.openxmlformats.org/drawingml/2006/main" noGrp="1"/>
+          </p:cNvSpPr>
+          <p:nvPr/>
+        </p:nvSpPr>
+        <p:spPr>
+          <a:xfrm xmlns:a="http://schemas.openxmlformats.org/drawingml/2006/main">
+            <a:off x="514350" y="2038350"/>
+            <a:ext cx="5619750" cy="3181350"/>
+          </a:xfrm>
+          <a:prstGeom xmlns:a="http://schemas.openxmlformats.org/drawingml/2006/main" prst="rect">
+            <a:avLst/>
+          </a:prstGeom>
+          <a:solidFill xmlns:a="http://schemas.openxmlformats.org/drawingml/2006/main">
+            <a:srgbClr val="FFFFFF"/>
           </a:solidFill>
           <a:ln xmlns:a="http://schemas.openxmlformats.org/drawingml/2006/main" w="9525">
             <a:solidFill>
-              <a:srgbClr val="12232B"/>
+              <a:srgbClr val="D9DDD6"/>
             </a:solidFill>
             <a:prstDash val="solid"/>
           </a:ln>
@@ -3813,25 +3811,25 @@
           <p:cNvPr id="14" name="">
             <a:extLst xmlns:a="http://schemas.openxmlformats.org/drawingml/2006/main">
               <a:ext uri="{FF2B5EF4-FFF2-40B4-BE49-F238E27FC236}">
-                <a16:creationId xmlns:a16="http://schemas.microsoft.com/office/drawing/2014/main" id="{C8BFC22C-DB9B-4447-951B-2B685D491B02}"/>
-              </a:ext>
-            </a:extLst>
-          </p:cNvPr>
-          <p:cNvSpPr>
-            <a:spLocks xmlns:a="http://schemas.openxmlformats.org/drawingml/2006/main" noGrp="1"/>
-          </p:cNvSpPr>
-          <p:nvPr/>
-        </p:nvSpPr>
-        <p:spPr>
-          <a:xfrm xmlns:a="http://schemas.openxmlformats.org/drawingml/2006/main">
-            <a:off x="609600" y="2266950"/>
+                <a16:creationId xmlns:a16="http://schemas.microsoft.com/office/drawing/2014/main" id="{C3779A2F-FD36-479E-840E-A00B1B59EDA8}"/>
+              </a:ext>
+            </a:extLst>
+          </p:cNvPr>
+          <p:cNvSpPr>
+            <a:spLocks xmlns:a="http://schemas.openxmlformats.org/drawingml/2006/main" noGrp="1"/>
+          </p:cNvSpPr>
+          <p:nvPr/>
+        </p:nvSpPr>
+        <p:spPr>
+          <a:xfrm xmlns:a="http://schemas.openxmlformats.org/drawingml/2006/main">
+            <a:off x="819150" y="2419350"/>
             <a:ext cx="266700" cy="19050"/>
           </a:xfrm>
           <a:prstGeom xmlns:a="http://schemas.openxmlformats.org/drawingml/2006/main" prst="rect">
             <a:avLst/>
           </a:prstGeom>
           <a:solidFill xmlns:a="http://schemas.openxmlformats.org/drawingml/2006/main">
-            <a:srgbClr val="B7953B"/>
+            <a:srgbClr val="A85D2A"/>
           </a:solidFill>
           <a:ln xmlns:a="http://schemas.openxmlformats.org/drawingml/2006/main" w="0">
             <a:solidFill>
@@ -3848,18 +3846,18 @@
           <p:cNvPr id="15" name="">
             <a:extLst xmlns:a="http://schemas.openxmlformats.org/drawingml/2006/main">
               <a:ext uri="{FF2B5EF4-FFF2-40B4-BE49-F238E27FC236}">
-                <a16:creationId xmlns:a16="http://schemas.microsoft.com/office/drawing/2014/main" id="{CEA54081-0EB2-433D-9BC5-F8A152144721}"/>
-              </a:ext>
-            </a:extLst>
-          </p:cNvPr>
-          <p:cNvSpPr>
-            <a:spLocks xmlns:a="http://schemas.openxmlformats.org/drawingml/2006/main" noGrp="1"/>
-          </p:cNvSpPr>
-          <p:nvPr/>
-        </p:nvSpPr>
-        <p:spPr>
-          <a:xfrm xmlns:a="http://schemas.openxmlformats.org/drawingml/2006/main">
-            <a:off x="971550" y="2190750"/>
+                <a16:creationId xmlns:a16="http://schemas.microsoft.com/office/drawing/2014/main" id="{60B8D330-E191-4FD9-B246-697FB63C517A}"/>
+              </a:ext>
+            </a:extLst>
+          </p:cNvPr>
+          <p:cNvSpPr>
+            <a:spLocks xmlns:a="http://schemas.openxmlformats.org/drawingml/2006/main" noGrp="1"/>
+          </p:cNvSpPr>
+          <p:nvPr/>
+        </p:nvSpPr>
+        <p:spPr>
+          <a:xfrm xmlns:a="http://schemas.openxmlformats.org/drawingml/2006/main">
+            <a:off x="1181100" y="2343150"/>
             <a:ext cx="2476500" cy="171450"/>
           </a:xfrm>
           <a:prstGeom xmlns:a="http://schemas.openxmlformats.org/drawingml/2006/main" prst="rect">
@@ -3902,7 +3900,7 @@
                 <a:ea typeface="Aptos"/>
                 <a:cs typeface="Aptos"/>
               </a:rPr>
-              <a:t>PROMPT TO GIVE AI</a:t>
+              <a:t>DRAFTING BRIEF</a:t>
             </a:r>
           </a:p>
         </p:txBody>
@@ -3912,19 +3910,19 @@
           <p:cNvPr id="16" name="">
             <a:extLst xmlns:a="http://schemas.openxmlformats.org/drawingml/2006/main">
               <a:ext uri="{FF2B5EF4-FFF2-40B4-BE49-F238E27FC236}">
-                <a16:creationId xmlns:a16="http://schemas.microsoft.com/office/drawing/2014/main" id="{E46F4B36-D89A-47F6-B794-BB394B4B32EB}"/>
-              </a:ext>
-            </a:extLst>
-          </p:cNvPr>
-          <p:cNvSpPr>
-            <a:spLocks xmlns:a="http://schemas.openxmlformats.org/drawingml/2006/main" noGrp="1"/>
-          </p:cNvSpPr>
-          <p:nvPr/>
-        </p:nvSpPr>
-        <p:spPr>
-          <a:xfrm xmlns:a="http://schemas.openxmlformats.org/drawingml/2006/main">
-            <a:off x="609600" y="2647950"/>
-            <a:ext cx="5048250" cy="2190750"/>
+                <a16:creationId xmlns:a16="http://schemas.microsoft.com/office/drawing/2014/main" id="{A40DB47F-71C5-4BB1-9B71-5236B3D26A66}"/>
+              </a:ext>
+            </a:extLst>
+          </p:cNvPr>
+          <p:cNvSpPr>
+            <a:spLocks xmlns:a="http://schemas.openxmlformats.org/drawingml/2006/main" noGrp="1"/>
+          </p:cNvSpPr>
+          <p:nvPr/>
+        </p:nvSpPr>
+        <p:spPr>
+          <a:xfrm xmlns:a="http://schemas.openxmlformats.org/drawingml/2006/main">
+            <a:off x="819150" y="2762250"/>
+            <a:ext cx="4610100" cy="1752600"/>
           </a:xfrm>
           <a:prstGeom xmlns:a="http://schemas.openxmlformats.org/drawingml/2006/main" prst="rect">
             <a:avLst/>
@@ -3948,9 +3946,240 @@
           <a:lstStyle xmlns:a="http://schemas.openxmlformats.org/drawingml/2006/main"/>
           <a:p xmlns:a="http://schemas.openxmlformats.org/drawingml/2006/main">
             <a:pPr algn="l">
+              <a:defRPr sz="1200" b="0">
+                <a:solidFill>
+                  <a:srgbClr val="172026"/>
+                </a:solidFill>
+                <a:latin typeface="Aptos"/>
+                <a:ea typeface="Aptos"/>
+                <a:cs typeface="Aptos"/>
+              </a:defRPr>
+            </a:pPr>
+            <a:r>
+              <a:rPr sz="1200" b="0">
+                <a:solidFill>
+                  <a:srgbClr val="172026"/>
+                </a:solidFill>
+                <a:latin typeface="Aptos"/>
+                <a:ea typeface="Aptos"/>
+                <a:cs typeface="Aptos"/>
+              </a:rPr>
+              <a:t>Assemble the 90-day pilot from prior artifacts. Include executive summary, phase plan, weekly cadence, success metrics, anti-pattern risks, stop-repair-scale criteria, and unresolved assumptions requiring field validation. Keep metrics focused on account movement and quality, not vanity activity.</a:t>
+            </a:r>
+          </a:p>
+        </p:txBody>
+      </p:sp>
+      <p:sp>
+        <p:nvSpPr>
+          <p:cNvPr id="17" name="">
+            <a:extLst xmlns:a="http://schemas.openxmlformats.org/drawingml/2006/main">
+              <a:ext uri="{FF2B5EF4-FFF2-40B4-BE49-F238E27FC236}">
+                <a16:creationId xmlns:a16="http://schemas.microsoft.com/office/drawing/2014/main" id="{AED5C77D-348F-4133-9A68-1CCB33913AAA}"/>
+              </a:ext>
+            </a:extLst>
+          </p:cNvPr>
+          <p:cNvSpPr>
+            <a:spLocks xmlns:a="http://schemas.openxmlformats.org/drawingml/2006/main" noGrp="1"/>
+          </p:cNvSpPr>
+          <p:nvPr/>
+        </p:nvSpPr>
+        <p:spPr>
+          <a:xfrm xmlns:a="http://schemas.openxmlformats.org/drawingml/2006/main">
+            <a:off x="6496050" y="2038350"/>
+            <a:ext cx="4933950" cy="3181350"/>
+          </a:xfrm>
+          <a:prstGeom xmlns:a="http://schemas.openxmlformats.org/drawingml/2006/main" prst="rect">
+            <a:avLst/>
+          </a:prstGeom>
+          <a:solidFill xmlns:a="http://schemas.openxmlformats.org/drawingml/2006/main">
+            <a:srgbClr val="F9FAF7"/>
+          </a:solidFill>
+          <a:ln xmlns:a="http://schemas.openxmlformats.org/drawingml/2006/main" w="9525">
+            <a:solidFill>
+              <a:srgbClr val="D9DDD6"/>
+            </a:solidFill>
+            <a:prstDash val="solid"/>
+          </a:ln>
+        </p:spPr>
+      </p:sp>
+      <p:sp>
+        <p:nvSpPr>
+          <p:cNvPr id="18" name="">
+            <a:extLst xmlns:a="http://schemas.openxmlformats.org/drawingml/2006/main">
+              <a:ext uri="{FF2B5EF4-FFF2-40B4-BE49-F238E27FC236}">
+                <a16:creationId xmlns:a16="http://schemas.microsoft.com/office/drawing/2014/main" id="{1E31DC90-87FC-4318-B43F-90F29A482747}"/>
+              </a:ext>
+            </a:extLst>
+          </p:cNvPr>
+          <p:cNvSpPr>
+            <a:spLocks xmlns:a="http://schemas.openxmlformats.org/drawingml/2006/main" noGrp="1"/>
+          </p:cNvSpPr>
+          <p:nvPr/>
+        </p:nvSpPr>
+        <p:spPr>
+          <a:xfrm xmlns:a="http://schemas.openxmlformats.org/drawingml/2006/main">
+            <a:off x="6819900" y="2419350"/>
+            <a:ext cx="266700" cy="19050"/>
+          </a:xfrm>
+          <a:prstGeom xmlns:a="http://schemas.openxmlformats.org/drawingml/2006/main" prst="rect">
+            <a:avLst/>
+          </a:prstGeom>
+          <a:solidFill xmlns:a="http://schemas.openxmlformats.org/drawingml/2006/main">
+            <a:srgbClr val="1D6072"/>
+          </a:solidFill>
+          <a:ln xmlns:a="http://schemas.openxmlformats.org/drawingml/2006/main" w="0">
+            <a:solidFill>
+              <a:srgbClr val="000000">
+                <a:alpha val="0"/>
+              </a:srgbClr>
+            </a:solidFill>
+            <a:prstDash val="solid"/>
+          </a:ln>
+        </p:spPr>
+      </p:sp>
+      <p:sp>
+        <p:nvSpPr>
+          <p:cNvPr id="19" name="">
+            <a:extLst xmlns:a="http://schemas.openxmlformats.org/drawingml/2006/main">
+              <a:ext uri="{FF2B5EF4-FFF2-40B4-BE49-F238E27FC236}">
+                <a16:creationId xmlns:a16="http://schemas.microsoft.com/office/drawing/2014/main" id="{AA92B149-DF5D-492D-A54E-2F0AFC8D9E79}"/>
+              </a:ext>
+            </a:extLst>
+          </p:cNvPr>
+          <p:cNvSpPr>
+            <a:spLocks xmlns:a="http://schemas.openxmlformats.org/drawingml/2006/main" noGrp="1"/>
+          </p:cNvSpPr>
+          <p:nvPr/>
+        </p:nvSpPr>
+        <p:spPr>
+          <a:xfrm xmlns:a="http://schemas.openxmlformats.org/drawingml/2006/main">
+            <a:off x="7181850" y="2343150"/>
+            <a:ext cx="2476500" cy="171450"/>
+          </a:xfrm>
+          <a:prstGeom xmlns:a="http://schemas.openxmlformats.org/drawingml/2006/main" prst="rect">
+            <a:avLst/>
+          </a:prstGeom>
+          <a:solidFill xmlns:a="http://schemas.openxmlformats.org/drawingml/2006/main">
+            <a:srgbClr val="000000">
+              <a:alpha val="0"/>
+            </a:srgbClr>
+          </a:solidFill>
+          <a:ln xmlns:a="http://schemas.openxmlformats.org/drawingml/2006/main" w="0">
+            <a:solidFill>
+              <a:srgbClr val="000000">
+                <a:alpha val="0"/>
+              </a:srgbClr>
+            </a:solidFill>
+            <a:prstDash val="solid"/>
+          </a:ln>
+        </p:spPr>
+        <p:txBody>
+          <a:bodyPr xmlns:a="http://schemas.openxmlformats.org/drawingml/2006/main" lIns="0" tIns="0" rIns="0" bIns="0" anchor="t"/>
+          <a:lstStyle xmlns:a="http://schemas.openxmlformats.org/drawingml/2006/main"/>
+          <a:p xmlns:a="http://schemas.openxmlformats.org/drawingml/2006/main">
+            <a:pPr algn="l">
+              <a:defRPr sz="750" b="1">
+                <a:solidFill>
+                  <a:srgbClr val="59646A"/>
+                </a:solidFill>
+                <a:latin typeface="Aptos"/>
+                <a:ea typeface="Aptos"/>
+                <a:cs typeface="Aptos"/>
+              </a:defRPr>
+            </a:pPr>
+            <a:r>
+              <a:rPr sz="750" b="1">
+                <a:solidFill>
+                  <a:srgbClr val="59646A"/>
+                </a:solidFill>
+                <a:latin typeface="Aptos"/>
+                <a:ea typeface="Aptos"/>
+                <a:cs typeface="Aptos"/>
+              </a:rPr>
+              <a:t>REQUIRED OUTPUT STANDARD</a:t>
+            </a:r>
+          </a:p>
+        </p:txBody>
+      </p:sp>
+      <p:sp>
+        <p:nvSpPr>
+          <p:cNvPr id="20" name="">
+            <a:extLst xmlns:a="http://schemas.openxmlformats.org/drawingml/2006/main">
+              <a:ext uri="{FF2B5EF4-FFF2-40B4-BE49-F238E27FC236}">
+                <a16:creationId xmlns:a16="http://schemas.microsoft.com/office/drawing/2014/main" id="{3817E3AB-0BA0-483E-8A56-7C99B8C2E24E}"/>
+              </a:ext>
+            </a:extLst>
+          </p:cNvPr>
+          <p:cNvSpPr>
+            <a:spLocks xmlns:a="http://schemas.openxmlformats.org/drawingml/2006/main" noGrp="1"/>
+          </p:cNvSpPr>
+          <p:nvPr/>
+        </p:nvSpPr>
+        <p:spPr>
+          <a:xfrm xmlns:a="http://schemas.openxmlformats.org/drawingml/2006/main">
+            <a:off x="6819900" y="2847975"/>
+            <a:ext cx="57150" cy="57150"/>
+          </a:xfrm>
+          <a:prstGeom xmlns:a="http://schemas.openxmlformats.org/drawingml/2006/main" prst="rect">
+            <a:avLst/>
+          </a:prstGeom>
+          <a:solidFill xmlns:a="http://schemas.openxmlformats.org/drawingml/2006/main">
+            <a:srgbClr val="1D6072"/>
+          </a:solidFill>
+          <a:ln xmlns:a="http://schemas.openxmlformats.org/drawingml/2006/main" w="0">
+            <a:solidFill>
+              <a:srgbClr val="000000">
+                <a:alpha val="0"/>
+              </a:srgbClr>
+            </a:solidFill>
+            <a:prstDash val="solid"/>
+          </a:ln>
+        </p:spPr>
+      </p:sp>
+      <p:sp>
+        <p:nvSpPr>
+          <p:cNvPr id="21" name="">
+            <a:extLst xmlns:a="http://schemas.openxmlformats.org/drawingml/2006/main">
+              <a:ext uri="{FF2B5EF4-FFF2-40B4-BE49-F238E27FC236}">
+                <a16:creationId xmlns:a16="http://schemas.microsoft.com/office/drawing/2014/main" id="{37DB3785-A946-4D8B-B361-C84128386CCA}"/>
+              </a:ext>
+            </a:extLst>
+          </p:cNvPr>
+          <p:cNvSpPr>
+            <a:spLocks xmlns:a="http://schemas.openxmlformats.org/drawingml/2006/main" noGrp="1"/>
+          </p:cNvSpPr>
+          <p:nvPr/>
+        </p:nvSpPr>
+        <p:spPr>
+          <a:xfrm xmlns:a="http://schemas.openxmlformats.org/drawingml/2006/main">
+            <a:off x="6991350" y="2781300"/>
+            <a:ext cx="3619500" cy="438150"/>
+          </a:xfrm>
+          <a:prstGeom xmlns:a="http://schemas.openxmlformats.org/drawingml/2006/main" prst="rect">
+            <a:avLst/>
+          </a:prstGeom>
+          <a:solidFill xmlns:a="http://schemas.openxmlformats.org/drawingml/2006/main">
+            <a:srgbClr val="000000">
+              <a:alpha val="0"/>
+            </a:srgbClr>
+          </a:solidFill>
+          <a:ln xmlns:a="http://schemas.openxmlformats.org/drawingml/2006/main" w="0">
+            <a:solidFill>
+              <a:srgbClr val="000000">
+                <a:alpha val="0"/>
+              </a:srgbClr>
+            </a:solidFill>
+            <a:prstDash val="solid"/>
+          </a:ln>
+        </p:spPr>
+        <p:txBody>
+          <a:bodyPr xmlns:a="http://schemas.openxmlformats.org/drawingml/2006/main" lIns="0" tIns="0" rIns="0" bIns="0" anchor="t"/>
+          <a:lstStyle xmlns:a="http://schemas.openxmlformats.org/drawingml/2006/main"/>
+          <a:p xmlns:a="http://schemas.openxmlformats.org/drawingml/2006/main">
+            <a:pPr algn="l">
               <a:defRPr sz="1125" b="0">
                 <a:solidFill>
-                  <a:srgbClr val="FFFFFF"/>
+                  <a:srgbClr val="172026"/>
                 </a:solidFill>
                 <a:latin typeface="Aptos"/>
                 <a:ea typeface="Aptos"/>
@@ -3960,68 +4189,35 @@
             <a:r>
               <a:rPr sz="1125" b="0">
                 <a:solidFill>
-                  <a:srgbClr val="FFFFFF"/>
+                  <a:srgbClr val="172026"/>
                 </a:solidFill>
                 <a:latin typeface="Aptos"/>
                 <a:ea typeface="Aptos"/>
                 <a:cs typeface="Aptos"/>
               </a:rPr>
-              <a:t>Assemble the 90-day pilot from prior artifacts. Include executive summary, phase plan, weekly cadence, success metrics, anti-pattern risks, stop-repair-scale criteria, and unresolved assumptions requiring human validation. Keep metrics focused on account movement and quality, not vanity activity.</a:t>
+              <a:t>Clear revenue problem, focus, pilot logic, and decision request</a:t>
             </a:r>
           </a:p>
         </p:txBody>
       </p:sp>
       <p:sp>
         <p:nvSpPr>
-          <p:cNvPr id="17" name="">
-            <a:extLst xmlns:a="http://schemas.openxmlformats.org/drawingml/2006/main">
-              <a:ext uri="{FF2B5EF4-FFF2-40B4-BE49-F238E27FC236}">
-                <a16:creationId xmlns:a16="http://schemas.microsoft.com/office/drawing/2014/main" id="{CB35CC87-F4E6-450B-A0FD-78029537629C}"/>
-              </a:ext>
-            </a:extLst>
-          </p:cNvPr>
-          <p:cNvSpPr>
-            <a:spLocks xmlns:a="http://schemas.openxmlformats.org/drawingml/2006/main" noGrp="1"/>
-          </p:cNvSpPr>
-          <p:nvPr/>
-        </p:nvSpPr>
-        <p:spPr>
-          <a:xfrm xmlns:a="http://schemas.openxmlformats.org/drawingml/2006/main">
-            <a:off x="6324600" y="1809750"/>
-            <a:ext cx="5867400" cy="4591050"/>
-          </a:xfrm>
-          <a:prstGeom xmlns:a="http://schemas.openxmlformats.org/drawingml/2006/main" prst="rect">
-            <a:avLst/>
-          </a:prstGeom>
-          <a:solidFill xmlns:a="http://schemas.openxmlformats.org/drawingml/2006/main">
-            <a:srgbClr val="FFFFFF"/>
-          </a:solidFill>
-          <a:ln xmlns:a="http://schemas.openxmlformats.org/drawingml/2006/main" w="9525">
-            <a:solidFill>
-              <a:srgbClr val="D9DDD6"/>
-            </a:solidFill>
-            <a:prstDash val="solid"/>
-          </a:ln>
-        </p:spPr>
-      </p:sp>
-      <p:sp>
-        <p:nvSpPr>
-          <p:cNvPr id="18" name="">
-            <a:extLst xmlns:a="http://schemas.openxmlformats.org/drawingml/2006/main">
-              <a:ext uri="{FF2B5EF4-FFF2-40B4-BE49-F238E27FC236}">
-                <a16:creationId xmlns:a16="http://schemas.microsoft.com/office/drawing/2014/main" id="{34A39A9F-9B10-475C-9A8A-5F2E4583CA49}"/>
-              </a:ext>
-            </a:extLst>
-          </p:cNvPr>
-          <p:cNvSpPr>
-            <a:spLocks xmlns:a="http://schemas.openxmlformats.org/drawingml/2006/main" noGrp="1"/>
-          </p:cNvSpPr>
-          <p:nvPr/>
-        </p:nvSpPr>
-        <p:spPr>
-          <a:xfrm xmlns:a="http://schemas.openxmlformats.org/drawingml/2006/main">
-            <a:off x="6705600" y="2266950"/>
-            <a:ext cx="266700" cy="19050"/>
+          <p:cNvPr id="22" name="">
+            <a:extLst xmlns:a="http://schemas.openxmlformats.org/drawingml/2006/main">
+              <a:ext uri="{FF2B5EF4-FFF2-40B4-BE49-F238E27FC236}">
+                <a16:creationId xmlns:a16="http://schemas.microsoft.com/office/drawing/2014/main" id="{037AAA68-A1DD-4674-B7BC-FAC0170FBFBE}"/>
+              </a:ext>
+            </a:extLst>
+          </p:cNvPr>
+          <p:cNvSpPr>
+            <a:spLocks xmlns:a="http://schemas.openxmlformats.org/drawingml/2006/main" noGrp="1"/>
+          </p:cNvSpPr>
+          <p:nvPr/>
+        </p:nvSpPr>
+        <p:spPr>
+          <a:xfrm xmlns:a="http://schemas.openxmlformats.org/drawingml/2006/main">
+            <a:off x="6819900" y="3324225"/>
+            <a:ext cx="57150" cy="57150"/>
           </a:xfrm>
           <a:prstGeom xmlns:a="http://schemas.openxmlformats.org/drawingml/2006/main" prst="rect">
             <a:avLst/>
@@ -4041,22 +4237,22 @@
       </p:sp>
       <p:sp>
         <p:nvSpPr>
-          <p:cNvPr id="19" name="">
-            <a:extLst xmlns:a="http://schemas.openxmlformats.org/drawingml/2006/main">
-              <a:ext uri="{FF2B5EF4-FFF2-40B4-BE49-F238E27FC236}">
-                <a16:creationId xmlns:a16="http://schemas.microsoft.com/office/drawing/2014/main" id="{9F1A5CFC-C517-4514-8533-5C115315100A}"/>
-              </a:ext>
-            </a:extLst>
-          </p:cNvPr>
-          <p:cNvSpPr>
-            <a:spLocks xmlns:a="http://schemas.openxmlformats.org/drawingml/2006/main" noGrp="1"/>
-          </p:cNvSpPr>
-          <p:nvPr/>
-        </p:nvSpPr>
-        <p:spPr>
-          <a:xfrm xmlns:a="http://schemas.openxmlformats.org/drawingml/2006/main">
-            <a:off x="7067550" y="2190750"/>
-            <a:ext cx="2476500" cy="171450"/>
+          <p:cNvPr id="23" name="">
+            <a:extLst xmlns:a="http://schemas.openxmlformats.org/drawingml/2006/main">
+              <a:ext uri="{FF2B5EF4-FFF2-40B4-BE49-F238E27FC236}">
+                <a16:creationId xmlns:a16="http://schemas.microsoft.com/office/drawing/2014/main" id="{EAC546EA-5488-4979-AB33-F8A5BB818E1B}"/>
+              </a:ext>
+            </a:extLst>
+          </p:cNvPr>
+          <p:cNvSpPr>
+            <a:spLocks xmlns:a="http://schemas.openxmlformats.org/drawingml/2006/main" noGrp="1"/>
+          </p:cNvSpPr>
+          <p:nvPr/>
+        </p:nvSpPr>
+        <p:spPr>
+          <a:xfrm xmlns:a="http://schemas.openxmlformats.org/drawingml/2006/main">
+            <a:off x="6991350" y="3257550"/>
+            <a:ext cx="3619500" cy="438150"/>
           </a:xfrm>
           <a:prstGeom xmlns:a="http://schemas.openxmlformats.org/drawingml/2006/main" prst="rect">
             <a:avLst/>
@@ -4077,6 +4273,734 @@
         </p:spPr>
         <p:txBody>
           <a:bodyPr xmlns:a="http://schemas.openxmlformats.org/drawingml/2006/main" lIns="0" tIns="0" rIns="0" bIns="0" anchor="t"/>
+          <a:lstStyle xmlns:a="http://schemas.openxmlformats.org/drawingml/2006/main"/>
+          <a:p xmlns:a="http://schemas.openxmlformats.org/drawingml/2006/main">
+            <a:pPr algn="l">
+              <a:defRPr sz="1125" b="0">
+                <a:solidFill>
+                  <a:srgbClr val="172026"/>
+                </a:solidFill>
+                <a:latin typeface="Aptos"/>
+                <a:ea typeface="Aptos"/>
+                <a:cs typeface="Aptos"/>
+              </a:defRPr>
+            </a:pPr>
+            <a:r>
+              <a:rPr sz="1125" b="0">
+                <a:solidFill>
+                  <a:srgbClr val="172026"/>
+                </a:solidFill>
+                <a:latin typeface="Aptos"/>
+                <a:ea typeface="Aptos"/>
+                <a:cs typeface="Aptos"/>
+              </a:rPr>
+              <a:t>90-day sequence with owners and outputs</a:t>
+            </a:r>
+          </a:p>
+        </p:txBody>
+      </p:sp>
+      <p:sp>
+        <p:nvSpPr>
+          <p:cNvPr id="24" name="">
+            <a:extLst xmlns:a="http://schemas.openxmlformats.org/drawingml/2006/main">
+              <a:ext uri="{FF2B5EF4-FFF2-40B4-BE49-F238E27FC236}">
+                <a16:creationId xmlns:a16="http://schemas.microsoft.com/office/drawing/2014/main" id="{30C3A133-F255-484B-964D-F6F9ED3E383C}"/>
+              </a:ext>
+            </a:extLst>
+          </p:cNvPr>
+          <p:cNvSpPr>
+            <a:spLocks xmlns:a="http://schemas.openxmlformats.org/drawingml/2006/main" noGrp="1"/>
+          </p:cNvSpPr>
+          <p:nvPr/>
+        </p:nvSpPr>
+        <p:spPr>
+          <a:xfrm xmlns:a="http://schemas.openxmlformats.org/drawingml/2006/main">
+            <a:off x="6819900" y="3800475"/>
+            <a:ext cx="57150" cy="57150"/>
+          </a:xfrm>
+          <a:prstGeom xmlns:a="http://schemas.openxmlformats.org/drawingml/2006/main" prst="rect">
+            <a:avLst/>
+          </a:prstGeom>
+          <a:solidFill xmlns:a="http://schemas.openxmlformats.org/drawingml/2006/main">
+            <a:srgbClr val="1D6072"/>
+          </a:solidFill>
+          <a:ln xmlns:a="http://schemas.openxmlformats.org/drawingml/2006/main" w="0">
+            <a:solidFill>
+              <a:srgbClr val="000000">
+                <a:alpha val="0"/>
+              </a:srgbClr>
+            </a:solidFill>
+            <a:prstDash val="solid"/>
+          </a:ln>
+        </p:spPr>
+      </p:sp>
+      <p:sp>
+        <p:nvSpPr>
+          <p:cNvPr id="25" name="">
+            <a:extLst xmlns:a="http://schemas.openxmlformats.org/drawingml/2006/main">
+              <a:ext uri="{FF2B5EF4-FFF2-40B4-BE49-F238E27FC236}">
+                <a16:creationId xmlns:a16="http://schemas.microsoft.com/office/drawing/2014/main" id="{D1A70508-C41E-4F8B-9A8A-B40C2D71385C}"/>
+              </a:ext>
+            </a:extLst>
+          </p:cNvPr>
+          <p:cNvSpPr>
+            <a:spLocks xmlns:a="http://schemas.openxmlformats.org/drawingml/2006/main" noGrp="1"/>
+          </p:cNvSpPr>
+          <p:nvPr/>
+        </p:nvSpPr>
+        <p:spPr>
+          <a:xfrm xmlns:a="http://schemas.openxmlformats.org/drawingml/2006/main">
+            <a:off x="6991350" y="3733800"/>
+            <a:ext cx="3619500" cy="438150"/>
+          </a:xfrm>
+          <a:prstGeom xmlns:a="http://schemas.openxmlformats.org/drawingml/2006/main" prst="rect">
+            <a:avLst/>
+          </a:prstGeom>
+          <a:solidFill xmlns:a="http://schemas.openxmlformats.org/drawingml/2006/main">
+            <a:srgbClr val="000000">
+              <a:alpha val="0"/>
+            </a:srgbClr>
+          </a:solidFill>
+          <a:ln xmlns:a="http://schemas.openxmlformats.org/drawingml/2006/main" w="0">
+            <a:solidFill>
+              <a:srgbClr val="000000">
+                <a:alpha val="0"/>
+              </a:srgbClr>
+            </a:solidFill>
+            <a:prstDash val="solid"/>
+          </a:ln>
+        </p:spPr>
+        <p:txBody>
+          <a:bodyPr xmlns:a="http://schemas.openxmlformats.org/drawingml/2006/main" lIns="0" tIns="0" rIns="0" bIns="0" anchor="t"/>
+          <a:lstStyle xmlns:a="http://schemas.openxmlformats.org/drawingml/2006/main"/>
+          <a:p xmlns:a="http://schemas.openxmlformats.org/drawingml/2006/main">
+            <a:pPr algn="l">
+              <a:defRPr sz="1125" b="0">
+                <a:solidFill>
+                  <a:srgbClr val="172026"/>
+                </a:solidFill>
+                <a:latin typeface="Aptos"/>
+                <a:ea typeface="Aptos"/>
+                <a:cs typeface="Aptos"/>
+              </a:defRPr>
+            </a:pPr>
+            <a:r>
+              <a:rPr sz="1125" b="0">
+                <a:solidFill>
+                  <a:srgbClr val="172026"/>
+                </a:solidFill>
+                <a:latin typeface="Aptos"/>
+                <a:ea typeface="Aptos"/>
+                <a:cs typeface="Aptos"/>
+              </a:rPr>
+              <a:t>Cadence with evidence and decisions</a:t>
+            </a:r>
+          </a:p>
+        </p:txBody>
+      </p:sp>
+      <p:sp>
+        <p:nvSpPr>
+          <p:cNvPr id="26" name="">
+            <a:extLst xmlns:a="http://schemas.openxmlformats.org/drawingml/2006/main">
+              <a:ext uri="{FF2B5EF4-FFF2-40B4-BE49-F238E27FC236}">
+                <a16:creationId xmlns:a16="http://schemas.microsoft.com/office/drawing/2014/main" id="{46CD326A-3F75-475D-AEE6-A26F46CB9BE9}"/>
+              </a:ext>
+            </a:extLst>
+          </p:cNvPr>
+          <p:cNvSpPr>
+            <a:spLocks xmlns:a="http://schemas.openxmlformats.org/drawingml/2006/main" noGrp="1"/>
+          </p:cNvSpPr>
+          <p:nvPr/>
+        </p:nvSpPr>
+        <p:spPr>
+          <a:xfrm xmlns:a="http://schemas.openxmlformats.org/drawingml/2006/main">
+            <a:off x="6819900" y="4276725"/>
+            <a:ext cx="57150" cy="57150"/>
+          </a:xfrm>
+          <a:prstGeom xmlns:a="http://schemas.openxmlformats.org/drawingml/2006/main" prst="rect">
+            <a:avLst/>
+          </a:prstGeom>
+          <a:solidFill xmlns:a="http://schemas.openxmlformats.org/drawingml/2006/main">
+            <a:srgbClr val="1D6072"/>
+          </a:solidFill>
+          <a:ln xmlns:a="http://schemas.openxmlformats.org/drawingml/2006/main" w="0">
+            <a:solidFill>
+              <a:srgbClr val="000000">
+                <a:alpha val="0"/>
+              </a:srgbClr>
+            </a:solidFill>
+            <a:prstDash val="solid"/>
+          </a:ln>
+        </p:spPr>
+      </p:sp>
+      <p:sp>
+        <p:nvSpPr>
+          <p:cNvPr id="27" name="">
+            <a:extLst xmlns:a="http://schemas.openxmlformats.org/drawingml/2006/main">
+              <a:ext uri="{FF2B5EF4-FFF2-40B4-BE49-F238E27FC236}">
+                <a16:creationId xmlns:a16="http://schemas.microsoft.com/office/drawing/2014/main" id="{EC39777F-8BA5-4F69-A820-85FEDD64458D}"/>
+              </a:ext>
+            </a:extLst>
+          </p:cNvPr>
+          <p:cNvSpPr>
+            <a:spLocks xmlns:a="http://schemas.openxmlformats.org/drawingml/2006/main" noGrp="1"/>
+          </p:cNvSpPr>
+          <p:nvPr/>
+        </p:nvSpPr>
+        <p:spPr>
+          <a:xfrm xmlns:a="http://schemas.openxmlformats.org/drawingml/2006/main">
+            <a:off x="6991350" y="4210050"/>
+            <a:ext cx="3619500" cy="438150"/>
+          </a:xfrm>
+          <a:prstGeom xmlns:a="http://schemas.openxmlformats.org/drawingml/2006/main" prst="rect">
+            <a:avLst/>
+          </a:prstGeom>
+          <a:solidFill xmlns:a="http://schemas.openxmlformats.org/drawingml/2006/main">
+            <a:srgbClr val="000000">
+              <a:alpha val="0"/>
+            </a:srgbClr>
+          </a:solidFill>
+          <a:ln xmlns:a="http://schemas.openxmlformats.org/drawingml/2006/main" w="0">
+            <a:solidFill>
+              <a:srgbClr val="000000">
+                <a:alpha val="0"/>
+              </a:srgbClr>
+            </a:solidFill>
+            <a:prstDash val="solid"/>
+          </a:ln>
+        </p:spPr>
+        <p:txBody>
+          <a:bodyPr xmlns:a="http://schemas.openxmlformats.org/drawingml/2006/main" lIns="0" tIns="0" rIns="0" bIns="0" anchor="t"/>
+          <a:lstStyle xmlns:a="http://schemas.openxmlformats.org/drawingml/2006/main"/>
+          <a:p xmlns:a="http://schemas.openxmlformats.org/drawingml/2006/main">
+            <a:pPr algn="l">
+              <a:defRPr sz="1125" b="0">
+                <a:solidFill>
+                  <a:srgbClr val="172026"/>
+                </a:solidFill>
+                <a:latin typeface="Aptos"/>
+                <a:ea typeface="Aptos"/>
+                <a:cs typeface="Aptos"/>
+              </a:defRPr>
+            </a:pPr>
+            <a:r>
+              <a:rPr sz="1125" b="0">
+                <a:solidFill>
+                  <a:srgbClr val="172026"/>
+                </a:solidFill>
+                <a:latin typeface="Aptos"/>
+                <a:ea typeface="Aptos"/>
+                <a:cs typeface="Aptos"/>
+              </a:rPr>
+              <a:t>Success metrics for movement, coverage, signal quality, sales use, and opportunity quality</a:t>
+            </a:r>
+          </a:p>
+        </p:txBody>
+      </p:sp>
+      <p:sp>
+        <p:nvSpPr>
+          <p:cNvPr id="28" name="">
+            <a:extLst xmlns:a="http://schemas.openxmlformats.org/drawingml/2006/main">
+              <a:ext uri="{FF2B5EF4-FFF2-40B4-BE49-F238E27FC236}">
+                <a16:creationId xmlns:a16="http://schemas.microsoft.com/office/drawing/2014/main" id="{4D84CF6C-2872-40B3-A35E-74E57D8726FC}"/>
+              </a:ext>
+            </a:extLst>
+          </p:cNvPr>
+          <p:cNvSpPr>
+            <a:spLocks xmlns:a="http://schemas.openxmlformats.org/drawingml/2006/main" noGrp="1"/>
+          </p:cNvSpPr>
+          <p:nvPr/>
+        </p:nvSpPr>
+        <p:spPr>
+          <a:xfrm xmlns:a="http://schemas.openxmlformats.org/drawingml/2006/main">
+            <a:off x="6819900" y="4752975"/>
+            <a:ext cx="57150" cy="57150"/>
+          </a:xfrm>
+          <a:prstGeom xmlns:a="http://schemas.openxmlformats.org/drawingml/2006/main" prst="rect">
+            <a:avLst/>
+          </a:prstGeom>
+          <a:solidFill xmlns:a="http://schemas.openxmlformats.org/drawingml/2006/main">
+            <a:srgbClr val="1D6072"/>
+          </a:solidFill>
+          <a:ln xmlns:a="http://schemas.openxmlformats.org/drawingml/2006/main" w="0">
+            <a:solidFill>
+              <a:srgbClr val="000000">
+                <a:alpha val="0"/>
+              </a:srgbClr>
+            </a:solidFill>
+            <a:prstDash val="solid"/>
+          </a:ln>
+        </p:spPr>
+      </p:sp>
+      <p:sp>
+        <p:nvSpPr>
+          <p:cNvPr id="29" name="">
+            <a:extLst xmlns:a="http://schemas.openxmlformats.org/drawingml/2006/main">
+              <a:ext uri="{FF2B5EF4-FFF2-40B4-BE49-F238E27FC236}">
+                <a16:creationId xmlns:a16="http://schemas.microsoft.com/office/drawing/2014/main" id="{62DE371B-7FD7-4DDC-A0C2-BED8860DFE14}"/>
+              </a:ext>
+            </a:extLst>
+          </p:cNvPr>
+          <p:cNvSpPr>
+            <a:spLocks xmlns:a="http://schemas.openxmlformats.org/drawingml/2006/main" noGrp="1"/>
+          </p:cNvSpPr>
+          <p:nvPr/>
+        </p:nvSpPr>
+        <p:spPr>
+          <a:xfrm xmlns:a="http://schemas.openxmlformats.org/drawingml/2006/main">
+            <a:off x="6991350" y="4686300"/>
+            <a:ext cx="3619500" cy="438150"/>
+          </a:xfrm>
+          <a:prstGeom xmlns:a="http://schemas.openxmlformats.org/drawingml/2006/main" prst="rect">
+            <a:avLst/>
+          </a:prstGeom>
+          <a:solidFill xmlns:a="http://schemas.openxmlformats.org/drawingml/2006/main">
+            <a:srgbClr val="000000">
+              <a:alpha val="0"/>
+            </a:srgbClr>
+          </a:solidFill>
+          <a:ln xmlns:a="http://schemas.openxmlformats.org/drawingml/2006/main" w="0">
+            <a:solidFill>
+              <a:srgbClr val="000000">
+                <a:alpha val="0"/>
+              </a:srgbClr>
+            </a:solidFill>
+            <a:prstDash val="solid"/>
+          </a:ln>
+        </p:spPr>
+        <p:txBody>
+          <a:bodyPr xmlns:a="http://schemas.openxmlformats.org/drawingml/2006/main" lIns="0" tIns="0" rIns="0" bIns="0" anchor="t"/>
+          <a:lstStyle xmlns:a="http://schemas.openxmlformats.org/drawingml/2006/main"/>
+          <a:p xmlns:a="http://schemas.openxmlformats.org/drawingml/2006/main">
+            <a:pPr algn="l">
+              <a:defRPr sz="1125" b="0">
+                <a:solidFill>
+                  <a:srgbClr val="172026"/>
+                </a:solidFill>
+                <a:latin typeface="Aptos"/>
+                <a:ea typeface="Aptos"/>
+                <a:cs typeface="Aptos"/>
+              </a:defRPr>
+            </a:pPr>
+            <a:r>
+              <a:rPr sz="1125" b="0">
+                <a:solidFill>
+                  <a:srgbClr val="172026"/>
+                </a:solidFill>
+                <a:latin typeface="Aptos"/>
+                <a:ea typeface="Aptos"/>
+                <a:cs typeface="Aptos"/>
+              </a:rPr>
+              <a:t>Stop, repair, scale criteria tied to evidence</a:t>
+            </a:r>
+          </a:p>
+        </p:txBody>
+      </p:sp>
+      <p:sp>
+        <p:nvSpPr>
+          <p:cNvPr id="30" name="">
+            <a:extLst xmlns:a="http://schemas.openxmlformats.org/drawingml/2006/main">
+              <a:ext uri="{FF2B5EF4-FFF2-40B4-BE49-F238E27FC236}">
+                <a16:creationId xmlns:a16="http://schemas.microsoft.com/office/drawing/2014/main" id="{FB316935-A46D-41A6-8884-9242C1E808C6}"/>
+              </a:ext>
+            </a:extLst>
+          </p:cNvPr>
+          <p:cNvSpPr>
+            <a:spLocks xmlns:a="http://schemas.openxmlformats.org/drawingml/2006/main" noGrp="1"/>
+          </p:cNvSpPr>
+          <p:nvPr/>
+        </p:nvSpPr>
+        <p:spPr>
+          <a:xfrm xmlns:a="http://schemas.openxmlformats.org/drawingml/2006/main">
+            <a:off x="514350" y="6438900"/>
+            <a:ext cx="10915650" cy="9525"/>
+          </a:xfrm>
+          <a:prstGeom xmlns:a="http://schemas.openxmlformats.org/drawingml/2006/main" prst="rect">
+            <a:avLst/>
+          </a:prstGeom>
+          <a:solidFill xmlns:a="http://schemas.openxmlformats.org/drawingml/2006/main">
+            <a:srgbClr val="D9DDD6"/>
+          </a:solidFill>
+          <a:ln xmlns:a="http://schemas.openxmlformats.org/drawingml/2006/main" w="0">
+            <a:solidFill>
+              <a:srgbClr val="000000">
+                <a:alpha val="0"/>
+              </a:srgbClr>
+            </a:solidFill>
+            <a:prstDash val="solid"/>
+          </a:ln>
+        </p:spPr>
+      </p:sp>
+      <p:sp>
+        <p:nvSpPr>
+          <p:cNvPr id="31" name="">
+            <a:extLst xmlns:a="http://schemas.openxmlformats.org/drawingml/2006/main">
+              <a:ext uri="{FF2B5EF4-FFF2-40B4-BE49-F238E27FC236}">
+                <a16:creationId xmlns:a16="http://schemas.microsoft.com/office/drawing/2014/main" id="{6B201E6B-A718-42C5-BD5C-914DEFDC1DF9}"/>
+              </a:ext>
+            </a:extLst>
+          </p:cNvPr>
+          <p:cNvSpPr>
+            <a:spLocks xmlns:a="http://schemas.openxmlformats.org/drawingml/2006/main" noGrp="1"/>
+          </p:cNvSpPr>
+          <p:nvPr/>
+        </p:nvSpPr>
+        <p:spPr>
+          <a:xfrm xmlns:a="http://schemas.openxmlformats.org/drawingml/2006/main">
+            <a:off x="514350" y="6553200"/>
+            <a:ext cx="5905500" cy="171450"/>
+          </a:xfrm>
+          <a:prstGeom xmlns:a="http://schemas.openxmlformats.org/drawingml/2006/main" prst="rect">
+            <a:avLst/>
+          </a:prstGeom>
+          <a:solidFill xmlns:a="http://schemas.openxmlformats.org/drawingml/2006/main">
+            <a:srgbClr val="000000">
+              <a:alpha val="0"/>
+            </a:srgbClr>
+          </a:solidFill>
+          <a:ln xmlns:a="http://schemas.openxmlformats.org/drawingml/2006/main" w="0">
+            <a:solidFill>
+              <a:srgbClr val="000000">
+                <a:alpha val="0"/>
+              </a:srgbClr>
+            </a:solidFill>
+            <a:prstDash val="solid"/>
+          </a:ln>
+        </p:spPr>
+        <p:txBody>
+          <a:bodyPr xmlns:a="http://schemas.openxmlformats.org/drawingml/2006/main" lIns="0" tIns="0" rIns="0" bIns="0" anchor="t"/>
+          <a:lstStyle xmlns:a="http://schemas.openxmlformats.org/drawingml/2006/main"/>
+          <a:p xmlns:a="http://schemas.openxmlformats.org/drawingml/2006/main">
+            <a:pPr algn="l">
+              <a:defRPr sz="675" b="0">
+                <a:solidFill>
+                  <a:srgbClr val="59646A"/>
+                </a:solidFill>
+                <a:latin typeface="Aptos"/>
+                <a:ea typeface="Aptos"/>
+                <a:cs typeface="Aptos"/>
+              </a:defRPr>
+            </a:pPr>
+            <a:r>
+              <a:rPr sz="675" b="0">
+                <a:solidFill>
+                  <a:srgbClr val="59646A"/>
+                </a:solidFill>
+                <a:latin typeface="Aptos"/>
+                <a:ea typeface="Aptos"/>
+                <a:cs typeface="Aptos"/>
+              </a:rPr>
+              <a:t>Lesson 08 - Measurement, Cadence, And 90-Day Pilot</a:t>
+            </a:r>
+          </a:p>
+        </p:txBody>
+      </p:sp>
+      <p:sp>
+        <p:nvSpPr>
+          <p:cNvPr id="32" name="">
+            <a:extLst xmlns:a="http://schemas.openxmlformats.org/drawingml/2006/main">
+              <a:ext uri="{FF2B5EF4-FFF2-40B4-BE49-F238E27FC236}">
+                <a16:creationId xmlns:a16="http://schemas.microsoft.com/office/drawing/2014/main" id="{E66D1681-A966-4B13-808F-6E90BC8B8282}"/>
+              </a:ext>
+            </a:extLst>
+          </p:cNvPr>
+          <p:cNvSpPr>
+            <a:spLocks xmlns:a="http://schemas.openxmlformats.org/drawingml/2006/main" noGrp="1"/>
+          </p:cNvSpPr>
+          <p:nvPr/>
+        </p:nvSpPr>
+        <p:spPr>
+          <a:xfrm xmlns:a="http://schemas.openxmlformats.org/drawingml/2006/main">
+            <a:off x="5334000" y="6553200"/>
+            <a:ext cx="4095750" cy="171450"/>
+          </a:xfrm>
+          <a:prstGeom xmlns:a="http://schemas.openxmlformats.org/drawingml/2006/main" prst="rect">
+            <a:avLst/>
+          </a:prstGeom>
+          <a:solidFill xmlns:a="http://schemas.openxmlformats.org/drawingml/2006/main">
+            <a:srgbClr val="000000">
+              <a:alpha val="0"/>
+            </a:srgbClr>
+          </a:solidFill>
+          <a:ln xmlns:a="http://schemas.openxmlformats.org/drawingml/2006/main" w="0">
+            <a:solidFill>
+              <a:srgbClr val="000000">
+                <a:alpha val="0"/>
+              </a:srgbClr>
+            </a:solidFill>
+            <a:prstDash val="solid"/>
+          </a:ln>
+        </p:spPr>
+        <p:txBody>
+          <a:bodyPr xmlns:a="http://schemas.openxmlformats.org/drawingml/2006/main" lIns="0" tIns="0" rIns="0" bIns="0" anchor="t"/>
+          <a:lstStyle xmlns:a="http://schemas.openxmlformats.org/drawingml/2006/main"/>
+          <a:p xmlns:a="http://schemas.openxmlformats.org/drawingml/2006/main">
+            <a:pPr algn="r">
+              <a:defRPr sz="600" b="0">
+                <a:solidFill>
+                  <a:srgbClr val="59646A"/>
+                </a:solidFill>
+                <a:latin typeface="Aptos"/>
+                <a:ea typeface="Aptos"/>
+                <a:cs typeface="Aptos"/>
+              </a:defRPr>
+            </a:pPr>
+            <a:r>
+              <a:rPr sz="600" b="0">
+                <a:solidFill>
+                  <a:srgbClr val="59646A"/>
+                </a:solidFill>
+                <a:latin typeface="Aptos"/>
+                <a:ea typeface="Aptos"/>
+                <a:cs typeface="Aptos"/>
+              </a:rPr>
+              <a:t>Source: modules/module-01-industrial-demand-generation/lessons/08-measurement-cadence-and-90-day-pilot.md @ 9e28222</a:t>
+            </a:r>
+          </a:p>
+        </p:txBody>
+      </p:sp>
+      <p:sp>
+        <p:nvSpPr>
+          <p:cNvPr id="33" name="">
+            <a:extLst xmlns:a="http://schemas.openxmlformats.org/drawingml/2006/main">
+              <a:ext uri="{FF2B5EF4-FFF2-40B4-BE49-F238E27FC236}">
+                <a16:creationId xmlns:a16="http://schemas.microsoft.com/office/drawing/2014/main" id="{89440BCC-C8F2-4C96-9AB8-28A428E1DF6F}"/>
+              </a:ext>
+            </a:extLst>
+          </p:cNvPr>
+          <p:cNvSpPr>
+            <a:spLocks xmlns:a="http://schemas.openxmlformats.org/drawingml/2006/main" noGrp="1"/>
+          </p:cNvSpPr>
+          <p:nvPr/>
+        </p:nvSpPr>
+        <p:spPr>
+          <a:xfrm xmlns:a="http://schemas.openxmlformats.org/drawingml/2006/main">
+            <a:off x="10668000" y="6553200"/>
+            <a:ext cx="762000" cy="171450"/>
+          </a:xfrm>
+          <a:prstGeom xmlns:a="http://schemas.openxmlformats.org/drawingml/2006/main" prst="rect">
+            <a:avLst/>
+          </a:prstGeom>
+          <a:solidFill xmlns:a="http://schemas.openxmlformats.org/drawingml/2006/main">
+            <a:srgbClr val="000000">
+              <a:alpha val="0"/>
+            </a:srgbClr>
+          </a:solidFill>
+          <a:ln xmlns:a="http://schemas.openxmlformats.org/drawingml/2006/main" w="0">
+            <a:solidFill>
+              <a:srgbClr val="000000">
+                <a:alpha val="0"/>
+              </a:srgbClr>
+            </a:solidFill>
+            <a:prstDash val="solid"/>
+          </a:ln>
+        </p:spPr>
+        <p:txBody>
+          <a:bodyPr xmlns:a="http://schemas.openxmlformats.org/drawingml/2006/main" lIns="0" tIns="0" rIns="0" bIns="0" anchor="t"/>
+          <a:lstStyle xmlns:a="http://schemas.openxmlformats.org/drawingml/2006/main"/>
+          <a:p xmlns:a="http://schemas.openxmlformats.org/drawingml/2006/main">
+            <a:pPr algn="r">
+              <a:defRPr sz="675" b="0">
+                <a:solidFill>
+                  <a:srgbClr val="59646A"/>
+                </a:solidFill>
+                <a:latin typeface="Aptos"/>
+                <a:ea typeface="Aptos"/>
+                <a:cs typeface="Aptos"/>
+              </a:defRPr>
+            </a:pPr>
+            <a:r>
+              <a:rPr sz="675" b="0">
+                <a:solidFill>
+                  <a:srgbClr val="59646A"/>
+                </a:solidFill>
+                <a:latin typeface="Aptos"/>
+                <a:ea typeface="Aptos"/>
+                <a:cs typeface="Aptos"/>
+              </a:rPr>
+              <a:t>10/15</a:t>
+            </a:r>
+          </a:p>
+        </p:txBody>
+      </p:sp>
+      <p:sp>
+        <p:nvSpPr>
+          <p:cNvPr id="34" name="">
+            <a:extLst xmlns:a="http://schemas.openxmlformats.org/drawingml/2006/main">
+              <a:ext uri="{FF2B5EF4-FFF2-40B4-BE49-F238E27FC236}">
+                <a16:creationId xmlns:a16="http://schemas.microsoft.com/office/drawing/2014/main" id="{4DECF91F-B2F0-4E05-82B9-1CFC30928027}"/>
+              </a:ext>
+            </a:extLst>
+          </p:cNvPr>
+          <p:cNvSpPr>
+            <a:spLocks xmlns:a="http://schemas.openxmlformats.org/drawingml/2006/main" noGrp="1"/>
+          </p:cNvSpPr>
+          <p:nvPr/>
+        </p:nvSpPr>
+        <p:spPr>
+          <a:xfrm xmlns:a="http://schemas.openxmlformats.org/drawingml/2006/main">
+            <a:off x="0" y="0"/>
+            <a:ext cx="12192000" cy="1809750"/>
+          </a:xfrm>
+          <a:prstGeom xmlns:a="http://schemas.openxmlformats.org/drawingml/2006/main" prst="rect">
+            <a:avLst/>
+          </a:prstGeom>
+          <a:solidFill xmlns:a="http://schemas.openxmlformats.org/drawingml/2006/main">
+            <a:srgbClr val="F5F6F2"/>
+          </a:solidFill>
+          <a:ln xmlns:a="http://schemas.openxmlformats.org/drawingml/2006/main" w="0">
+            <a:solidFill>
+              <a:srgbClr val="000000">
+                <a:alpha val="0"/>
+              </a:srgbClr>
+            </a:solidFill>
+            <a:prstDash val="solid"/>
+          </a:ln>
+        </p:spPr>
+      </p:sp>
+      <p:sp>
+        <p:nvSpPr>
+          <p:cNvPr id="35" name="">
+            <a:extLst xmlns:a="http://schemas.openxmlformats.org/drawingml/2006/main">
+              <a:ext uri="{FF2B5EF4-FFF2-40B4-BE49-F238E27FC236}">
+                <a16:creationId xmlns:a16="http://schemas.microsoft.com/office/drawing/2014/main" id="{61648F55-6B69-492A-992D-DA8D7AEE3525}"/>
+              </a:ext>
+            </a:extLst>
+          </p:cNvPr>
+          <p:cNvSpPr>
+            <a:spLocks xmlns:a="http://schemas.openxmlformats.org/drawingml/2006/main" noGrp="1"/>
+          </p:cNvSpPr>
+          <p:nvPr/>
+        </p:nvSpPr>
+        <p:spPr>
+          <a:xfrm xmlns:a="http://schemas.openxmlformats.org/drawingml/2006/main">
+            <a:off x="0" y="0"/>
+            <a:ext cx="171450" cy="1809750"/>
+          </a:xfrm>
+          <a:prstGeom xmlns:a="http://schemas.openxmlformats.org/drawingml/2006/main" prst="rect">
+            <a:avLst/>
+          </a:prstGeom>
+          <a:solidFill xmlns:a="http://schemas.openxmlformats.org/drawingml/2006/main">
+            <a:srgbClr val="12232B"/>
+          </a:solidFill>
+          <a:ln xmlns:a="http://schemas.openxmlformats.org/drawingml/2006/main" w="0">
+            <a:solidFill>
+              <a:srgbClr val="000000">
+                <a:alpha val="0"/>
+              </a:srgbClr>
+            </a:solidFill>
+            <a:prstDash val="solid"/>
+          </a:ln>
+        </p:spPr>
+      </p:sp>
+      <p:sp>
+        <p:nvSpPr>
+          <p:cNvPr id="36" name="">
+            <a:extLst xmlns:a="http://schemas.openxmlformats.org/drawingml/2006/main">
+              <a:ext uri="{FF2B5EF4-FFF2-40B4-BE49-F238E27FC236}">
+                <a16:creationId xmlns:a16="http://schemas.microsoft.com/office/drawing/2014/main" id="{CC2F39B3-3BE0-4F4B-9C44-D87E271519FE}"/>
+              </a:ext>
+            </a:extLst>
+          </p:cNvPr>
+          <p:cNvSpPr>
+            <a:spLocks xmlns:a="http://schemas.openxmlformats.org/drawingml/2006/main" noGrp="1"/>
+          </p:cNvSpPr>
+          <p:nvPr/>
+        </p:nvSpPr>
+        <p:spPr>
+          <a:xfrm xmlns:a="http://schemas.openxmlformats.org/drawingml/2006/main">
+            <a:off x="171450" y="0"/>
+            <a:ext cx="57150" cy="1809750"/>
+          </a:xfrm>
+          <a:prstGeom xmlns:a="http://schemas.openxmlformats.org/drawingml/2006/main" prst="rect">
+            <a:avLst/>
+          </a:prstGeom>
+          <a:solidFill xmlns:a="http://schemas.openxmlformats.org/drawingml/2006/main">
+            <a:srgbClr val="A85D2A"/>
+          </a:solidFill>
+          <a:ln xmlns:a="http://schemas.openxmlformats.org/drawingml/2006/main" w="0">
+            <a:solidFill>
+              <a:srgbClr val="000000">
+                <a:alpha val="0"/>
+              </a:srgbClr>
+            </a:solidFill>
+            <a:prstDash val="solid"/>
+          </a:ln>
+        </p:spPr>
+      </p:sp>
+      <p:sp>
+        <p:nvSpPr>
+          <p:cNvPr id="37" name="kicker-08-marker">
+            <a:extLst xmlns:a="http://schemas.openxmlformats.org/drawingml/2006/main">
+              <a:ext uri="{FF2B5EF4-FFF2-40B4-BE49-F238E27FC236}">
+                <a16:creationId xmlns:a16="http://schemas.microsoft.com/office/drawing/2014/main" id="{921EB548-89C1-447D-AF75-5781920DD3F4}"/>
+              </a:ext>
+            </a:extLst>
+          </p:cNvPr>
+          <p:cNvSpPr>
+            <a:spLocks xmlns:a="http://schemas.openxmlformats.org/drawingml/2006/main" noGrp="1"/>
+          </p:cNvSpPr>
+          <p:nvPr/>
+        </p:nvSpPr>
+        <p:spPr>
+          <a:xfrm xmlns:a="http://schemas.openxmlformats.org/drawingml/2006/main">
+            <a:off x="514350" y="390525"/>
+            <a:ext cx="76200" cy="76200"/>
+          </a:xfrm>
+          <a:prstGeom xmlns:a="http://schemas.openxmlformats.org/drawingml/2006/main" prst="rect">
+            <a:avLst/>
+          </a:prstGeom>
+          <a:solidFill xmlns:a="http://schemas.openxmlformats.org/drawingml/2006/main">
+            <a:srgbClr val="A85D2A"/>
+          </a:solidFill>
+          <a:ln xmlns:a="http://schemas.openxmlformats.org/drawingml/2006/main" w="0">
+            <a:solidFill>
+              <a:srgbClr val="000000">
+                <a:alpha val="0"/>
+              </a:srgbClr>
+            </a:solidFill>
+            <a:prstDash val="solid"/>
+          </a:ln>
+        </p:spPr>
+      </p:sp>
+      <p:sp>
+        <p:nvSpPr>
+          <p:cNvPr id="38" name="kicker-08-label">
+            <a:extLst xmlns:a="http://schemas.openxmlformats.org/drawingml/2006/main">
+              <a:ext uri="{FF2B5EF4-FFF2-40B4-BE49-F238E27FC236}">
+                <a16:creationId xmlns:a16="http://schemas.microsoft.com/office/drawing/2014/main" id="{CACE8526-C4F5-4E08-BFEA-2E2221C3971A}"/>
+              </a:ext>
+            </a:extLst>
+          </p:cNvPr>
+          <p:cNvSpPr>
+            <a:spLocks xmlns:a="http://schemas.openxmlformats.org/drawingml/2006/main" noGrp="1"/>
+          </p:cNvSpPr>
+          <p:nvPr/>
+        </p:nvSpPr>
+        <p:spPr>
+          <a:xfrm xmlns:a="http://schemas.openxmlformats.org/drawingml/2006/main">
+            <a:off x="685800" y="323850"/>
+            <a:ext cx="7524750" cy="228600"/>
+          </a:xfrm>
+          <a:prstGeom xmlns:a="http://schemas.openxmlformats.org/drawingml/2006/main" prst="rect">
+            <a:avLst/>
+          </a:prstGeom>
+          <a:solidFill xmlns:a="http://schemas.openxmlformats.org/drawingml/2006/main">
+            <a:srgbClr val="000000">
+              <a:alpha val="0"/>
+            </a:srgbClr>
+          </a:solidFill>
+          <a:ln xmlns:a="http://schemas.openxmlformats.org/drawingml/2006/main" w="0">
+            <a:solidFill>
+              <a:srgbClr val="000000">
+                <a:alpha val="0"/>
+              </a:srgbClr>
+            </a:solidFill>
+            <a:prstDash val="solid"/>
+          </a:ln>
+        </p:spPr>
+        <p:txBody>
+          <a:bodyPr xmlns:a="http://schemas.openxmlformats.org/drawingml/2006/main" lIns="0" tIns="0" rIns="0" bIns="0" anchor="ctr"/>
           <a:lstStyle xmlns:a="http://schemas.openxmlformats.org/drawingml/2006/main"/>
           <a:p xmlns:a="http://schemas.openxmlformats.org/drawingml/2006/main">
             <a:pPr algn="l">
@@ -4098,943 +5022,17 @@
                 <a:ea typeface="Aptos"/>
                 <a:cs typeface="Aptos"/>
               </a:rPr>
-              <a:t>REQUIRED OUTPUT STANDARD</a:t>
+              <a:t>MODULE 1 / LESSON 08 / STRUCTURED DRAFTING DRILL</a:t>
             </a:r>
           </a:p>
         </p:txBody>
       </p:sp>
       <p:sp>
         <p:nvSpPr>
-          <p:cNvPr id="20" name="">
-            <a:extLst xmlns:a="http://schemas.openxmlformats.org/drawingml/2006/main">
-              <a:ext uri="{FF2B5EF4-FFF2-40B4-BE49-F238E27FC236}">
-                <a16:creationId xmlns:a16="http://schemas.microsoft.com/office/drawing/2014/main" id="{2ED21C38-514B-41C7-AA9D-8773BD2E5E64}"/>
-              </a:ext>
-            </a:extLst>
-          </p:cNvPr>
-          <p:cNvSpPr>
-            <a:spLocks xmlns:a="http://schemas.openxmlformats.org/drawingml/2006/main" noGrp="1"/>
-          </p:cNvSpPr>
-          <p:nvPr/>
-        </p:nvSpPr>
-        <p:spPr>
-          <a:xfrm xmlns:a="http://schemas.openxmlformats.org/drawingml/2006/main">
-            <a:off x="6705600" y="2714625"/>
-            <a:ext cx="57150" cy="57150"/>
-          </a:xfrm>
-          <a:prstGeom xmlns:a="http://schemas.openxmlformats.org/drawingml/2006/main" prst="rect">
-            <a:avLst/>
-          </a:prstGeom>
-          <a:solidFill xmlns:a="http://schemas.openxmlformats.org/drawingml/2006/main">
-            <a:srgbClr val="1D6072"/>
-          </a:solidFill>
-          <a:ln xmlns:a="http://schemas.openxmlformats.org/drawingml/2006/main" w="0">
-            <a:solidFill>
-              <a:srgbClr val="000000">
-                <a:alpha val="0"/>
-              </a:srgbClr>
-            </a:solidFill>
-            <a:prstDash val="solid"/>
-          </a:ln>
-        </p:spPr>
-      </p:sp>
-      <p:sp>
-        <p:nvSpPr>
-          <p:cNvPr id="21" name="">
-            <a:extLst xmlns:a="http://schemas.openxmlformats.org/drawingml/2006/main">
-              <a:ext uri="{FF2B5EF4-FFF2-40B4-BE49-F238E27FC236}">
-                <a16:creationId xmlns:a16="http://schemas.microsoft.com/office/drawing/2014/main" id="{0FC61C82-B5C5-4C8D-86A7-81E2117BEA89}"/>
-              </a:ext>
-            </a:extLst>
-          </p:cNvPr>
-          <p:cNvSpPr>
-            <a:spLocks xmlns:a="http://schemas.openxmlformats.org/drawingml/2006/main" noGrp="1"/>
-          </p:cNvSpPr>
-          <p:nvPr/>
-        </p:nvSpPr>
-        <p:spPr>
-          <a:xfrm xmlns:a="http://schemas.openxmlformats.org/drawingml/2006/main">
-            <a:off x="6877050" y="2647950"/>
-            <a:ext cx="4210050" cy="438150"/>
-          </a:xfrm>
-          <a:prstGeom xmlns:a="http://schemas.openxmlformats.org/drawingml/2006/main" prst="rect">
-            <a:avLst/>
-          </a:prstGeom>
-          <a:solidFill xmlns:a="http://schemas.openxmlformats.org/drawingml/2006/main">
-            <a:srgbClr val="000000">
-              <a:alpha val="0"/>
-            </a:srgbClr>
-          </a:solidFill>
-          <a:ln xmlns:a="http://schemas.openxmlformats.org/drawingml/2006/main" w="0">
-            <a:solidFill>
-              <a:srgbClr val="000000">
-                <a:alpha val="0"/>
-              </a:srgbClr>
-            </a:solidFill>
-            <a:prstDash val="solid"/>
-          </a:ln>
-        </p:spPr>
-        <p:txBody>
-          <a:bodyPr xmlns:a="http://schemas.openxmlformats.org/drawingml/2006/main" lIns="0" tIns="0" rIns="0" bIns="0" anchor="t"/>
-          <a:lstStyle xmlns:a="http://schemas.openxmlformats.org/drawingml/2006/main"/>
-          <a:p xmlns:a="http://schemas.openxmlformats.org/drawingml/2006/main">
-            <a:pPr algn="l">
-              <a:defRPr sz="1125" b="0">
-                <a:solidFill>
-                  <a:srgbClr val="172026"/>
-                </a:solidFill>
-                <a:latin typeface="Aptos"/>
-                <a:ea typeface="Aptos"/>
-                <a:cs typeface="Aptos"/>
-              </a:defRPr>
-            </a:pPr>
-            <a:r>
-              <a:rPr sz="1125" b="0">
-                <a:solidFill>
-                  <a:srgbClr val="172026"/>
-                </a:solidFill>
-                <a:latin typeface="Aptos"/>
-                <a:ea typeface="Aptos"/>
-                <a:cs typeface="Aptos"/>
-              </a:rPr>
-              <a:t>Clear revenue problem, focus, pilot logic, and decision request</a:t>
-            </a:r>
-          </a:p>
-        </p:txBody>
-      </p:sp>
-      <p:sp>
-        <p:nvSpPr>
-          <p:cNvPr id="22" name="">
-            <a:extLst xmlns:a="http://schemas.openxmlformats.org/drawingml/2006/main">
-              <a:ext uri="{FF2B5EF4-FFF2-40B4-BE49-F238E27FC236}">
-                <a16:creationId xmlns:a16="http://schemas.microsoft.com/office/drawing/2014/main" id="{0315495D-13E0-4A8C-997E-79A55ADA8B79}"/>
-              </a:ext>
-            </a:extLst>
-          </p:cNvPr>
-          <p:cNvSpPr>
-            <a:spLocks xmlns:a="http://schemas.openxmlformats.org/drawingml/2006/main" noGrp="1"/>
-          </p:cNvSpPr>
-          <p:nvPr/>
-        </p:nvSpPr>
-        <p:spPr>
-          <a:xfrm xmlns:a="http://schemas.openxmlformats.org/drawingml/2006/main">
-            <a:off x="6705600" y="3190875"/>
-            <a:ext cx="57150" cy="57150"/>
-          </a:xfrm>
-          <a:prstGeom xmlns:a="http://schemas.openxmlformats.org/drawingml/2006/main" prst="rect">
-            <a:avLst/>
-          </a:prstGeom>
-          <a:solidFill xmlns:a="http://schemas.openxmlformats.org/drawingml/2006/main">
-            <a:srgbClr val="1D6072"/>
-          </a:solidFill>
-          <a:ln xmlns:a="http://schemas.openxmlformats.org/drawingml/2006/main" w="0">
-            <a:solidFill>
-              <a:srgbClr val="000000">
-                <a:alpha val="0"/>
-              </a:srgbClr>
-            </a:solidFill>
-            <a:prstDash val="solid"/>
-          </a:ln>
-        </p:spPr>
-      </p:sp>
-      <p:sp>
-        <p:nvSpPr>
-          <p:cNvPr id="23" name="">
-            <a:extLst xmlns:a="http://schemas.openxmlformats.org/drawingml/2006/main">
-              <a:ext uri="{FF2B5EF4-FFF2-40B4-BE49-F238E27FC236}">
-                <a16:creationId xmlns:a16="http://schemas.microsoft.com/office/drawing/2014/main" id="{44242116-72A4-469A-9911-93D4CE095F5B}"/>
-              </a:ext>
-            </a:extLst>
-          </p:cNvPr>
-          <p:cNvSpPr>
-            <a:spLocks xmlns:a="http://schemas.openxmlformats.org/drawingml/2006/main" noGrp="1"/>
-          </p:cNvSpPr>
-          <p:nvPr/>
-        </p:nvSpPr>
-        <p:spPr>
-          <a:xfrm xmlns:a="http://schemas.openxmlformats.org/drawingml/2006/main">
-            <a:off x="6877050" y="3124200"/>
-            <a:ext cx="4210050" cy="438150"/>
-          </a:xfrm>
-          <a:prstGeom xmlns:a="http://schemas.openxmlformats.org/drawingml/2006/main" prst="rect">
-            <a:avLst/>
-          </a:prstGeom>
-          <a:solidFill xmlns:a="http://schemas.openxmlformats.org/drawingml/2006/main">
-            <a:srgbClr val="000000">
-              <a:alpha val="0"/>
-            </a:srgbClr>
-          </a:solidFill>
-          <a:ln xmlns:a="http://schemas.openxmlformats.org/drawingml/2006/main" w="0">
-            <a:solidFill>
-              <a:srgbClr val="000000">
-                <a:alpha val="0"/>
-              </a:srgbClr>
-            </a:solidFill>
-            <a:prstDash val="solid"/>
-          </a:ln>
-        </p:spPr>
-        <p:txBody>
-          <a:bodyPr xmlns:a="http://schemas.openxmlformats.org/drawingml/2006/main" lIns="0" tIns="0" rIns="0" bIns="0" anchor="t"/>
-          <a:lstStyle xmlns:a="http://schemas.openxmlformats.org/drawingml/2006/main"/>
-          <a:p xmlns:a="http://schemas.openxmlformats.org/drawingml/2006/main">
-            <a:pPr algn="l">
-              <a:defRPr sz="1125" b="0">
-                <a:solidFill>
-                  <a:srgbClr val="172026"/>
-                </a:solidFill>
-                <a:latin typeface="Aptos"/>
-                <a:ea typeface="Aptos"/>
-                <a:cs typeface="Aptos"/>
-              </a:defRPr>
-            </a:pPr>
-            <a:r>
-              <a:rPr sz="1125" b="0">
-                <a:solidFill>
-                  <a:srgbClr val="172026"/>
-                </a:solidFill>
-                <a:latin typeface="Aptos"/>
-                <a:ea typeface="Aptos"/>
-                <a:cs typeface="Aptos"/>
-              </a:rPr>
-              <a:t>90-day sequence with owners and outputs</a:t>
-            </a:r>
-          </a:p>
-        </p:txBody>
-      </p:sp>
-      <p:sp>
-        <p:nvSpPr>
-          <p:cNvPr id="24" name="">
-            <a:extLst xmlns:a="http://schemas.openxmlformats.org/drawingml/2006/main">
-              <a:ext uri="{FF2B5EF4-FFF2-40B4-BE49-F238E27FC236}">
-                <a16:creationId xmlns:a16="http://schemas.microsoft.com/office/drawing/2014/main" id="{5A6492B6-41EA-4A62-A516-4F67731001ED}"/>
-              </a:ext>
-            </a:extLst>
-          </p:cNvPr>
-          <p:cNvSpPr>
-            <a:spLocks xmlns:a="http://schemas.openxmlformats.org/drawingml/2006/main" noGrp="1"/>
-          </p:cNvSpPr>
-          <p:nvPr/>
-        </p:nvSpPr>
-        <p:spPr>
-          <a:xfrm xmlns:a="http://schemas.openxmlformats.org/drawingml/2006/main">
-            <a:off x="6705600" y="3667125"/>
-            <a:ext cx="57150" cy="57150"/>
-          </a:xfrm>
-          <a:prstGeom xmlns:a="http://schemas.openxmlformats.org/drawingml/2006/main" prst="rect">
-            <a:avLst/>
-          </a:prstGeom>
-          <a:solidFill xmlns:a="http://schemas.openxmlformats.org/drawingml/2006/main">
-            <a:srgbClr val="1D6072"/>
-          </a:solidFill>
-          <a:ln xmlns:a="http://schemas.openxmlformats.org/drawingml/2006/main" w="0">
-            <a:solidFill>
-              <a:srgbClr val="000000">
-                <a:alpha val="0"/>
-              </a:srgbClr>
-            </a:solidFill>
-            <a:prstDash val="solid"/>
-          </a:ln>
-        </p:spPr>
-      </p:sp>
-      <p:sp>
-        <p:nvSpPr>
-          <p:cNvPr id="25" name="">
-            <a:extLst xmlns:a="http://schemas.openxmlformats.org/drawingml/2006/main">
-              <a:ext uri="{FF2B5EF4-FFF2-40B4-BE49-F238E27FC236}">
-                <a16:creationId xmlns:a16="http://schemas.microsoft.com/office/drawing/2014/main" id="{FE0722F4-A398-4E74-9E04-EA082AEE92DF}"/>
-              </a:ext>
-            </a:extLst>
-          </p:cNvPr>
-          <p:cNvSpPr>
-            <a:spLocks xmlns:a="http://schemas.openxmlformats.org/drawingml/2006/main" noGrp="1"/>
-          </p:cNvSpPr>
-          <p:nvPr/>
-        </p:nvSpPr>
-        <p:spPr>
-          <a:xfrm xmlns:a="http://schemas.openxmlformats.org/drawingml/2006/main">
-            <a:off x="6877050" y="3600450"/>
-            <a:ext cx="4210050" cy="438150"/>
-          </a:xfrm>
-          <a:prstGeom xmlns:a="http://schemas.openxmlformats.org/drawingml/2006/main" prst="rect">
-            <a:avLst/>
-          </a:prstGeom>
-          <a:solidFill xmlns:a="http://schemas.openxmlformats.org/drawingml/2006/main">
-            <a:srgbClr val="000000">
-              <a:alpha val="0"/>
-            </a:srgbClr>
-          </a:solidFill>
-          <a:ln xmlns:a="http://schemas.openxmlformats.org/drawingml/2006/main" w="0">
-            <a:solidFill>
-              <a:srgbClr val="000000">
-                <a:alpha val="0"/>
-              </a:srgbClr>
-            </a:solidFill>
-            <a:prstDash val="solid"/>
-          </a:ln>
-        </p:spPr>
-        <p:txBody>
-          <a:bodyPr xmlns:a="http://schemas.openxmlformats.org/drawingml/2006/main" lIns="0" tIns="0" rIns="0" bIns="0" anchor="t"/>
-          <a:lstStyle xmlns:a="http://schemas.openxmlformats.org/drawingml/2006/main"/>
-          <a:p xmlns:a="http://schemas.openxmlformats.org/drawingml/2006/main">
-            <a:pPr algn="l">
-              <a:defRPr sz="1125" b="0">
-                <a:solidFill>
-                  <a:srgbClr val="172026"/>
-                </a:solidFill>
-                <a:latin typeface="Aptos"/>
-                <a:ea typeface="Aptos"/>
-                <a:cs typeface="Aptos"/>
-              </a:defRPr>
-            </a:pPr>
-            <a:r>
-              <a:rPr sz="1125" b="0">
-                <a:solidFill>
-                  <a:srgbClr val="172026"/>
-                </a:solidFill>
-                <a:latin typeface="Aptos"/>
-                <a:ea typeface="Aptos"/>
-                <a:cs typeface="Aptos"/>
-              </a:rPr>
-              <a:t>Cadence with evidence and decisions</a:t>
-            </a:r>
-          </a:p>
-        </p:txBody>
-      </p:sp>
-      <p:sp>
-        <p:nvSpPr>
-          <p:cNvPr id="26" name="">
-            <a:extLst xmlns:a="http://schemas.openxmlformats.org/drawingml/2006/main">
-              <a:ext uri="{FF2B5EF4-FFF2-40B4-BE49-F238E27FC236}">
-                <a16:creationId xmlns:a16="http://schemas.microsoft.com/office/drawing/2014/main" id="{4ECD6319-1D89-41E7-A64C-1CCA817858DB}"/>
-              </a:ext>
-            </a:extLst>
-          </p:cNvPr>
-          <p:cNvSpPr>
-            <a:spLocks xmlns:a="http://schemas.openxmlformats.org/drawingml/2006/main" noGrp="1"/>
-          </p:cNvSpPr>
-          <p:nvPr/>
-        </p:nvSpPr>
-        <p:spPr>
-          <a:xfrm xmlns:a="http://schemas.openxmlformats.org/drawingml/2006/main">
-            <a:off x="6705600" y="4143375"/>
-            <a:ext cx="57150" cy="57150"/>
-          </a:xfrm>
-          <a:prstGeom xmlns:a="http://schemas.openxmlformats.org/drawingml/2006/main" prst="rect">
-            <a:avLst/>
-          </a:prstGeom>
-          <a:solidFill xmlns:a="http://schemas.openxmlformats.org/drawingml/2006/main">
-            <a:srgbClr val="1D6072"/>
-          </a:solidFill>
-          <a:ln xmlns:a="http://schemas.openxmlformats.org/drawingml/2006/main" w="0">
-            <a:solidFill>
-              <a:srgbClr val="000000">
-                <a:alpha val="0"/>
-              </a:srgbClr>
-            </a:solidFill>
-            <a:prstDash val="solid"/>
-          </a:ln>
-        </p:spPr>
-      </p:sp>
-      <p:sp>
-        <p:nvSpPr>
-          <p:cNvPr id="27" name="">
-            <a:extLst xmlns:a="http://schemas.openxmlformats.org/drawingml/2006/main">
-              <a:ext uri="{FF2B5EF4-FFF2-40B4-BE49-F238E27FC236}">
-                <a16:creationId xmlns:a16="http://schemas.microsoft.com/office/drawing/2014/main" id="{EE24AE61-D4A7-4BED-BEFB-D77D497D40EB}"/>
-              </a:ext>
-            </a:extLst>
-          </p:cNvPr>
-          <p:cNvSpPr>
-            <a:spLocks xmlns:a="http://schemas.openxmlformats.org/drawingml/2006/main" noGrp="1"/>
-          </p:cNvSpPr>
-          <p:nvPr/>
-        </p:nvSpPr>
-        <p:spPr>
-          <a:xfrm xmlns:a="http://schemas.openxmlformats.org/drawingml/2006/main">
-            <a:off x="6877050" y="4076700"/>
-            <a:ext cx="4210050" cy="438150"/>
-          </a:xfrm>
-          <a:prstGeom xmlns:a="http://schemas.openxmlformats.org/drawingml/2006/main" prst="rect">
-            <a:avLst/>
-          </a:prstGeom>
-          <a:solidFill xmlns:a="http://schemas.openxmlformats.org/drawingml/2006/main">
-            <a:srgbClr val="000000">
-              <a:alpha val="0"/>
-            </a:srgbClr>
-          </a:solidFill>
-          <a:ln xmlns:a="http://schemas.openxmlformats.org/drawingml/2006/main" w="0">
-            <a:solidFill>
-              <a:srgbClr val="000000">
-                <a:alpha val="0"/>
-              </a:srgbClr>
-            </a:solidFill>
-            <a:prstDash val="solid"/>
-          </a:ln>
-        </p:spPr>
-        <p:txBody>
-          <a:bodyPr xmlns:a="http://schemas.openxmlformats.org/drawingml/2006/main" lIns="0" tIns="0" rIns="0" bIns="0" anchor="t"/>
-          <a:lstStyle xmlns:a="http://schemas.openxmlformats.org/drawingml/2006/main"/>
-          <a:p xmlns:a="http://schemas.openxmlformats.org/drawingml/2006/main">
-            <a:pPr algn="l">
-              <a:defRPr sz="1125" b="0">
-                <a:solidFill>
-                  <a:srgbClr val="172026"/>
-                </a:solidFill>
-                <a:latin typeface="Aptos"/>
-                <a:ea typeface="Aptos"/>
-                <a:cs typeface="Aptos"/>
-              </a:defRPr>
-            </a:pPr>
-            <a:r>
-              <a:rPr sz="1125" b="0">
-                <a:solidFill>
-                  <a:srgbClr val="172026"/>
-                </a:solidFill>
-                <a:latin typeface="Aptos"/>
-                <a:ea typeface="Aptos"/>
-                <a:cs typeface="Aptos"/>
-              </a:rPr>
-              <a:t>Success metrics for movement, coverage, signal quality, sales use, and opportunity quality</a:t>
-            </a:r>
-          </a:p>
-        </p:txBody>
-      </p:sp>
-      <p:sp>
-        <p:nvSpPr>
-          <p:cNvPr id="28" name="">
-            <a:extLst xmlns:a="http://schemas.openxmlformats.org/drawingml/2006/main">
-              <a:ext uri="{FF2B5EF4-FFF2-40B4-BE49-F238E27FC236}">
-                <a16:creationId xmlns:a16="http://schemas.microsoft.com/office/drawing/2014/main" id="{BEEBC9BA-077E-4F48-8C8B-D8AD06F461FA}"/>
-              </a:ext>
-            </a:extLst>
-          </p:cNvPr>
-          <p:cNvSpPr>
-            <a:spLocks xmlns:a="http://schemas.openxmlformats.org/drawingml/2006/main" noGrp="1"/>
-          </p:cNvSpPr>
-          <p:nvPr/>
-        </p:nvSpPr>
-        <p:spPr>
-          <a:xfrm xmlns:a="http://schemas.openxmlformats.org/drawingml/2006/main">
-            <a:off x="6705600" y="4619625"/>
-            <a:ext cx="57150" cy="57150"/>
-          </a:xfrm>
-          <a:prstGeom xmlns:a="http://schemas.openxmlformats.org/drawingml/2006/main" prst="rect">
-            <a:avLst/>
-          </a:prstGeom>
-          <a:solidFill xmlns:a="http://schemas.openxmlformats.org/drawingml/2006/main">
-            <a:srgbClr val="1D6072"/>
-          </a:solidFill>
-          <a:ln xmlns:a="http://schemas.openxmlformats.org/drawingml/2006/main" w="0">
-            <a:solidFill>
-              <a:srgbClr val="000000">
-                <a:alpha val="0"/>
-              </a:srgbClr>
-            </a:solidFill>
-            <a:prstDash val="solid"/>
-          </a:ln>
-        </p:spPr>
-      </p:sp>
-      <p:sp>
-        <p:nvSpPr>
-          <p:cNvPr id="29" name="">
-            <a:extLst xmlns:a="http://schemas.openxmlformats.org/drawingml/2006/main">
-              <a:ext uri="{FF2B5EF4-FFF2-40B4-BE49-F238E27FC236}">
-                <a16:creationId xmlns:a16="http://schemas.microsoft.com/office/drawing/2014/main" id="{8A3A3D05-845F-4CF3-8913-3FA0ECC836D3}"/>
-              </a:ext>
-            </a:extLst>
-          </p:cNvPr>
-          <p:cNvSpPr>
-            <a:spLocks xmlns:a="http://schemas.openxmlformats.org/drawingml/2006/main" noGrp="1"/>
-          </p:cNvSpPr>
-          <p:nvPr/>
-        </p:nvSpPr>
-        <p:spPr>
-          <a:xfrm xmlns:a="http://schemas.openxmlformats.org/drawingml/2006/main">
-            <a:off x="6877050" y="4552950"/>
-            <a:ext cx="4210050" cy="438150"/>
-          </a:xfrm>
-          <a:prstGeom xmlns:a="http://schemas.openxmlformats.org/drawingml/2006/main" prst="rect">
-            <a:avLst/>
-          </a:prstGeom>
-          <a:solidFill xmlns:a="http://schemas.openxmlformats.org/drawingml/2006/main">
-            <a:srgbClr val="000000">
-              <a:alpha val="0"/>
-            </a:srgbClr>
-          </a:solidFill>
-          <a:ln xmlns:a="http://schemas.openxmlformats.org/drawingml/2006/main" w="0">
-            <a:solidFill>
-              <a:srgbClr val="000000">
-                <a:alpha val="0"/>
-              </a:srgbClr>
-            </a:solidFill>
-            <a:prstDash val="solid"/>
-          </a:ln>
-        </p:spPr>
-        <p:txBody>
-          <a:bodyPr xmlns:a="http://schemas.openxmlformats.org/drawingml/2006/main" lIns="0" tIns="0" rIns="0" bIns="0" anchor="t"/>
-          <a:lstStyle xmlns:a="http://schemas.openxmlformats.org/drawingml/2006/main"/>
-          <a:p xmlns:a="http://schemas.openxmlformats.org/drawingml/2006/main">
-            <a:pPr algn="l">
-              <a:defRPr sz="1125" b="0">
-                <a:solidFill>
-                  <a:srgbClr val="172026"/>
-                </a:solidFill>
-                <a:latin typeface="Aptos"/>
-                <a:ea typeface="Aptos"/>
-                <a:cs typeface="Aptos"/>
-              </a:defRPr>
-            </a:pPr>
-            <a:r>
-              <a:rPr sz="1125" b="0">
-                <a:solidFill>
-                  <a:srgbClr val="172026"/>
-                </a:solidFill>
-                <a:latin typeface="Aptos"/>
-                <a:ea typeface="Aptos"/>
-                <a:cs typeface="Aptos"/>
-              </a:rPr>
-              <a:t>Stop, repair, scale criteria tied to evidence</a:t>
-            </a:r>
-          </a:p>
-        </p:txBody>
-      </p:sp>
-      <p:sp>
-        <p:nvSpPr>
-          <p:cNvPr id="30" name="">
-            <a:extLst xmlns:a="http://schemas.openxmlformats.org/drawingml/2006/main">
-              <a:ext uri="{FF2B5EF4-FFF2-40B4-BE49-F238E27FC236}">
-                <a16:creationId xmlns:a16="http://schemas.microsoft.com/office/drawing/2014/main" id="{37E4182C-079F-478B-B72B-EA38BB39C226}"/>
-              </a:ext>
-            </a:extLst>
-          </p:cNvPr>
-          <p:cNvSpPr>
-            <a:spLocks xmlns:a="http://schemas.openxmlformats.org/drawingml/2006/main" noGrp="1"/>
-          </p:cNvSpPr>
-          <p:nvPr/>
-        </p:nvSpPr>
-        <p:spPr>
-          <a:xfrm xmlns:a="http://schemas.openxmlformats.org/drawingml/2006/main">
-            <a:off x="514350" y="6438900"/>
-            <a:ext cx="10915650" cy="9525"/>
-          </a:xfrm>
-          <a:prstGeom xmlns:a="http://schemas.openxmlformats.org/drawingml/2006/main" prst="rect">
-            <a:avLst/>
-          </a:prstGeom>
-          <a:solidFill xmlns:a="http://schemas.openxmlformats.org/drawingml/2006/main">
-            <a:srgbClr val="D9DDD6"/>
-          </a:solidFill>
-          <a:ln xmlns:a="http://schemas.openxmlformats.org/drawingml/2006/main" w="0">
-            <a:solidFill>
-              <a:srgbClr val="000000">
-                <a:alpha val="0"/>
-              </a:srgbClr>
-            </a:solidFill>
-            <a:prstDash val="solid"/>
-          </a:ln>
-        </p:spPr>
-      </p:sp>
-      <p:sp>
-        <p:nvSpPr>
-          <p:cNvPr id="31" name="">
-            <a:extLst xmlns:a="http://schemas.openxmlformats.org/drawingml/2006/main">
-              <a:ext uri="{FF2B5EF4-FFF2-40B4-BE49-F238E27FC236}">
-                <a16:creationId xmlns:a16="http://schemas.microsoft.com/office/drawing/2014/main" id="{4AB2B703-03C6-4B9F-A188-055A04774332}"/>
-              </a:ext>
-            </a:extLst>
-          </p:cNvPr>
-          <p:cNvSpPr>
-            <a:spLocks xmlns:a="http://schemas.openxmlformats.org/drawingml/2006/main" noGrp="1"/>
-          </p:cNvSpPr>
-          <p:nvPr/>
-        </p:nvSpPr>
-        <p:spPr>
-          <a:xfrm xmlns:a="http://schemas.openxmlformats.org/drawingml/2006/main">
-            <a:off x="514350" y="6553200"/>
-            <a:ext cx="5905500" cy="171450"/>
-          </a:xfrm>
-          <a:prstGeom xmlns:a="http://schemas.openxmlformats.org/drawingml/2006/main" prst="rect">
-            <a:avLst/>
-          </a:prstGeom>
-          <a:solidFill xmlns:a="http://schemas.openxmlformats.org/drawingml/2006/main">
-            <a:srgbClr val="000000">
-              <a:alpha val="0"/>
-            </a:srgbClr>
-          </a:solidFill>
-          <a:ln xmlns:a="http://schemas.openxmlformats.org/drawingml/2006/main" w="0">
-            <a:solidFill>
-              <a:srgbClr val="000000">
-                <a:alpha val="0"/>
-              </a:srgbClr>
-            </a:solidFill>
-            <a:prstDash val="solid"/>
-          </a:ln>
-        </p:spPr>
-        <p:txBody>
-          <a:bodyPr xmlns:a="http://schemas.openxmlformats.org/drawingml/2006/main" lIns="0" tIns="0" rIns="0" bIns="0" anchor="t"/>
-          <a:lstStyle xmlns:a="http://schemas.openxmlformats.org/drawingml/2006/main"/>
-          <a:p xmlns:a="http://schemas.openxmlformats.org/drawingml/2006/main">
-            <a:pPr algn="l">
-              <a:defRPr sz="675" b="0">
-                <a:solidFill>
-                  <a:srgbClr val="59646A"/>
-                </a:solidFill>
-                <a:latin typeface="Aptos"/>
-                <a:ea typeface="Aptos"/>
-                <a:cs typeface="Aptos"/>
-              </a:defRPr>
-            </a:pPr>
-            <a:r>
-              <a:rPr sz="675" b="0">
-                <a:solidFill>
-                  <a:srgbClr val="59646A"/>
-                </a:solidFill>
-                <a:latin typeface="Aptos"/>
-                <a:ea typeface="Aptos"/>
-                <a:cs typeface="Aptos"/>
-              </a:rPr>
-              <a:t>Lesson 08 - Measurement, Cadence, And 90-Day Pilot</a:t>
-            </a:r>
-          </a:p>
-        </p:txBody>
-      </p:sp>
-      <p:sp>
-        <p:nvSpPr>
-          <p:cNvPr id="32" name="">
-            <a:extLst xmlns:a="http://schemas.openxmlformats.org/drawingml/2006/main">
-              <a:ext uri="{FF2B5EF4-FFF2-40B4-BE49-F238E27FC236}">
-                <a16:creationId xmlns:a16="http://schemas.microsoft.com/office/drawing/2014/main" id="{B82EC511-477D-4FDB-8ED4-A986EABB64FF}"/>
-              </a:ext>
-            </a:extLst>
-          </p:cNvPr>
-          <p:cNvSpPr>
-            <a:spLocks xmlns:a="http://schemas.openxmlformats.org/drawingml/2006/main" noGrp="1"/>
-          </p:cNvSpPr>
-          <p:nvPr/>
-        </p:nvSpPr>
-        <p:spPr>
-          <a:xfrm xmlns:a="http://schemas.openxmlformats.org/drawingml/2006/main">
-            <a:off x="5334000" y="6553200"/>
-            <a:ext cx="4095750" cy="171450"/>
-          </a:xfrm>
-          <a:prstGeom xmlns:a="http://schemas.openxmlformats.org/drawingml/2006/main" prst="rect">
-            <a:avLst/>
-          </a:prstGeom>
-          <a:solidFill xmlns:a="http://schemas.openxmlformats.org/drawingml/2006/main">
-            <a:srgbClr val="000000">
-              <a:alpha val="0"/>
-            </a:srgbClr>
-          </a:solidFill>
-          <a:ln xmlns:a="http://schemas.openxmlformats.org/drawingml/2006/main" w="0">
-            <a:solidFill>
-              <a:srgbClr val="000000">
-                <a:alpha val="0"/>
-              </a:srgbClr>
-            </a:solidFill>
-            <a:prstDash val="solid"/>
-          </a:ln>
-        </p:spPr>
-        <p:txBody>
-          <a:bodyPr xmlns:a="http://schemas.openxmlformats.org/drawingml/2006/main" lIns="0" tIns="0" rIns="0" bIns="0" anchor="t"/>
-          <a:lstStyle xmlns:a="http://schemas.openxmlformats.org/drawingml/2006/main"/>
-          <a:p xmlns:a="http://schemas.openxmlformats.org/drawingml/2006/main">
-            <a:pPr algn="r">
-              <a:defRPr sz="600" b="0">
-                <a:solidFill>
-                  <a:srgbClr val="59646A"/>
-                </a:solidFill>
-                <a:latin typeface="Aptos"/>
-                <a:ea typeface="Aptos"/>
-                <a:cs typeface="Aptos"/>
-              </a:defRPr>
-            </a:pPr>
-            <a:r>
-              <a:rPr sz="600" b="0">
-                <a:solidFill>
-                  <a:srgbClr val="59646A"/>
-                </a:solidFill>
-                <a:latin typeface="Aptos"/>
-                <a:ea typeface="Aptos"/>
-                <a:cs typeface="Aptos"/>
-              </a:rPr>
-              <a:t>Source: modules/module-01-industrial-demand-generation/lessons/08-measurement-cadence-and-90-day-pilot.md @ 9e28222</a:t>
-            </a:r>
-          </a:p>
-        </p:txBody>
-      </p:sp>
-      <p:sp>
-        <p:nvSpPr>
-          <p:cNvPr id="33" name="">
-            <a:extLst xmlns:a="http://schemas.openxmlformats.org/drawingml/2006/main">
-              <a:ext uri="{FF2B5EF4-FFF2-40B4-BE49-F238E27FC236}">
-                <a16:creationId xmlns:a16="http://schemas.microsoft.com/office/drawing/2014/main" id="{00CE54BC-FCCA-45B3-B541-233B48F31791}"/>
-              </a:ext>
-            </a:extLst>
-          </p:cNvPr>
-          <p:cNvSpPr>
-            <a:spLocks xmlns:a="http://schemas.openxmlformats.org/drawingml/2006/main" noGrp="1"/>
-          </p:cNvSpPr>
-          <p:nvPr/>
-        </p:nvSpPr>
-        <p:spPr>
-          <a:xfrm xmlns:a="http://schemas.openxmlformats.org/drawingml/2006/main">
-            <a:off x="10668000" y="6553200"/>
-            <a:ext cx="762000" cy="171450"/>
-          </a:xfrm>
-          <a:prstGeom xmlns:a="http://schemas.openxmlformats.org/drawingml/2006/main" prst="rect">
-            <a:avLst/>
-          </a:prstGeom>
-          <a:solidFill xmlns:a="http://schemas.openxmlformats.org/drawingml/2006/main">
-            <a:srgbClr val="000000">
-              <a:alpha val="0"/>
-            </a:srgbClr>
-          </a:solidFill>
-          <a:ln xmlns:a="http://schemas.openxmlformats.org/drawingml/2006/main" w="0">
-            <a:solidFill>
-              <a:srgbClr val="000000">
-                <a:alpha val="0"/>
-              </a:srgbClr>
-            </a:solidFill>
-            <a:prstDash val="solid"/>
-          </a:ln>
-        </p:spPr>
-        <p:txBody>
-          <a:bodyPr xmlns:a="http://schemas.openxmlformats.org/drawingml/2006/main" lIns="0" tIns="0" rIns="0" bIns="0" anchor="t"/>
-          <a:lstStyle xmlns:a="http://schemas.openxmlformats.org/drawingml/2006/main"/>
-          <a:p xmlns:a="http://schemas.openxmlformats.org/drawingml/2006/main">
-            <a:pPr algn="r">
-              <a:defRPr sz="675" b="0">
-                <a:solidFill>
-                  <a:srgbClr val="59646A"/>
-                </a:solidFill>
-                <a:latin typeface="Aptos"/>
-                <a:ea typeface="Aptos"/>
-                <a:cs typeface="Aptos"/>
-              </a:defRPr>
-            </a:pPr>
-            <a:r>
-              <a:rPr sz="675" b="0">
-                <a:solidFill>
-                  <a:srgbClr val="59646A"/>
-                </a:solidFill>
-                <a:latin typeface="Aptos"/>
-                <a:ea typeface="Aptos"/>
-                <a:cs typeface="Aptos"/>
-              </a:rPr>
-              <a:t>10/15</a:t>
-            </a:r>
-          </a:p>
-        </p:txBody>
-      </p:sp>
-      <p:sp>
-        <p:nvSpPr>
-          <p:cNvPr id="34" name="">
-            <a:extLst xmlns:a="http://schemas.openxmlformats.org/drawingml/2006/main">
-              <a:ext uri="{FF2B5EF4-FFF2-40B4-BE49-F238E27FC236}">
-                <a16:creationId xmlns:a16="http://schemas.microsoft.com/office/drawing/2014/main" id="{2F11C697-D1C3-44A1-A3AE-B9BD924672EA}"/>
-              </a:ext>
-            </a:extLst>
-          </p:cNvPr>
-          <p:cNvSpPr>
-            <a:spLocks xmlns:a="http://schemas.openxmlformats.org/drawingml/2006/main" noGrp="1"/>
-          </p:cNvSpPr>
-          <p:nvPr/>
-        </p:nvSpPr>
-        <p:spPr>
-          <a:xfrm xmlns:a="http://schemas.openxmlformats.org/drawingml/2006/main">
-            <a:off x="0" y="0"/>
-            <a:ext cx="12192000" cy="1809750"/>
-          </a:xfrm>
-          <a:prstGeom xmlns:a="http://schemas.openxmlformats.org/drawingml/2006/main" prst="rect">
-            <a:avLst/>
-          </a:prstGeom>
-          <a:solidFill xmlns:a="http://schemas.openxmlformats.org/drawingml/2006/main">
-            <a:srgbClr val="F5F6F2"/>
-          </a:solidFill>
-          <a:ln xmlns:a="http://schemas.openxmlformats.org/drawingml/2006/main" w="0">
-            <a:solidFill>
-              <a:srgbClr val="000000">
-                <a:alpha val="0"/>
-              </a:srgbClr>
-            </a:solidFill>
-            <a:prstDash val="solid"/>
-          </a:ln>
-        </p:spPr>
-      </p:sp>
-      <p:sp>
-        <p:nvSpPr>
-          <p:cNvPr id="35" name="">
-            <a:extLst xmlns:a="http://schemas.openxmlformats.org/drawingml/2006/main">
-              <a:ext uri="{FF2B5EF4-FFF2-40B4-BE49-F238E27FC236}">
-                <a16:creationId xmlns:a16="http://schemas.microsoft.com/office/drawing/2014/main" id="{0CE4C578-2E5E-4841-BF41-02DA8EE572EB}"/>
-              </a:ext>
-            </a:extLst>
-          </p:cNvPr>
-          <p:cNvSpPr>
-            <a:spLocks xmlns:a="http://schemas.openxmlformats.org/drawingml/2006/main" noGrp="1"/>
-          </p:cNvSpPr>
-          <p:nvPr/>
-        </p:nvSpPr>
-        <p:spPr>
-          <a:xfrm xmlns:a="http://schemas.openxmlformats.org/drawingml/2006/main">
-            <a:off x="0" y="0"/>
-            <a:ext cx="171450" cy="1809750"/>
-          </a:xfrm>
-          <a:prstGeom xmlns:a="http://schemas.openxmlformats.org/drawingml/2006/main" prst="rect">
-            <a:avLst/>
-          </a:prstGeom>
-          <a:solidFill xmlns:a="http://schemas.openxmlformats.org/drawingml/2006/main">
-            <a:srgbClr val="12232B"/>
-          </a:solidFill>
-          <a:ln xmlns:a="http://schemas.openxmlformats.org/drawingml/2006/main" w="0">
-            <a:solidFill>
-              <a:srgbClr val="000000">
-                <a:alpha val="0"/>
-              </a:srgbClr>
-            </a:solidFill>
-            <a:prstDash val="solid"/>
-          </a:ln>
-        </p:spPr>
-      </p:sp>
-      <p:sp>
-        <p:nvSpPr>
-          <p:cNvPr id="36" name="">
-            <a:extLst xmlns:a="http://schemas.openxmlformats.org/drawingml/2006/main">
-              <a:ext uri="{FF2B5EF4-FFF2-40B4-BE49-F238E27FC236}">
-                <a16:creationId xmlns:a16="http://schemas.microsoft.com/office/drawing/2014/main" id="{EB42353A-7E24-4397-9343-0A20E744C230}"/>
-              </a:ext>
-            </a:extLst>
-          </p:cNvPr>
-          <p:cNvSpPr>
-            <a:spLocks xmlns:a="http://schemas.openxmlformats.org/drawingml/2006/main" noGrp="1"/>
-          </p:cNvSpPr>
-          <p:nvPr/>
-        </p:nvSpPr>
-        <p:spPr>
-          <a:xfrm xmlns:a="http://schemas.openxmlformats.org/drawingml/2006/main">
-            <a:off x="171450" y="0"/>
-            <a:ext cx="57150" cy="1809750"/>
-          </a:xfrm>
-          <a:prstGeom xmlns:a="http://schemas.openxmlformats.org/drawingml/2006/main" prst="rect">
-            <a:avLst/>
-          </a:prstGeom>
-          <a:solidFill xmlns:a="http://schemas.openxmlformats.org/drawingml/2006/main">
-            <a:srgbClr val="A85D2A"/>
-          </a:solidFill>
-          <a:ln xmlns:a="http://schemas.openxmlformats.org/drawingml/2006/main" w="0">
-            <a:solidFill>
-              <a:srgbClr val="000000">
-                <a:alpha val="0"/>
-              </a:srgbClr>
-            </a:solidFill>
-            <a:prstDash val="solid"/>
-          </a:ln>
-        </p:spPr>
-      </p:sp>
-      <p:sp>
-        <p:nvSpPr>
-          <p:cNvPr id="37" name="kicker-08-marker">
-            <a:extLst xmlns:a="http://schemas.openxmlformats.org/drawingml/2006/main">
-              <a:ext uri="{FF2B5EF4-FFF2-40B4-BE49-F238E27FC236}">
-                <a16:creationId xmlns:a16="http://schemas.microsoft.com/office/drawing/2014/main" id="{DFADB268-E103-4DDE-80F9-780144320BB4}"/>
-              </a:ext>
-            </a:extLst>
-          </p:cNvPr>
-          <p:cNvSpPr>
-            <a:spLocks xmlns:a="http://schemas.openxmlformats.org/drawingml/2006/main" noGrp="1"/>
-          </p:cNvSpPr>
-          <p:nvPr/>
-        </p:nvSpPr>
-        <p:spPr>
-          <a:xfrm xmlns:a="http://schemas.openxmlformats.org/drawingml/2006/main">
-            <a:off x="514350" y="390525"/>
-            <a:ext cx="76200" cy="76200"/>
-          </a:xfrm>
-          <a:prstGeom xmlns:a="http://schemas.openxmlformats.org/drawingml/2006/main" prst="rect">
-            <a:avLst/>
-          </a:prstGeom>
-          <a:solidFill xmlns:a="http://schemas.openxmlformats.org/drawingml/2006/main">
-            <a:srgbClr val="A85D2A"/>
-          </a:solidFill>
-          <a:ln xmlns:a="http://schemas.openxmlformats.org/drawingml/2006/main" w="0">
-            <a:solidFill>
-              <a:srgbClr val="000000">
-                <a:alpha val="0"/>
-              </a:srgbClr>
-            </a:solidFill>
-            <a:prstDash val="solid"/>
-          </a:ln>
-        </p:spPr>
-      </p:sp>
-      <p:sp>
-        <p:nvSpPr>
-          <p:cNvPr id="38" name="kicker-08-label">
-            <a:extLst xmlns:a="http://schemas.openxmlformats.org/drawingml/2006/main">
-              <a:ext uri="{FF2B5EF4-FFF2-40B4-BE49-F238E27FC236}">
-                <a16:creationId xmlns:a16="http://schemas.microsoft.com/office/drawing/2014/main" id="{8A4AC446-53B6-430B-B936-382C6BF1C784}"/>
-              </a:ext>
-            </a:extLst>
-          </p:cNvPr>
-          <p:cNvSpPr>
-            <a:spLocks xmlns:a="http://schemas.openxmlformats.org/drawingml/2006/main" noGrp="1"/>
-          </p:cNvSpPr>
-          <p:nvPr/>
-        </p:nvSpPr>
-        <p:spPr>
-          <a:xfrm xmlns:a="http://schemas.openxmlformats.org/drawingml/2006/main">
-            <a:off x="685800" y="323850"/>
-            <a:ext cx="7524750" cy="228600"/>
-          </a:xfrm>
-          <a:prstGeom xmlns:a="http://schemas.openxmlformats.org/drawingml/2006/main" prst="rect">
-            <a:avLst/>
-          </a:prstGeom>
-          <a:solidFill xmlns:a="http://schemas.openxmlformats.org/drawingml/2006/main">
-            <a:srgbClr val="000000">
-              <a:alpha val="0"/>
-            </a:srgbClr>
-          </a:solidFill>
-          <a:ln xmlns:a="http://schemas.openxmlformats.org/drawingml/2006/main" w="0">
-            <a:solidFill>
-              <a:srgbClr val="000000">
-                <a:alpha val="0"/>
-              </a:srgbClr>
-            </a:solidFill>
-            <a:prstDash val="solid"/>
-          </a:ln>
-        </p:spPr>
-        <p:txBody>
-          <a:bodyPr xmlns:a="http://schemas.openxmlformats.org/drawingml/2006/main" lIns="0" tIns="0" rIns="0" bIns="0" anchor="ctr"/>
-          <a:lstStyle xmlns:a="http://schemas.openxmlformats.org/drawingml/2006/main"/>
-          <a:p xmlns:a="http://schemas.openxmlformats.org/drawingml/2006/main">
-            <a:pPr algn="l">
-              <a:defRPr sz="750" b="1">
-                <a:solidFill>
-                  <a:srgbClr val="59646A"/>
-                </a:solidFill>
-                <a:latin typeface="Aptos"/>
-                <a:ea typeface="Aptos"/>
-                <a:cs typeface="Aptos"/>
-              </a:defRPr>
-            </a:pPr>
-            <a:r>
-              <a:rPr sz="750" b="1">
-                <a:solidFill>
-                  <a:srgbClr val="59646A"/>
-                </a:solidFill>
-                <a:latin typeface="Aptos"/>
-                <a:ea typeface="Aptos"/>
-                <a:cs typeface="Aptos"/>
-              </a:rPr>
-              <a:t>MODULE 1 / LESSON 08 / AI-ASSISTED EXERCISE</a:t>
-            </a:r>
-          </a:p>
-        </p:txBody>
-      </p:sp>
-      <p:sp>
-        <p:nvSpPr>
           <p:cNvPr id="39" name="">
             <a:extLst xmlns:a="http://schemas.openxmlformats.org/drawingml/2006/main">
               <a:ext uri="{FF2B5EF4-FFF2-40B4-BE49-F238E27FC236}">
-                <a16:creationId xmlns:a16="http://schemas.microsoft.com/office/drawing/2014/main" id="{4D3B1205-CDC7-4D1A-98E9-C8D1C7607FF0}"/>
+                <a16:creationId xmlns:a16="http://schemas.microsoft.com/office/drawing/2014/main" id="{1F6EB5FF-AE2B-4EF9-A722-1D2EA7D90BC3}"/>
               </a:ext>
             </a:extLst>
           </p:cNvPr>
@@ -5088,7 +5086,7 @@
                 <a:ea typeface="Aptos Display"/>
                 <a:cs typeface="Aptos Display"/>
               </a:rPr>
-              <a:t>Use AI to structure the attempt, then make humans responsible for judgment.</a:t>
+              <a:t>Structure the first draft before the room critiques it.</a:t>
             </a:r>
           </a:p>
         </p:txBody>
@@ -5098,7 +5096,7 @@
           <p:cNvPr id="40" name="">
             <a:extLst xmlns:a="http://schemas.openxmlformats.org/drawingml/2006/main">
               <a:ext uri="{FF2B5EF4-FFF2-40B4-BE49-F238E27FC236}">
-                <a16:creationId xmlns:a16="http://schemas.microsoft.com/office/drawing/2014/main" id="{84841FC5-8B3B-4653-929C-25E09298ACB8}"/>
+                <a16:creationId xmlns:a16="http://schemas.microsoft.com/office/drawing/2014/main" id="{30D25E7E-1A47-41C3-901A-61A58A6A2112}"/>
               </a:ext>
             </a:extLst>
           </p:cNvPr>
@@ -5152,7 +5150,7 @@
                 <a:ea typeface="Aptos"/>
                 <a:cs typeface="Aptos"/>
               </a:rPr>
-              <a:t>The prompt is constrained by source, assumptions, output standard, and human validation.</a:t>
+              <a:t>The brief is constrained by source evidence, assumptions, output standard, and validation.</a:t>
             </a:r>
           </a:p>
         </p:txBody>
@@ -5162,7 +5160,7 @@
           <p:cNvPr id="41" name="">
             <a:extLst xmlns:a="http://schemas.openxmlformats.org/drawingml/2006/main">
               <a:ext uri="{FF2B5EF4-FFF2-40B4-BE49-F238E27FC236}">
-                <a16:creationId xmlns:a16="http://schemas.microsoft.com/office/drawing/2014/main" id="{BECA439D-7FE1-43C0-8392-632DEC93169A}"/>
+                <a16:creationId xmlns:a16="http://schemas.microsoft.com/office/drawing/2014/main" id="{4A4F1C8E-1424-4BDC-BB09-3768AB0EF977}"/>
               </a:ext>
             </a:extLst>
           </p:cNvPr>
@@ -5197,7 +5195,7 @@
           <p:cNvPr id="42" name="">
             <a:extLst xmlns:a="http://schemas.openxmlformats.org/drawingml/2006/main">
               <a:ext uri="{FF2B5EF4-FFF2-40B4-BE49-F238E27FC236}">
-                <a16:creationId xmlns:a16="http://schemas.microsoft.com/office/drawing/2014/main" id="{636A8FEC-2A90-466C-AB26-1C20E9426408}"/>
+                <a16:creationId xmlns:a16="http://schemas.microsoft.com/office/drawing/2014/main" id="{F8CAE34C-0E9F-4254-8CE0-C54E4BF6B5D6}"/>
               </a:ext>
             </a:extLst>
           </p:cNvPr>
@@ -5232,7 +5230,7 @@
           <p:cNvPr id="43" name="">
             <a:extLst xmlns:a="http://schemas.openxmlformats.org/drawingml/2006/main">
               <a:ext uri="{FF2B5EF4-FFF2-40B4-BE49-F238E27FC236}">
-                <a16:creationId xmlns:a16="http://schemas.microsoft.com/office/drawing/2014/main" id="{E7B7A95A-F175-412E-A892-202AC34F4D0F}"/>
+                <a16:creationId xmlns:a16="http://schemas.microsoft.com/office/drawing/2014/main" id="{805900FF-325D-4E98-9137-43376BF6AF2F}"/>
               </a:ext>
             </a:extLst>
           </p:cNvPr>
@@ -5267,7 +5265,7 @@
           <p:cNvPr id="44" name="">
             <a:extLst xmlns:a="http://schemas.openxmlformats.org/drawingml/2006/main">
               <a:ext uri="{FF2B5EF4-FFF2-40B4-BE49-F238E27FC236}">
-                <a16:creationId xmlns:a16="http://schemas.microsoft.com/office/drawing/2014/main" id="{666B5353-AB0E-4A86-8505-B527D4309872}"/>
+                <a16:creationId xmlns:a16="http://schemas.microsoft.com/office/drawing/2014/main" id="{3A89D0B2-266C-4A5D-8A4D-FF5247C75584}"/>
               </a:ext>
             </a:extLst>
           </p:cNvPr>
@@ -5302,7 +5300,7 @@
           <p:cNvPr id="45" name="">
             <a:extLst xmlns:a="http://schemas.openxmlformats.org/drawingml/2006/main">
               <a:ext uri="{FF2B5EF4-FFF2-40B4-BE49-F238E27FC236}">
-                <a16:creationId xmlns:a16="http://schemas.microsoft.com/office/drawing/2014/main" id="{3675CF87-2E10-4B4F-B7E5-4CF3609A2CA5}"/>
+                <a16:creationId xmlns:a16="http://schemas.microsoft.com/office/drawing/2014/main" id="{4D2C7FE2-77A4-42D6-A748-478F6A2ACCB5}"/>
               </a:ext>
             </a:extLst>
           </p:cNvPr>
@@ -5366,7 +5364,7 @@
           <p:cNvPr id="46" name="">
             <a:extLst xmlns:a="http://schemas.openxmlformats.org/drawingml/2006/main">
               <a:ext uri="{FF2B5EF4-FFF2-40B4-BE49-F238E27FC236}">
-                <a16:creationId xmlns:a16="http://schemas.microsoft.com/office/drawing/2014/main" id="{2D7C54AC-442C-4AD4-BB46-5EE20B83D434}"/>
+                <a16:creationId xmlns:a16="http://schemas.microsoft.com/office/drawing/2014/main" id="{7020CA6B-2DA8-45F3-A4AF-414E1D507964}"/>
               </a:ext>
             </a:extLst>
           </p:cNvPr>
@@ -5430,7 +5428,7 @@
           <p:cNvPr id="47" name="">
             <a:extLst xmlns:a="http://schemas.openxmlformats.org/drawingml/2006/main">
               <a:ext uri="{FF2B5EF4-FFF2-40B4-BE49-F238E27FC236}">
-                <a16:creationId xmlns:a16="http://schemas.microsoft.com/office/drawing/2014/main" id="{22A16283-25BB-471D-A6E2-B47C0A07D52F}"/>
+                <a16:creationId xmlns:a16="http://schemas.microsoft.com/office/drawing/2014/main" id="{1D35AAF4-B5DB-4214-9A78-20F7E3918315}"/>
               </a:ext>
             </a:extLst>
           </p:cNvPr>
@@ -5492,7 +5490,7 @@
     </p:spTree>
     <p:extLst>
       <p:ext uri="{BB962C8B-B14F-4D97-AF65-F5344CB8AC3E}">
-        <p14:creationId xmlns:p14="http://schemas.microsoft.com/office/powerpoint/2010/main" val="546827121"/>
+        <p14:creationId xmlns:p14="http://schemas.microsoft.com/office/powerpoint/2010/main" val="538342227"/>
       </p:ext>
     </p:extLst>
   </p:cSld>
@@ -5516,7 +5514,7 @@
           <p:cNvPr id="1" name="">
             <a:extLst xmlns:a="http://schemas.openxmlformats.org/drawingml/2006/main">
               <a:ext uri="{FF2B5EF4-FFF2-40B4-BE49-F238E27FC236}">
-                <a16:creationId xmlns:a16="http://schemas.microsoft.com/office/drawing/2014/main" id="{2076993D-3493-48F9-8C9E-E139FB1FB900}"/>
+                <a16:creationId xmlns:a16="http://schemas.microsoft.com/office/drawing/2014/main" id="{1D2F6B3F-E041-4C26-8AA2-9AAC985403DE}"/>
               </a:ext>
             </a:extLst>
           </p:cNvPr>
@@ -5551,7 +5549,7 @@
           <p:cNvPr id="2" name="">
             <a:extLst xmlns:a="http://schemas.openxmlformats.org/drawingml/2006/main">
               <a:ext uri="{FF2B5EF4-FFF2-40B4-BE49-F238E27FC236}">
-                <a16:creationId xmlns:a16="http://schemas.microsoft.com/office/drawing/2014/main" id="{9971600F-BEB1-49E4-A826-CDFF0E9D4FE4}"/>
+                <a16:creationId xmlns:a16="http://schemas.microsoft.com/office/drawing/2014/main" id="{6DBB30F1-FACB-4D67-9E0E-9DD78E81EE34}"/>
               </a:ext>
             </a:extLst>
           </p:cNvPr>
@@ -5586,7 +5584,7 @@
           <p:cNvPr id="3" name="">
             <a:extLst xmlns:a="http://schemas.openxmlformats.org/drawingml/2006/main">
               <a:ext uri="{FF2B5EF4-FFF2-40B4-BE49-F238E27FC236}">
-                <a16:creationId xmlns:a16="http://schemas.microsoft.com/office/drawing/2014/main" id="{3BD340F5-0736-4165-A98C-157242326FB4}"/>
+                <a16:creationId xmlns:a16="http://schemas.microsoft.com/office/drawing/2014/main" id="{B44FBCA6-B65D-4A84-98DB-A248DB38CCE1}"/>
               </a:ext>
             </a:extLst>
           </p:cNvPr>
@@ -5621,7 +5619,7 @@
           <p:cNvPr id="4" name="kicker-08-marker">
             <a:extLst xmlns:a="http://schemas.openxmlformats.org/drawingml/2006/main">
               <a:ext uri="{FF2B5EF4-FFF2-40B4-BE49-F238E27FC236}">
-                <a16:creationId xmlns:a16="http://schemas.microsoft.com/office/drawing/2014/main" id="{67A9ED7D-6EF4-42FA-B233-890713CE0928}"/>
+                <a16:creationId xmlns:a16="http://schemas.microsoft.com/office/drawing/2014/main" id="{FF15A75C-ED01-449F-BF9A-92AEC99F2EB1}"/>
               </a:ext>
             </a:extLst>
           </p:cNvPr>
@@ -5656,7 +5654,7 @@
           <p:cNvPr id="5" name="kicker-08-label">
             <a:extLst xmlns:a="http://schemas.openxmlformats.org/drawingml/2006/main">
               <a:ext uri="{FF2B5EF4-FFF2-40B4-BE49-F238E27FC236}">
-                <a16:creationId xmlns:a16="http://schemas.microsoft.com/office/drawing/2014/main" id="{237AE7FF-3321-4161-8906-FF9E641B208D}"/>
+                <a16:creationId xmlns:a16="http://schemas.microsoft.com/office/drawing/2014/main" id="{594669D0-E4EC-4CC5-9E1E-A262B274E974}"/>
               </a:ext>
             </a:extLst>
           </p:cNvPr>
@@ -5710,7 +5708,7 @@
                 <a:ea typeface="Aptos"/>
                 <a:cs typeface="Aptos"/>
               </a:rPr>
-              <a:t>MODULE 1 / LESSON 08 / HUMAN CORRECTION</a:t>
+              <a:t>MODULE 1 / LESSON 08 / QUALITY CONTROL</a:t>
             </a:r>
           </a:p>
         </p:txBody>
@@ -5720,7 +5718,7 @@
           <p:cNvPr id="6" name="">
             <a:extLst xmlns:a="http://schemas.openxmlformats.org/drawingml/2006/main">
               <a:ext uri="{FF2B5EF4-FFF2-40B4-BE49-F238E27FC236}">
-                <a16:creationId xmlns:a16="http://schemas.microsoft.com/office/drawing/2014/main" id="{8BBED9BB-9234-48F6-89F7-C6BE8A747402}"/>
+                <a16:creationId xmlns:a16="http://schemas.microsoft.com/office/drawing/2014/main" id="{3311B899-EA74-4D28-98F0-304C8132756F}"/>
               </a:ext>
             </a:extLst>
           </p:cNvPr>
@@ -5774,7 +5772,7 @@
                 <a:ea typeface="Aptos Display"/>
                 <a:cs typeface="Aptos Display"/>
               </a:rPr>
-              <a:t>AI can draft structure. Humans must repair industrial reality.</a:t>
+              <a:t>Reject weak artifacts before they become operating practice.</a:t>
             </a:r>
           </a:p>
         </p:txBody>
@@ -5784,7 +5782,7 @@
           <p:cNvPr id="7" name="">
             <a:extLst xmlns:a="http://schemas.openxmlformats.org/drawingml/2006/main">
               <a:ext uri="{FF2B5EF4-FFF2-40B4-BE49-F238E27FC236}">
-                <a16:creationId xmlns:a16="http://schemas.microsoft.com/office/drawing/2014/main" id="{DAE9EF76-86AE-4D12-B32C-51156E5C8469}"/>
+                <a16:creationId xmlns:a16="http://schemas.microsoft.com/office/drawing/2014/main" id="{850CDDF0-AA8D-4E5F-9A3D-CA8550F00337}"/>
               </a:ext>
             </a:extLst>
           </p:cNvPr>
@@ -5848,7 +5846,7 @@
           <p:cNvPr id="8" name="">
             <a:extLst xmlns:a="http://schemas.openxmlformats.org/drawingml/2006/main">
               <a:ext uri="{FF2B5EF4-FFF2-40B4-BE49-F238E27FC236}">
-                <a16:creationId xmlns:a16="http://schemas.microsoft.com/office/drawing/2014/main" id="{29DFA119-BE0C-4287-B4D1-B7F1CEFAD6C1}"/>
+                <a16:creationId xmlns:a16="http://schemas.microsoft.com/office/drawing/2014/main" id="{9B081FBC-FCC4-42F9-BE8E-812857EA0F15}"/>
               </a:ext>
             </a:extLst>
           </p:cNvPr>
@@ -5883,7 +5881,7 @@
           <p:cNvPr id="9" name="">
             <a:extLst xmlns:a="http://schemas.openxmlformats.org/drawingml/2006/main">
               <a:ext uri="{FF2B5EF4-FFF2-40B4-BE49-F238E27FC236}">
-                <a16:creationId xmlns:a16="http://schemas.microsoft.com/office/drawing/2014/main" id="{28DA5FB0-A351-4712-970D-064F8B6D90F8}"/>
+                <a16:creationId xmlns:a16="http://schemas.microsoft.com/office/drawing/2014/main" id="{0EAC3274-2A21-4BA7-833C-196B42479B7A}"/>
               </a:ext>
             </a:extLst>
           </p:cNvPr>
@@ -5947,7 +5945,7 @@
           <p:cNvPr id="10" name="">
             <a:extLst xmlns:a="http://schemas.openxmlformats.org/drawingml/2006/main">
               <a:ext uri="{FF2B5EF4-FFF2-40B4-BE49-F238E27FC236}">
-                <a16:creationId xmlns:a16="http://schemas.microsoft.com/office/drawing/2014/main" id="{B04B9932-725F-41E4-ABF6-0E7180228DC8}"/>
+                <a16:creationId xmlns:a16="http://schemas.microsoft.com/office/drawing/2014/main" id="{32DB5BCE-B418-485B-AA12-AAAC2E64144E}"/>
               </a:ext>
             </a:extLst>
           </p:cNvPr>
@@ -6011,7 +6009,7 @@
           <p:cNvPr id="11" name="">
             <a:extLst xmlns:a="http://schemas.openxmlformats.org/drawingml/2006/main">
               <a:ext uri="{FF2B5EF4-FFF2-40B4-BE49-F238E27FC236}">
-                <a16:creationId xmlns:a16="http://schemas.microsoft.com/office/drawing/2014/main" id="{9B9EBB69-3EE3-4AC0-9672-6DE6E237A91F}"/>
+                <a16:creationId xmlns:a16="http://schemas.microsoft.com/office/drawing/2014/main" id="{C6911EEE-DC39-4C38-A510-407827C5A2DA}"/>
               </a:ext>
             </a:extLst>
           </p:cNvPr>
@@ -6075,7 +6073,7 @@
           <p:cNvPr id="12" name="">
             <a:extLst xmlns:a="http://schemas.openxmlformats.org/drawingml/2006/main">
               <a:ext uri="{FF2B5EF4-FFF2-40B4-BE49-F238E27FC236}">
-                <a16:creationId xmlns:a16="http://schemas.microsoft.com/office/drawing/2014/main" id="{A89F4843-BBD6-4422-9A55-D902FC0A5C51}"/>
+                <a16:creationId xmlns:a16="http://schemas.microsoft.com/office/drawing/2014/main" id="{C3937A3A-0EC2-4E67-98EB-9E6551511355}"/>
               </a:ext>
             </a:extLst>
           </p:cNvPr>
@@ -6110,7 +6108,7 @@
           <p:cNvPr id="13" name="">
             <a:extLst xmlns:a="http://schemas.openxmlformats.org/drawingml/2006/main">
               <a:ext uri="{FF2B5EF4-FFF2-40B4-BE49-F238E27FC236}">
-                <a16:creationId xmlns:a16="http://schemas.microsoft.com/office/drawing/2014/main" id="{DED4EE76-CDFA-4638-910C-2A28B2C0987C}"/>
+                <a16:creationId xmlns:a16="http://schemas.microsoft.com/office/drawing/2014/main" id="{7A2A4582-D170-4A47-8B06-B0C817933393}"/>
               </a:ext>
             </a:extLst>
           </p:cNvPr>
@@ -6143,7 +6141,7 @@
           <p:cNvPr id="14" name="">
             <a:extLst xmlns:a="http://schemas.openxmlformats.org/drawingml/2006/main">
               <a:ext uri="{FF2B5EF4-FFF2-40B4-BE49-F238E27FC236}">
-                <a16:creationId xmlns:a16="http://schemas.microsoft.com/office/drawing/2014/main" id="{2C1305F6-885B-4994-8072-54826EE39ACE}"/>
+                <a16:creationId xmlns:a16="http://schemas.microsoft.com/office/drawing/2014/main" id="{7D1AD982-DD50-49BD-A63D-76DEDB284F5A}"/>
               </a:ext>
             </a:extLst>
           </p:cNvPr>
@@ -6178,7 +6176,7 @@
           <p:cNvPr id="15" name="">
             <a:extLst xmlns:a="http://schemas.openxmlformats.org/drawingml/2006/main">
               <a:ext uri="{FF2B5EF4-FFF2-40B4-BE49-F238E27FC236}">
-                <a16:creationId xmlns:a16="http://schemas.microsoft.com/office/drawing/2014/main" id="{C6617D28-CA2D-49CE-B5CC-7EF7B02CB4B1}"/>
+                <a16:creationId xmlns:a16="http://schemas.microsoft.com/office/drawing/2014/main" id="{93D20A2C-3521-48BC-A702-0E4B56914F77}"/>
               </a:ext>
             </a:extLst>
           </p:cNvPr>
@@ -6232,7 +6230,7 @@
                 <a:ea typeface="Aptos"/>
                 <a:cs typeface="Aptos"/>
               </a:rPr>
-              <a:t>REJECT OR REPAIR WHEN AI OUTPUT...</a:t>
+              <a:t>REJECT OR REPAIR WHEN THE ARTIFACT...</a:t>
             </a:r>
           </a:p>
         </p:txBody>
@@ -6242,7 +6240,7 @@
           <p:cNvPr id="16" name="">
             <a:extLst xmlns:a="http://schemas.openxmlformats.org/drawingml/2006/main">
               <a:ext uri="{FF2B5EF4-FFF2-40B4-BE49-F238E27FC236}">
-                <a16:creationId xmlns:a16="http://schemas.microsoft.com/office/drawing/2014/main" id="{3834FC47-9C5C-45FA-BF63-8F791C00BE46}"/>
+                <a16:creationId xmlns:a16="http://schemas.microsoft.com/office/drawing/2014/main" id="{396ED685-A820-494D-8727-2F2BE4997579}"/>
               </a:ext>
             </a:extLst>
           </p:cNvPr>
@@ -6277,7 +6275,7 @@
           <p:cNvPr id="17" name="">
             <a:extLst xmlns:a="http://schemas.openxmlformats.org/drawingml/2006/main">
               <a:ext uri="{FF2B5EF4-FFF2-40B4-BE49-F238E27FC236}">
-                <a16:creationId xmlns:a16="http://schemas.microsoft.com/office/drawing/2014/main" id="{2E96552B-0827-4762-B5A8-6DF4A87C13F2}"/>
+                <a16:creationId xmlns:a16="http://schemas.microsoft.com/office/drawing/2014/main" id="{52506A03-C44C-44F6-8031-3A4628B0549F}"/>
               </a:ext>
             </a:extLst>
           </p:cNvPr>
@@ -6341,7 +6339,7 @@
           <p:cNvPr id="18" name="">
             <a:extLst xmlns:a="http://schemas.openxmlformats.org/drawingml/2006/main">
               <a:ext uri="{FF2B5EF4-FFF2-40B4-BE49-F238E27FC236}">
-                <a16:creationId xmlns:a16="http://schemas.microsoft.com/office/drawing/2014/main" id="{F7434979-9ACC-4444-BB78-22A5B6E08A61}"/>
+                <a16:creationId xmlns:a16="http://schemas.microsoft.com/office/drawing/2014/main" id="{1527D4F4-AAFC-4D18-A50B-615E51A00E09}"/>
               </a:ext>
             </a:extLst>
           </p:cNvPr>
@@ -6376,7 +6374,7 @@
           <p:cNvPr id="19" name="">
             <a:extLst xmlns:a="http://schemas.openxmlformats.org/drawingml/2006/main">
               <a:ext uri="{FF2B5EF4-FFF2-40B4-BE49-F238E27FC236}">
-                <a16:creationId xmlns:a16="http://schemas.microsoft.com/office/drawing/2014/main" id="{015EBDEB-61E0-4B32-9A69-EB16CC627F3D}"/>
+                <a16:creationId xmlns:a16="http://schemas.microsoft.com/office/drawing/2014/main" id="{6C890308-F284-4C93-969B-665E3C674949}"/>
               </a:ext>
             </a:extLst>
           </p:cNvPr>
@@ -6440,7 +6438,7 @@
           <p:cNvPr id="20" name="">
             <a:extLst xmlns:a="http://schemas.openxmlformats.org/drawingml/2006/main">
               <a:ext uri="{FF2B5EF4-FFF2-40B4-BE49-F238E27FC236}">
-                <a16:creationId xmlns:a16="http://schemas.microsoft.com/office/drawing/2014/main" id="{369BFED7-5189-4682-8198-09280F882547}"/>
+                <a16:creationId xmlns:a16="http://schemas.microsoft.com/office/drawing/2014/main" id="{A0BC84C3-D819-4FE9-B295-54CF03FDF8A7}"/>
               </a:ext>
             </a:extLst>
           </p:cNvPr>
@@ -6475,7 +6473,7 @@
           <p:cNvPr id="21" name="">
             <a:extLst xmlns:a="http://schemas.openxmlformats.org/drawingml/2006/main">
               <a:ext uri="{FF2B5EF4-FFF2-40B4-BE49-F238E27FC236}">
-                <a16:creationId xmlns:a16="http://schemas.microsoft.com/office/drawing/2014/main" id="{072B4AAB-164B-4056-98AC-2F00750F4EB8}"/>
+                <a16:creationId xmlns:a16="http://schemas.microsoft.com/office/drawing/2014/main" id="{0D5108DC-FAAC-4C8E-872F-78E9D342BA75}"/>
               </a:ext>
             </a:extLst>
           </p:cNvPr>
@@ -6539,7 +6537,7 @@
           <p:cNvPr id="22" name="">
             <a:extLst xmlns:a="http://schemas.openxmlformats.org/drawingml/2006/main">
               <a:ext uri="{FF2B5EF4-FFF2-40B4-BE49-F238E27FC236}">
-                <a16:creationId xmlns:a16="http://schemas.microsoft.com/office/drawing/2014/main" id="{478A2B76-95DF-4C96-912D-9529AE5F472B}"/>
+                <a16:creationId xmlns:a16="http://schemas.microsoft.com/office/drawing/2014/main" id="{140A23EF-7F28-4AF2-A7CE-8DDAB08191BD}"/>
               </a:ext>
             </a:extLst>
           </p:cNvPr>
@@ -6574,7 +6572,7 @@
           <p:cNvPr id="23" name="">
             <a:extLst xmlns:a="http://schemas.openxmlformats.org/drawingml/2006/main">
               <a:ext uri="{FF2B5EF4-FFF2-40B4-BE49-F238E27FC236}">
-                <a16:creationId xmlns:a16="http://schemas.microsoft.com/office/drawing/2014/main" id="{7E02EFD3-703D-4501-8B7B-FC64069DA404}"/>
+                <a16:creationId xmlns:a16="http://schemas.microsoft.com/office/drawing/2014/main" id="{6756E3EB-1579-4CF8-BFED-B9AAB2EEC6C4}"/>
               </a:ext>
             </a:extLst>
           </p:cNvPr>
@@ -6638,7 +6636,7 @@
           <p:cNvPr id="24" name="">
             <a:extLst xmlns:a="http://schemas.openxmlformats.org/drawingml/2006/main">
               <a:ext uri="{FF2B5EF4-FFF2-40B4-BE49-F238E27FC236}">
-                <a16:creationId xmlns:a16="http://schemas.microsoft.com/office/drawing/2014/main" id="{5FF1A50C-9E05-4870-8E7B-A86FD93AD882}"/>
+                <a16:creationId xmlns:a16="http://schemas.microsoft.com/office/drawing/2014/main" id="{D7781BA5-1798-4446-97FD-0FC4099F41CF}"/>
               </a:ext>
             </a:extLst>
           </p:cNvPr>
@@ -6673,7 +6671,7 @@
           <p:cNvPr id="25" name="">
             <a:extLst xmlns:a="http://schemas.openxmlformats.org/drawingml/2006/main">
               <a:ext uri="{FF2B5EF4-FFF2-40B4-BE49-F238E27FC236}">
-                <a16:creationId xmlns:a16="http://schemas.microsoft.com/office/drawing/2014/main" id="{1AEDC931-C4C0-49AE-9DF2-3CAE7D3F4ADC}"/>
+                <a16:creationId xmlns:a16="http://schemas.microsoft.com/office/drawing/2014/main" id="{38EAAD7D-704A-4F7F-A665-D1ACBDAB2438}"/>
               </a:ext>
             </a:extLst>
           </p:cNvPr>
@@ -6737,7 +6735,7 @@
           <p:cNvPr id="26" name="">
             <a:extLst xmlns:a="http://schemas.openxmlformats.org/drawingml/2006/main">
               <a:ext uri="{FF2B5EF4-FFF2-40B4-BE49-F238E27FC236}">
-                <a16:creationId xmlns:a16="http://schemas.microsoft.com/office/drawing/2014/main" id="{3E253886-E706-485C-8B8A-4FFC5003CE6F}"/>
+                <a16:creationId xmlns:a16="http://schemas.microsoft.com/office/drawing/2014/main" id="{57CCB5F1-A2E3-4DD8-92AC-2336EB5D248C}"/>
               </a:ext>
             </a:extLst>
           </p:cNvPr>
@@ -6772,7 +6770,7 @@
           <p:cNvPr id="27" name="">
             <a:extLst xmlns:a="http://schemas.openxmlformats.org/drawingml/2006/main">
               <a:ext uri="{FF2B5EF4-FFF2-40B4-BE49-F238E27FC236}">
-                <a16:creationId xmlns:a16="http://schemas.microsoft.com/office/drawing/2014/main" id="{22E384BC-ED84-4028-9020-806179E4979F}"/>
+                <a16:creationId xmlns:a16="http://schemas.microsoft.com/office/drawing/2014/main" id="{AA6D0132-564F-444A-9B94-9A930D45760D}"/>
               </a:ext>
             </a:extLst>
           </p:cNvPr>
@@ -6836,7 +6834,7 @@
           <p:cNvPr id="28" name="">
             <a:extLst xmlns:a="http://schemas.openxmlformats.org/drawingml/2006/main">
               <a:ext uri="{FF2B5EF4-FFF2-40B4-BE49-F238E27FC236}">
-                <a16:creationId xmlns:a16="http://schemas.microsoft.com/office/drawing/2014/main" id="{2C77EB96-4BC9-43D8-A7D0-0C554D5F436E}"/>
+                <a16:creationId xmlns:a16="http://schemas.microsoft.com/office/drawing/2014/main" id="{EAE74FEF-F917-4374-900A-318894786BD2}"/>
               </a:ext>
             </a:extLst>
           </p:cNvPr>
@@ -6869,7 +6867,7 @@
           <p:cNvPr id="29" name="">
             <a:extLst xmlns:a="http://schemas.openxmlformats.org/drawingml/2006/main">
               <a:ext uri="{FF2B5EF4-FFF2-40B4-BE49-F238E27FC236}">
-                <a16:creationId xmlns:a16="http://schemas.microsoft.com/office/drawing/2014/main" id="{1CCE06DA-CAD2-4D5D-88EB-75E780B40D82}"/>
+                <a16:creationId xmlns:a16="http://schemas.microsoft.com/office/drawing/2014/main" id="{6B29D442-E981-4F87-ACE3-E3C6C426C3C2}"/>
               </a:ext>
             </a:extLst>
           </p:cNvPr>
@@ -6904,7 +6902,7 @@
           <p:cNvPr id="30" name="">
             <a:extLst xmlns:a="http://schemas.openxmlformats.org/drawingml/2006/main">
               <a:ext uri="{FF2B5EF4-FFF2-40B4-BE49-F238E27FC236}">
-                <a16:creationId xmlns:a16="http://schemas.microsoft.com/office/drawing/2014/main" id="{51F13C4C-4B2D-4EE0-BC02-E0A6076661FD}"/>
+                <a16:creationId xmlns:a16="http://schemas.microsoft.com/office/drawing/2014/main" id="{DC89855B-5806-4DA5-AE20-B573E3F13951}"/>
               </a:ext>
             </a:extLst>
           </p:cNvPr>
@@ -6968,7 +6966,7 @@
           <p:cNvPr id="31" name="">
             <a:extLst xmlns:a="http://schemas.openxmlformats.org/drawingml/2006/main">
               <a:ext uri="{FF2B5EF4-FFF2-40B4-BE49-F238E27FC236}">
-                <a16:creationId xmlns:a16="http://schemas.microsoft.com/office/drawing/2014/main" id="{238BE9DB-FB8F-4B86-9938-E074745CE049}"/>
+                <a16:creationId xmlns:a16="http://schemas.microsoft.com/office/drawing/2014/main" id="{A9AB5B5E-E707-496A-8B56-2C98C9620380}"/>
               </a:ext>
             </a:extLst>
           </p:cNvPr>
@@ -7032,7 +7030,7 @@
           <p:cNvPr id="32" name="">
             <a:extLst xmlns:a="http://schemas.openxmlformats.org/drawingml/2006/main">
               <a:ext uri="{FF2B5EF4-FFF2-40B4-BE49-F238E27FC236}">
-                <a16:creationId xmlns:a16="http://schemas.microsoft.com/office/drawing/2014/main" id="{93EEC0F5-9E5D-44B4-9729-55357893930B}"/>
+                <a16:creationId xmlns:a16="http://schemas.microsoft.com/office/drawing/2014/main" id="{A2F20248-778F-4CDA-9792-0360EC217DC6}"/>
               </a:ext>
             </a:extLst>
           </p:cNvPr>
@@ -7065,7 +7063,7 @@
           <p:cNvPr id="33" name="">
             <a:extLst xmlns:a="http://schemas.openxmlformats.org/drawingml/2006/main">
               <a:ext uri="{FF2B5EF4-FFF2-40B4-BE49-F238E27FC236}">
-                <a16:creationId xmlns:a16="http://schemas.microsoft.com/office/drawing/2014/main" id="{D6395340-951C-4C40-BEB3-E6A5AC86F312}"/>
+                <a16:creationId xmlns:a16="http://schemas.microsoft.com/office/drawing/2014/main" id="{84F01FAA-39DE-476C-8068-C413F1B5D90E}"/>
               </a:ext>
             </a:extLst>
           </p:cNvPr>
@@ -7129,7 +7127,7 @@
           <p:cNvPr id="34" name="">
             <a:extLst xmlns:a="http://schemas.openxmlformats.org/drawingml/2006/main">
               <a:ext uri="{FF2B5EF4-FFF2-40B4-BE49-F238E27FC236}">
-                <a16:creationId xmlns:a16="http://schemas.microsoft.com/office/drawing/2014/main" id="{398E9DED-76F0-43D5-98EE-A4CE36871D8F}"/>
+                <a16:creationId xmlns:a16="http://schemas.microsoft.com/office/drawing/2014/main" id="{69D4475F-BBCD-4ADE-8260-517ADA1E7255}"/>
               </a:ext>
             </a:extLst>
           </p:cNvPr>
@@ -7183,7 +7181,7 @@
                 <a:ea typeface="Aptos"/>
                 <a:cs typeface="Aptos"/>
               </a:rPr>
-              <a:t>Ask what the AI is guessing.</a:t>
+              <a:t>Ask what the artifact assumes.</a:t>
             </a:r>
           </a:p>
         </p:txBody>
@@ -7193,7 +7191,7 @@
           <p:cNvPr id="35" name="">
             <a:extLst xmlns:a="http://schemas.openxmlformats.org/drawingml/2006/main">
               <a:ext uri="{FF2B5EF4-FFF2-40B4-BE49-F238E27FC236}">
-                <a16:creationId xmlns:a16="http://schemas.microsoft.com/office/drawing/2014/main" id="{915E8F98-2B1F-4F98-933D-910945984790}"/>
+                <a16:creationId xmlns:a16="http://schemas.microsoft.com/office/drawing/2014/main" id="{81E42C86-F7C4-434C-95EA-AC49B8577653}"/>
               </a:ext>
             </a:extLst>
           </p:cNvPr>
@@ -7228,7 +7226,7 @@
           <p:cNvPr id="36" name="">
             <a:extLst xmlns:a="http://schemas.openxmlformats.org/drawingml/2006/main">
               <a:ext uri="{FF2B5EF4-FFF2-40B4-BE49-F238E27FC236}">
-                <a16:creationId xmlns:a16="http://schemas.microsoft.com/office/drawing/2014/main" id="{83776CFB-5955-45CA-8E5B-4B695248F8AD}"/>
+                <a16:creationId xmlns:a16="http://schemas.microsoft.com/office/drawing/2014/main" id="{BFD43328-C498-44CE-BEAE-51A7C16E0D79}"/>
               </a:ext>
             </a:extLst>
           </p:cNvPr>
@@ -7292,7 +7290,7 @@
           <p:cNvPr id="37" name="">
             <a:extLst xmlns:a="http://schemas.openxmlformats.org/drawingml/2006/main">
               <a:ext uri="{FF2B5EF4-FFF2-40B4-BE49-F238E27FC236}">
-                <a16:creationId xmlns:a16="http://schemas.microsoft.com/office/drawing/2014/main" id="{13A2F724-5F52-4F9B-B755-CBCF2C849421}"/>
+                <a16:creationId xmlns:a16="http://schemas.microsoft.com/office/drawing/2014/main" id="{E8CD864A-1C60-4516-87AE-9BB6087D3193}"/>
               </a:ext>
             </a:extLst>
           </p:cNvPr>
@@ -7356,7 +7354,7 @@
           <p:cNvPr id="38" name="">
             <a:extLst xmlns:a="http://schemas.openxmlformats.org/drawingml/2006/main">
               <a:ext uri="{FF2B5EF4-FFF2-40B4-BE49-F238E27FC236}">
-                <a16:creationId xmlns:a16="http://schemas.microsoft.com/office/drawing/2014/main" id="{0B95ABE1-4A82-449C-9C40-9E564F32B482}"/>
+                <a16:creationId xmlns:a16="http://schemas.microsoft.com/office/drawing/2014/main" id="{36737CFD-2103-44BE-A71E-47F29037772C}"/>
               </a:ext>
             </a:extLst>
           </p:cNvPr>
@@ -7420,7 +7418,7 @@
           <p:cNvPr id="39" name="">
             <a:extLst xmlns:a="http://schemas.openxmlformats.org/drawingml/2006/main">
               <a:ext uri="{FF2B5EF4-FFF2-40B4-BE49-F238E27FC236}">
-                <a16:creationId xmlns:a16="http://schemas.microsoft.com/office/drawing/2014/main" id="{DD80C671-038D-45F7-B56A-2C20E6B83655}"/>
+                <a16:creationId xmlns:a16="http://schemas.microsoft.com/office/drawing/2014/main" id="{C2058238-8382-4945-A48F-0EAF0B86C3B3}"/>
               </a:ext>
             </a:extLst>
           </p:cNvPr>
@@ -7455,7 +7453,7 @@
           <p:cNvPr id="40" name="">
             <a:extLst xmlns:a="http://schemas.openxmlformats.org/drawingml/2006/main">
               <a:ext uri="{FF2B5EF4-FFF2-40B4-BE49-F238E27FC236}">
-                <a16:creationId xmlns:a16="http://schemas.microsoft.com/office/drawing/2014/main" id="{9DAAB80B-4FE5-4B2F-A13D-4D266F2BE3F5}"/>
+                <a16:creationId xmlns:a16="http://schemas.microsoft.com/office/drawing/2014/main" id="{C5FDB9EE-194E-436E-9179-65847282ED51}"/>
               </a:ext>
             </a:extLst>
           </p:cNvPr>
@@ -7490,7 +7488,7 @@
           <p:cNvPr id="41" name="">
             <a:extLst xmlns:a="http://schemas.openxmlformats.org/drawingml/2006/main">
               <a:ext uri="{FF2B5EF4-FFF2-40B4-BE49-F238E27FC236}">
-                <a16:creationId xmlns:a16="http://schemas.microsoft.com/office/drawing/2014/main" id="{12872CA9-807C-4DBE-96B4-80435077A961}"/>
+                <a16:creationId xmlns:a16="http://schemas.microsoft.com/office/drawing/2014/main" id="{ABC58A36-7BD2-49D7-9AB0-39D0D9D0E46D}"/>
               </a:ext>
             </a:extLst>
           </p:cNvPr>
@@ -7525,7 +7523,7 @@
           <p:cNvPr id="42" name="kicker-08-marker">
             <a:extLst xmlns:a="http://schemas.openxmlformats.org/drawingml/2006/main">
               <a:ext uri="{FF2B5EF4-FFF2-40B4-BE49-F238E27FC236}">
-                <a16:creationId xmlns:a16="http://schemas.microsoft.com/office/drawing/2014/main" id="{36198D2F-EF8D-43A0-B9F2-F9AF0E66A8EA}"/>
+                <a16:creationId xmlns:a16="http://schemas.microsoft.com/office/drawing/2014/main" id="{042452A0-7D09-4FE8-9B93-77266ED9CE03}"/>
               </a:ext>
             </a:extLst>
           </p:cNvPr>
@@ -7560,7 +7558,7 @@
           <p:cNvPr id="43" name="kicker-08-label">
             <a:extLst xmlns:a="http://schemas.openxmlformats.org/drawingml/2006/main">
               <a:ext uri="{FF2B5EF4-FFF2-40B4-BE49-F238E27FC236}">
-                <a16:creationId xmlns:a16="http://schemas.microsoft.com/office/drawing/2014/main" id="{B2628C54-2AE5-4BB8-B6E6-58D50EDE5C96}"/>
+                <a16:creationId xmlns:a16="http://schemas.microsoft.com/office/drawing/2014/main" id="{AE245754-3BF5-4757-AD74-56FAC93D2740}"/>
               </a:ext>
             </a:extLst>
           </p:cNvPr>
@@ -7614,7 +7612,7 @@
                 <a:ea typeface="Aptos"/>
                 <a:cs typeface="Aptos"/>
               </a:rPr>
-              <a:t>MODULE 1 / LESSON 08 / HUMAN CORRECTION</a:t>
+              <a:t>MODULE 1 / LESSON 08 / QUALITY CONTROL</a:t>
             </a:r>
           </a:p>
         </p:txBody>
@@ -7624,7 +7622,7 @@
           <p:cNvPr id="44" name="">
             <a:extLst xmlns:a="http://schemas.openxmlformats.org/drawingml/2006/main">
               <a:ext uri="{FF2B5EF4-FFF2-40B4-BE49-F238E27FC236}">
-                <a16:creationId xmlns:a16="http://schemas.microsoft.com/office/drawing/2014/main" id="{54325BA9-DDBB-46BA-9740-E5796996EA3E}"/>
+                <a16:creationId xmlns:a16="http://schemas.microsoft.com/office/drawing/2014/main" id="{7E388DC2-160A-4AE1-BE79-E863EC61B3B5}"/>
               </a:ext>
             </a:extLst>
           </p:cNvPr>
@@ -7678,7 +7676,7 @@
                 <a:ea typeface="Aptos Display"/>
                 <a:cs typeface="Aptos Display"/>
               </a:rPr>
-              <a:t>AI can draft structure. Humans must repair industrial reality.</a:t>
+              <a:t>Reject weak artifacts before they become operating practice.</a:t>
             </a:r>
           </a:p>
         </p:txBody>
@@ -7688,7 +7686,7 @@
           <p:cNvPr id="45" name="">
             <a:extLst xmlns:a="http://schemas.openxmlformats.org/drawingml/2006/main">
               <a:ext uri="{FF2B5EF4-FFF2-40B4-BE49-F238E27FC236}">
-                <a16:creationId xmlns:a16="http://schemas.microsoft.com/office/drawing/2014/main" id="{F755F90C-B3C9-4A57-9D97-50252E93EFB1}"/>
+                <a16:creationId xmlns:a16="http://schemas.microsoft.com/office/drawing/2014/main" id="{13304C1D-A9AF-4400-959D-57D4D421CD33}"/>
               </a:ext>
             </a:extLst>
           </p:cNvPr>
@@ -7752,7 +7750,7 @@
           <p:cNvPr id="46" name="">
             <a:extLst xmlns:a="http://schemas.openxmlformats.org/drawingml/2006/main">
               <a:ext uri="{FF2B5EF4-FFF2-40B4-BE49-F238E27FC236}">
-                <a16:creationId xmlns:a16="http://schemas.microsoft.com/office/drawing/2014/main" id="{B9B30A1E-D49B-4FBB-A78A-1BEAF67B4DC2}"/>
+                <a16:creationId xmlns:a16="http://schemas.microsoft.com/office/drawing/2014/main" id="{8EA9B75D-E6D9-4B82-A890-8CDBFBE574A6}"/>
               </a:ext>
             </a:extLst>
           </p:cNvPr>
@@ -7787,7 +7785,7 @@
           <p:cNvPr id="47" name="">
             <a:extLst xmlns:a="http://schemas.openxmlformats.org/drawingml/2006/main">
               <a:ext uri="{FF2B5EF4-FFF2-40B4-BE49-F238E27FC236}">
-                <a16:creationId xmlns:a16="http://schemas.microsoft.com/office/drawing/2014/main" id="{8936B2A4-F6C6-4F7D-8A7F-4F06183C3B94}"/>
+                <a16:creationId xmlns:a16="http://schemas.microsoft.com/office/drawing/2014/main" id="{D0656411-F54A-4E5B-9F77-F9790B9E4175}"/>
               </a:ext>
             </a:extLst>
           </p:cNvPr>
@@ -7822,7 +7820,7 @@
           <p:cNvPr id="48" name="">
             <a:extLst xmlns:a="http://schemas.openxmlformats.org/drawingml/2006/main">
               <a:ext uri="{FF2B5EF4-FFF2-40B4-BE49-F238E27FC236}">
-                <a16:creationId xmlns:a16="http://schemas.microsoft.com/office/drawing/2014/main" id="{8596BE47-81EA-4F0B-B85F-C3F5278BF791}"/>
+                <a16:creationId xmlns:a16="http://schemas.microsoft.com/office/drawing/2014/main" id="{AA935829-B0C9-41F2-A181-ED430399EE9B}"/>
               </a:ext>
             </a:extLst>
           </p:cNvPr>
@@ -7857,7 +7855,7 @@
           <p:cNvPr id="49" name="">
             <a:extLst xmlns:a="http://schemas.openxmlformats.org/drawingml/2006/main">
               <a:ext uri="{FF2B5EF4-FFF2-40B4-BE49-F238E27FC236}">
-                <a16:creationId xmlns:a16="http://schemas.microsoft.com/office/drawing/2014/main" id="{160CBBC0-D7A7-4D7F-AC48-0DDAF6E3ACF1}"/>
+                <a16:creationId xmlns:a16="http://schemas.microsoft.com/office/drawing/2014/main" id="{A81263B4-9CC5-44B4-85B5-B1A98726808D}"/>
               </a:ext>
             </a:extLst>
           </p:cNvPr>
@@ -7892,7 +7890,7 @@
           <p:cNvPr id="50" name="">
             <a:extLst xmlns:a="http://schemas.openxmlformats.org/drawingml/2006/main">
               <a:ext uri="{FF2B5EF4-FFF2-40B4-BE49-F238E27FC236}">
-                <a16:creationId xmlns:a16="http://schemas.microsoft.com/office/drawing/2014/main" id="{0AEDC2D8-7843-4F76-B846-84DCA52A3833}"/>
+                <a16:creationId xmlns:a16="http://schemas.microsoft.com/office/drawing/2014/main" id="{677FE799-BB2D-4518-8BBD-73E493B063A4}"/>
               </a:ext>
             </a:extLst>
           </p:cNvPr>
@@ -7956,7 +7954,7 @@
           <p:cNvPr id="51" name="">
             <a:extLst xmlns:a="http://schemas.openxmlformats.org/drawingml/2006/main">
               <a:ext uri="{FF2B5EF4-FFF2-40B4-BE49-F238E27FC236}">
-                <a16:creationId xmlns:a16="http://schemas.microsoft.com/office/drawing/2014/main" id="{8975AA94-97DA-4BBB-9262-1203BBA66B17}"/>
+                <a16:creationId xmlns:a16="http://schemas.microsoft.com/office/drawing/2014/main" id="{4ACB621A-A5E8-45BD-900B-C5E9ACDFE0FD}"/>
               </a:ext>
             </a:extLst>
           </p:cNvPr>
@@ -8020,7 +8018,7 @@
           <p:cNvPr id="52" name="">
             <a:extLst xmlns:a="http://schemas.openxmlformats.org/drawingml/2006/main">
               <a:ext uri="{FF2B5EF4-FFF2-40B4-BE49-F238E27FC236}">
-                <a16:creationId xmlns:a16="http://schemas.microsoft.com/office/drawing/2014/main" id="{A8E0DE0B-68DD-4ED5-A1B7-75329E9A734C}"/>
+                <a16:creationId xmlns:a16="http://schemas.microsoft.com/office/drawing/2014/main" id="{E5669FA8-4FF4-4162-8DA0-48FD1EE532D1}"/>
               </a:ext>
             </a:extLst>
           </p:cNvPr>
@@ -8082,7 +8080,7 @@
     </p:spTree>
     <p:extLst>
       <p:ext uri="{BB962C8B-B14F-4D97-AF65-F5344CB8AC3E}">
-        <p14:creationId xmlns:p14="http://schemas.microsoft.com/office/powerpoint/2010/main" val="1892741783"/>
+        <p14:creationId xmlns:p14="http://schemas.microsoft.com/office/powerpoint/2010/main" val="1638837822"/>
       </p:ext>
     </p:extLst>
   </p:cSld>
@@ -8106,7 +8104,7 @@
           <p:cNvPr id="1" name="">
             <a:extLst xmlns:a="http://schemas.openxmlformats.org/drawingml/2006/main">
               <a:ext uri="{FF2B5EF4-FFF2-40B4-BE49-F238E27FC236}">
-                <a16:creationId xmlns:a16="http://schemas.microsoft.com/office/drawing/2014/main" id="{30208B1F-3B47-4BD5-B84F-703D472193BE}"/>
+                <a16:creationId xmlns:a16="http://schemas.microsoft.com/office/drawing/2014/main" id="{590F1A94-056B-4B59-B795-E48CA8EC7D46}"/>
               </a:ext>
             </a:extLst>
           </p:cNvPr>
@@ -8141,7 +8139,7 @@
           <p:cNvPr id="2" name="">
             <a:extLst xmlns:a="http://schemas.openxmlformats.org/drawingml/2006/main">
               <a:ext uri="{FF2B5EF4-FFF2-40B4-BE49-F238E27FC236}">
-                <a16:creationId xmlns:a16="http://schemas.microsoft.com/office/drawing/2014/main" id="{0B578109-8FE1-4969-9AD5-43FD49E6B64F}"/>
+                <a16:creationId xmlns:a16="http://schemas.microsoft.com/office/drawing/2014/main" id="{495EA2D7-BC18-44A6-952A-64180BACFC96}"/>
               </a:ext>
             </a:extLst>
           </p:cNvPr>
@@ -8176,7 +8174,7 @@
           <p:cNvPr id="3" name="">
             <a:extLst xmlns:a="http://schemas.openxmlformats.org/drawingml/2006/main">
               <a:ext uri="{FF2B5EF4-FFF2-40B4-BE49-F238E27FC236}">
-                <a16:creationId xmlns:a16="http://schemas.microsoft.com/office/drawing/2014/main" id="{FF41881F-F02C-45AE-BC6E-81C5183AD357}"/>
+                <a16:creationId xmlns:a16="http://schemas.microsoft.com/office/drawing/2014/main" id="{35B72DDB-85D5-410F-97C9-BF8E76EAFAEE}"/>
               </a:ext>
             </a:extLst>
           </p:cNvPr>
@@ -8211,7 +8209,7 @@
           <p:cNvPr id="4" name="kicker-08-marker">
             <a:extLst xmlns:a="http://schemas.openxmlformats.org/drawingml/2006/main">
               <a:ext uri="{FF2B5EF4-FFF2-40B4-BE49-F238E27FC236}">
-                <a16:creationId xmlns:a16="http://schemas.microsoft.com/office/drawing/2014/main" id="{C932CF98-3318-49DA-839E-B6FDA560A6A2}"/>
+                <a16:creationId xmlns:a16="http://schemas.microsoft.com/office/drawing/2014/main" id="{F9F827D0-30DE-4961-8B94-66F6762314C2}"/>
               </a:ext>
             </a:extLst>
           </p:cNvPr>
@@ -8246,7 +8244,7 @@
           <p:cNvPr id="5" name="kicker-08-label">
             <a:extLst xmlns:a="http://schemas.openxmlformats.org/drawingml/2006/main">
               <a:ext uri="{FF2B5EF4-FFF2-40B4-BE49-F238E27FC236}">
-                <a16:creationId xmlns:a16="http://schemas.microsoft.com/office/drawing/2014/main" id="{D95EAB8F-B7B0-44DB-8D7A-F1EF5585D68D}"/>
+                <a16:creationId xmlns:a16="http://schemas.microsoft.com/office/drawing/2014/main" id="{F1BDD930-236C-495B-B2ED-BCBC76B98661}"/>
               </a:ext>
             </a:extLst>
           </p:cNvPr>
@@ -8310,7 +8308,7 @@
           <p:cNvPr id="6" name="">
             <a:extLst xmlns:a="http://schemas.openxmlformats.org/drawingml/2006/main">
               <a:ext uri="{FF2B5EF4-FFF2-40B4-BE49-F238E27FC236}">
-                <a16:creationId xmlns:a16="http://schemas.microsoft.com/office/drawing/2014/main" id="{92CCB88F-C3F2-48DF-8B4D-15D237D52AD7}"/>
+                <a16:creationId xmlns:a16="http://schemas.microsoft.com/office/drawing/2014/main" id="{D6CF74B4-93EC-437D-BD72-A1EC2757097D}"/>
               </a:ext>
             </a:extLst>
           </p:cNvPr>
@@ -8374,7 +8372,7 @@
           <p:cNvPr id="7" name="">
             <a:extLst xmlns:a="http://schemas.openxmlformats.org/drawingml/2006/main">
               <a:ext uri="{FF2B5EF4-FFF2-40B4-BE49-F238E27FC236}">
-                <a16:creationId xmlns:a16="http://schemas.microsoft.com/office/drawing/2014/main" id="{5E48031E-CF1A-4D89-ADD7-2DC434BF3346}"/>
+                <a16:creationId xmlns:a16="http://schemas.microsoft.com/office/drawing/2014/main" id="{12FC1B3F-1759-49D4-AC71-9D6C9C3BCA6D}"/>
               </a:ext>
             </a:extLst>
           </p:cNvPr>
@@ -8438,7 +8436,7 @@
           <p:cNvPr id="8" name="">
             <a:extLst xmlns:a="http://schemas.openxmlformats.org/drawingml/2006/main">
               <a:ext uri="{FF2B5EF4-FFF2-40B4-BE49-F238E27FC236}">
-                <a16:creationId xmlns:a16="http://schemas.microsoft.com/office/drawing/2014/main" id="{7EAED33A-224B-460E-8360-9240B3AE03BF}"/>
+                <a16:creationId xmlns:a16="http://schemas.microsoft.com/office/drawing/2014/main" id="{26E5D4C3-FFFA-4CAF-9DD6-83C895E74C71}"/>
               </a:ext>
             </a:extLst>
           </p:cNvPr>
@@ -8473,7 +8471,7 @@
           <p:cNvPr id="9" name="">
             <a:extLst xmlns:a="http://schemas.openxmlformats.org/drawingml/2006/main">
               <a:ext uri="{FF2B5EF4-FFF2-40B4-BE49-F238E27FC236}">
-                <a16:creationId xmlns:a16="http://schemas.microsoft.com/office/drawing/2014/main" id="{46A2F42F-08E9-4206-B5D7-62B163BD46DF}"/>
+                <a16:creationId xmlns:a16="http://schemas.microsoft.com/office/drawing/2014/main" id="{40EB8715-3E9B-4FA3-96E0-A24B47174D1D}"/>
               </a:ext>
             </a:extLst>
           </p:cNvPr>
@@ -8537,7 +8535,7 @@
           <p:cNvPr id="10" name="">
             <a:extLst xmlns:a="http://schemas.openxmlformats.org/drawingml/2006/main">
               <a:ext uri="{FF2B5EF4-FFF2-40B4-BE49-F238E27FC236}">
-                <a16:creationId xmlns:a16="http://schemas.microsoft.com/office/drawing/2014/main" id="{B6A0CE9F-5962-4D4B-A69A-D81DC55A1FAD}"/>
+                <a16:creationId xmlns:a16="http://schemas.microsoft.com/office/drawing/2014/main" id="{48A0B409-2988-40A6-8E02-D108F14FC4E9}"/>
               </a:ext>
             </a:extLst>
           </p:cNvPr>
@@ -8601,7 +8599,7 @@
           <p:cNvPr id="11" name="">
             <a:extLst xmlns:a="http://schemas.openxmlformats.org/drawingml/2006/main">
               <a:ext uri="{FF2B5EF4-FFF2-40B4-BE49-F238E27FC236}">
-                <a16:creationId xmlns:a16="http://schemas.microsoft.com/office/drawing/2014/main" id="{66731254-D426-47FF-B640-23085DEEF9FB}"/>
+                <a16:creationId xmlns:a16="http://schemas.microsoft.com/office/drawing/2014/main" id="{09E89235-79A0-47EC-965D-3A7FF6A66184}"/>
               </a:ext>
             </a:extLst>
           </p:cNvPr>
@@ -8665,7 +8663,7 @@
           <p:cNvPr id="12" name="">
             <a:extLst xmlns:a="http://schemas.openxmlformats.org/drawingml/2006/main">
               <a:ext uri="{FF2B5EF4-FFF2-40B4-BE49-F238E27FC236}">
-                <a16:creationId xmlns:a16="http://schemas.microsoft.com/office/drawing/2014/main" id="{E1B66FC3-6077-421A-852F-4D55630EE55A}"/>
+                <a16:creationId xmlns:a16="http://schemas.microsoft.com/office/drawing/2014/main" id="{589F9363-6BF0-4AD8-BC7B-56E1716E6F04}"/>
               </a:ext>
             </a:extLst>
           </p:cNvPr>
@@ -8698,7 +8696,7 @@
           <p:cNvPr id="13" name="">
             <a:extLst xmlns:a="http://schemas.openxmlformats.org/drawingml/2006/main">
               <a:ext uri="{FF2B5EF4-FFF2-40B4-BE49-F238E27FC236}">
-                <a16:creationId xmlns:a16="http://schemas.microsoft.com/office/drawing/2014/main" id="{C93FD8C6-0030-4423-B737-9F7E60224682}"/>
+                <a16:creationId xmlns:a16="http://schemas.microsoft.com/office/drawing/2014/main" id="{AD5CA844-CBE4-4662-84A6-87DAC297D099}"/>
               </a:ext>
             </a:extLst>
           </p:cNvPr>
@@ -8733,7 +8731,7 @@
           <p:cNvPr id="14" name="">
             <a:extLst xmlns:a="http://schemas.openxmlformats.org/drawingml/2006/main">
               <a:ext uri="{FF2B5EF4-FFF2-40B4-BE49-F238E27FC236}">
-                <a16:creationId xmlns:a16="http://schemas.microsoft.com/office/drawing/2014/main" id="{0C82E995-CDFA-4DCB-9E67-D1CDE8786841}"/>
+                <a16:creationId xmlns:a16="http://schemas.microsoft.com/office/drawing/2014/main" id="{DAFA8306-084D-4177-9537-B84BC55292B1}"/>
               </a:ext>
             </a:extLst>
           </p:cNvPr>
@@ -8797,7 +8795,7 @@
           <p:cNvPr id="15" name="">
             <a:extLst xmlns:a="http://schemas.openxmlformats.org/drawingml/2006/main">
               <a:ext uri="{FF2B5EF4-FFF2-40B4-BE49-F238E27FC236}">
-                <a16:creationId xmlns:a16="http://schemas.microsoft.com/office/drawing/2014/main" id="{B855F751-4956-4BF0-8C3C-6573D8CE5064}"/>
+                <a16:creationId xmlns:a16="http://schemas.microsoft.com/office/drawing/2014/main" id="{B0B63F93-5064-4A15-8385-E4AFF2430309}"/>
               </a:ext>
             </a:extLst>
           </p:cNvPr>
@@ -8830,7 +8828,7 @@
           <p:cNvPr id="16" name="">
             <a:extLst xmlns:a="http://schemas.openxmlformats.org/drawingml/2006/main">
               <a:ext uri="{FF2B5EF4-FFF2-40B4-BE49-F238E27FC236}">
-                <a16:creationId xmlns:a16="http://schemas.microsoft.com/office/drawing/2014/main" id="{23A013F4-79B6-467E-B259-8A4D21E1904A}"/>
+                <a16:creationId xmlns:a16="http://schemas.microsoft.com/office/drawing/2014/main" id="{2D87B241-623B-4959-BB16-184425CBCE02}"/>
               </a:ext>
             </a:extLst>
           </p:cNvPr>
@@ -8865,7 +8863,7 @@
           <p:cNvPr id="17" name="">
             <a:extLst xmlns:a="http://schemas.openxmlformats.org/drawingml/2006/main">
               <a:ext uri="{FF2B5EF4-FFF2-40B4-BE49-F238E27FC236}">
-                <a16:creationId xmlns:a16="http://schemas.microsoft.com/office/drawing/2014/main" id="{F54D5C3F-A17F-45D9-A4F2-CA4958834420}"/>
+                <a16:creationId xmlns:a16="http://schemas.microsoft.com/office/drawing/2014/main" id="{EC7B238A-F1BB-42D0-977F-BC7B78310236}"/>
               </a:ext>
             </a:extLst>
           </p:cNvPr>
@@ -8929,7 +8927,7 @@
           <p:cNvPr id="18" name="">
             <a:extLst xmlns:a="http://schemas.openxmlformats.org/drawingml/2006/main">
               <a:ext uri="{FF2B5EF4-FFF2-40B4-BE49-F238E27FC236}">
-                <a16:creationId xmlns:a16="http://schemas.microsoft.com/office/drawing/2014/main" id="{CD7C8DE4-36F8-4062-AF35-780AB04B35C0}"/>
+                <a16:creationId xmlns:a16="http://schemas.microsoft.com/office/drawing/2014/main" id="{DA9AA768-AC59-4E2B-A2EC-58A8298F7625}"/>
               </a:ext>
             </a:extLst>
           </p:cNvPr>
@@ -8962,7 +8960,7 @@
           <p:cNvPr id="19" name="">
             <a:extLst xmlns:a="http://schemas.openxmlformats.org/drawingml/2006/main">
               <a:ext uri="{FF2B5EF4-FFF2-40B4-BE49-F238E27FC236}">
-                <a16:creationId xmlns:a16="http://schemas.microsoft.com/office/drawing/2014/main" id="{7397ACF7-8D24-47DA-8036-AF08D206DDCF}"/>
+                <a16:creationId xmlns:a16="http://schemas.microsoft.com/office/drawing/2014/main" id="{31783D92-13D5-486B-9FD6-A33F3D8BACB4}"/>
               </a:ext>
             </a:extLst>
           </p:cNvPr>
@@ -8997,7 +8995,7 @@
           <p:cNvPr id="20" name="">
             <a:extLst xmlns:a="http://schemas.openxmlformats.org/drawingml/2006/main">
               <a:ext uri="{FF2B5EF4-FFF2-40B4-BE49-F238E27FC236}">
-                <a16:creationId xmlns:a16="http://schemas.microsoft.com/office/drawing/2014/main" id="{87990D43-881F-45F0-B221-7EF89B6DA12E}"/>
+                <a16:creationId xmlns:a16="http://schemas.microsoft.com/office/drawing/2014/main" id="{6F8FDDA9-0ED1-4ED2-A256-1B766F1506B5}"/>
               </a:ext>
             </a:extLst>
           </p:cNvPr>
@@ -9061,7 +9059,7 @@
           <p:cNvPr id="21" name="">
             <a:extLst xmlns:a="http://schemas.openxmlformats.org/drawingml/2006/main">
               <a:ext uri="{FF2B5EF4-FFF2-40B4-BE49-F238E27FC236}">
-                <a16:creationId xmlns:a16="http://schemas.microsoft.com/office/drawing/2014/main" id="{329CAD6E-3E95-413C-A50C-899C8AF4BB69}"/>
+                <a16:creationId xmlns:a16="http://schemas.microsoft.com/office/drawing/2014/main" id="{8B8CD3A1-7202-432F-A72C-59C1362A0073}"/>
               </a:ext>
             </a:extLst>
           </p:cNvPr>
@@ -9094,7 +9092,7 @@
           <p:cNvPr id="22" name="">
             <a:extLst xmlns:a="http://schemas.openxmlformats.org/drawingml/2006/main">
               <a:ext uri="{FF2B5EF4-FFF2-40B4-BE49-F238E27FC236}">
-                <a16:creationId xmlns:a16="http://schemas.microsoft.com/office/drawing/2014/main" id="{AB857E06-F2D9-405A-80AF-89141A6818CB}"/>
+                <a16:creationId xmlns:a16="http://schemas.microsoft.com/office/drawing/2014/main" id="{3F600739-89F1-4D2A-AF5A-6B6E26E2C0A4}"/>
               </a:ext>
             </a:extLst>
           </p:cNvPr>
@@ -9129,7 +9127,7 @@
           <p:cNvPr id="23" name="">
             <a:extLst xmlns:a="http://schemas.openxmlformats.org/drawingml/2006/main">
               <a:ext uri="{FF2B5EF4-FFF2-40B4-BE49-F238E27FC236}">
-                <a16:creationId xmlns:a16="http://schemas.microsoft.com/office/drawing/2014/main" id="{FD18F316-5680-49E5-B93E-0B7D5669E745}"/>
+                <a16:creationId xmlns:a16="http://schemas.microsoft.com/office/drawing/2014/main" id="{DAD88FBD-6F9D-49BD-AA51-1C17E59BF5CA}"/>
               </a:ext>
             </a:extLst>
           </p:cNvPr>
@@ -9193,7 +9191,7 @@
           <p:cNvPr id="24" name="">
             <a:extLst xmlns:a="http://schemas.openxmlformats.org/drawingml/2006/main">
               <a:ext uri="{FF2B5EF4-FFF2-40B4-BE49-F238E27FC236}">
-                <a16:creationId xmlns:a16="http://schemas.microsoft.com/office/drawing/2014/main" id="{3777431A-38A2-4B4E-B4BC-CD2BEC6D9F07}"/>
+                <a16:creationId xmlns:a16="http://schemas.microsoft.com/office/drawing/2014/main" id="{5503A68A-AEB0-43B3-ABBF-6FEF20087D5C}"/>
               </a:ext>
             </a:extLst>
           </p:cNvPr>
@@ -9226,7 +9224,7 @@
           <p:cNvPr id="25" name="">
             <a:extLst xmlns:a="http://schemas.openxmlformats.org/drawingml/2006/main">
               <a:ext uri="{FF2B5EF4-FFF2-40B4-BE49-F238E27FC236}">
-                <a16:creationId xmlns:a16="http://schemas.microsoft.com/office/drawing/2014/main" id="{B5B9417A-E03E-40C8-8D7F-BF459FE18832}"/>
+                <a16:creationId xmlns:a16="http://schemas.microsoft.com/office/drawing/2014/main" id="{01FCD0EA-9115-4413-9E41-4AA37FD17159}"/>
               </a:ext>
             </a:extLst>
           </p:cNvPr>
@@ -9261,7 +9259,7 @@
           <p:cNvPr id="26" name="">
             <a:extLst xmlns:a="http://schemas.openxmlformats.org/drawingml/2006/main">
               <a:ext uri="{FF2B5EF4-FFF2-40B4-BE49-F238E27FC236}">
-                <a16:creationId xmlns:a16="http://schemas.microsoft.com/office/drawing/2014/main" id="{97A60D7E-AF63-422D-9A1F-FB41C29CACDC}"/>
+                <a16:creationId xmlns:a16="http://schemas.microsoft.com/office/drawing/2014/main" id="{D94668E0-18D2-4E57-8441-CC4DD925C822}"/>
               </a:ext>
             </a:extLst>
           </p:cNvPr>
@@ -9325,7 +9323,7 @@
           <p:cNvPr id="27" name="">
             <a:extLst xmlns:a="http://schemas.openxmlformats.org/drawingml/2006/main">
               <a:ext uri="{FF2B5EF4-FFF2-40B4-BE49-F238E27FC236}">
-                <a16:creationId xmlns:a16="http://schemas.microsoft.com/office/drawing/2014/main" id="{92965986-F917-4247-AFCD-F82C38376A05}"/>
+                <a16:creationId xmlns:a16="http://schemas.microsoft.com/office/drawing/2014/main" id="{DB45AE73-2345-4112-8CC9-E5CB8B2FF7D5}"/>
               </a:ext>
             </a:extLst>
           </p:cNvPr>
@@ -9358,7 +9356,7 @@
           <p:cNvPr id="28" name="">
             <a:extLst xmlns:a="http://schemas.openxmlformats.org/drawingml/2006/main">
               <a:ext uri="{FF2B5EF4-FFF2-40B4-BE49-F238E27FC236}">
-                <a16:creationId xmlns:a16="http://schemas.microsoft.com/office/drawing/2014/main" id="{16F51D1F-0C2F-4D77-8A6A-18EEE2282D1F}"/>
+                <a16:creationId xmlns:a16="http://schemas.microsoft.com/office/drawing/2014/main" id="{EFC0FF9D-F96B-4F61-AA11-4E38D2596DD0}"/>
               </a:ext>
             </a:extLst>
           </p:cNvPr>
@@ -9393,7 +9391,7 @@
           <p:cNvPr id="29" name="">
             <a:extLst xmlns:a="http://schemas.openxmlformats.org/drawingml/2006/main">
               <a:ext uri="{FF2B5EF4-FFF2-40B4-BE49-F238E27FC236}">
-                <a16:creationId xmlns:a16="http://schemas.microsoft.com/office/drawing/2014/main" id="{FFE90581-9FBD-4407-96DB-005171AB8224}"/>
+                <a16:creationId xmlns:a16="http://schemas.microsoft.com/office/drawing/2014/main" id="{D4C6BEA1-7F58-409E-96E1-860A3A7249C5}"/>
               </a:ext>
             </a:extLst>
           </p:cNvPr>
@@ -9457,7 +9455,7 @@
           <p:cNvPr id="30" name="">
             <a:extLst xmlns:a="http://schemas.openxmlformats.org/drawingml/2006/main">
               <a:ext uri="{FF2B5EF4-FFF2-40B4-BE49-F238E27FC236}">
-                <a16:creationId xmlns:a16="http://schemas.microsoft.com/office/drawing/2014/main" id="{B51FBF82-1611-4A96-AF75-2A5B25304160}"/>
+                <a16:creationId xmlns:a16="http://schemas.microsoft.com/office/drawing/2014/main" id="{578D5E75-5215-4D5E-A326-6CF8EA3E3F9A}"/>
               </a:ext>
             </a:extLst>
           </p:cNvPr>
@@ -9490,7 +9488,7 @@
           <p:cNvPr id="31" name="">
             <a:extLst xmlns:a="http://schemas.openxmlformats.org/drawingml/2006/main">
               <a:ext uri="{FF2B5EF4-FFF2-40B4-BE49-F238E27FC236}">
-                <a16:creationId xmlns:a16="http://schemas.microsoft.com/office/drawing/2014/main" id="{36634F7B-0B30-47E2-998E-E0C9E2724A6D}"/>
+                <a16:creationId xmlns:a16="http://schemas.microsoft.com/office/drawing/2014/main" id="{F9EB55A1-657F-4319-BEA8-F8851C102F4B}"/>
               </a:ext>
             </a:extLst>
           </p:cNvPr>
@@ -9525,7 +9523,7 @@
           <p:cNvPr id="32" name="">
             <a:extLst xmlns:a="http://schemas.openxmlformats.org/drawingml/2006/main">
               <a:ext uri="{FF2B5EF4-FFF2-40B4-BE49-F238E27FC236}">
-                <a16:creationId xmlns:a16="http://schemas.microsoft.com/office/drawing/2014/main" id="{96CD02DE-95A8-4A5C-9489-A5E8D8028B7B}"/>
+                <a16:creationId xmlns:a16="http://schemas.microsoft.com/office/drawing/2014/main" id="{868EB1FC-D3C6-4F41-BA4E-491104D4100A}"/>
               </a:ext>
             </a:extLst>
           </p:cNvPr>
@@ -9589,7 +9587,7 @@
           <p:cNvPr id="33" name="">
             <a:extLst xmlns:a="http://schemas.openxmlformats.org/drawingml/2006/main">
               <a:ext uri="{FF2B5EF4-FFF2-40B4-BE49-F238E27FC236}">
-                <a16:creationId xmlns:a16="http://schemas.microsoft.com/office/drawing/2014/main" id="{C54FF448-1D67-4B7E-BDB5-7979AAEE63F3}"/>
+                <a16:creationId xmlns:a16="http://schemas.microsoft.com/office/drawing/2014/main" id="{2382A790-78DC-445C-9C38-EEC40ACAC537}"/>
               </a:ext>
             </a:extLst>
           </p:cNvPr>
@@ -9622,7 +9620,7 @@
           <p:cNvPr id="34" name="">
             <a:extLst xmlns:a="http://schemas.openxmlformats.org/drawingml/2006/main">
               <a:ext uri="{FF2B5EF4-FFF2-40B4-BE49-F238E27FC236}">
-                <a16:creationId xmlns:a16="http://schemas.microsoft.com/office/drawing/2014/main" id="{941BC4FA-5E79-4894-8D04-A4799DAFD510}"/>
+                <a16:creationId xmlns:a16="http://schemas.microsoft.com/office/drawing/2014/main" id="{D5F558B2-DD3E-4A7A-85DC-C23AECA2AD9E}"/>
               </a:ext>
             </a:extLst>
           </p:cNvPr>
@@ -9686,7 +9684,7 @@
           <p:cNvPr id="35" name="">
             <a:extLst xmlns:a="http://schemas.openxmlformats.org/drawingml/2006/main">
               <a:ext uri="{FF2B5EF4-FFF2-40B4-BE49-F238E27FC236}">
-                <a16:creationId xmlns:a16="http://schemas.microsoft.com/office/drawing/2014/main" id="{3E59F472-5556-4000-BAA9-244C60AC8FB4}"/>
+                <a16:creationId xmlns:a16="http://schemas.microsoft.com/office/drawing/2014/main" id="{FD30B9E3-3902-4955-B3B4-4310985B617E}"/>
               </a:ext>
             </a:extLst>
           </p:cNvPr>
@@ -9750,7 +9748,7 @@
           <p:cNvPr id="36" name="">
             <a:extLst xmlns:a="http://schemas.openxmlformats.org/drawingml/2006/main">
               <a:ext uri="{FF2B5EF4-FFF2-40B4-BE49-F238E27FC236}">
-                <a16:creationId xmlns:a16="http://schemas.microsoft.com/office/drawing/2014/main" id="{D6087595-B889-4712-9534-283D27DA90B4}"/>
+                <a16:creationId xmlns:a16="http://schemas.microsoft.com/office/drawing/2014/main" id="{A909F724-B9F3-40D3-91C9-AB0864B6E14A}"/>
               </a:ext>
             </a:extLst>
           </p:cNvPr>
@@ -9785,7 +9783,7 @@
           <p:cNvPr id="37" name="">
             <a:extLst xmlns:a="http://schemas.openxmlformats.org/drawingml/2006/main">
               <a:ext uri="{FF2B5EF4-FFF2-40B4-BE49-F238E27FC236}">
-                <a16:creationId xmlns:a16="http://schemas.microsoft.com/office/drawing/2014/main" id="{DCFA58E4-3E2D-4447-A2CD-3AB9DB8972F5}"/>
+                <a16:creationId xmlns:a16="http://schemas.microsoft.com/office/drawing/2014/main" id="{2136D6D4-5502-46E7-8085-FC991AD6DBF2}"/>
               </a:ext>
             </a:extLst>
           </p:cNvPr>
@@ -9849,7 +9847,7 @@
           <p:cNvPr id="38" name="">
             <a:extLst xmlns:a="http://schemas.openxmlformats.org/drawingml/2006/main">
               <a:ext uri="{FF2B5EF4-FFF2-40B4-BE49-F238E27FC236}">
-                <a16:creationId xmlns:a16="http://schemas.microsoft.com/office/drawing/2014/main" id="{34CDEBFA-270F-4A21-988E-137DA8F94B85}"/>
+                <a16:creationId xmlns:a16="http://schemas.microsoft.com/office/drawing/2014/main" id="{95993D34-1BBD-4BD2-9268-023088395A34}"/>
               </a:ext>
             </a:extLst>
           </p:cNvPr>
@@ -9913,7 +9911,7 @@
           <p:cNvPr id="39" name="">
             <a:extLst xmlns:a="http://schemas.openxmlformats.org/drawingml/2006/main">
               <a:ext uri="{FF2B5EF4-FFF2-40B4-BE49-F238E27FC236}">
-                <a16:creationId xmlns:a16="http://schemas.microsoft.com/office/drawing/2014/main" id="{CC97A938-0570-49CA-9525-B6A26F191E83}"/>
+                <a16:creationId xmlns:a16="http://schemas.microsoft.com/office/drawing/2014/main" id="{6C8310DE-4F9C-4014-8FB0-3E2E94F8534E}"/>
               </a:ext>
             </a:extLst>
           </p:cNvPr>
@@ -9975,7 +9973,7 @@
     </p:spTree>
     <p:extLst>
       <p:ext uri="{BB962C8B-B14F-4D97-AF65-F5344CB8AC3E}">
-        <p14:creationId xmlns:p14="http://schemas.microsoft.com/office/powerpoint/2010/main" val="17253026"/>
+        <p14:creationId xmlns:p14="http://schemas.microsoft.com/office/powerpoint/2010/main" val="463878836"/>
       </p:ext>
     </p:extLst>
   </p:cSld>
@@ -9999,7 +9997,7 @@
           <p:cNvPr id="1" name="">
             <a:extLst xmlns:a="http://schemas.openxmlformats.org/drawingml/2006/main">
               <a:ext uri="{FF2B5EF4-FFF2-40B4-BE49-F238E27FC236}">
-                <a16:creationId xmlns:a16="http://schemas.microsoft.com/office/drawing/2014/main" id="{00017536-B293-4FE3-95B3-B257013A941C}"/>
+                <a16:creationId xmlns:a16="http://schemas.microsoft.com/office/drawing/2014/main" id="{93286F41-602A-45CD-BCE9-2DDEAF4CEEE0}"/>
               </a:ext>
             </a:extLst>
           </p:cNvPr>
@@ -10034,7 +10032,7 @@
           <p:cNvPr id="2" name="">
             <a:extLst xmlns:a="http://schemas.openxmlformats.org/drawingml/2006/main">
               <a:ext uri="{FF2B5EF4-FFF2-40B4-BE49-F238E27FC236}">
-                <a16:creationId xmlns:a16="http://schemas.microsoft.com/office/drawing/2014/main" id="{B3E9C796-4539-439B-8297-372D1745CFEB}"/>
+                <a16:creationId xmlns:a16="http://schemas.microsoft.com/office/drawing/2014/main" id="{96ACBBA1-6059-4A73-BDA8-C264F8853C33}"/>
               </a:ext>
             </a:extLst>
           </p:cNvPr>
@@ -10069,7 +10067,7 @@
           <p:cNvPr id="3" name="">
             <a:extLst xmlns:a="http://schemas.openxmlformats.org/drawingml/2006/main">
               <a:ext uri="{FF2B5EF4-FFF2-40B4-BE49-F238E27FC236}">
-                <a16:creationId xmlns:a16="http://schemas.microsoft.com/office/drawing/2014/main" id="{04AE7248-21DA-4E34-9209-90DB2C7AD379}"/>
+                <a16:creationId xmlns:a16="http://schemas.microsoft.com/office/drawing/2014/main" id="{9299F661-18DB-4E00-BA2D-E15F3D1899D7}"/>
               </a:ext>
             </a:extLst>
           </p:cNvPr>
@@ -10104,7 +10102,7 @@
           <p:cNvPr id="4" name="kicker-08-marker">
             <a:extLst xmlns:a="http://schemas.openxmlformats.org/drawingml/2006/main">
               <a:ext uri="{FF2B5EF4-FFF2-40B4-BE49-F238E27FC236}">
-                <a16:creationId xmlns:a16="http://schemas.microsoft.com/office/drawing/2014/main" id="{3C3B8487-C8A8-4DB3-B591-EC0507D18A4F}"/>
+                <a16:creationId xmlns:a16="http://schemas.microsoft.com/office/drawing/2014/main" id="{B89DEC71-4ABC-423A-ABE0-E259F55A61E6}"/>
               </a:ext>
             </a:extLst>
           </p:cNvPr>
@@ -10139,7 +10137,7 @@
           <p:cNvPr id="5" name="kicker-08-label">
             <a:extLst xmlns:a="http://schemas.openxmlformats.org/drawingml/2006/main">
               <a:ext uri="{FF2B5EF4-FFF2-40B4-BE49-F238E27FC236}">
-                <a16:creationId xmlns:a16="http://schemas.microsoft.com/office/drawing/2014/main" id="{4F642396-7DA2-4E0B-85AD-A59D875B314F}"/>
+                <a16:creationId xmlns:a16="http://schemas.microsoft.com/office/drawing/2014/main" id="{ED7CEA8D-8FD6-49FD-AD96-5299AFD5B65F}"/>
               </a:ext>
             </a:extLst>
           </p:cNvPr>
@@ -10203,7 +10201,7 @@
           <p:cNvPr id="6" name="">
             <a:extLst xmlns:a="http://schemas.openxmlformats.org/drawingml/2006/main">
               <a:ext uri="{FF2B5EF4-FFF2-40B4-BE49-F238E27FC236}">
-                <a16:creationId xmlns:a16="http://schemas.microsoft.com/office/drawing/2014/main" id="{D919513A-6ABD-4635-8A61-5934CC835FA3}"/>
+                <a16:creationId xmlns:a16="http://schemas.microsoft.com/office/drawing/2014/main" id="{8123F829-5B80-4875-A4F6-553CD7BA9D27}"/>
               </a:ext>
             </a:extLst>
           </p:cNvPr>
@@ -10267,7 +10265,7 @@
           <p:cNvPr id="7" name="">
             <a:extLst xmlns:a="http://schemas.openxmlformats.org/drawingml/2006/main">
               <a:ext uri="{FF2B5EF4-FFF2-40B4-BE49-F238E27FC236}">
-                <a16:creationId xmlns:a16="http://schemas.microsoft.com/office/drawing/2014/main" id="{77577F7A-B4AF-42DB-A1EA-D4AFC76C31EC}"/>
+                <a16:creationId xmlns:a16="http://schemas.microsoft.com/office/drawing/2014/main" id="{EF117FEA-2A53-4F88-A434-6AF9BF265DC0}"/>
               </a:ext>
             </a:extLst>
           </p:cNvPr>
@@ -10331,7 +10329,7 @@
           <p:cNvPr id="8" name="">
             <a:extLst xmlns:a="http://schemas.openxmlformats.org/drawingml/2006/main">
               <a:ext uri="{FF2B5EF4-FFF2-40B4-BE49-F238E27FC236}">
-                <a16:creationId xmlns:a16="http://schemas.microsoft.com/office/drawing/2014/main" id="{70DDD6F0-BE77-443B-97BB-6D518AD7EC33}"/>
+                <a16:creationId xmlns:a16="http://schemas.microsoft.com/office/drawing/2014/main" id="{95051B94-426A-4F48-878C-87225C175CA5}"/>
               </a:ext>
             </a:extLst>
           </p:cNvPr>
@@ -10366,7 +10364,7 @@
           <p:cNvPr id="9" name="">
             <a:extLst xmlns:a="http://schemas.openxmlformats.org/drawingml/2006/main">
               <a:ext uri="{FF2B5EF4-FFF2-40B4-BE49-F238E27FC236}">
-                <a16:creationId xmlns:a16="http://schemas.microsoft.com/office/drawing/2014/main" id="{CC604C27-5D3E-41E7-BBE9-03FBE28F3ACA}"/>
+                <a16:creationId xmlns:a16="http://schemas.microsoft.com/office/drawing/2014/main" id="{7FCE517C-DFF0-4B28-AB25-BAFB590DCF5B}"/>
               </a:ext>
             </a:extLst>
           </p:cNvPr>
@@ -10430,7 +10428,7 @@
           <p:cNvPr id="10" name="">
             <a:extLst xmlns:a="http://schemas.openxmlformats.org/drawingml/2006/main">
               <a:ext uri="{FF2B5EF4-FFF2-40B4-BE49-F238E27FC236}">
-                <a16:creationId xmlns:a16="http://schemas.microsoft.com/office/drawing/2014/main" id="{0A2EA009-BAF4-4A36-B72F-8E50B7592EBA}"/>
+                <a16:creationId xmlns:a16="http://schemas.microsoft.com/office/drawing/2014/main" id="{3CA2A4D5-8070-4A10-ACE6-975D324846EE}"/>
               </a:ext>
             </a:extLst>
           </p:cNvPr>
@@ -10494,7 +10492,7 @@
           <p:cNvPr id="11" name="">
             <a:extLst xmlns:a="http://schemas.openxmlformats.org/drawingml/2006/main">
               <a:ext uri="{FF2B5EF4-FFF2-40B4-BE49-F238E27FC236}">
-                <a16:creationId xmlns:a16="http://schemas.microsoft.com/office/drawing/2014/main" id="{F3AA34AB-8B11-4AAB-8C53-A2D806C8D247}"/>
+                <a16:creationId xmlns:a16="http://schemas.microsoft.com/office/drawing/2014/main" id="{8CC46EC0-5363-40B8-A2EA-DAD3FDEC4573}"/>
               </a:ext>
             </a:extLst>
           </p:cNvPr>
@@ -10558,7 +10556,7 @@
           <p:cNvPr id="12" name="">
             <a:extLst xmlns:a="http://schemas.openxmlformats.org/drawingml/2006/main">
               <a:ext uri="{FF2B5EF4-FFF2-40B4-BE49-F238E27FC236}">
-                <a16:creationId xmlns:a16="http://schemas.microsoft.com/office/drawing/2014/main" id="{B5BD7570-D9AB-43EA-8C39-02655FC055E1}"/>
+                <a16:creationId xmlns:a16="http://schemas.microsoft.com/office/drawing/2014/main" id="{B9B597AA-E160-444D-8298-9716B9594B97}"/>
               </a:ext>
             </a:extLst>
           </p:cNvPr>
@@ -10593,7 +10591,7 @@
           <p:cNvPr id="13" name="">
             <a:extLst xmlns:a="http://schemas.openxmlformats.org/drawingml/2006/main">
               <a:ext uri="{FF2B5EF4-FFF2-40B4-BE49-F238E27FC236}">
-                <a16:creationId xmlns:a16="http://schemas.microsoft.com/office/drawing/2014/main" id="{0ED86AB0-82F3-466B-BDD4-159169477BF0}"/>
+                <a16:creationId xmlns:a16="http://schemas.microsoft.com/office/drawing/2014/main" id="{135209BA-2E42-4612-A007-8450676E3A94}"/>
               </a:ext>
             </a:extLst>
           </p:cNvPr>
@@ -10626,7 +10624,7 @@
           <p:cNvPr id="14" name="">
             <a:extLst xmlns:a="http://schemas.openxmlformats.org/drawingml/2006/main">
               <a:ext uri="{FF2B5EF4-FFF2-40B4-BE49-F238E27FC236}">
-                <a16:creationId xmlns:a16="http://schemas.microsoft.com/office/drawing/2014/main" id="{90880FE2-CD2F-4D01-8077-0CA3400E36CC}"/>
+                <a16:creationId xmlns:a16="http://schemas.microsoft.com/office/drawing/2014/main" id="{94934C90-6370-49BA-8D3E-1D97052793C4}"/>
               </a:ext>
             </a:extLst>
           </p:cNvPr>
@@ -10659,7 +10657,7 @@
           <p:cNvPr id="15" name="">
             <a:extLst xmlns:a="http://schemas.openxmlformats.org/drawingml/2006/main">
               <a:ext uri="{FF2B5EF4-FFF2-40B4-BE49-F238E27FC236}">
-                <a16:creationId xmlns:a16="http://schemas.microsoft.com/office/drawing/2014/main" id="{50CCC175-4422-4081-BF71-783DB3F87C44}"/>
+                <a16:creationId xmlns:a16="http://schemas.microsoft.com/office/drawing/2014/main" id="{A6B7D70D-9541-4F14-8FED-CE6CACCF2EFB}"/>
               </a:ext>
             </a:extLst>
           </p:cNvPr>
@@ -10723,7 +10721,7 @@
           <p:cNvPr id="16" name="">
             <a:extLst xmlns:a="http://schemas.openxmlformats.org/drawingml/2006/main">
               <a:ext uri="{FF2B5EF4-FFF2-40B4-BE49-F238E27FC236}">
-                <a16:creationId xmlns:a16="http://schemas.microsoft.com/office/drawing/2014/main" id="{B91C17E4-D378-4174-933B-F2F153132C80}"/>
+                <a16:creationId xmlns:a16="http://schemas.microsoft.com/office/drawing/2014/main" id="{60215C43-2C63-4E33-8BC8-438D97689382}"/>
               </a:ext>
             </a:extLst>
           </p:cNvPr>
@@ -10787,7 +10785,7 @@
           <p:cNvPr id="17" name="">
             <a:extLst xmlns:a="http://schemas.openxmlformats.org/drawingml/2006/main">
               <a:ext uri="{FF2B5EF4-FFF2-40B4-BE49-F238E27FC236}">
-                <a16:creationId xmlns:a16="http://schemas.microsoft.com/office/drawing/2014/main" id="{D49FC613-A4FA-41E1-BD34-D85E76AE4EC4}"/>
+                <a16:creationId xmlns:a16="http://schemas.microsoft.com/office/drawing/2014/main" id="{3F0FF8E8-4EE9-465D-859D-98F8CAED6230}"/>
               </a:ext>
             </a:extLst>
           </p:cNvPr>
@@ -10851,7 +10849,7 @@
           <p:cNvPr id="18" name="">
             <a:extLst xmlns:a="http://schemas.openxmlformats.org/drawingml/2006/main">
               <a:ext uri="{FF2B5EF4-FFF2-40B4-BE49-F238E27FC236}">
-                <a16:creationId xmlns:a16="http://schemas.microsoft.com/office/drawing/2014/main" id="{DD741951-E2C3-45EE-B4C2-3CE0D5B09C54}"/>
+                <a16:creationId xmlns:a16="http://schemas.microsoft.com/office/drawing/2014/main" id="{146D5531-F32E-4F13-8318-8C4D191359B1}"/>
               </a:ext>
             </a:extLst>
           </p:cNvPr>
@@ -10886,7 +10884,7 @@
           <p:cNvPr id="19" name="">
             <a:extLst xmlns:a="http://schemas.openxmlformats.org/drawingml/2006/main">
               <a:ext uri="{FF2B5EF4-FFF2-40B4-BE49-F238E27FC236}">
-                <a16:creationId xmlns:a16="http://schemas.microsoft.com/office/drawing/2014/main" id="{4B1D3D26-DFB1-448C-A871-7A01C66BE8E8}"/>
+                <a16:creationId xmlns:a16="http://schemas.microsoft.com/office/drawing/2014/main" id="{91AE86D3-D1BA-4508-B458-3273C0DF91B8}"/>
               </a:ext>
             </a:extLst>
           </p:cNvPr>
@@ -10950,7 +10948,7 @@
           <p:cNvPr id="20" name="">
             <a:extLst xmlns:a="http://schemas.openxmlformats.org/drawingml/2006/main">
               <a:ext uri="{FF2B5EF4-FFF2-40B4-BE49-F238E27FC236}">
-                <a16:creationId xmlns:a16="http://schemas.microsoft.com/office/drawing/2014/main" id="{F2DCCF39-E071-476C-874A-051F89587AE8}"/>
+                <a16:creationId xmlns:a16="http://schemas.microsoft.com/office/drawing/2014/main" id="{6560DDC4-8E00-44AE-90C7-5D3EA4C20374}"/>
               </a:ext>
             </a:extLst>
           </p:cNvPr>
@@ -11014,7 +11012,7 @@
           <p:cNvPr id="21" name="">
             <a:extLst xmlns:a="http://schemas.openxmlformats.org/drawingml/2006/main">
               <a:ext uri="{FF2B5EF4-FFF2-40B4-BE49-F238E27FC236}">
-                <a16:creationId xmlns:a16="http://schemas.microsoft.com/office/drawing/2014/main" id="{ABF8ACF1-3D4F-4E56-AE5B-21646B6F7F5E}"/>
+                <a16:creationId xmlns:a16="http://schemas.microsoft.com/office/drawing/2014/main" id="{8D6054FB-5E03-447C-9763-5436257AF04C}"/>
               </a:ext>
             </a:extLst>
           </p:cNvPr>
@@ -11078,7 +11076,7 @@
           <p:cNvPr id="22" name="">
             <a:extLst xmlns:a="http://schemas.openxmlformats.org/drawingml/2006/main">
               <a:ext uri="{FF2B5EF4-FFF2-40B4-BE49-F238E27FC236}">
-                <a16:creationId xmlns:a16="http://schemas.microsoft.com/office/drawing/2014/main" id="{CECC534E-872E-4F40-87F0-097A5C5266F5}"/>
+                <a16:creationId xmlns:a16="http://schemas.microsoft.com/office/drawing/2014/main" id="{9C959FD1-1B8A-4350-8861-039D1874DA2C}"/>
               </a:ext>
             </a:extLst>
           </p:cNvPr>
@@ -11113,7 +11111,7 @@
           <p:cNvPr id="23" name="">
             <a:extLst xmlns:a="http://schemas.openxmlformats.org/drawingml/2006/main">
               <a:ext uri="{FF2B5EF4-FFF2-40B4-BE49-F238E27FC236}">
-                <a16:creationId xmlns:a16="http://schemas.microsoft.com/office/drawing/2014/main" id="{1BCC29E3-6D10-4191-83F2-2441F6F5ADB9}"/>
+                <a16:creationId xmlns:a16="http://schemas.microsoft.com/office/drawing/2014/main" id="{A5BE82EA-6668-4D32-92BB-C8AC9525B19C}"/>
               </a:ext>
             </a:extLst>
           </p:cNvPr>
@@ -11148,7 +11146,7 @@
           <p:cNvPr id="24" name="">
             <a:extLst xmlns:a="http://schemas.openxmlformats.org/drawingml/2006/main">
               <a:ext uri="{FF2B5EF4-FFF2-40B4-BE49-F238E27FC236}">
-                <a16:creationId xmlns:a16="http://schemas.microsoft.com/office/drawing/2014/main" id="{DF01C68E-6076-4C6B-8083-394BC60FD1A6}"/>
+                <a16:creationId xmlns:a16="http://schemas.microsoft.com/office/drawing/2014/main" id="{7C3B0EC5-FC39-4370-8534-7B7E6C21AA78}"/>
               </a:ext>
             </a:extLst>
           </p:cNvPr>
@@ -11212,7 +11210,7 @@
           <p:cNvPr id="25" name="">
             <a:extLst xmlns:a="http://schemas.openxmlformats.org/drawingml/2006/main">
               <a:ext uri="{FF2B5EF4-FFF2-40B4-BE49-F238E27FC236}">
-                <a16:creationId xmlns:a16="http://schemas.microsoft.com/office/drawing/2014/main" id="{4237F7E5-FCEF-481B-B329-512EBB3C3199}"/>
+                <a16:creationId xmlns:a16="http://schemas.microsoft.com/office/drawing/2014/main" id="{A659F535-8820-48FB-B511-395218C497EB}"/>
               </a:ext>
             </a:extLst>
           </p:cNvPr>
@@ -11276,7 +11274,7 @@
           <p:cNvPr id="26" name="">
             <a:extLst xmlns:a="http://schemas.openxmlformats.org/drawingml/2006/main">
               <a:ext uri="{FF2B5EF4-FFF2-40B4-BE49-F238E27FC236}">
-                <a16:creationId xmlns:a16="http://schemas.microsoft.com/office/drawing/2014/main" id="{9E03049B-DDE6-42E3-B072-F7EFE49426E3}"/>
+                <a16:creationId xmlns:a16="http://schemas.microsoft.com/office/drawing/2014/main" id="{637A40E4-4CDB-4A69-8C38-A85FD7D1DEE7}"/>
               </a:ext>
             </a:extLst>
           </p:cNvPr>
@@ -11340,7 +11338,7 @@
           <p:cNvPr id="27" name="">
             <a:extLst xmlns:a="http://schemas.openxmlformats.org/drawingml/2006/main">
               <a:ext uri="{FF2B5EF4-FFF2-40B4-BE49-F238E27FC236}">
-                <a16:creationId xmlns:a16="http://schemas.microsoft.com/office/drawing/2014/main" id="{CF7340F7-0A50-46CB-B6A2-B6955598B3B1}"/>
+                <a16:creationId xmlns:a16="http://schemas.microsoft.com/office/drawing/2014/main" id="{87E8A878-35EC-432E-9484-CEDAB78EFDEE}"/>
               </a:ext>
             </a:extLst>
           </p:cNvPr>
@@ -11375,7 +11373,7 @@
           <p:cNvPr id="28" name="">
             <a:extLst xmlns:a="http://schemas.openxmlformats.org/drawingml/2006/main">
               <a:ext uri="{FF2B5EF4-FFF2-40B4-BE49-F238E27FC236}">
-                <a16:creationId xmlns:a16="http://schemas.microsoft.com/office/drawing/2014/main" id="{3137312D-C11C-478F-AA24-7576970E156E}"/>
+                <a16:creationId xmlns:a16="http://schemas.microsoft.com/office/drawing/2014/main" id="{E9B04594-810B-434C-8961-0CFBB82B5417}"/>
               </a:ext>
             </a:extLst>
           </p:cNvPr>
@@ -11439,7 +11437,7 @@
           <p:cNvPr id="29" name="">
             <a:extLst xmlns:a="http://schemas.openxmlformats.org/drawingml/2006/main">
               <a:ext uri="{FF2B5EF4-FFF2-40B4-BE49-F238E27FC236}">
-                <a16:creationId xmlns:a16="http://schemas.microsoft.com/office/drawing/2014/main" id="{BE4EDDF0-E589-41FA-BC61-4AACCD337F04}"/>
+                <a16:creationId xmlns:a16="http://schemas.microsoft.com/office/drawing/2014/main" id="{72F4926F-36DD-43DE-97CC-30299F2FC2B2}"/>
               </a:ext>
             </a:extLst>
           </p:cNvPr>
@@ -11503,7 +11501,7 @@
           <p:cNvPr id="30" name="">
             <a:extLst xmlns:a="http://schemas.openxmlformats.org/drawingml/2006/main">
               <a:ext uri="{FF2B5EF4-FFF2-40B4-BE49-F238E27FC236}">
-                <a16:creationId xmlns:a16="http://schemas.microsoft.com/office/drawing/2014/main" id="{2AFE261D-1D15-41EF-858B-E455E8E26B1A}"/>
+                <a16:creationId xmlns:a16="http://schemas.microsoft.com/office/drawing/2014/main" id="{DAEDC2A0-F161-4179-BC84-F99E95AC401F}"/>
               </a:ext>
             </a:extLst>
           </p:cNvPr>
@@ -11567,7 +11565,7 @@
           <p:cNvPr id="31" name="">
             <a:extLst xmlns:a="http://schemas.openxmlformats.org/drawingml/2006/main">
               <a:ext uri="{FF2B5EF4-FFF2-40B4-BE49-F238E27FC236}">
-                <a16:creationId xmlns:a16="http://schemas.microsoft.com/office/drawing/2014/main" id="{0BD87278-8695-4919-877F-0A6D3C476F2E}"/>
+                <a16:creationId xmlns:a16="http://schemas.microsoft.com/office/drawing/2014/main" id="{6FB1821D-593E-46C9-829F-491D81733B71}"/>
               </a:ext>
             </a:extLst>
           </p:cNvPr>
@@ -11602,7 +11600,7 @@
           <p:cNvPr id="32" name="">
             <a:extLst xmlns:a="http://schemas.openxmlformats.org/drawingml/2006/main">
               <a:ext uri="{FF2B5EF4-FFF2-40B4-BE49-F238E27FC236}">
-                <a16:creationId xmlns:a16="http://schemas.microsoft.com/office/drawing/2014/main" id="{A22FE8A7-72D0-46A0-84FB-078BD20CE034}"/>
+                <a16:creationId xmlns:a16="http://schemas.microsoft.com/office/drawing/2014/main" id="{7674977B-B890-49DB-91BE-43676AE5CDB4}"/>
               </a:ext>
             </a:extLst>
           </p:cNvPr>
@@ -11637,7 +11635,7 @@
           <p:cNvPr id="33" name="">
             <a:extLst xmlns:a="http://schemas.openxmlformats.org/drawingml/2006/main">
               <a:ext uri="{FF2B5EF4-FFF2-40B4-BE49-F238E27FC236}">
-                <a16:creationId xmlns:a16="http://schemas.microsoft.com/office/drawing/2014/main" id="{4C63970C-9A3A-4F1A-8025-5197AD690B19}"/>
+                <a16:creationId xmlns:a16="http://schemas.microsoft.com/office/drawing/2014/main" id="{F4A3505D-A356-44EF-9FAF-937F5BDD4E2D}"/>
               </a:ext>
             </a:extLst>
           </p:cNvPr>
@@ -11701,7 +11699,7 @@
           <p:cNvPr id="34" name="">
             <a:extLst xmlns:a="http://schemas.openxmlformats.org/drawingml/2006/main">
               <a:ext uri="{FF2B5EF4-FFF2-40B4-BE49-F238E27FC236}">
-                <a16:creationId xmlns:a16="http://schemas.microsoft.com/office/drawing/2014/main" id="{80559739-E0F5-4F6C-BFA6-3D839461F6D5}"/>
+                <a16:creationId xmlns:a16="http://schemas.microsoft.com/office/drawing/2014/main" id="{D8C7AC68-8CBF-449B-9C85-48901F2A2A50}"/>
               </a:ext>
             </a:extLst>
           </p:cNvPr>
@@ -11765,7 +11763,7 @@
           <p:cNvPr id="35" name="">
             <a:extLst xmlns:a="http://schemas.openxmlformats.org/drawingml/2006/main">
               <a:ext uri="{FF2B5EF4-FFF2-40B4-BE49-F238E27FC236}">
-                <a16:creationId xmlns:a16="http://schemas.microsoft.com/office/drawing/2014/main" id="{55BFFC2A-3118-4904-B99F-F82E5EB4CA59}"/>
+                <a16:creationId xmlns:a16="http://schemas.microsoft.com/office/drawing/2014/main" id="{0FFBAB28-891F-407B-B433-5C35ABD40F6E}"/>
               </a:ext>
             </a:extLst>
           </p:cNvPr>
@@ -11829,7 +11827,7 @@
           <p:cNvPr id="36" name="">
             <a:extLst xmlns:a="http://schemas.openxmlformats.org/drawingml/2006/main">
               <a:ext uri="{FF2B5EF4-FFF2-40B4-BE49-F238E27FC236}">
-                <a16:creationId xmlns:a16="http://schemas.microsoft.com/office/drawing/2014/main" id="{1D30E4B2-6FB6-4399-8DC8-58FF3C593C35}"/>
+                <a16:creationId xmlns:a16="http://schemas.microsoft.com/office/drawing/2014/main" id="{ED495B43-3126-4B1A-A8A5-C166C98BB4EE}"/>
               </a:ext>
             </a:extLst>
           </p:cNvPr>
@@ -11864,7 +11862,7 @@
           <p:cNvPr id="37" name="">
             <a:extLst xmlns:a="http://schemas.openxmlformats.org/drawingml/2006/main">
               <a:ext uri="{FF2B5EF4-FFF2-40B4-BE49-F238E27FC236}">
-                <a16:creationId xmlns:a16="http://schemas.microsoft.com/office/drawing/2014/main" id="{9CF6EC90-B399-4BCB-B610-258DF41B6DEA}"/>
+                <a16:creationId xmlns:a16="http://schemas.microsoft.com/office/drawing/2014/main" id="{E916FC71-01CE-4F94-812B-C91420287B43}"/>
               </a:ext>
             </a:extLst>
           </p:cNvPr>
@@ -11928,7 +11926,7 @@
           <p:cNvPr id="38" name="">
             <a:extLst xmlns:a="http://schemas.openxmlformats.org/drawingml/2006/main">
               <a:ext uri="{FF2B5EF4-FFF2-40B4-BE49-F238E27FC236}">
-                <a16:creationId xmlns:a16="http://schemas.microsoft.com/office/drawing/2014/main" id="{516F44C5-1E11-46C9-861C-3945F65B77C2}"/>
+                <a16:creationId xmlns:a16="http://schemas.microsoft.com/office/drawing/2014/main" id="{2F1E9CF4-9C59-4081-806E-1E35725B76EA}"/>
               </a:ext>
             </a:extLst>
           </p:cNvPr>
@@ -11992,7 +11990,7 @@
           <p:cNvPr id="39" name="">
             <a:extLst xmlns:a="http://schemas.openxmlformats.org/drawingml/2006/main">
               <a:ext uri="{FF2B5EF4-FFF2-40B4-BE49-F238E27FC236}">
-                <a16:creationId xmlns:a16="http://schemas.microsoft.com/office/drawing/2014/main" id="{E23569F3-8EB1-4189-9030-18FFD7CB9AAA}"/>
+                <a16:creationId xmlns:a16="http://schemas.microsoft.com/office/drawing/2014/main" id="{DE81AD32-1D21-4DBF-8A33-A02DEA3B6D2F}"/>
               </a:ext>
             </a:extLst>
           </p:cNvPr>
@@ -12056,7 +12054,7 @@
           <p:cNvPr id="40" name="">
             <a:extLst xmlns:a="http://schemas.openxmlformats.org/drawingml/2006/main">
               <a:ext uri="{FF2B5EF4-FFF2-40B4-BE49-F238E27FC236}">
-                <a16:creationId xmlns:a16="http://schemas.microsoft.com/office/drawing/2014/main" id="{70370944-57ED-4F6F-9170-A409BA3F77AB}"/>
+                <a16:creationId xmlns:a16="http://schemas.microsoft.com/office/drawing/2014/main" id="{975804DD-2EBF-421B-A498-2B9006848865}"/>
               </a:ext>
             </a:extLst>
           </p:cNvPr>
@@ -12091,7 +12089,7 @@
           <p:cNvPr id="41" name="">
             <a:extLst xmlns:a="http://schemas.openxmlformats.org/drawingml/2006/main">
               <a:ext uri="{FF2B5EF4-FFF2-40B4-BE49-F238E27FC236}">
-                <a16:creationId xmlns:a16="http://schemas.microsoft.com/office/drawing/2014/main" id="{5B635649-37B3-4BA3-BBE4-A3C275B87648}"/>
+                <a16:creationId xmlns:a16="http://schemas.microsoft.com/office/drawing/2014/main" id="{8ACD0B4D-165B-4714-BC88-C7C13A70DBBF}"/>
               </a:ext>
             </a:extLst>
           </p:cNvPr>
@@ -12126,7 +12124,7 @@
           <p:cNvPr id="42" name="">
             <a:extLst xmlns:a="http://schemas.openxmlformats.org/drawingml/2006/main">
               <a:ext uri="{FF2B5EF4-FFF2-40B4-BE49-F238E27FC236}">
-                <a16:creationId xmlns:a16="http://schemas.microsoft.com/office/drawing/2014/main" id="{6236E2F1-724E-4E5F-A965-C436603697E5}"/>
+                <a16:creationId xmlns:a16="http://schemas.microsoft.com/office/drawing/2014/main" id="{2E865386-8F03-43FF-A30B-479537EE13EF}"/>
               </a:ext>
             </a:extLst>
           </p:cNvPr>
@@ -12161,7 +12159,7 @@
           <p:cNvPr id="43" name="kicker-08-marker">
             <a:extLst xmlns:a="http://schemas.openxmlformats.org/drawingml/2006/main">
               <a:ext uri="{FF2B5EF4-FFF2-40B4-BE49-F238E27FC236}">
-                <a16:creationId xmlns:a16="http://schemas.microsoft.com/office/drawing/2014/main" id="{5A224095-0FE4-43DC-862E-59B1A22A170E}"/>
+                <a16:creationId xmlns:a16="http://schemas.microsoft.com/office/drawing/2014/main" id="{D52806CC-A28E-4165-80D0-C601FA9C7F2B}"/>
               </a:ext>
             </a:extLst>
           </p:cNvPr>
@@ -12196,7 +12194,7 @@
           <p:cNvPr id="44" name="kicker-08-label">
             <a:extLst xmlns:a="http://schemas.openxmlformats.org/drawingml/2006/main">
               <a:ext uri="{FF2B5EF4-FFF2-40B4-BE49-F238E27FC236}">
-                <a16:creationId xmlns:a16="http://schemas.microsoft.com/office/drawing/2014/main" id="{270D0130-180B-466E-BC1D-175058970C1C}"/>
+                <a16:creationId xmlns:a16="http://schemas.microsoft.com/office/drawing/2014/main" id="{447F6B27-E409-411E-8785-5FB93FA1628F}"/>
               </a:ext>
             </a:extLst>
           </p:cNvPr>
@@ -12260,7 +12258,7 @@
           <p:cNvPr id="45" name="">
             <a:extLst xmlns:a="http://schemas.openxmlformats.org/drawingml/2006/main">
               <a:ext uri="{FF2B5EF4-FFF2-40B4-BE49-F238E27FC236}">
-                <a16:creationId xmlns:a16="http://schemas.microsoft.com/office/drawing/2014/main" id="{31D9A002-7E90-4808-8649-1A5119B94B71}"/>
+                <a16:creationId xmlns:a16="http://schemas.microsoft.com/office/drawing/2014/main" id="{50288D32-F94E-49F6-9689-1803EFCFF29A}"/>
               </a:ext>
             </a:extLst>
           </p:cNvPr>
@@ -12324,7 +12322,7 @@
           <p:cNvPr id="46" name="">
             <a:extLst xmlns:a="http://schemas.openxmlformats.org/drawingml/2006/main">
               <a:ext uri="{FF2B5EF4-FFF2-40B4-BE49-F238E27FC236}">
-                <a16:creationId xmlns:a16="http://schemas.microsoft.com/office/drawing/2014/main" id="{F9AB1E57-BB37-4DD3-B166-9ABDAFB578B9}"/>
+                <a16:creationId xmlns:a16="http://schemas.microsoft.com/office/drawing/2014/main" id="{DFF97A03-B83B-400E-89B1-775520D1D5AF}"/>
               </a:ext>
             </a:extLst>
           </p:cNvPr>
@@ -12388,7 +12386,7 @@
           <p:cNvPr id="47" name="">
             <a:extLst xmlns:a="http://schemas.openxmlformats.org/drawingml/2006/main">
               <a:ext uri="{FF2B5EF4-FFF2-40B4-BE49-F238E27FC236}">
-                <a16:creationId xmlns:a16="http://schemas.microsoft.com/office/drawing/2014/main" id="{DBA81EFB-BAAF-411A-A306-B3501FBE428A}"/>
+                <a16:creationId xmlns:a16="http://schemas.microsoft.com/office/drawing/2014/main" id="{5FA80980-E056-44CD-9BAE-BAEC772B4BCD}"/>
               </a:ext>
             </a:extLst>
           </p:cNvPr>
@@ -12423,7 +12421,7 @@
           <p:cNvPr id="48" name="">
             <a:extLst xmlns:a="http://schemas.openxmlformats.org/drawingml/2006/main">
               <a:ext uri="{FF2B5EF4-FFF2-40B4-BE49-F238E27FC236}">
-                <a16:creationId xmlns:a16="http://schemas.microsoft.com/office/drawing/2014/main" id="{A886FB78-4F05-44DE-8E3D-17E375938606}"/>
+                <a16:creationId xmlns:a16="http://schemas.microsoft.com/office/drawing/2014/main" id="{CC7AA63D-BD06-4834-A156-64DECD481BCB}"/>
               </a:ext>
             </a:extLst>
           </p:cNvPr>
@@ -12458,7 +12456,7 @@
           <p:cNvPr id="49" name="">
             <a:extLst xmlns:a="http://schemas.openxmlformats.org/drawingml/2006/main">
               <a:ext uri="{FF2B5EF4-FFF2-40B4-BE49-F238E27FC236}">
-                <a16:creationId xmlns:a16="http://schemas.microsoft.com/office/drawing/2014/main" id="{C5BFDBA1-C31F-4814-80AB-E88038EF1C51}"/>
+                <a16:creationId xmlns:a16="http://schemas.microsoft.com/office/drawing/2014/main" id="{993E514C-42C0-4265-8B1C-741D9D53A1D1}"/>
               </a:ext>
             </a:extLst>
           </p:cNvPr>
@@ -12493,7 +12491,7 @@
           <p:cNvPr id="50" name="">
             <a:extLst xmlns:a="http://schemas.openxmlformats.org/drawingml/2006/main">
               <a:ext uri="{FF2B5EF4-FFF2-40B4-BE49-F238E27FC236}">
-                <a16:creationId xmlns:a16="http://schemas.microsoft.com/office/drawing/2014/main" id="{5199C4D5-A56B-47CC-A196-072B16AEDB0D}"/>
+                <a16:creationId xmlns:a16="http://schemas.microsoft.com/office/drawing/2014/main" id="{0F7C3B12-9776-44FB-8E0A-511A1550F960}"/>
               </a:ext>
             </a:extLst>
           </p:cNvPr>
@@ -12528,7 +12526,7 @@
           <p:cNvPr id="51" name="">
             <a:extLst xmlns:a="http://schemas.openxmlformats.org/drawingml/2006/main">
               <a:ext uri="{FF2B5EF4-FFF2-40B4-BE49-F238E27FC236}">
-                <a16:creationId xmlns:a16="http://schemas.microsoft.com/office/drawing/2014/main" id="{FDE8F30E-82E7-4D45-A656-0C00DDBF4FA9}"/>
+                <a16:creationId xmlns:a16="http://schemas.microsoft.com/office/drawing/2014/main" id="{A588FC6C-CC1C-497A-9E84-6FE180A4F0F8}"/>
               </a:ext>
             </a:extLst>
           </p:cNvPr>
@@ -12592,7 +12590,7 @@
           <p:cNvPr id="52" name="">
             <a:extLst xmlns:a="http://schemas.openxmlformats.org/drawingml/2006/main">
               <a:ext uri="{FF2B5EF4-FFF2-40B4-BE49-F238E27FC236}">
-                <a16:creationId xmlns:a16="http://schemas.microsoft.com/office/drawing/2014/main" id="{F3BE1A18-8F52-4475-881C-D7AE3A6F4C36}"/>
+                <a16:creationId xmlns:a16="http://schemas.microsoft.com/office/drawing/2014/main" id="{BACCE49B-7294-43F6-95F2-15AC76AABD55}"/>
               </a:ext>
             </a:extLst>
           </p:cNvPr>
@@ -12656,7 +12654,7 @@
           <p:cNvPr id="53" name="">
             <a:extLst xmlns:a="http://schemas.openxmlformats.org/drawingml/2006/main">
               <a:ext uri="{FF2B5EF4-FFF2-40B4-BE49-F238E27FC236}">
-                <a16:creationId xmlns:a16="http://schemas.microsoft.com/office/drawing/2014/main" id="{6839B7BC-8AA6-46DC-854C-F6DD415C04C1}"/>
+                <a16:creationId xmlns:a16="http://schemas.microsoft.com/office/drawing/2014/main" id="{2ED7235B-EC7B-489F-8BEE-DBD0B7E8BB62}"/>
               </a:ext>
             </a:extLst>
           </p:cNvPr>
@@ -12718,7 +12716,7 @@
     </p:spTree>
     <p:extLst>
       <p:ext uri="{BB962C8B-B14F-4D97-AF65-F5344CB8AC3E}">
-        <p14:creationId xmlns:p14="http://schemas.microsoft.com/office/powerpoint/2010/main" val="792762812"/>
+        <p14:creationId xmlns:p14="http://schemas.microsoft.com/office/powerpoint/2010/main" val="128270075"/>
       </p:ext>
     </p:extLst>
   </p:cSld>
@@ -12742,7 +12740,7 @@
           <p:cNvPr id="1" name="">
             <a:extLst xmlns:a="http://schemas.openxmlformats.org/drawingml/2006/main">
               <a:ext uri="{FF2B5EF4-FFF2-40B4-BE49-F238E27FC236}">
-                <a16:creationId xmlns:a16="http://schemas.microsoft.com/office/drawing/2014/main" id="{4EE38D82-B5A5-4B4B-9CDC-58F6588C0906}"/>
+                <a16:creationId xmlns:a16="http://schemas.microsoft.com/office/drawing/2014/main" id="{59A7ADCA-17A6-40BB-A57D-92F66775B432}"/>
               </a:ext>
             </a:extLst>
           </p:cNvPr>
@@ -12777,7 +12775,7 @@
           <p:cNvPr id="2" name="">
             <a:extLst xmlns:a="http://schemas.openxmlformats.org/drawingml/2006/main">
               <a:ext uri="{FF2B5EF4-FFF2-40B4-BE49-F238E27FC236}">
-                <a16:creationId xmlns:a16="http://schemas.microsoft.com/office/drawing/2014/main" id="{60025C73-DC66-443A-935E-8421E2348FEE}"/>
+                <a16:creationId xmlns:a16="http://schemas.microsoft.com/office/drawing/2014/main" id="{9FE94EDD-4A70-4977-8678-4054E8DE1313}"/>
               </a:ext>
             </a:extLst>
           </p:cNvPr>
@@ -12812,7 +12810,7 @@
           <p:cNvPr id="3" name="">
             <a:extLst xmlns:a="http://schemas.openxmlformats.org/drawingml/2006/main">
               <a:ext uri="{FF2B5EF4-FFF2-40B4-BE49-F238E27FC236}">
-                <a16:creationId xmlns:a16="http://schemas.microsoft.com/office/drawing/2014/main" id="{899C5FDC-9D20-49B4-9C2F-652C1CFA4363}"/>
+                <a16:creationId xmlns:a16="http://schemas.microsoft.com/office/drawing/2014/main" id="{172D8332-2B44-42B5-B0BF-7602DB2315DF}"/>
               </a:ext>
             </a:extLst>
           </p:cNvPr>
@@ -12847,7 +12845,7 @@
           <p:cNvPr id="4" name="kicker-08-marker">
             <a:extLst xmlns:a="http://schemas.openxmlformats.org/drawingml/2006/main">
               <a:ext uri="{FF2B5EF4-FFF2-40B4-BE49-F238E27FC236}">
-                <a16:creationId xmlns:a16="http://schemas.microsoft.com/office/drawing/2014/main" id="{0B49AFEC-6039-47B9-9A41-6249453A1DDD}"/>
+                <a16:creationId xmlns:a16="http://schemas.microsoft.com/office/drawing/2014/main" id="{9D8BEDA8-AEC3-448B-8DF5-F26F322BE63C}"/>
               </a:ext>
             </a:extLst>
           </p:cNvPr>
@@ -12882,7 +12880,7 @@
           <p:cNvPr id="5" name="kicker-08-label">
             <a:extLst xmlns:a="http://schemas.openxmlformats.org/drawingml/2006/main">
               <a:ext uri="{FF2B5EF4-FFF2-40B4-BE49-F238E27FC236}">
-                <a16:creationId xmlns:a16="http://schemas.microsoft.com/office/drawing/2014/main" id="{EEDC783F-CACC-479E-BBCD-CF742C535EFF}"/>
+                <a16:creationId xmlns:a16="http://schemas.microsoft.com/office/drawing/2014/main" id="{A6FC9FB4-0F4A-4B7F-B5ED-7CD6B0EE4D48}"/>
               </a:ext>
             </a:extLst>
           </p:cNvPr>
@@ -12946,7 +12944,7 @@
           <p:cNvPr id="6" name="">
             <a:extLst xmlns:a="http://schemas.openxmlformats.org/drawingml/2006/main">
               <a:ext uri="{FF2B5EF4-FFF2-40B4-BE49-F238E27FC236}">
-                <a16:creationId xmlns:a16="http://schemas.microsoft.com/office/drawing/2014/main" id="{32508159-E166-48C9-9712-5E11675134D3}"/>
+                <a16:creationId xmlns:a16="http://schemas.microsoft.com/office/drawing/2014/main" id="{4F7CEB44-14FC-4514-9182-E779A5240186}"/>
               </a:ext>
             </a:extLst>
           </p:cNvPr>
@@ -13010,7 +13008,7 @@
           <p:cNvPr id="7" name="">
             <a:extLst xmlns:a="http://schemas.openxmlformats.org/drawingml/2006/main">
               <a:ext uri="{FF2B5EF4-FFF2-40B4-BE49-F238E27FC236}">
-                <a16:creationId xmlns:a16="http://schemas.microsoft.com/office/drawing/2014/main" id="{D5A25503-2642-43B9-86D4-F85B572014A2}"/>
+                <a16:creationId xmlns:a16="http://schemas.microsoft.com/office/drawing/2014/main" id="{D42E80A7-24D8-483B-B93F-45B5C7AB2F3A}"/>
               </a:ext>
             </a:extLst>
           </p:cNvPr>
@@ -13074,7 +13072,7 @@
           <p:cNvPr id="8" name="">
             <a:extLst xmlns:a="http://schemas.openxmlformats.org/drawingml/2006/main">
               <a:ext uri="{FF2B5EF4-FFF2-40B4-BE49-F238E27FC236}">
-                <a16:creationId xmlns:a16="http://schemas.microsoft.com/office/drawing/2014/main" id="{14101B37-BF5B-417B-9F80-7C9B52FCFAC7}"/>
+                <a16:creationId xmlns:a16="http://schemas.microsoft.com/office/drawing/2014/main" id="{7B197885-2B19-4DF7-BF70-3869D912CC85}"/>
               </a:ext>
             </a:extLst>
           </p:cNvPr>
@@ -13109,7 +13107,7 @@
           <p:cNvPr id="9" name="">
             <a:extLst xmlns:a="http://schemas.openxmlformats.org/drawingml/2006/main">
               <a:ext uri="{FF2B5EF4-FFF2-40B4-BE49-F238E27FC236}">
-                <a16:creationId xmlns:a16="http://schemas.microsoft.com/office/drawing/2014/main" id="{C06053A6-BD48-4B6C-89B6-36D3A9B0C702}"/>
+                <a16:creationId xmlns:a16="http://schemas.microsoft.com/office/drawing/2014/main" id="{AAE694A2-AA73-4E39-A2F6-E43331EF81F6}"/>
               </a:ext>
             </a:extLst>
           </p:cNvPr>
@@ -13173,7 +13171,7 @@
           <p:cNvPr id="10" name="">
             <a:extLst xmlns:a="http://schemas.openxmlformats.org/drawingml/2006/main">
               <a:ext uri="{FF2B5EF4-FFF2-40B4-BE49-F238E27FC236}">
-                <a16:creationId xmlns:a16="http://schemas.microsoft.com/office/drawing/2014/main" id="{7B405AB8-7EFE-465C-8A5C-4A6BBA37A228}"/>
+                <a16:creationId xmlns:a16="http://schemas.microsoft.com/office/drawing/2014/main" id="{982CA5ED-F9B8-4363-9DBD-FE9DE6A1D159}"/>
               </a:ext>
             </a:extLst>
           </p:cNvPr>
@@ -13237,7 +13235,7 @@
           <p:cNvPr id="11" name="">
             <a:extLst xmlns:a="http://schemas.openxmlformats.org/drawingml/2006/main">
               <a:ext uri="{FF2B5EF4-FFF2-40B4-BE49-F238E27FC236}">
-                <a16:creationId xmlns:a16="http://schemas.microsoft.com/office/drawing/2014/main" id="{D9080735-9CF3-42E4-8687-5E98FBFD5F2B}"/>
+                <a16:creationId xmlns:a16="http://schemas.microsoft.com/office/drawing/2014/main" id="{2EED687D-187A-4883-A2CF-47CBDA3C7AEE}"/>
               </a:ext>
             </a:extLst>
           </p:cNvPr>
@@ -13301,7 +13299,7 @@
           <p:cNvPr id="12" name="">
             <a:extLst xmlns:a="http://schemas.openxmlformats.org/drawingml/2006/main">
               <a:ext uri="{FF2B5EF4-FFF2-40B4-BE49-F238E27FC236}">
-                <a16:creationId xmlns:a16="http://schemas.microsoft.com/office/drawing/2014/main" id="{4475D09F-4618-4C1B-A6C3-0FE7868AD05E}"/>
+                <a16:creationId xmlns:a16="http://schemas.microsoft.com/office/drawing/2014/main" id="{AD8984CC-62CC-4A11-A378-32B1B724294C}"/>
               </a:ext>
             </a:extLst>
           </p:cNvPr>
@@ -13336,7 +13334,7 @@
           <p:cNvPr id="13" name="">
             <a:extLst xmlns:a="http://schemas.openxmlformats.org/drawingml/2006/main">
               <a:ext uri="{FF2B5EF4-FFF2-40B4-BE49-F238E27FC236}">
-                <a16:creationId xmlns:a16="http://schemas.microsoft.com/office/drawing/2014/main" id="{A6510B04-8374-43AA-8C09-20A762FAB868}"/>
+                <a16:creationId xmlns:a16="http://schemas.microsoft.com/office/drawing/2014/main" id="{0433C5C0-0942-4BDB-859A-979DB9153F41}"/>
               </a:ext>
             </a:extLst>
           </p:cNvPr>
@@ -13369,7 +13367,7 @@
           <p:cNvPr id="14" name="">
             <a:extLst xmlns:a="http://schemas.openxmlformats.org/drawingml/2006/main">
               <a:ext uri="{FF2B5EF4-FFF2-40B4-BE49-F238E27FC236}">
-                <a16:creationId xmlns:a16="http://schemas.microsoft.com/office/drawing/2014/main" id="{2936F10F-6001-4A3A-B51C-CAADC74F041E}"/>
+                <a16:creationId xmlns:a16="http://schemas.microsoft.com/office/drawing/2014/main" id="{39438C8D-25E6-4F56-902C-CC3CFD462868}"/>
               </a:ext>
             </a:extLst>
           </p:cNvPr>
@@ -13404,7 +13402,7 @@
           <p:cNvPr id="15" name="">
             <a:extLst xmlns:a="http://schemas.openxmlformats.org/drawingml/2006/main">
               <a:ext uri="{FF2B5EF4-FFF2-40B4-BE49-F238E27FC236}">
-                <a16:creationId xmlns:a16="http://schemas.microsoft.com/office/drawing/2014/main" id="{38300CBC-DE58-4073-B4EB-273CCE90D76B}"/>
+                <a16:creationId xmlns:a16="http://schemas.microsoft.com/office/drawing/2014/main" id="{705C70B9-BBD2-42D1-B71C-8B6DC4B1B267}"/>
               </a:ext>
             </a:extLst>
           </p:cNvPr>
@@ -13468,7 +13466,7 @@
           <p:cNvPr id="16" name="">
             <a:extLst xmlns:a="http://schemas.openxmlformats.org/drawingml/2006/main">
               <a:ext uri="{FF2B5EF4-FFF2-40B4-BE49-F238E27FC236}">
-                <a16:creationId xmlns:a16="http://schemas.microsoft.com/office/drawing/2014/main" id="{65133748-6C7B-49A6-B112-5157EC2592CA}"/>
+                <a16:creationId xmlns:a16="http://schemas.microsoft.com/office/drawing/2014/main" id="{EE0E4A5D-1923-4741-9183-D4A1E06AD996}"/>
               </a:ext>
             </a:extLst>
           </p:cNvPr>
@@ -13503,7 +13501,7 @@
           <p:cNvPr id="17" name="">
             <a:extLst xmlns:a="http://schemas.openxmlformats.org/drawingml/2006/main">
               <a:ext uri="{FF2B5EF4-FFF2-40B4-BE49-F238E27FC236}">
-                <a16:creationId xmlns:a16="http://schemas.microsoft.com/office/drawing/2014/main" id="{8AE1C5D7-598E-43C9-A438-1D5F7C5EA7F4}"/>
+                <a16:creationId xmlns:a16="http://schemas.microsoft.com/office/drawing/2014/main" id="{AA3A324A-6F28-4C8A-9AD5-CD2F3ED58366}"/>
               </a:ext>
             </a:extLst>
           </p:cNvPr>
@@ -13567,7 +13565,7 @@
           <p:cNvPr id="18" name="">
             <a:extLst xmlns:a="http://schemas.openxmlformats.org/drawingml/2006/main">
               <a:ext uri="{FF2B5EF4-FFF2-40B4-BE49-F238E27FC236}">
-                <a16:creationId xmlns:a16="http://schemas.microsoft.com/office/drawing/2014/main" id="{52178AC2-B976-4AC6-80C5-AF503AEE5086}"/>
+                <a16:creationId xmlns:a16="http://schemas.microsoft.com/office/drawing/2014/main" id="{29C9A293-909D-491A-A088-563F484ABE0D}"/>
               </a:ext>
             </a:extLst>
           </p:cNvPr>
@@ -13602,7 +13600,7 @@
           <p:cNvPr id="19" name="">
             <a:extLst xmlns:a="http://schemas.openxmlformats.org/drawingml/2006/main">
               <a:ext uri="{FF2B5EF4-FFF2-40B4-BE49-F238E27FC236}">
-                <a16:creationId xmlns:a16="http://schemas.microsoft.com/office/drawing/2014/main" id="{C9CBFFD0-17F9-4BDE-B3FA-506B6A4E0B9E}"/>
+                <a16:creationId xmlns:a16="http://schemas.microsoft.com/office/drawing/2014/main" id="{B94C4809-0806-482E-A723-881DAD07040F}"/>
               </a:ext>
             </a:extLst>
           </p:cNvPr>
@@ -13666,7 +13664,7 @@
           <p:cNvPr id="20" name="">
             <a:extLst xmlns:a="http://schemas.openxmlformats.org/drawingml/2006/main">
               <a:ext uri="{FF2B5EF4-FFF2-40B4-BE49-F238E27FC236}">
-                <a16:creationId xmlns:a16="http://schemas.microsoft.com/office/drawing/2014/main" id="{B789C5C0-708F-48E3-A859-989A19C635C6}"/>
+                <a16:creationId xmlns:a16="http://schemas.microsoft.com/office/drawing/2014/main" id="{2DCF7B04-CF07-48A7-A1B6-9835367211A0}"/>
               </a:ext>
             </a:extLst>
           </p:cNvPr>
@@ -13701,7 +13699,7 @@
           <p:cNvPr id="21" name="">
             <a:extLst xmlns:a="http://schemas.openxmlformats.org/drawingml/2006/main">
               <a:ext uri="{FF2B5EF4-FFF2-40B4-BE49-F238E27FC236}">
-                <a16:creationId xmlns:a16="http://schemas.microsoft.com/office/drawing/2014/main" id="{A25A190B-43CD-4AA1-B08A-7EA711D9FB7F}"/>
+                <a16:creationId xmlns:a16="http://schemas.microsoft.com/office/drawing/2014/main" id="{23489E39-2E8C-4EE8-BE4F-94107F3A417E}"/>
               </a:ext>
             </a:extLst>
           </p:cNvPr>
@@ -13765,7 +13763,7 @@
           <p:cNvPr id="22" name="">
             <a:extLst xmlns:a="http://schemas.openxmlformats.org/drawingml/2006/main">
               <a:ext uri="{FF2B5EF4-FFF2-40B4-BE49-F238E27FC236}">
-                <a16:creationId xmlns:a16="http://schemas.microsoft.com/office/drawing/2014/main" id="{2B647427-1C45-490A-A8E3-45A792A6D5AC}"/>
+                <a16:creationId xmlns:a16="http://schemas.microsoft.com/office/drawing/2014/main" id="{B20CFD26-AD76-4559-8903-1EC6D83053F4}"/>
               </a:ext>
             </a:extLst>
           </p:cNvPr>
@@ -13800,7 +13798,7 @@
           <p:cNvPr id="23" name="">
             <a:extLst xmlns:a="http://schemas.openxmlformats.org/drawingml/2006/main">
               <a:ext uri="{FF2B5EF4-FFF2-40B4-BE49-F238E27FC236}">
-                <a16:creationId xmlns:a16="http://schemas.microsoft.com/office/drawing/2014/main" id="{60C12151-AA3C-449C-81CD-9F685A3D7F0C}"/>
+                <a16:creationId xmlns:a16="http://schemas.microsoft.com/office/drawing/2014/main" id="{47086D49-2EA3-41E7-84DF-6EE90F923653}"/>
               </a:ext>
             </a:extLst>
           </p:cNvPr>
@@ -13864,7 +13862,7 @@
           <p:cNvPr id="24" name="">
             <a:extLst xmlns:a="http://schemas.openxmlformats.org/drawingml/2006/main">
               <a:ext uri="{FF2B5EF4-FFF2-40B4-BE49-F238E27FC236}">
-                <a16:creationId xmlns:a16="http://schemas.microsoft.com/office/drawing/2014/main" id="{5D8510C3-B3F3-4A75-810F-7F3CDE713F41}"/>
+                <a16:creationId xmlns:a16="http://schemas.microsoft.com/office/drawing/2014/main" id="{5CF563D1-6A68-49AB-BA22-62D81A2F90DF}"/>
               </a:ext>
             </a:extLst>
           </p:cNvPr>
@@ -13899,7 +13897,7 @@
           <p:cNvPr id="25" name="">
             <a:extLst xmlns:a="http://schemas.openxmlformats.org/drawingml/2006/main">
               <a:ext uri="{FF2B5EF4-FFF2-40B4-BE49-F238E27FC236}">
-                <a16:creationId xmlns:a16="http://schemas.microsoft.com/office/drawing/2014/main" id="{CDC5C6E1-5F47-480E-B6BD-619CCC986F7B}"/>
+                <a16:creationId xmlns:a16="http://schemas.microsoft.com/office/drawing/2014/main" id="{89C2EF7A-55F3-486D-9CBB-5A0A0FF1FFB5}"/>
               </a:ext>
             </a:extLst>
           </p:cNvPr>
@@ -13963,7 +13961,7 @@
           <p:cNvPr id="26" name="">
             <a:extLst xmlns:a="http://schemas.openxmlformats.org/drawingml/2006/main">
               <a:ext uri="{FF2B5EF4-FFF2-40B4-BE49-F238E27FC236}">
-                <a16:creationId xmlns:a16="http://schemas.microsoft.com/office/drawing/2014/main" id="{F3F611E9-FB54-4CA1-B717-2B6EF81CEF19}"/>
+                <a16:creationId xmlns:a16="http://schemas.microsoft.com/office/drawing/2014/main" id="{5BF00834-2833-4229-9116-E1AE7CC7836E}"/>
               </a:ext>
             </a:extLst>
           </p:cNvPr>
@@ -13998,7 +13996,7 @@
           <p:cNvPr id="27" name="">
             <a:extLst xmlns:a="http://schemas.openxmlformats.org/drawingml/2006/main">
               <a:ext uri="{FF2B5EF4-FFF2-40B4-BE49-F238E27FC236}">
-                <a16:creationId xmlns:a16="http://schemas.microsoft.com/office/drawing/2014/main" id="{ADEA2317-CB06-43E4-B114-1B3EA4753315}"/>
+                <a16:creationId xmlns:a16="http://schemas.microsoft.com/office/drawing/2014/main" id="{53849E68-E165-428B-92E0-DB3E722EEF89}"/>
               </a:ext>
             </a:extLst>
           </p:cNvPr>
@@ -14062,7 +14060,7 @@
           <p:cNvPr id="28" name="">
             <a:extLst xmlns:a="http://schemas.openxmlformats.org/drawingml/2006/main">
               <a:ext uri="{FF2B5EF4-FFF2-40B4-BE49-F238E27FC236}">
-                <a16:creationId xmlns:a16="http://schemas.microsoft.com/office/drawing/2014/main" id="{7B7A3F05-CE2C-4D9D-85FA-FB0B2A2DD53D}"/>
+                <a16:creationId xmlns:a16="http://schemas.microsoft.com/office/drawing/2014/main" id="{F4982007-CE50-4C84-AB81-1976BB3C7141}"/>
               </a:ext>
             </a:extLst>
           </p:cNvPr>
@@ -14097,7 +14095,7 @@
           <p:cNvPr id="29" name="">
             <a:extLst xmlns:a="http://schemas.openxmlformats.org/drawingml/2006/main">
               <a:ext uri="{FF2B5EF4-FFF2-40B4-BE49-F238E27FC236}">
-                <a16:creationId xmlns:a16="http://schemas.microsoft.com/office/drawing/2014/main" id="{827C1C73-5A4B-41B9-8542-150040FC863F}"/>
+                <a16:creationId xmlns:a16="http://schemas.microsoft.com/office/drawing/2014/main" id="{EFFA71AD-D80E-45FC-B980-E9BB3804A49C}"/>
               </a:ext>
             </a:extLst>
           </p:cNvPr>
@@ -14161,7 +14159,7 @@
           <p:cNvPr id="30" name="">
             <a:extLst xmlns:a="http://schemas.openxmlformats.org/drawingml/2006/main">
               <a:ext uri="{FF2B5EF4-FFF2-40B4-BE49-F238E27FC236}">
-                <a16:creationId xmlns:a16="http://schemas.microsoft.com/office/drawing/2014/main" id="{4477CDB0-997D-4B8D-A21F-939BA3F0A392}"/>
+                <a16:creationId xmlns:a16="http://schemas.microsoft.com/office/drawing/2014/main" id="{FB3297A9-81A8-4432-B95A-75C184A82AAC}"/>
               </a:ext>
             </a:extLst>
           </p:cNvPr>
@@ -14196,7 +14194,7 @@
           <p:cNvPr id="31" name="">
             <a:extLst xmlns:a="http://schemas.openxmlformats.org/drawingml/2006/main">
               <a:ext uri="{FF2B5EF4-FFF2-40B4-BE49-F238E27FC236}">
-                <a16:creationId xmlns:a16="http://schemas.microsoft.com/office/drawing/2014/main" id="{DC580F64-C6AC-4E99-902E-FB006F6BFEFA}"/>
+                <a16:creationId xmlns:a16="http://schemas.microsoft.com/office/drawing/2014/main" id="{8D0B45BB-1BA2-46E7-B431-C27426F9FF2B}"/>
               </a:ext>
             </a:extLst>
           </p:cNvPr>
@@ -14260,7 +14258,7 @@
           <p:cNvPr id="32" name="">
             <a:extLst xmlns:a="http://schemas.openxmlformats.org/drawingml/2006/main">
               <a:ext uri="{FF2B5EF4-FFF2-40B4-BE49-F238E27FC236}">
-                <a16:creationId xmlns:a16="http://schemas.microsoft.com/office/drawing/2014/main" id="{07764B39-FF8F-4FDA-8AFA-98ADFC975AD9}"/>
+                <a16:creationId xmlns:a16="http://schemas.microsoft.com/office/drawing/2014/main" id="{36269958-DF88-4ECA-B7A2-75AFD3E2B3A6}"/>
               </a:ext>
             </a:extLst>
           </p:cNvPr>
@@ -14295,7 +14293,7 @@
           <p:cNvPr id="33" name="">
             <a:extLst xmlns:a="http://schemas.openxmlformats.org/drawingml/2006/main">
               <a:ext uri="{FF2B5EF4-FFF2-40B4-BE49-F238E27FC236}">
-                <a16:creationId xmlns:a16="http://schemas.microsoft.com/office/drawing/2014/main" id="{6F974B23-B824-4402-8F2B-D0D04482920A}"/>
+                <a16:creationId xmlns:a16="http://schemas.microsoft.com/office/drawing/2014/main" id="{C0E0448B-427D-4E22-967B-C00A62DA641F}"/>
               </a:ext>
             </a:extLst>
           </p:cNvPr>
@@ -14359,7 +14357,7 @@
           <p:cNvPr id="34" name="">
             <a:extLst xmlns:a="http://schemas.openxmlformats.org/drawingml/2006/main">
               <a:ext uri="{FF2B5EF4-FFF2-40B4-BE49-F238E27FC236}">
-                <a16:creationId xmlns:a16="http://schemas.microsoft.com/office/drawing/2014/main" id="{531E1B48-404D-4ED2-88FC-BDA87A7EB329}"/>
+                <a16:creationId xmlns:a16="http://schemas.microsoft.com/office/drawing/2014/main" id="{E9DFEA6B-B23A-4F05-8333-B4B9C009389A}"/>
               </a:ext>
             </a:extLst>
           </p:cNvPr>
@@ -14394,7 +14392,7 @@
           <p:cNvPr id="35" name="">
             <a:extLst xmlns:a="http://schemas.openxmlformats.org/drawingml/2006/main">
               <a:ext uri="{FF2B5EF4-FFF2-40B4-BE49-F238E27FC236}">
-                <a16:creationId xmlns:a16="http://schemas.microsoft.com/office/drawing/2014/main" id="{335B72AD-967A-484D-8DED-F58607747D79}"/>
+                <a16:creationId xmlns:a16="http://schemas.microsoft.com/office/drawing/2014/main" id="{2694650E-C9C9-4306-BF45-F51DFECBB7F4}"/>
               </a:ext>
             </a:extLst>
           </p:cNvPr>
@@ -14458,7 +14456,7 @@
           <p:cNvPr id="36" name="">
             <a:extLst xmlns:a="http://schemas.openxmlformats.org/drawingml/2006/main">
               <a:ext uri="{FF2B5EF4-FFF2-40B4-BE49-F238E27FC236}">
-                <a16:creationId xmlns:a16="http://schemas.microsoft.com/office/drawing/2014/main" id="{E533AC15-2BC4-4843-B7EA-A5E2EF950D94}"/>
+                <a16:creationId xmlns:a16="http://schemas.microsoft.com/office/drawing/2014/main" id="{A1D7D0A3-E0D5-41F2-8FE0-62D32D6239A9}"/>
               </a:ext>
             </a:extLst>
           </p:cNvPr>
@@ -14491,7 +14489,7 @@
           <p:cNvPr id="37" name="">
             <a:extLst xmlns:a="http://schemas.openxmlformats.org/drawingml/2006/main">
               <a:ext uri="{FF2B5EF4-FFF2-40B4-BE49-F238E27FC236}">
-                <a16:creationId xmlns:a16="http://schemas.microsoft.com/office/drawing/2014/main" id="{59AFBE53-E746-4278-BA9E-C1929FFCC106}"/>
+                <a16:creationId xmlns:a16="http://schemas.microsoft.com/office/drawing/2014/main" id="{F86E7CC6-2BE1-4C60-80C1-D9679B7E8071}"/>
               </a:ext>
             </a:extLst>
           </p:cNvPr>
@@ -14526,7 +14524,7 @@
           <p:cNvPr id="38" name="">
             <a:extLst xmlns:a="http://schemas.openxmlformats.org/drawingml/2006/main">
               <a:ext uri="{FF2B5EF4-FFF2-40B4-BE49-F238E27FC236}">
-                <a16:creationId xmlns:a16="http://schemas.microsoft.com/office/drawing/2014/main" id="{649C5DBE-F543-434B-9672-8112F379602B}"/>
+                <a16:creationId xmlns:a16="http://schemas.microsoft.com/office/drawing/2014/main" id="{704F594E-5C3F-483F-A1A8-934EB99CB2FE}"/>
               </a:ext>
             </a:extLst>
           </p:cNvPr>
@@ -14590,7 +14588,7 @@
           <p:cNvPr id="39" name="">
             <a:extLst xmlns:a="http://schemas.openxmlformats.org/drawingml/2006/main">
               <a:ext uri="{FF2B5EF4-FFF2-40B4-BE49-F238E27FC236}">
-                <a16:creationId xmlns:a16="http://schemas.microsoft.com/office/drawing/2014/main" id="{5F2067C6-BC17-45AE-BE99-B08E3C7F51DE}"/>
+                <a16:creationId xmlns:a16="http://schemas.microsoft.com/office/drawing/2014/main" id="{AF78CA85-0D31-47D0-AA10-52E1DFA549F2}"/>
               </a:ext>
             </a:extLst>
           </p:cNvPr>
@@ -14644,7 +14642,7 @@
                 <a:ea typeface="Aptos Display"/>
                 <a:cs typeface="Aptos Display"/>
               </a:rPr>
-              <a:t>The artifact passes only if sales, marketing, RevOps, leadership, and an AI agent could inspect it and know what to do next.</a:t>
+              <a:t>The artifact passes only if sales, marketing, RevOps, and leadership can inspect it and know what to do next.</a:t>
             </a:r>
           </a:p>
         </p:txBody>
@@ -14654,7 +14652,7 @@
           <p:cNvPr id="40" name="">
             <a:extLst xmlns:a="http://schemas.openxmlformats.org/drawingml/2006/main">
               <a:ext uri="{FF2B5EF4-FFF2-40B4-BE49-F238E27FC236}">
-                <a16:creationId xmlns:a16="http://schemas.microsoft.com/office/drawing/2014/main" id="{D765B7F9-E9E4-47BA-9FEE-E4C60BD5E479}"/>
+                <a16:creationId xmlns:a16="http://schemas.microsoft.com/office/drawing/2014/main" id="{5FDDD561-EF7E-4825-A747-80E8CB4FF64C}"/>
               </a:ext>
             </a:extLst>
           </p:cNvPr>
@@ -14718,7 +14716,7 @@
           <p:cNvPr id="41" name="">
             <a:extLst xmlns:a="http://schemas.openxmlformats.org/drawingml/2006/main">
               <a:ext uri="{FF2B5EF4-FFF2-40B4-BE49-F238E27FC236}">
-                <a16:creationId xmlns:a16="http://schemas.microsoft.com/office/drawing/2014/main" id="{F0886E33-5320-4586-9BDC-01D7FBA0D5EF}"/>
+                <a16:creationId xmlns:a16="http://schemas.microsoft.com/office/drawing/2014/main" id="{F3E99957-45F9-4DE0-80E6-E7BEC4F810FA}"/>
               </a:ext>
             </a:extLst>
           </p:cNvPr>
@@ -14753,7 +14751,7 @@
           <p:cNvPr id="42" name="">
             <a:extLst xmlns:a="http://schemas.openxmlformats.org/drawingml/2006/main">
               <a:ext uri="{FF2B5EF4-FFF2-40B4-BE49-F238E27FC236}">
-                <a16:creationId xmlns:a16="http://schemas.microsoft.com/office/drawing/2014/main" id="{DD900609-1EC8-4347-B0CB-E4A80EA4FC24}"/>
+                <a16:creationId xmlns:a16="http://schemas.microsoft.com/office/drawing/2014/main" id="{81CA4D21-0DA5-42BA-9A31-5EEF573EA9B2}"/>
               </a:ext>
             </a:extLst>
           </p:cNvPr>
@@ -14817,7 +14815,7 @@
           <p:cNvPr id="43" name="">
             <a:extLst xmlns:a="http://schemas.openxmlformats.org/drawingml/2006/main">
               <a:ext uri="{FF2B5EF4-FFF2-40B4-BE49-F238E27FC236}">
-                <a16:creationId xmlns:a16="http://schemas.microsoft.com/office/drawing/2014/main" id="{07A2A510-6918-42C3-A712-AE26D9134148}"/>
+                <a16:creationId xmlns:a16="http://schemas.microsoft.com/office/drawing/2014/main" id="{0F42670A-A306-449C-BBA7-4EEB537C3940}"/>
               </a:ext>
             </a:extLst>
           </p:cNvPr>
@@ -14881,7 +14879,7 @@
           <p:cNvPr id="44" name="">
             <a:extLst xmlns:a="http://schemas.openxmlformats.org/drawingml/2006/main">
               <a:ext uri="{FF2B5EF4-FFF2-40B4-BE49-F238E27FC236}">
-                <a16:creationId xmlns:a16="http://schemas.microsoft.com/office/drawing/2014/main" id="{12377C2A-FCBD-4E51-B507-8F6F17CC1E0E}"/>
+                <a16:creationId xmlns:a16="http://schemas.microsoft.com/office/drawing/2014/main" id="{771570D3-B724-4EBD-BBAD-5487A3BEB16C}"/>
               </a:ext>
             </a:extLst>
           </p:cNvPr>
@@ -14945,7 +14943,7 @@
           <p:cNvPr id="45" name="">
             <a:extLst xmlns:a="http://schemas.openxmlformats.org/drawingml/2006/main">
               <a:ext uri="{FF2B5EF4-FFF2-40B4-BE49-F238E27FC236}">
-                <a16:creationId xmlns:a16="http://schemas.microsoft.com/office/drawing/2014/main" id="{49059A96-1C73-4D41-90E9-E1487A9319EE}"/>
+                <a16:creationId xmlns:a16="http://schemas.microsoft.com/office/drawing/2014/main" id="{76EEF73E-32F5-4492-9E83-5A39A637B453}"/>
               </a:ext>
             </a:extLst>
           </p:cNvPr>
@@ -14980,7 +14978,7 @@
           <p:cNvPr id="46" name="">
             <a:extLst xmlns:a="http://schemas.openxmlformats.org/drawingml/2006/main">
               <a:ext uri="{FF2B5EF4-FFF2-40B4-BE49-F238E27FC236}">
-                <a16:creationId xmlns:a16="http://schemas.microsoft.com/office/drawing/2014/main" id="{67498A30-995B-4BA6-AAC3-425B961B526F}"/>
+                <a16:creationId xmlns:a16="http://schemas.microsoft.com/office/drawing/2014/main" id="{0EF5741F-90C8-4727-85A5-4A7D9A26FFCB}"/>
               </a:ext>
             </a:extLst>
           </p:cNvPr>
@@ -15015,7 +15013,7 @@
           <p:cNvPr id="47" name="">
             <a:extLst xmlns:a="http://schemas.openxmlformats.org/drawingml/2006/main">
               <a:ext uri="{FF2B5EF4-FFF2-40B4-BE49-F238E27FC236}">
-                <a16:creationId xmlns:a16="http://schemas.microsoft.com/office/drawing/2014/main" id="{6A5FD239-C2BD-4F2E-B1AA-3EFB9570E5D0}"/>
+                <a16:creationId xmlns:a16="http://schemas.microsoft.com/office/drawing/2014/main" id="{12D71A18-5B21-4614-862C-8AC39636D1AB}"/>
               </a:ext>
             </a:extLst>
           </p:cNvPr>
@@ -15050,7 +15048,7 @@
           <p:cNvPr id="48" name="kicker-08-marker">
             <a:extLst xmlns:a="http://schemas.openxmlformats.org/drawingml/2006/main">
               <a:ext uri="{FF2B5EF4-FFF2-40B4-BE49-F238E27FC236}">
-                <a16:creationId xmlns:a16="http://schemas.microsoft.com/office/drawing/2014/main" id="{36D8BEA5-9157-49ED-816B-D90F5E7563B5}"/>
+                <a16:creationId xmlns:a16="http://schemas.microsoft.com/office/drawing/2014/main" id="{928895D1-FFA9-4F25-8BDD-F22EB3E99027}"/>
               </a:ext>
             </a:extLst>
           </p:cNvPr>
@@ -15085,7 +15083,7 @@
           <p:cNvPr id="49" name="kicker-08-label">
             <a:extLst xmlns:a="http://schemas.openxmlformats.org/drawingml/2006/main">
               <a:ext uri="{FF2B5EF4-FFF2-40B4-BE49-F238E27FC236}">
-                <a16:creationId xmlns:a16="http://schemas.microsoft.com/office/drawing/2014/main" id="{1800312F-7AF0-4FF1-B411-09866833EF36}"/>
+                <a16:creationId xmlns:a16="http://schemas.microsoft.com/office/drawing/2014/main" id="{13782474-059C-4734-BCF8-0C9ECFAB7209}"/>
               </a:ext>
             </a:extLst>
           </p:cNvPr>
@@ -15149,7 +15147,7 @@
           <p:cNvPr id="50" name="">
             <a:extLst xmlns:a="http://schemas.openxmlformats.org/drawingml/2006/main">
               <a:ext uri="{FF2B5EF4-FFF2-40B4-BE49-F238E27FC236}">
-                <a16:creationId xmlns:a16="http://schemas.microsoft.com/office/drawing/2014/main" id="{9F38435E-3ADB-4D3F-BC11-E7AC0306D7EC}"/>
+                <a16:creationId xmlns:a16="http://schemas.microsoft.com/office/drawing/2014/main" id="{1FBCD5C7-BFA8-4527-92C8-42162C40A824}"/>
               </a:ext>
             </a:extLst>
           </p:cNvPr>
@@ -15213,7 +15211,7 @@
           <p:cNvPr id="51" name="">
             <a:extLst xmlns:a="http://schemas.openxmlformats.org/drawingml/2006/main">
               <a:ext uri="{FF2B5EF4-FFF2-40B4-BE49-F238E27FC236}">
-                <a16:creationId xmlns:a16="http://schemas.microsoft.com/office/drawing/2014/main" id="{112E4DC8-F4D9-4C31-87EB-A75A9611FB42}"/>
+                <a16:creationId xmlns:a16="http://schemas.microsoft.com/office/drawing/2014/main" id="{DD29A38F-510D-4D81-B420-56B48ECC3849}"/>
               </a:ext>
             </a:extLst>
           </p:cNvPr>
@@ -15277,7 +15275,7 @@
           <p:cNvPr id="52" name="">
             <a:extLst xmlns:a="http://schemas.openxmlformats.org/drawingml/2006/main">
               <a:ext uri="{FF2B5EF4-FFF2-40B4-BE49-F238E27FC236}">
-                <a16:creationId xmlns:a16="http://schemas.microsoft.com/office/drawing/2014/main" id="{9B57D203-2865-467A-A9E0-77DC05DCDB77}"/>
+                <a16:creationId xmlns:a16="http://schemas.microsoft.com/office/drawing/2014/main" id="{5711B4D6-8550-43C3-96AA-28F29D9FAC3B}"/>
               </a:ext>
             </a:extLst>
           </p:cNvPr>
@@ -15312,7 +15310,7 @@
           <p:cNvPr id="53" name="">
             <a:extLst xmlns:a="http://schemas.openxmlformats.org/drawingml/2006/main">
               <a:ext uri="{FF2B5EF4-FFF2-40B4-BE49-F238E27FC236}">
-                <a16:creationId xmlns:a16="http://schemas.microsoft.com/office/drawing/2014/main" id="{2B464EDF-0FE8-43C9-BE6C-846A0675849C}"/>
+                <a16:creationId xmlns:a16="http://schemas.microsoft.com/office/drawing/2014/main" id="{6C3414AA-E75C-4FB6-A68B-94794B8400E1}"/>
               </a:ext>
             </a:extLst>
           </p:cNvPr>
@@ -15347,7 +15345,7 @@
           <p:cNvPr id="54" name="">
             <a:extLst xmlns:a="http://schemas.openxmlformats.org/drawingml/2006/main">
               <a:ext uri="{FF2B5EF4-FFF2-40B4-BE49-F238E27FC236}">
-                <a16:creationId xmlns:a16="http://schemas.microsoft.com/office/drawing/2014/main" id="{43FDA9EE-91E5-4381-893C-91DF19DE41A0}"/>
+                <a16:creationId xmlns:a16="http://schemas.microsoft.com/office/drawing/2014/main" id="{A4946587-E644-4CC2-934A-8DE48C77B7A0}"/>
               </a:ext>
             </a:extLst>
           </p:cNvPr>
@@ -15382,7 +15380,7 @@
           <p:cNvPr id="55" name="">
             <a:extLst xmlns:a="http://schemas.openxmlformats.org/drawingml/2006/main">
               <a:ext uri="{FF2B5EF4-FFF2-40B4-BE49-F238E27FC236}">
-                <a16:creationId xmlns:a16="http://schemas.microsoft.com/office/drawing/2014/main" id="{DB0576DF-80C7-4309-8463-705E762DD625}"/>
+                <a16:creationId xmlns:a16="http://schemas.microsoft.com/office/drawing/2014/main" id="{DD0ADD23-B15D-4E45-8A72-D7244A16BC1B}"/>
               </a:ext>
             </a:extLst>
           </p:cNvPr>
@@ -15417,7 +15415,7 @@
           <p:cNvPr id="56" name="">
             <a:extLst xmlns:a="http://schemas.openxmlformats.org/drawingml/2006/main">
               <a:ext uri="{FF2B5EF4-FFF2-40B4-BE49-F238E27FC236}">
-                <a16:creationId xmlns:a16="http://schemas.microsoft.com/office/drawing/2014/main" id="{EB0F4985-47DE-48B0-A756-35A3460A8596}"/>
+                <a16:creationId xmlns:a16="http://schemas.microsoft.com/office/drawing/2014/main" id="{42758291-9D36-4643-ADD9-4A44DCA66ED0}"/>
               </a:ext>
             </a:extLst>
           </p:cNvPr>
@@ -15481,7 +15479,7 @@
           <p:cNvPr id="57" name="">
             <a:extLst xmlns:a="http://schemas.openxmlformats.org/drawingml/2006/main">
               <a:ext uri="{FF2B5EF4-FFF2-40B4-BE49-F238E27FC236}">
-                <a16:creationId xmlns:a16="http://schemas.microsoft.com/office/drawing/2014/main" id="{A3CADDA2-C015-453B-AE6C-7506A33AD13D}"/>
+                <a16:creationId xmlns:a16="http://schemas.microsoft.com/office/drawing/2014/main" id="{340BA66E-4562-497E-911A-55988A279AB8}"/>
               </a:ext>
             </a:extLst>
           </p:cNvPr>
@@ -15545,7 +15543,7 @@
           <p:cNvPr id="58" name="">
             <a:extLst xmlns:a="http://schemas.openxmlformats.org/drawingml/2006/main">
               <a:ext uri="{FF2B5EF4-FFF2-40B4-BE49-F238E27FC236}">
-                <a16:creationId xmlns:a16="http://schemas.microsoft.com/office/drawing/2014/main" id="{A73EB8D7-75E3-439F-A97D-10D1B844B6C8}"/>
+                <a16:creationId xmlns:a16="http://schemas.microsoft.com/office/drawing/2014/main" id="{5A04F618-0C80-49DE-AC92-81573EDF4700}"/>
               </a:ext>
             </a:extLst>
           </p:cNvPr>
@@ -15607,7 +15605,7 @@
     </p:spTree>
     <p:extLst>
       <p:ext uri="{BB962C8B-B14F-4D97-AF65-F5344CB8AC3E}">
-        <p14:creationId xmlns:p14="http://schemas.microsoft.com/office/powerpoint/2010/main" val="1355976956"/>
+        <p14:creationId xmlns:p14="http://schemas.microsoft.com/office/powerpoint/2010/main" val="37080636"/>
       </p:ext>
     </p:extLst>
   </p:cSld>
@@ -15631,7 +15629,7 @@
           <p:cNvPr id="1" name="">
             <a:extLst xmlns:a="http://schemas.openxmlformats.org/drawingml/2006/main">
               <a:ext uri="{FF2B5EF4-FFF2-40B4-BE49-F238E27FC236}">
-                <a16:creationId xmlns:a16="http://schemas.microsoft.com/office/drawing/2014/main" id="{9CCFEC91-6CEB-48C1-A477-91CD1256A222}"/>
+                <a16:creationId xmlns:a16="http://schemas.microsoft.com/office/drawing/2014/main" id="{C8CAC7DC-22D1-4D16-909A-6C6C22D45944}"/>
               </a:ext>
             </a:extLst>
           </p:cNvPr>
@@ -15666,7 +15664,7 @@
           <p:cNvPr id="2" name="">
             <a:extLst xmlns:a="http://schemas.openxmlformats.org/drawingml/2006/main">
               <a:ext uri="{FF2B5EF4-FFF2-40B4-BE49-F238E27FC236}">
-                <a16:creationId xmlns:a16="http://schemas.microsoft.com/office/drawing/2014/main" id="{39A719C3-6FBC-4F01-B657-0922EF4BEFDC}"/>
+                <a16:creationId xmlns:a16="http://schemas.microsoft.com/office/drawing/2014/main" id="{BE6B6CC5-8F3B-4EC6-9F3E-8261FDA96D97}"/>
               </a:ext>
             </a:extLst>
           </p:cNvPr>
@@ -15701,7 +15699,7 @@
           <p:cNvPr id="3" name="">
             <a:extLst xmlns:a="http://schemas.openxmlformats.org/drawingml/2006/main">
               <a:ext uri="{FF2B5EF4-FFF2-40B4-BE49-F238E27FC236}">
-                <a16:creationId xmlns:a16="http://schemas.microsoft.com/office/drawing/2014/main" id="{D6B8542C-AD97-4011-8C5C-9BAD79107EB8}"/>
+                <a16:creationId xmlns:a16="http://schemas.microsoft.com/office/drawing/2014/main" id="{9E74E730-D523-4D6B-A056-8913B1B2559B}"/>
               </a:ext>
             </a:extLst>
           </p:cNvPr>
@@ -15736,7 +15734,7 @@
           <p:cNvPr id="4" name="kicker-08-marker">
             <a:extLst xmlns:a="http://schemas.openxmlformats.org/drawingml/2006/main">
               <a:ext uri="{FF2B5EF4-FFF2-40B4-BE49-F238E27FC236}">
-                <a16:creationId xmlns:a16="http://schemas.microsoft.com/office/drawing/2014/main" id="{0A224AAD-167F-433B-84B5-591CAAD3E544}"/>
+                <a16:creationId xmlns:a16="http://schemas.microsoft.com/office/drawing/2014/main" id="{B7361C34-336D-4567-8340-0BD65DCD9ED4}"/>
               </a:ext>
             </a:extLst>
           </p:cNvPr>
@@ -15771,7 +15769,7 @@
           <p:cNvPr id="5" name="kicker-08-label">
             <a:extLst xmlns:a="http://schemas.openxmlformats.org/drawingml/2006/main">
               <a:ext uri="{FF2B5EF4-FFF2-40B4-BE49-F238E27FC236}">
-                <a16:creationId xmlns:a16="http://schemas.microsoft.com/office/drawing/2014/main" id="{6D56F67E-F716-4DAC-A823-AA1AFC34319B}"/>
+                <a16:creationId xmlns:a16="http://schemas.microsoft.com/office/drawing/2014/main" id="{025CC286-0F8C-4167-92C2-E7813A88728E}"/>
               </a:ext>
             </a:extLst>
           </p:cNvPr>
@@ -15835,7 +15833,7 @@
           <p:cNvPr id="6" name="">
             <a:extLst xmlns:a="http://schemas.openxmlformats.org/drawingml/2006/main">
               <a:ext uri="{FF2B5EF4-FFF2-40B4-BE49-F238E27FC236}">
-                <a16:creationId xmlns:a16="http://schemas.microsoft.com/office/drawing/2014/main" id="{178C51F3-27E6-4CCE-BCFF-6EEDF6C0DD29}"/>
+                <a16:creationId xmlns:a16="http://schemas.microsoft.com/office/drawing/2014/main" id="{EEEDE3F1-64F7-4846-B7F0-E0D2932011D8}"/>
               </a:ext>
             </a:extLst>
           </p:cNvPr>
@@ -15899,7 +15897,7 @@
           <p:cNvPr id="7" name="">
             <a:extLst xmlns:a="http://schemas.openxmlformats.org/drawingml/2006/main">
               <a:ext uri="{FF2B5EF4-FFF2-40B4-BE49-F238E27FC236}">
-                <a16:creationId xmlns:a16="http://schemas.microsoft.com/office/drawing/2014/main" id="{115DA0BA-5322-493D-87EF-8BD7EA157FB0}"/>
+                <a16:creationId xmlns:a16="http://schemas.microsoft.com/office/drawing/2014/main" id="{B4486F85-ED4F-4386-B0D1-CC6545E1A004}"/>
               </a:ext>
             </a:extLst>
           </p:cNvPr>
@@ -15932,7 +15930,7 @@
           <p:cNvPr id="8" name="">
             <a:extLst xmlns:a="http://schemas.openxmlformats.org/drawingml/2006/main">
               <a:ext uri="{FF2B5EF4-FFF2-40B4-BE49-F238E27FC236}">
-                <a16:creationId xmlns:a16="http://schemas.microsoft.com/office/drawing/2014/main" id="{E0778E29-B806-4806-B776-6A28B75C6A23}"/>
+                <a16:creationId xmlns:a16="http://schemas.microsoft.com/office/drawing/2014/main" id="{C4D069E4-AF40-48AD-A4B5-6D1491AD00BE}"/>
               </a:ext>
             </a:extLst>
           </p:cNvPr>
@@ -15967,7 +15965,7 @@
           <p:cNvPr id="9" name="">
             <a:extLst xmlns:a="http://schemas.openxmlformats.org/drawingml/2006/main">
               <a:ext uri="{FF2B5EF4-FFF2-40B4-BE49-F238E27FC236}">
-                <a16:creationId xmlns:a16="http://schemas.microsoft.com/office/drawing/2014/main" id="{4E69E0FC-E82C-418D-AF61-7CEA83B1F9E4}"/>
+                <a16:creationId xmlns:a16="http://schemas.microsoft.com/office/drawing/2014/main" id="{F98B6AE2-56C8-4F93-B812-FD536DDA388E}"/>
               </a:ext>
             </a:extLst>
           </p:cNvPr>
@@ -16031,7 +16029,7 @@
           <p:cNvPr id="10" name="">
             <a:extLst xmlns:a="http://schemas.openxmlformats.org/drawingml/2006/main">
               <a:ext uri="{FF2B5EF4-FFF2-40B4-BE49-F238E27FC236}">
-                <a16:creationId xmlns:a16="http://schemas.microsoft.com/office/drawing/2014/main" id="{ED78DD25-F640-4DAD-BBAD-FDC13A5B01FF}"/>
+                <a16:creationId xmlns:a16="http://schemas.microsoft.com/office/drawing/2014/main" id="{A3FB8DF9-F73F-45BA-A661-9DECF4F0F913}"/>
               </a:ext>
             </a:extLst>
           </p:cNvPr>
@@ -16095,7 +16093,7 @@
           <p:cNvPr id="11" name="">
             <a:extLst xmlns:a="http://schemas.openxmlformats.org/drawingml/2006/main">
               <a:ext uri="{FF2B5EF4-FFF2-40B4-BE49-F238E27FC236}">
-                <a16:creationId xmlns:a16="http://schemas.microsoft.com/office/drawing/2014/main" id="{B9CBDAE6-83C7-4462-BC93-C2855DCC893B}"/>
+                <a16:creationId xmlns:a16="http://schemas.microsoft.com/office/drawing/2014/main" id="{7285CEE6-29E2-46BE-B104-40A364827F37}"/>
               </a:ext>
             </a:extLst>
           </p:cNvPr>
@@ -16128,7 +16126,7 @@
           <p:cNvPr id="12" name="">
             <a:extLst xmlns:a="http://schemas.openxmlformats.org/drawingml/2006/main">
               <a:ext uri="{FF2B5EF4-FFF2-40B4-BE49-F238E27FC236}">
-                <a16:creationId xmlns:a16="http://schemas.microsoft.com/office/drawing/2014/main" id="{B2A8C4C3-E8AC-4E0C-B7E5-A209E2876704}"/>
+                <a16:creationId xmlns:a16="http://schemas.microsoft.com/office/drawing/2014/main" id="{30BA81E3-5182-4781-8CFF-2577EE432D35}"/>
               </a:ext>
             </a:extLst>
           </p:cNvPr>
@@ -16163,7 +16161,7 @@
           <p:cNvPr id="13" name="">
             <a:extLst xmlns:a="http://schemas.openxmlformats.org/drawingml/2006/main">
               <a:ext uri="{FF2B5EF4-FFF2-40B4-BE49-F238E27FC236}">
-                <a16:creationId xmlns:a16="http://schemas.microsoft.com/office/drawing/2014/main" id="{1D1EBF6C-6C8F-473A-8479-5350F95DE6EC}"/>
+                <a16:creationId xmlns:a16="http://schemas.microsoft.com/office/drawing/2014/main" id="{1B4AB5C5-8CCD-4FDC-8FAC-F404BCDD8C14}"/>
               </a:ext>
             </a:extLst>
           </p:cNvPr>
@@ -16227,7 +16225,7 @@
           <p:cNvPr id="14" name="">
             <a:extLst xmlns:a="http://schemas.openxmlformats.org/drawingml/2006/main">
               <a:ext uri="{FF2B5EF4-FFF2-40B4-BE49-F238E27FC236}">
-                <a16:creationId xmlns:a16="http://schemas.microsoft.com/office/drawing/2014/main" id="{8A525F5F-FFC2-4FB4-AD45-C450EB5A0A0A}"/>
+                <a16:creationId xmlns:a16="http://schemas.microsoft.com/office/drawing/2014/main" id="{95EEE173-D094-499F-AD31-C73F4A2134CA}"/>
               </a:ext>
             </a:extLst>
           </p:cNvPr>
@@ -16291,7 +16289,7 @@
           <p:cNvPr id="15" name="">
             <a:extLst xmlns:a="http://schemas.openxmlformats.org/drawingml/2006/main">
               <a:ext uri="{FF2B5EF4-FFF2-40B4-BE49-F238E27FC236}">
-                <a16:creationId xmlns:a16="http://schemas.microsoft.com/office/drawing/2014/main" id="{9BF0A0E1-F704-4C7D-B999-C35CF7B27F8B}"/>
+                <a16:creationId xmlns:a16="http://schemas.microsoft.com/office/drawing/2014/main" id="{69A09D87-DA75-4738-BB04-C78267E9AB9C}"/>
               </a:ext>
             </a:extLst>
           </p:cNvPr>
@@ -16324,7 +16322,7 @@
           <p:cNvPr id="16" name="">
             <a:extLst xmlns:a="http://schemas.openxmlformats.org/drawingml/2006/main">
               <a:ext uri="{FF2B5EF4-FFF2-40B4-BE49-F238E27FC236}">
-                <a16:creationId xmlns:a16="http://schemas.microsoft.com/office/drawing/2014/main" id="{863641DA-D7FA-4472-BD7A-1BAEE80DC4E9}"/>
+                <a16:creationId xmlns:a16="http://schemas.microsoft.com/office/drawing/2014/main" id="{649ED388-AD75-441A-9286-3987350721B4}"/>
               </a:ext>
             </a:extLst>
           </p:cNvPr>
@@ -16378,7 +16376,7 @@
                 <a:ea typeface="Aptos"/>
                 <a:cs typeface="Aptos"/>
               </a:rPr>
-              <a:t>Recurring instructor check: sales impact / signal / RevOps field / buyer content / AI risk / industrial failure mode</a:t>
+              <a:t>Recurring instructor check: sales impact / signal / RevOps field / buyer content / review risk / industrial failure mode</a:t>
             </a:r>
           </a:p>
         </p:txBody>
@@ -16388,7 +16386,7 @@
           <p:cNvPr id="17" name="">
             <a:extLst xmlns:a="http://schemas.openxmlformats.org/drawingml/2006/main">
               <a:ext uri="{FF2B5EF4-FFF2-40B4-BE49-F238E27FC236}">
-                <a16:creationId xmlns:a16="http://schemas.microsoft.com/office/drawing/2014/main" id="{BF39AF04-EE19-4F74-89F1-3B597BC9626A}"/>
+                <a16:creationId xmlns:a16="http://schemas.microsoft.com/office/drawing/2014/main" id="{E4E9564D-EA2B-4505-9B77-53741DD04E29}"/>
               </a:ext>
             </a:extLst>
           </p:cNvPr>
@@ -16423,7 +16421,7 @@
           <p:cNvPr id="18" name="">
             <a:extLst xmlns:a="http://schemas.openxmlformats.org/drawingml/2006/main">
               <a:ext uri="{FF2B5EF4-FFF2-40B4-BE49-F238E27FC236}">
-                <a16:creationId xmlns:a16="http://schemas.microsoft.com/office/drawing/2014/main" id="{463130B7-D442-4A12-8C6E-7B40E89E7C47}"/>
+                <a16:creationId xmlns:a16="http://schemas.microsoft.com/office/drawing/2014/main" id="{0F4C22BD-63DC-41DF-BFF0-C44CEF8F9FA9}"/>
               </a:ext>
             </a:extLst>
           </p:cNvPr>
@@ -16487,7 +16485,7 @@
           <p:cNvPr id="19" name="">
             <a:extLst xmlns:a="http://schemas.openxmlformats.org/drawingml/2006/main">
               <a:ext uri="{FF2B5EF4-FFF2-40B4-BE49-F238E27FC236}">
-                <a16:creationId xmlns:a16="http://schemas.microsoft.com/office/drawing/2014/main" id="{754CD86F-DBC9-4D64-8880-E80E45BD72A1}"/>
+                <a16:creationId xmlns:a16="http://schemas.microsoft.com/office/drawing/2014/main" id="{A1536109-0AAE-4588-861F-34DD6EC044CE}"/>
               </a:ext>
             </a:extLst>
           </p:cNvPr>
@@ -16551,7 +16549,7 @@
           <p:cNvPr id="20" name="">
             <a:extLst xmlns:a="http://schemas.openxmlformats.org/drawingml/2006/main">
               <a:ext uri="{FF2B5EF4-FFF2-40B4-BE49-F238E27FC236}">
-                <a16:creationId xmlns:a16="http://schemas.microsoft.com/office/drawing/2014/main" id="{843DF90D-380D-4882-A37F-C5916DB0C97D}"/>
+                <a16:creationId xmlns:a16="http://schemas.microsoft.com/office/drawing/2014/main" id="{132F667F-4026-46F2-A41A-3639E8C649A9}"/>
               </a:ext>
             </a:extLst>
           </p:cNvPr>
@@ -16613,7 +16611,7 @@
     </p:spTree>
     <p:extLst>
       <p:ext uri="{BB962C8B-B14F-4D97-AF65-F5344CB8AC3E}">
-        <p14:creationId xmlns:p14="http://schemas.microsoft.com/office/powerpoint/2010/main" val="1218965101"/>
+        <p14:creationId xmlns:p14="http://schemas.microsoft.com/office/powerpoint/2010/main" val="426212153"/>
       </p:ext>
     </p:extLst>
   </p:cSld>
@@ -16637,7 +16635,7 @@
           <p:cNvPr id="1" name="">
             <a:extLst xmlns:a="http://schemas.openxmlformats.org/drawingml/2006/main">
               <a:ext uri="{FF2B5EF4-FFF2-40B4-BE49-F238E27FC236}">
-                <a16:creationId xmlns:a16="http://schemas.microsoft.com/office/drawing/2014/main" id="{66E829C1-B2DB-4AB8-9B06-999E9646FD1C}"/>
+                <a16:creationId xmlns:a16="http://schemas.microsoft.com/office/drawing/2014/main" id="{C3095690-F6A7-48F3-B247-D40CFF928C56}"/>
               </a:ext>
             </a:extLst>
           </p:cNvPr>
@@ -16672,7 +16670,7 @@
           <p:cNvPr id="2" name="">
             <a:extLst xmlns:a="http://schemas.openxmlformats.org/drawingml/2006/main">
               <a:ext uri="{FF2B5EF4-FFF2-40B4-BE49-F238E27FC236}">
-                <a16:creationId xmlns:a16="http://schemas.microsoft.com/office/drawing/2014/main" id="{1F665F93-A965-4D20-A604-E24C69694CAB}"/>
+                <a16:creationId xmlns:a16="http://schemas.microsoft.com/office/drawing/2014/main" id="{8C056894-90E1-47C2-9366-50E11C557403}"/>
               </a:ext>
             </a:extLst>
           </p:cNvPr>
@@ -16707,7 +16705,7 @@
           <p:cNvPr id="3" name="">
             <a:extLst xmlns:a="http://schemas.openxmlformats.org/drawingml/2006/main">
               <a:ext uri="{FF2B5EF4-FFF2-40B4-BE49-F238E27FC236}">
-                <a16:creationId xmlns:a16="http://schemas.microsoft.com/office/drawing/2014/main" id="{8CBC6155-30B8-48D6-A732-E0BA70370339}"/>
+                <a16:creationId xmlns:a16="http://schemas.microsoft.com/office/drawing/2014/main" id="{DE8C091C-D5F2-4512-82F7-8EE060CA05F0}"/>
               </a:ext>
             </a:extLst>
           </p:cNvPr>
@@ -16742,7 +16740,7 @@
           <p:cNvPr id="4" name="kicker-08-marker">
             <a:extLst xmlns:a="http://schemas.openxmlformats.org/drawingml/2006/main">
               <a:ext uri="{FF2B5EF4-FFF2-40B4-BE49-F238E27FC236}">
-                <a16:creationId xmlns:a16="http://schemas.microsoft.com/office/drawing/2014/main" id="{F1866504-D25F-4446-A11A-03EDF7D9288A}"/>
+                <a16:creationId xmlns:a16="http://schemas.microsoft.com/office/drawing/2014/main" id="{BC050BFE-FF22-4AFE-A180-B17B1901FB88}"/>
               </a:ext>
             </a:extLst>
           </p:cNvPr>
@@ -16777,7 +16775,7 @@
           <p:cNvPr id="5" name="kicker-08-label">
             <a:extLst xmlns:a="http://schemas.openxmlformats.org/drawingml/2006/main">
               <a:ext uri="{FF2B5EF4-FFF2-40B4-BE49-F238E27FC236}">
-                <a16:creationId xmlns:a16="http://schemas.microsoft.com/office/drawing/2014/main" id="{A6EBB396-88D8-4869-94A5-1433BFE24318}"/>
+                <a16:creationId xmlns:a16="http://schemas.microsoft.com/office/drawing/2014/main" id="{5E238406-3B10-4832-AABD-884409C3F77E}"/>
               </a:ext>
             </a:extLst>
           </p:cNvPr>
@@ -16841,7 +16839,7 @@
           <p:cNvPr id="6" name="">
             <a:extLst xmlns:a="http://schemas.openxmlformats.org/drawingml/2006/main">
               <a:ext uri="{FF2B5EF4-FFF2-40B4-BE49-F238E27FC236}">
-                <a16:creationId xmlns:a16="http://schemas.microsoft.com/office/drawing/2014/main" id="{9521983A-48F7-4146-B5F6-52DC827B6B34}"/>
+                <a16:creationId xmlns:a16="http://schemas.microsoft.com/office/drawing/2014/main" id="{E700CFC6-0842-4A5C-89D4-8D218FB41E46}"/>
               </a:ext>
             </a:extLst>
           </p:cNvPr>
@@ -16905,7 +16903,7 @@
           <p:cNvPr id="7" name="">
             <a:extLst xmlns:a="http://schemas.openxmlformats.org/drawingml/2006/main">
               <a:ext uri="{FF2B5EF4-FFF2-40B4-BE49-F238E27FC236}">
-                <a16:creationId xmlns:a16="http://schemas.microsoft.com/office/drawing/2014/main" id="{FB9EFD6D-A94A-4FF5-B51B-A3805B2618E6}"/>
+                <a16:creationId xmlns:a16="http://schemas.microsoft.com/office/drawing/2014/main" id="{F6154AA1-8E74-44DF-90A5-B9B00D7F51F7}"/>
               </a:ext>
             </a:extLst>
           </p:cNvPr>
@@ -16969,7 +16967,7 @@
           <p:cNvPr id="8" name="">
             <a:extLst xmlns:a="http://schemas.openxmlformats.org/drawingml/2006/main">
               <a:ext uri="{FF2B5EF4-FFF2-40B4-BE49-F238E27FC236}">
-                <a16:creationId xmlns:a16="http://schemas.microsoft.com/office/drawing/2014/main" id="{A5AFEA01-4104-4D1A-8440-59DA20808F78}"/>
+                <a16:creationId xmlns:a16="http://schemas.microsoft.com/office/drawing/2014/main" id="{0AA16FE7-8B54-4F2E-97A7-7F94E31EA715}"/>
               </a:ext>
             </a:extLst>
           </p:cNvPr>
@@ -17004,7 +17002,7 @@
           <p:cNvPr id="9" name="">
             <a:extLst xmlns:a="http://schemas.openxmlformats.org/drawingml/2006/main">
               <a:ext uri="{FF2B5EF4-FFF2-40B4-BE49-F238E27FC236}">
-                <a16:creationId xmlns:a16="http://schemas.microsoft.com/office/drawing/2014/main" id="{09144746-A0B0-48DD-86F5-2705E89F0035}"/>
+                <a16:creationId xmlns:a16="http://schemas.microsoft.com/office/drawing/2014/main" id="{88D21728-20F1-49CA-AD74-21AD04521E9C}"/>
               </a:ext>
             </a:extLst>
           </p:cNvPr>
@@ -17068,7 +17066,7 @@
           <p:cNvPr id="10" name="">
             <a:extLst xmlns:a="http://schemas.openxmlformats.org/drawingml/2006/main">
               <a:ext uri="{FF2B5EF4-FFF2-40B4-BE49-F238E27FC236}">
-                <a16:creationId xmlns:a16="http://schemas.microsoft.com/office/drawing/2014/main" id="{D7B2FA53-FDB9-4534-B681-A2172D441BF7}"/>
+                <a16:creationId xmlns:a16="http://schemas.microsoft.com/office/drawing/2014/main" id="{D93B3AEE-C34F-4304-BC27-2C6E8BAB75BC}"/>
               </a:ext>
             </a:extLst>
           </p:cNvPr>
@@ -17132,7 +17130,7 @@
           <p:cNvPr id="11" name="">
             <a:extLst xmlns:a="http://schemas.openxmlformats.org/drawingml/2006/main">
               <a:ext uri="{FF2B5EF4-FFF2-40B4-BE49-F238E27FC236}">
-                <a16:creationId xmlns:a16="http://schemas.microsoft.com/office/drawing/2014/main" id="{2C7B4038-FFFF-4D29-803A-B7BD31AAF4A9}"/>
+                <a16:creationId xmlns:a16="http://schemas.microsoft.com/office/drawing/2014/main" id="{EDF47E60-0C70-4143-8D3F-C53EC2AABC57}"/>
               </a:ext>
             </a:extLst>
           </p:cNvPr>
@@ -17196,7 +17194,7 @@
           <p:cNvPr id="12" name="">
             <a:extLst xmlns:a="http://schemas.openxmlformats.org/drawingml/2006/main">
               <a:ext uri="{FF2B5EF4-FFF2-40B4-BE49-F238E27FC236}">
-                <a16:creationId xmlns:a16="http://schemas.microsoft.com/office/drawing/2014/main" id="{E18BE123-2CD6-4442-806A-B46D7BE69417}"/>
+                <a16:creationId xmlns:a16="http://schemas.microsoft.com/office/drawing/2014/main" id="{FF97F895-B2BF-4369-9E9D-13518DA977E8}"/>
               </a:ext>
             </a:extLst>
           </p:cNvPr>
@@ -17229,7 +17227,7 @@
           <p:cNvPr id="13" name="">
             <a:extLst xmlns:a="http://schemas.openxmlformats.org/drawingml/2006/main">
               <a:ext uri="{FF2B5EF4-FFF2-40B4-BE49-F238E27FC236}">
-                <a16:creationId xmlns:a16="http://schemas.microsoft.com/office/drawing/2014/main" id="{D2536DFB-9449-488B-BC00-A993E86D0DEA}"/>
+                <a16:creationId xmlns:a16="http://schemas.microsoft.com/office/drawing/2014/main" id="{AA8AFE76-9D19-4CE9-BBF4-D0476A1D77F4}"/>
               </a:ext>
             </a:extLst>
           </p:cNvPr>
@@ -17293,7 +17291,7 @@
           <p:cNvPr id="14" name="">
             <a:extLst xmlns:a="http://schemas.openxmlformats.org/drawingml/2006/main">
               <a:ext uri="{FF2B5EF4-FFF2-40B4-BE49-F238E27FC236}">
-                <a16:creationId xmlns:a16="http://schemas.microsoft.com/office/drawing/2014/main" id="{59E5B532-0705-4315-B58C-CA07707F3636}"/>
+                <a16:creationId xmlns:a16="http://schemas.microsoft.com/office/drawing/2014/main" id="{660B53C9-9C55-4362-9C98-3974EFB464BD}"/>
               </a:ext>
             </a:extLst>
           </p:cNvPr>
@@ -17328,7 +17326,7 @@
           <p:cNvPr id="15" name="">
             <a:extLst xmlns:a="http://schemas.openxmlformats.org/drawingml/2006/main">
               <a:ext uri="{FF2B5EF4-FFF2-40B4-BE49-F238E27FC236}">
-                <a16:creationId xmlns:a16="http://schemas.microsoft.com/office/drawing/2014/main" id="{64C1A901-CB59-438B-BD09-A3AEB9E0B10D}"/>
+                <a16:creationId xmlns:a16="http://schemas.microsoft.com/office/drawing/2014/main" id="{CFB99132-25CC-4BCF-A0BD-5F7922DB3B50}"/>
               </a:ext>
             </a:extLst>
           </p:cNvPr>
@@ -17392,7 +17390,7 @@
           <p:cNvPr id="16" name="">
             <a:extLst xmlns:a="http://schemas.openxmlformats.org/drawingml/2006/main">
               <a:ext uri="{FF2B5EF4-FFF2-40B4-BE49-F238E27FC236}">
-                <a16:creationId xmlns:a16="http://schemas.microsoft.com/office/drawing/2014/main" id="{83A70826-6B98-4EDC-8321-46DD314DFD6D}"/>
+                <a16:creationId xmlns:a16="http://schemas.microsoft.com/office/drawing/2014/main" id="{514E39CB-3C09-4F84-93CA-08C6ED406EA2}"/>
               </a:ext>
             </a:extLst>
           </p:cNvPr>
@@ -17425,7 +17423,7 @@
           <p:cNvPr id="17" name="">
             <a:extLst xmlns:a="http://schemas.openxmlformats.org/drawingml/2006/main">
               <a:ext uri="{FF2B5EF4-FFF2-40B4-BE49-F238E27FC236}">
-                <a16:creationId xmlns:a16="http://schemas.microsoft.com/office/drawing/2014/main" id="{BD8850A4-292F-4991-8A85-92294612346E}"/>
+                <a16:creationId xmlns:a16="http://schemas.microsoft.com/office/drawing/2014/main" id="{0A0BA3F1-6EF7-4E0E-9A43-C1F7AF837E4A}"/>
               </a:ext>
             </a:extLst>
           </p:cNvPr>
@@ -17460,7 +17458,7 @@
           <p:cNvPr id="18" name="">
             <a:extLst xmlns:a="http://schemas.openxmlformats.org/drawingml/2006/main">
               <a:ext uri="{FF2B5EF4-FFF2-40B4-BE49-F238E27FC236}">
-                <a16:creationId xmlns:a16="http://schemas.microsoft.com/office/drawing/2014/main" id="{169BE8B0-4B40-471C-A211-29D78A0C2155}"/>
+                <a16:creationId xmlns:a16="http://schemas.microsoft.com/office/drawing/2014/main" id="{04B2C1E9-1D11-456D-851A-2809502BB556}"/>
               </a:ext>
             </a:extLst>
           </p:cNvPr>
@@ -17524,7 +17522,7 @@
           <p:cNvPr id="19" name="">
             <a:extLst xmlns:a="http://schemas.openxmlformats.org/drawingml/2006/main">
               <a:ext uri="{FF2B5EF4-FFF2-40B4-BE49-F238E27FC236}">
-                <a16:creationId xmlns:a16="http://schemas.microsoft.com/office/drawing/2014/main" id="{95E616C3-6185-453E-A155-2A1EFDF41516}"/>
+                <a16:creationId xmlns:a16="http://schemas.microsoft.com/office/drawing/2014/main" id="{D9EA4659-2B67-457B-8482-0F0E4111FD58}"/>
               </a:ext>
             </a:extLst>
           </p:cNvPr>
@@ -17559,7 +17557,7 @@
           <p:cNvPr id="20" name="">
             <a:extLst xmlns:a="http://schemas.openxmlformats.org/drawingml/2006/main">
               <a:ext uri="{FF2B5EF4-FFF2-40B4-BE49-F238E27FC236}">
-                <a16:creationId xmlns:a16="http://schemas.microsoft.com/office/drawing/2014/main" id="{6F7F7AC4-9951-4D9D-A5CC-345FAB5DFBEB}"/>
+                <a16:creationId xmlns:a16="http://schemas.microsoft.com/office/drawing/2014/main" id="{89E3FA74-7E70-41FB-B044-703958597E27}"/>
               </a:ext>
             </a:extLst>
           </p:cNvPr>
@@ -17623,7 +17621,7 @@
           <p:cNvPr id="21" name="">
             <a:extLst xmlns:a="http://schemas.openxmlformats.org/drawingml/2006/main">
               <a:ext uri="{FF2B5EF4-FFF2-40B4-BE49-F238E27FC236}">
-                <a16:creationId xmlns:a16="http://schemas.microsoft.com/office/drawing/2014/main" id="{00538080-BAE2-48BF-90D6-AAD9E5AD0255}"/>
+                <a16:creationId xmlns:a16="http://schemas.microsoft.com/office/drawing/2014/main" id="{3F0C617C-DCCE-4A1C-A11B-E1DD7B89DAF4}"/>
               </a:ext>
             </a:extLst>
           </p:cNvPr>
@@ -17658,7 +17656,7 @@
           <p:cNvPr id="22" name="">
             <a:extLst xmlns:a="http://schemas.openxmlformats.org/drawingml/2006/main">
               <a:ext uri="{FF2B5EF4-FFF2-40B4-BE49-F238E27FC236}">
-                <a16:creationId xmlns:a16="http://schemas.microsoft.com/office/drawing/2014/main" id="{9CA8EA79-521A-4844-AD57-5FE855F203FB}"/>
+                <a16:creationId xmlns:a16="http://schemas.microsoft.com/office/drawing/2014/main" id="{D5AC5D9F-315E-4240-B5E5-CF33C9F208B2}"/>
               </a:ext>
             </a:extLst>
           </p:cNvPr>
@@ -17722,7 +17720,7 @@
           <p:cNvPr id="23" name="">
             <a:extLst xmlns:a="http://schemas.openxmlformats.org/drawingml/2006/main">
               <a:ext uri="{FF2B5EF4-FFF2-40B4-BE49-F238E27FC236}">
-                <a16:creationId xmlns:a16="http://schemas.microsoft.com/office/drawing/2014/main" id="{364514AE-641E-4A13-822F-88E46222F8B2}"/>
+                <a16:creationId xmlns:a16="http://schemas.microsoft.com/office/drawing/2014/main" id="{075FEFC7-A3DB-4174-A9A0-D2B740378D93}"/>
               </a:ext>
             </a:extLst>
           </p:cNvPr>
@@ -17757,7 +17755,7 @@
           <p:cNvPr id="24" name="">
             <a:extLst xmlns:a="http://schemas.openxmlformats.org/drawingml/2006/main">
               <a:ext uri="{FF2B5EF4-FFF2-40B4-BE49-F238E27FC236}">
-                <a16:creationId xmlns:a16="http://schemas.microsoft.com/office/drawing/2014/main" id="{B9A53B63-8734-4A89-B115-E067EF366435}"/>
+                <a16:creationId xmlns:a16="http://schemas.microsoft.com/office/drawing/2014/main" id="{6E9FCBB5-C90A-4120-B979-F60DF4690C28}"/>
               </a:ext>
             </a:extLst>
           </p:cNvPr>
@@ -17811,7 +17809,7 @@
                 <a:ea typeface="Aptos"/>
                 <a:cs typeface="Aptos"/>
               </a:rPr>
-              <a:t>Keep AI useful but subordinate to human correction.</a:t>
+              <a:t>Keep first drafts subordinate to human correction.</a:t>
             </a:r>
           </a:p>
         </p:txBody>
@@ -17821,7 +17819,7 @@
           <p:cNvPr id="25" name="">
             <a:extLst xmlns:a="http://schemas.openxmlformats.org/drawingml/2006/main">
               <a:ext uri="{FF2B5EF4-FFF2-40B4-BE49-F238E27FC236}">
-                <a16:creationId xmlns:a16="http://schemas.microsoft.com/office/drawing/2014/main" id="{73C2C5ED-BB44-4E8C-BA65-9ED9C0E560C9}"/>
+                <a16:creationId xmlns:a16="http://schemas.microsoft.com/office/drawing/2014/main" id="{3C7A0D4C-2129-4A57-BBD8-FB9899E9F353}"/>
               </a:ext>
             </a:extLst>
           </p:cNvPr>
@@ -17856,7 +17854,7 @@
           <p:cNvPr id="26" name="">
             <a:extLst xmlns:a="http://schemas.openxmlformats.org/drawingml/2006/main">
               <a:ext uri="{FF2B5EF4-FFF2-40B4-BE49-F238E27FC236}">
-                <a16:creationId xmlns:a16="http://schemas.microsoft.com/office/drawing/2014/main" id="{AD2C24C3-A3D9-4273-BA4B-4FECC08A1782}"/>
+                <a16:creationId xmlns:a16="http://schemas.microsoft.com/office/drawing/2014/main" id="{7DEE60C1-DA9C-46AC-A6D0-9DC79EFA6A4A}"/>
               </a:ext>
             </a:extLst>
           </p:cNvPr>
@@ -17920,7 +17918,7 @@
           <p:cNvPr id="27" name="">
             <a:extLst xmlns:a="http://schemas.openxmlformats.org/drawingml/2006/main">
               <a:ext uri="{FF2B5EF4-FFF2-40B4-BE49-F238E27FC236}">
-                <a16:creationId xmlns:a16="http://schemas.microsoft.com/office/drawing/2014/main" id="{599F84F5-362D-4CEB-B7D8-39FE213E2C4C}"/>
+                <a16:creationId xmlns:a16="http://schemas.microsoft.com/office/drawing/2014/main" id="{D4F0DE83-BC7C-4E9B-B84C-54A1CC8AE43D}"/>
               </a:ext>
             </a:extLst>
           </p:cNvPr>
@@ -17955,7 +17953,7 @@
           <p:cNvPr id="28" name="">
             <a:extLst xmlns:a="http://schemas.openxmlformats.org/drawingml/2006/main">
               <a:ext uri="{FF2B5EF4-FFF2-40B4-BE49-F238E27FC236}">
-                <a16:creationId xmlns:a16="http://schemas.microsoft.com/office/drawing/2014/main" id="{D530C5CA-129F-4769-A86C-60A26DD79E25}"/>
+                <a16:creationId xmlns:a16="http://schemas.microsoft.com/office/drawing/2014/main" id="{207A282C-39E9-43E8-9A96-66BB6ADDA61D}"/>
               </a:ext>
             </a:extLst>
           </p:cNvPr>
@@ -18019,7 +18017,7 @@
           <p:cNvPr id="29" name="">
             <a:extLst xmlns:a="http://schemas.openxmlformats.org/drawingml/2006/main">
               <a:ext uri="{FF2B5EF4-FFF2-40B4-BE49-F238E27FC236}">
-                <a16:creationId xmlns:a16="http://schemas.microsoft.com/office/drawing/2014/main" id="{EDD56684-1820-4ED1-AFE6-A1F26AD15CDC}"/>
+                <a16:creationId xmlns:a16="http://schemas.microsoft.com/office/drawing/2014/main" id="{CDE458FC-0A78-4AB0-AA7D-0A5EEEB742E7}"/>
               </a:ext>
             </a:extLst>
           </p:cNvPr>
@@ -18083,7 +18081,7 @@
           <p:cNvPr id="30" name="">
             <a:extLst xmlns:a="http://schemas.openxmlformats.org/drawingml/2006/main">
               <a:ext uri="{FF2B5EF4-FFF2-40B4-BE49-F238E27FC236}">
-                <a16:creationId xmlns:a16="http://schemas.microsoft.com/office/drawing/2014/main" id="{7F315A14-0237-4148-9766-F2D1D3DC2E41}"/>
+                <a16:creationId xmlns:a16="http://schemas.microsoft.com/office/drawing/2014/main" id="{D7FEB435-58E2-4AAC-8447-8EF76ED2BDB6}"/>
               </a:ext>
             </a:extLst>
           </p:cNvPr>
@@ -18145,7 +18143,7 @@
     </p:spTree>
     <p:extLst>
       <p:ext uri="{BB962C8B-B14F-4D97-AF65-F5344CB8AC3E}">
-        <p14:creationId xmlns:p14="http://schemas.microsoft.com/office/powerpoint/2010/main" val="444501030"/>
+        <p14:creationId xmlns:p14="http://schemas.microsoft.com/office/powerpoint/2010/main" val="1449426476"/>
       </p:ext>
     </p:extLst>
   </p:cSld>
@@ -18169,7 +18167,7 @@
           <p:cNvPr id="1" name="">
             <a:extLst xmlns:a="http://schemas.openxmlformats.org/drawingml/2006/main">
               <a:ext uri="{FF2B5EF4-FFF2-40B4-BE49-F238E27FC236}">
-                <a16:creationId xmlns:a16="http://schemas.microsoft.com/office/drawing/2014/main" id="{EAC8249B-2135-4E68-8C77-2493AFCFFA08}"/>
+                <a16:creationId xmlns:a16="http://schemas.microsoft.com/office/drawing/2014/main" id="{4073ED6A-7580-4533-8724-D414BF33E834}"/>
               </a:ext>
             </a:extLst>
           </p:cNvPr>
@@ -18204,7 +18202,7 @@
           <p:cNvPr id="2" name="">
             <a:extLst xmlns:a="http://schemas.openxmlformats.org/drawingml/2006/main">
               <a:ext uri="{FF2B5EF4-FFF2-40B4-BE49-F238E27FC236}">
-                <a16:creationId xmlns:a16="http://schemas.microsoft.com/office/drawing/2014/main" id="{E5458ED6-237E-407C-B400-3F9B73EA5B4F}"/>
+                <a16:creationId xmlns:a16="http://schemas.microsoft.com/office/drawing/2014/main" id="{CE4FB198-1017-4781-B330-23A8E8446F0A}"/>
               </a:ext>
             </a:extLst>
           </p:cNvPr>
@@ -18239,7 +18237,7 @@
           <p:cNvPr id="3" name="">
             <a:extLst xmlns:a="http://schemas.openxmlformats.org/drawingml/2006/main">
               <a:ext uri="{FF2B5EF4-FFF2-40B4-BE49-F238E27FC236}">
-                <a16:creationId xmlns:a16="http://schemas.microsoft.com/office/drawing/2014/main" id="{CC9D0BB8-1FBF-4495-B6D5-15AE756BB382}"/>
+                <a16:creationId xmlns:a16="http://schemas.microsoft.com/office/drawing/2014/main" id="{ED1DC3D7-7FDD-4D95-BFA9-311DE17B0E24}"/>
               </a:ext>
             </a:extLst>
           </p:cNvPr>
@@ -18274,7 +18272,7 @@
           <p:cNvPr id="4" name="kicker-08-marker">
             <a:extLst xmlns:a="http://schemas.openxmlformats.org/drawingml/2006/main">
               <a:ext uri="{FF2B5EF4-FFF2-40B4-BE49-F238E27FC236}">
-                <a16:creationId xmlns:a16="http://schemas.microsoft.com/office/drawing/2014/main" id="{3C995413-7381-481A-91B7-436AB4032035}"/>
+                <a16:creationId xmlns:a16="http://schemas.microsoft.com/office/drawing/2014/main" id="{403940B5-6807-4A3E-AABA-16AAB49397AD}"/>
               </a:ext>
             </a:extLst>
           </p:cNvPr>
@@ -18309,7 +18307,7 @@
           <p:cNvPr id="5" name="kicker-08-label">
             <a:extLst xmlns:a="http://schemas.openxmlformats.org/drawingml/2006/main">
               <a:ext uri="{FF2B5EF4-FFF2-40B4-BE49-F238E27FC236}">
-                <a16:creationId xmlns:a16="http://schemas.microsoft.com/office/drawing/2014/main" id="{2D61198B-A72D-427D-9A1D-0680B9463631}"/>
+                <a16:creationId xmlns:a16="http://schemas.microsoft.com/office/drawing/2014/main" id="{4E362A5A-1010-483E-89DA-80DCEBC803E5}"/>
               </a:ext>
             </a:extLst>
           </p:cNvPr>
@@ -18373,7 +18371,7 @@
           <p:cNvPr id="6" name="">
             <a:extLst xmlns:a="http://schemas.openxmlformats.org/drawingml/2006/main">
               <a:ext uri="{FF2B5EF4-FFF2-40B4-BE49-F238E27FC236}">
-                <a16:creationId xmlns:a16="http://schemas.microsoft.com/office/drawing/2014/main" id="{8038957E-06D1-45BC-AD9F-9E88C29B2F3B}"/>
+                <a16:creationId xmlns:a16="http://schemas.microsoft.com/office/drawing/2014/main" id="{72EC8F1D-5FB2-40BC-A90F-B4BF470A9090}"/>
               </a:ext>
             </a:extLst>
           </p:cNvPr>
@@ -18437,7 +18435,7 @@
           <p:cNvPr id="7" name="">
             <a:extLst xmlns:a="http://schemas.openxmlformats.org/drawingml/2006/main">
               <a:ext uri="{FF2B5EF4-FFF2-40B4-BE49-F238E27FC236}">
-                <a16:creationId xmlns:a16="http://schemas.microsoft.com/office/drawing/2014/main" id="{49193386-21AA-43F6-AECE-C4CFE6894B23}"/>
+                <a16:creationId xmlns:a16="http://schemas.microsoft.com/office/drawing/2014/main" id="{40C69402-3696-451D-8C8B-942C2C157C6E}"/>
               </a:ext>
             </a:extLst>
           </p:cNvPr>
@@ -18501,7 +18499,7 @@
           <p:cNvPr id="8" name="">
             <a:extLst xmlns:a="http://schemas.openxmlformats.org/drawingml/2006/main">
               <a:ext uri="{FF2B5EF4-FFF2-40B4-BE49-F238E27FC236}">
-                <a16:creationId xmlns:a16="http://schemas.microsoft.com/office/drawing/2014/main" id="{0F07A02E-3C24-4D24-A09C-17967DC02653}"/>
+                <a16:creationId xmlns:a16="http://schemas.microsoft.com/office/drawing/2014/main" id="{F7CED0BD-40E1-4274-95B6-A1C9203E2A5E}"/>
               </a:ext>
             </a:extLst>
           </p:cNvPr>
@@ -18536,7 +18534,7 @@
           <p:cNvPr id="9" name="">
             <a:extLst xmlns:a="http://schemas.openxmlformats.org/drawingml/2006/main">
               <a:ext uri="{FF2B5EF4-FFF2-40B4-BE49-F238E27FC236}">
-                <a16:creationId xmlns:a16="http://schemas.microsoft.com/office/drawing/2014/main" id="{0455430A-9FC9-4E95-B0BE-F115316CB375}"/>
+                <a16:creationId xmlns:a16="http://schemas.microsoft.com/office/drawing/2014/main" id="{34BE3051-0509-4DA1-80E6-622EB3EA1379}"/>
               </a:ext>
             </a:extLst>
           </p:cNvPr>
@@ -18600,7 +18598,7 @@
           <p:cNvPr id="10" name="">
             <a:extLst xmlns:a="http://schemas.openxmlformats.org/drawingml/2006/main">
               <a:ext uri="{FF2B5EF4-FFF2-40B4-BE49-F238E27FC236}">
-                <a16:creationId xmlns:a16="http://schemas.microsoft.com/office/drawing/2014/main" id="{3FE70999-F5C9-49CA-90BB-EDF4DAA5AEE3}"/>
+                <a16:creationId xmlns:a16="http://schemas.microsoft.com/office/drawing/2014/main" id="{E03383B3-C630-4282-9A5C-8DB4BCF18411}"/>
               </a:ext>
             </a:extLst>
           </p:cNvPr>
@@ -18664,7 +18662,7 @@
           <p:cNvPr id="11" name="">
             <a:extLst xmlns:a="http://schemas.openxmlformats.org/drawingml/2006/main">
               <a:ext uri="{FF2B5EF4-FFF2-40B4-BE49-F238E27FC236}">
-                <a16:creationId xmlns:a16="http://schemas.microsoft.com/office/drawing/2014/main" id="{580C4A3C-FA6B-43F5-8B80-A5EF86A262E4}"/>
+                <a16:creationId xmlns:a16="http://schemas.microsoft.com/office/drawing/2014/main" id="{F4F97DB0-6D52-4BAE-8020-E4CD5CE166FB}"/>
               </a:ext>
             </a:extLst>
           </p:cNvPr>
@@ -18728,7 +18726,7 @@
           <p:cNvPr id="12" name="">
             <a:extLst xmlns:a="http://schemas.openxmlformats.org/drawingml/2006/main">
               <a:ext uri="{FF2B5EF4-FFF2-40B4-BE49-F238E27FC236}">
-                <a16:creationId xmlns:a16="http://schemas.microsoft.com/office/drawing/2014/main" id="{1E7A1B33-8F06-4AD1-9B22-0EA100F177D4}"/>
+                <a16:creationId xmlns:a16="http://schemas.microsoft.com/office/drawing/2014/main" id="{4FA258A5-BE28-4D67-89E2-3AB1533120F0}"/>
               </a:ext>
             </a:extLst>
           </p:cNvPr>
@@ -18761,7 +18759,7 @@
           <p:cNvPr id="13" name="">
             <a:extLst xmlns:a="http://schemas.openxmlformats.org/drawingml/2006/main">
               <a:ext uri="{FF2B5EF4-FFF2-40B4-BE49-F238E27FC236}">
-                <a16:creationId xmlns:a16="http://schemas.microsoft.com/office/drawing/2014/main" id="{B513EEF2-551A-42ED-99C6-9462900208A8}"/>
+                <a16:creationId xmlns:a16="http://schemas.microsoft.com/office/drawing/2014/main" id="{6D7EE0BE-2187-427E-AEB9-6918266369EE}"/>
               </a:ext>
             </a:extLst>
           </p:cNvPr>
@@ -18796,7 +18794,7 @@
           <p:cNvPr id="14" name="">
             <a:extLst xmlns:a="http://schemas.openxmlformats.org/drawingml/2006/main">
               <a:ext uri="{FF2B5EF4-FFF2-40B4-BE49-F238E27FC236}">
-                <a16:creationId xmlns:a16="http://schemas.microsoft.com/office/drawing/2014/main" id="{AE00ACFC-0DB2-4494-8FE9-B284ECA80B12}"/>
+                <a16:creationId xmlns:a16="http://schemas.microsoft.com/office/drawing/2014/main" id="{C9E0CD91-CB0A-43AA-B3ED-A6B1855FDB34}"/>
               </a:ext>
             </a:extLst>
           </p:cNvPr>
@@ -18860,7 +18858,7 @@
           <p:cNvPr id="15" name="">
             <a:extLst xmlns:a="http://schemas.openxmlformats.org/drawingml/2006/main">
               <a:ext uri="{FF2B5EF4-FFF2-40B4-BE49-F238E27FC236}">
-                <a16:creationId xmlns:a16="http://schemas.microsoft.com/office/drawing/2014/main" id="{CE58E5A4-2C6C-44C6-B75F-D37D2486AA96}"/>
+                <a16:creationId xmlns:a16="http://schemas.microsoft.com/office/drawing/2014/main" id="{3722C440-B837-4340-9D9D-796C48794FF0}"/>
               </a:ext>
             </a:extLst>
           </p:cNvPr>
@@ -18895,7 +18893,7 @@
           <p:cNvPr id="16" name="">
             <a:extLst xmlns:a="http://schemas.openxmlformats.org/drawingml/2006/main">
               <a:ext uri="{FF2B5EF4-FFF2-40B4-BE49-F238E27FC236}">
-                <a16:creationId xmlns:a16="http://schemas.microsoft.com/office/drawing/2014/main" id="{B8BEA3AB-F489-42E9-BA14-1948BE8634F2}"/>
+                <a16:creationId xmlns:a16="http://schemas.microsoft.com/office/drawing/2014/main" id="{49225527-348E-4160-888E-70A192B375DD}"/>
               </a:ext>
             </a:extLst>
           </p:cNvPr>
@@ -18959,7 +18957,7 @@
           <p:cNvPr id="17" name="">
             <a:extLst xmlns:a="http://schemas.openxmlformats.org/drawingml/2006/main">
               <a:ext uri="{FF2B5EF4-FFF2-40B4-BE49-F238E27FC236}">
-                <a16:creationId xmlns:a16="http://schemas.microsoft.com/office/drawing/2014/main" id="{BC17EA04-D505-481B-8C25-015EEC0FED89}"/>
+                <a16:creationId xmlns:a16="http://schemas.microsoft.com/office/drawing/2014/main" id="{266F6B14-408B-4491-B24D-E8502E5E0333}"/>
               </a:ext>
             </a:extLst>
           </p:cNvPr>
@@ -18994,7 +18992,7 @@
           <p:cNvPr id="18" name="">
             <a:extLst xmlns:a="http://schemas.openxmlformats.org/drawingml/2006/main">
               <a:ext uri="{FF2B5EF4-FFF2-40B4-BE49-F238E27FC236}">
-                <a16:creationId xmlns:a16="http://schemas.microsoft.com/office/drawing/2014/main" id="{8685973C-D139-40EC-B1DB-108A1F3F146E}"/>
+                <a16:creationId xmlns:a16="http://schemas.microsoft.com/office/drawing/2014/main" id="{23F70611-5955-419F-BB54-12B92B187863}"/>
               </a:ext>
             </a:extLst>
           </p:cNvPr>
@@ -19058,7 +19056,7 @@
           <p:cNvPr id="19" name="">
             <a:extLst xmlns:a="http://schemas.openxmlformats.org/drawingml/2006/main">
               <a:ext uri="{FF2B5EF4-FFF2-40B4-BE49-F238E27FC236}">
-                <a16:creationId xmlns:a16="http://schemas.microsoft.com/office/drawing/2014/main" id="{B927D9CC-81FD-4134-B23E-ACABF006B6B2}"/>
+                <a16:creationId xmlns:a16="http://schemas.microsoft.com/office/drawing/2014/main" id="{05728A20-A7A5-4EFE-B79F-B78119F51144}"/>
               </a:ext>
             </a:extLst>
           </p:cNvPr>
@@ -19093,7 +19091,7 @@
           <p:cNvPr id="20" name="">
             <a:extLst xmlns:a="http://schemas.openxmlformats.org/drawingml/2006/main">
               <a:ext uri="{FF2B5EF4-FFF2-40B4-BE49-F238E27FC236}">
-                <a16:creationId xmlns:a16="http://schemas.microsoft.com/office/drawing/2014/main" id="{AB48EB4A-F4F4-45D9-BBC9-B9496CEAA6E5}"/>
+                <a16:creationId xmlns:a16="http://schemas.microsoft.com/office/drawing/2014/main" id="{DB0EB1B0-D82B-4572-9F8E-3A45FDFD07D8}"/>
               </a:ext>
             </a:extLst>
           </p:cNvPr>
@@ -19157,7 +19155,7 @@
           <p:cNvPr id="21" name="">
             <a:extLst xmlns:a="http://schemas.openxmlformats.org/drawingml/2006/main">
               <a:ext uri="{FF2B5EF4-FFF2-40B4-BE49-F238E27FC236}">
-                <a16:creationId xmlns:a16="http://schemas.microsoft.com/office/drawing/2014/main" id="{05FC072B-B2CA-4A0B-9F5C-260BFA28BF15}"/>
+                <a16:creationId xmlns:a16="http://schemas.microsoft.com/office/drawing/2014/main" id="{0151F9B9-55D7-4A49-94F5-16F5435B13AD}"/>
               </a:ext>
             </a:extLst>
           </p:cNvPr>
@@ -19192,7 +19190,7 @@
           <p:cNvPr id="22" name="">
             <a:extLst xmlns:a="http://schemas.openxmlformats.org/drawingml/2006/main">
               <a:ext uri="{FF2B5EF4-FFF2-40B4-BE49-F238E27FC236}">
-                <a16:creationId xmlns:a16="http://schemas.microsoft.com/office/drawing/2014/main" id="{E4C060D9-4546-43A8-BC8A-2DFF765DDFEC}"/>
+                <a16:creationId xmlns:a16="http://schemas.microsoft.com/office/drawing/2014/main" id="{EF5DC2C0-10A5-4A23-A085-3E570DD44D61}"/>
               </a:ext>
             </a:extLst>
           </p:cNvPr>
@@ -19256,7 +19254,7 @@
           <p:cNvPr id="23" name="">
             <a:extLst xmlns:a="http://schemas.openxmlformats.org/drawingml/2006/main">
               <a:ext uri="{FF2B5EF4-FFF2-40B4-BE49-F238E27FC236}">
-                <a16:creationId xmlns:a16="http://schemas.microsoft.com/office/drawing/2014/main" id="{0C1A5F54-D842-4782-9258-C70AF122267F}"/>
+                <a16:creationId xmlns:a16="http://schemas.microsoft.com/office/drawing/2014/main" id="{055834E1-7A04-4590-AD2F-0EDF410DA9AE}"/>
               </a:ext>
             </a:extLst>
           </p:cNvPr>
@@ -19289,7 +19287,7 @@
           <p:cNvPr id="24" name="">
             <a:extLst xmlns:a="http://schemas.openxmlformats.org/drawingml/2006/main">
               <a:ext uri="{FF2B5EF4-FFF2-40B4-BE49-F238E27FC236}">
-                <a16:creationId xmlns:a16="http://schemas.microsoft.com/office/drawing/2014/main" id="{437BD9A3-46E5-4648-B996-447157194254}"/>
+                <a16:creationId xmlns:a16="http://schemas.microsoft.com/office/drawing/2014/main" id="{CB05A83D-B0FF-4372-9F06-938ACBD31161}"/>
               </a:ext>
             </a:extLst>
           </p:cNvPr>
@@ -19324,7 +19322,7 @@
           <p:cNvPr id="25" name="">
             <a:extLst xmlns:a="http://schemas.openxmlformats.org/drawingml/2006/main">
               <a:ext uri="{FF2B5EF4-FFF2-40B4-BE49-F238E27FC236}">
-                <a16:creationId xmlns:a16="http://schemas.microsoft.com/office/drawing/2014/main" id="{5BE494BF-2949-4B68-A3E0-1FCA9931B3C6}"/>
+                <a16:creationId xmlns:a16="http://schemas.microsoft.com/office/drawing/2014/main" id="{12FB5FCE-321E-4F8E-8E0A-13C9343394A8}"/>
               </a:ext>
             </a:extLst>
           </p:cNvPr>
@@ -19388,7 +19386,7 @@
           <p:cNvPr id="26" name="">
             <a:extLst xmlns:a="http://schemas.openxmlformats.org/drawingml/2006/main">
               <a:ext uri="{FF2B5EF4-FFF2-40B4-BE49-F238E27FC236}">
-                <a16:creationId xmlns:a16="http://schemas.microsoft.com/office/drawing/2014/main" id="{0F58ABCF-2926-4CBA-874C-DC8B396C7456}"/>
+                <a16:creationId xmlns:a16="http://schemas.microsoft.com/office/drawing/2014/main" id="{777FF13B-AAEB-4DE5-B636-F46A2411EDE9}"/>
               </a:ext>
             </a:extLst>
           </p:cNvPr>
@@ -19421,7 +19419,7 @@
           <p:cNvPr id="27" name="">
             <a:extLst xmlns:a="http://schemas.openxmlformats.org/drawingml/2006/main">
               <a:ext uri="{FF2B5EF4-FFF2-40B4-BE49-F238E27FC236}">
-                <a16:creationId xmlns:a16="http://schemas.microsoft.com/office/drawing/2014/main" id="{1C0ADA46-448D-4D6D-868A-DCBCF9F0F699}"/>
+                <a16:creationId xmlns:a16="http://schemas.microsoft.com/office/drawing/2014/main" id="{B6001772-E3B3-42F7-A997-6000FEB72A9D}"/>
               </a:ext>
             </a:extLst>
           </p:cNvPr>
@@ -19485,7 +19483,7 @@
           <p:cNvPr id="28" name="">
             <a:extLst xmlns:a="http://schemas.openxmlformats.org/drawingml/2006/main">
               <a:ext uri="{FF2B5EF4-FFF2-40B4-BE49-F238E27FC236}">
-                <a16:creationId xmlns:a16="http://schemas.microsoft.com/office/drawing/2014/main" id="{0B17339D-2DE3-4C0B-8674-0A1D2C9F9059}"/>
+                <a16:creationId xmlns:a16="http://schemas.microsoft.com/office/drawing/2014/main" id="{1734FD07-4571-45B4-B8C7-E3787F5DA450}"/>
               </a:ext>
             </a:extLst>
           </p:cNvPr>
@@ -19549,7 +19547,7 @@
           <p:cNvPr id="29" name="">
             <a:extLst xmlns:a="http://schemas.openxmlformats.org/drawingml/2006/main">
               <a:ext uri="{FF2B5EF4-FFF2-40B4-BE49-F238E27FC236}">
-                <a16:creationId xmlns:a16="http://schemas.microsoft.com/office/drawing/2014/main" id="{AB881BBA-2038-4D40-BFCB-DCCF3CA249DA}"/>
+                <a16:creationId xmlns:a16="http://schemas.microsoft.com/office/drawing/2014/main" id="{3F8D0B36-5125-4AC6-9E8C-AE0240C5CB4D}"/>
               </a:ext>
             </a:extLst>
           </p:cNvPr>
@@ -19582,7 +19580,7 @@
           <p:cNvPr id="30" name="">
             <a:extLst xmlns:a="http://schemas.openxmlformats.org/drawingml/2006/main">
               <a:ext uri="{FF2B5EF4-FFF2-40B4-BE49-F238E27FC236}">
-                <a16:creationId xmlns:a16="http://schemas.microsoft.com/office/drawing/2014/main" id="{9DD16F0C-5DB2-42FB-8F0D-FEAE4EB41794}"/>
+                <a16:creationId xmlns:a16="http://schemas.microsoft.com/office/drawing/2014/main" id="{353F1F81-D7FC-4A19-8046-0F7FEEA318A1}"/>
               </a:ext>
             </a:extLst>
           </p:cNvPr>
@@ -19646,7 +19644,7 @@
           <p:cNvPr id="31" name="">
             <a:extLst xmlns:a="http://schemas.openxmlformats.org/drawingml/2006/main">
               <a:ext uri="{FF2B5EF4-FFF2-40B4-BE49-F238E27FC236}">
-                <a16:creationId xmlns:a16="http://schemas.microsoft.com/office/drawing/2014/main" id="{3601A2E9-5892-44A9-A9A6-3EAD5925B9C8}"/>
+                <a16:creationId xmlns:a16="http://schemas.microsoft.com/office/drawing/2014/main" id="{588F4D92-8317-4B12-874E-86BA17633238}"/>
               </a:ext>
             </a:extLst>
           </p:cNvPr>
@@ -19710,7 +19708,7 @@
           <p:cNvPr id="32" name="">
             <a:extLst xmlns:a="http://schemas.openxmlformats.org/drawingml/2006/main">
               <a:ext uri="{FF2B5EF4-FFF2-40B4-BE49-F238E27FC236}">
-                <a16:creationId xmlns:a16="http://schemas.microsoft.com/office/drawing/2014/main" id="{7FCAB3DD-C822-41BA-8816-A36DE2C68CDD}"/>
+                <a16:creationId xmlns:a16="http://schemas.microsoft.com/office/drawing/2014/main" id="{C3353D8A-A338-4AD1-816F-52F1F0B0450D}"/>
               </a:ext>
             </a:extLst>
           </p:cNvPr>
@@ -19743,7 +19741,7 @@
           <p:cNvPr id="33" name="">
             <a:extLst xmlns:a="http://schemas.openxmlformats.org/drawingml/2006/main">
               <a:ext uri="{FF2B5EF4-FFF2-40B4-BE49-F238E27FC236}">
-                <a16:creationId xmlns:a16="http://schemas.microsoft.com/office/drawing/2014/main" id="{86A52D8A-DEBA-4FDA-A959-B7EC52144D4D}"/>
+                <a16:creationId xmlns:a16="http://schemas.microsoft.com/office/drawing/2014/main" id="{8A249F7A-7E99-491E-B85E-DDA7D02C4097}"/>
               </a:ext>
             </a:extLst>
           </p:cNvPr>
@@ -19807,7 +19805,7 @@
           <p:cNvPr id="34" name="">
             <a:extLst xmlns:a="http://schemas.openxmlformats.org/drawingml/2006/main">
               <a:ext uri="{FF2B5EF4-FFF2-40B4-BE49-F238E27FC236}">
-                <a16:creationId xmlns:a16="http://schemas.microsoft.com/office/drawing/2014/main" id="{A106EB33-1D49-4CAC-B95B-96514F09CE44}"/>
+                <a16:creationId xmlns:a16="http://schemas.microsoft.com/office/drawing/2014/main" id="{0BA5362E-DBA3-4D4D-8DD8-5B7EF30395FE}"/>
               </a:ext>
             </a:extLst>
           </p:cNvPr>
@@ -19871,7 +19869,7 @@
           <p:cNvPr id="35" name="">
             <a:extLst xmlns:a="http://schemas.openxmlformats.org/drawingml/2006/main">
               <a:ext uri="{FF2B5EF4-FFF2-40B4-BE49-F238E27FC236}">
-                <a16:creationId xmlns:a16="http://schemas.microsoft.com/office/drawing/2014/main" id="{3462655D-1B04-4AEB-A79F-4A6EC39C0B94}"/>
+                <a16:creationId xmlns:a16="http://schemas.microsoft.com/office/drawing/2014/main" id="{5DB19F83-598B-46E1-9C7E-26CB04D64AE9}"/>
               </a:ext>
             </a:extLst>
           </p:cNvPr>
@@ -19904,7 +19902,7 @@
           <p:cNvPr id="36" name="">
             <a:extLst xmlns:a="http://schemas.openxmlformats.org/drawingml/2006/main">
               <a:ext uri="{FF2B5EF4-FFF2-40B4-BE49-F238E27FC236}">
-                <a16:creationId xmlns:a16="http://schemas.microsoft.com/office/drawing/2014/main" id="{0FB291A3-B662-4412-A163-92CDE3CB1C04}"/>
+                <a16:creationId xmlns:a16="http://schemas.microsoft.com/office/drawing/2014/main" id="{94E79D6E-FFE9-41D0-BAE2-3F3DA7987C85}"/>
               </a:ext>
             </a:extLst>
           </p:cNvPr>
@@ -19968,7 +19966,7 @@
           <p:cNvPr id="37" name="">
             <a:extLst xmlns:a="http://schemas.openxmlformats.org/drawingml/2006/main">
               <a:ext uri="{FF2B5EF4-FFF2-40B4-BE49-F238E27FC236}">
-                <a16:creationId xmlns:a16="http://schemas.microsoft.com/office/drawing/2014/main" id="{ABEDA667-2598-44CC-B8C9-F32C5BEE69C2}"/>
+                <a16:creationId xmlns:a16="http://schemas.microsoft.com/office/drawing/2014/main" id="{025C659C-005E-4693-876A-3186302497E5}"/>
               </a:ext>
             </a:extLst>
           </p:cNvPr>
@@ -20032,7 +20030,7 @@
           <p:cNvPr id="38" name="">
             <a:extLst xmlns:a="http://schemas.openxmlformats.org/drawingml/2006/main">
               <a:ext uri="{FF2B5EF4-FFF2-40B4-BE49-F238E27FC236}">
-                <a16:creationId xmlns:a16="http://schemas.microsoft.com/office/drawing/2014/main" id="{AA09AC26-9AF1-4026-816F-58FC6D2D0EAC}"/>
+                <a16:creationId xmlns:a16="http://schemas.microsoft.com/office/drawing/2014/main" id="{87204F27-53C7-4494-8454-93079CD6FF1D}"/>
               </a:ext>
             </a:extLst>
           </p:cNvPr>
@@ -20065,7 +20063,7 @@
           <p:cNvPr id="39" name="">
             <a:extLst xmlns:a="http://schemas.openxmlformats.org/drawingml/2006/main">
               <a:ext uri="{FF2B5EF4-FFF2-40B4-BE49-F238E27FC236}">
-                <a16:creationId xmlns:a16="http://schemas.microsoft.com/office/drawing/2014/main" id="{9DB6C0FD-7A42-4083-AC96-54111E0B911D}"/>
+                <a16:creationId xmlns:a16="http://schemas.microsoft.com/office/drawing/2014/main" id="{0DC41BBA-66ED-4A35-BE54-F79D9339B997}"/>
               </a:ext>
             </a:extLst>
           </p:cNvPr>
@@ -20129,7 +20127,7 @@
           <p:cNvPr id="40" name="">
             <a:extLst xmlns:a="http://schemas.openxmlformats.org/drawingml/2006/main">
               <a:ext uri="{FF2B5EF4-FFF2-40B4-BE49-F238E27FC236}">
-                <a16:creationId xmlns:a16="http://schemas.microsoft.com/office/drawing/2014/main" id="{4E76E6F1-C704-4C2C-B377-3B4B2E797AF8}"/>
+                <a16:creationId xmlns:a16="http://schemas.microsoft.com/office/drawing/2014/main" id="{4986D8F6-7CC5-47D3-B70B-DC7CC5185BB7}"/>
               </a:ext>
             </a:extLst>
           </p:cNvPr>
@@ -20193,7 +20191,7 @@
           <p:cNvPr id="41" name="">
             <a:extLst xmlns:a="http://schemas.openxmlformats.org/drawingml/2006/main">
               <a:ext uri="{FF2B5EF4-FFF2-40B4-BE49-F238E27FC236}">
-                <a16:creationId xmlns:a16="http://schemas.microsoft.com/office/drawing/2014/main" id="{534FC3AC-1348-46FE-A315-27083E1962D3}"/>
+                <a16:creationId xmlns:a16="http://schemas.microsoft.com/office/drawing/2014/main" id="{BCDAAB77-8B28-4110-8151-623662F249E0}"/>
               </a:ext>
             </a:extLst>
           </p:cNvPr>
@@ -20228,7 +20226,7 @@
           <p:cNvPr id="42" name="">
             <a:extLst xmlns:a="http://schemas.openxmlformats.org/drawingml/2006/main">
               <a:ext uri="{FF2B5EF4-FFF2-40B4-BE49-F238E27FC236}">
-                <a16:creationId xmlns:a16="http://schemas.microsoft.com/office/drawing/2014/main" id="{8AFEA1F3-BE5E-4AD8-9FF3-A1045463BBF1}"/>
+                <a16:creationId xmlns:a16="http://schemas.microsoft.com/office/drawing/2014/main" id="{5339EFD1-4D31-4741-B676-158FBEB18803}"/>
               </a:ext>
             </a:extLst>
           </p:cNvPr>
@@ -20292,7 +20290,7 @@
           <p:cNvPr id="43" name="">
             <a:extLst xmlns:a="http://schemas.openxmlformats.org/drawingml/2006/main">
               <a:ext uri="{FF2B5EF4-FFF2-40B4-BE49-F238E27FC236}">
-                <a16:creationId xmlns:a16="http://schemas.microsoft.com/office/drawing/2014/main" id="{3FF53DBE-2E0D-4BEA-AF4F-A2FF952CFBED}"/>
+                <a16:creationId xmlns:a16="http://schemas.microsoft.com/office/drawing/2014/main" id="{548CA890-73D5-435E-AEBA-D10C3D723D75}"/>
               </a:ext>
             </a:extLst>
           </p:cNvPr>
@@ -20356,7 +20354,7 @@
           <p:cNvPr id="44" name="">
             <a:extLst xmlns:a="http://schemas.openxmlformats.org/drawingml/2006/main">
               <a:ext uri="{FF2B5EF4-FFF2-40B4-BE49-F238E27FC236}">
-                <a16:creationId xmlns:a16="http://schemas.microsoft.com/office/drawing/2014/main" id="{A4082A5B-6829-4F72-95AD-E8FB20FDCCDD}"/>
+                <a16:creationId xmlns:a16="http://schemas.microsoft.com/office/drawing/2014/main" id="{EF100FB1-989E-46C1-A5FE-FB148FCAA37E}"/>
               </a:ext>
             </a:extLst>
           </p:cNvPr>
@@ -20418,7 +20416,7 @@
     </p:spTree>
     <p:extLst>
       <p:ext uri="{BB962C8B-B14F-4D97-AF65-F5344CB8AC3E}">
-        <p14:creationId xmlns:p14="http://schemas.microsoft.com/office/powerpoint/2010/main" val="1387388954"/>
+        <p14:creationId xmlns:p14="http://schemas.microsoft.com/office/powerpoint/2010/main" val="830871391"/>
       </p:ext>
     </p:extLst>
   </p:cSld>
@@ -20442,7 +20440,7 @@
           <p:cNvPr id="1" name="">
             <a:extLst xmlns:a="http://schemas.openxmlformats.org/drawingml/2006/main">
               <a:ext uri="{FF2B5EF4-FFF2-40B4-BE49-F238E27FC236}">
-                <a16:creationId xmlns:a16="http://schemas.microsoft.com/office/drawing/2014/main" id="{72C4DAD6-96B8-4246-8DD0-B11A0B1F6ACD}"/>
+                <a16:creationId xmlns:a16="http://schemas.microsoft.com/office/drawing/2014/main" id="{3893154D-8AC1-449B-BFC7-C7262E0A232A}"/>
               </a:ext>
             </a:extLst>
           </p:cNvPr>
@@ -20477,7 +20475,7 @@
           <p:cNvPr id="2" name="">
             <a:extLst xmlns:a="http://schemas.openxmlformats.org/drawingml/2006/main">
               <a:ext uri="{FF2B5EF4-FFF2-40B4-BE49-F238E27FC236}">
-                <a16:creationId xmlns:a16="http://schemas.microsoft.com/office/drawing/2014/main" id="{84D11D26-8A48-41CE-BADE-1E1FBFBB44E6}"/>
+                <a16:creationId xmlns:a16="http://schemas.microsoft.com/office/drawing/2014/main" id="{21392479-3DD6-422F-8D26-8F2530EFF934}"/>
               </a:ext>
             </a:extLst>
           </p:cNvPr>
@@ -20512,7 +20510,7 @@
           <p:cNvPr id="3" name="">
             <a:extLst xmlns:a="http://schemas.openxmlformats.org/drawingml/2006/main">
               <a:ext uri="{FF2B5EF4-FFF2-40B4-BE49-F238E27FC236}">
-                <a16:creationId xmlns:a16="http://schemas.microsoft.com/office/drawing/2014/main" id="{3CC7C79D-E212-4FA4-AFEA-05F243195FF0}"/>
+                <a16:creationId xmlns:a16="http://schemas.microsoft.com/office/drawing/2014/main" id="{33841D1B-54A9-4BBC-9A10-4EBE0AC3ACB8}"/>
               </a:ext>
             </a:extLst>
           </p:cNvPr>
@@ -20547,7 +20545,7 @@
           <p:cNvPr id="4" name="kicker-08-marker">
             <a:extLst xmlns:a="http://schemas.openxmlformats.org/drawingml/2006/main">
               <a:ext uri="{FF2B5EF4-FFF2-40B4-BE49-F238E27FC236}">
-                <a16:creationId xmlns:a16="http://schemas.microsoft.com/office/drawing/2014/main" id="{48EDEFBE-6729-47FD-A192-AACB7C278298}"/>
+                <a16:creationId xmlns:a16="http://schemas.microsoft.com/office/drawing/2014/main" id="{FC75D0A6-745B-43D9-9E43-19BA76FCDE65}"/>
               </a:ext>
             </a:extLst>
           </p:cNvPr>
@@ -20582,7 +20580,7 @@
           <p:cNvPr id="5" name="kicker-08-label">
             <a:extLst xmlns:a="http://schemas.openxmlformats.org/drawingml/2006/main">
               <a:ext uri="{FF2B5EF4-FFF2-40B4-BE49-F238E27FC236}">
-                <a16:creationId xmlns:a16="http://schemas.microsoft.com/office/drawing/2014/main" id="{A111929F-E681-438D-A48E-EC07912E067C}"/>
+                <a16:creationId xmlns:a16="http://schemas.microsoft.com/office/drawing/2014/main" id="{A4E79A6D-F7E8-49D1-B311-4BB07896187D}"/>
               </a:ext>
             </a:extLst>
           </p:cNvPr>
@@ -20646,7 +20644,7 @@
           <p:cNvPr id="6" name="">
             <a:extLst xmlns:a="http://schemas.openxmlformats.org/drawingml/2006/main">
               <a:ext uri="{FF2B5EF4-FFF2-40B4-BE49-F238E27FC236}">
-                <a16:creationId xmlns:a16="http://schemas.microsoft.com/office/drawing/2014/main" id="{8A6D69B5-8338-4438-9DBA-A1457C6DB22C}"/>
+                <a16:creationId xmlns:a16="http://schemas.microsoft.com/office/drawing/2014/main" id="{1E439B97-B828-4ABC-92BB-B60745D7BED1}"/>
               </a:ext>
             </a:extLst>
           </p:cNvPr>
@@ -20710,7 +20708,7 @@
           <p:cNvPr id="7" name="">
             <a:extLst xmlns:a="http://schemas.openxmlformats.org/drawingml/2006/main">
               <a:ext uri="{FF2B5EF4-FFF2-40B4-BE49-F238E27FC236}">
-                <a16:creationId xmlns:a16="http://schemas.microsoft.com/office/drawing/2014/main" id="{2A7E49F1-614E-449E-B25D-ABED2645A5C2}"/>
+                <a16:creationId xmlns:a16="http://schemas.microsoft.com/office/drawing/2014/main" id="{7ADDFD9E-E450-46A4-BE94-7F7C9E08BAEF}"/>
               </a:ext>
             </a:extLst>
           </p:cNvPr>
@@ -20774,7 +20772,7 @@
           <p:cNvPr id="8" name="">
             <a:extLst xmlns:a="http://schemas.openxmlformats.org/drawingml/2006/main">
               <a:ext uri="{FF2B5EF4-FFF2-40B4-BE49-F238E27FC236}">
-                <a16:creationId xmlns:a16="http://schemas.microsoft.com/office/drawing/2014/main" id="{8E5231E6-D3CA-4F5D-97C1-5444C562F586}"/>
+                <a16:creationId xmlns:a16="http://schemas.microsoft.com/office/drawing/2014/main" id="{D7E05254-2349-4B9C-AA1E-304D5D691064}"/>
               </a:ext>
             </a:extLst>
           </p:cNvPr>
@@ -20809,7 +20807,7 @@
           <p:cNvPr id="9" name="">
             <a:extLst xmlns:a="http://schemas.openxmlformats.org/drawingml/2006/main">
               <a:ext uri="{FF2B5EF4-FFF2-40B4-BE49-F238E27FC236}">
-                <a16:creationId xmlns:a16="http://schemas.microsoft.com/office/drawing/2014/main" id="{9838EE86-8263-4D16-912C-CB99A53D7D96}"/>
+                <a16:creationId xmlns:a16="http://schemas.microsoft.com/office/drawing/2014/main" id="{A6C0D69F-B814-4960-9ABA-B4FDB2A43458}"/>
               </a:ext>
             </a:extLst>
           </p:cNvPr>
@@ -20873,7 +20871,7 @@
           <p:cNvPr id="10" name="">
             <a:extLst xmlns:a="http://schemas.openxmlformats.org/drawingml/2006/main">
               <a:ext uri="{FF2B5EF4-FFF2-40B4-BE49-F238E27FC236}">
-                <a16:creationId xmlns:a16="http://schemas.microsoft.com/office/drawing/2014/main" id="{B98FCD48-83E6-4149-B9CB-148ED48822DC}"/>
+                <a16:creationId xmlns:a16="http://schemas.microsoft.com/office/drawing/2014/main" id="{2C3E2F11-A9FA-498A-BF20-F7965E82EA4D}"/>
               </a:ext>
             </a:extLst>
           </p:cNvPr>
@@ -20937,7 +20935,7 @@
           <p:cNvPr id="11" name="">
             <a:extLst xmlns:a="http://schemas.openxmlformats.org/drawingml/2006/main">
               <a:ext uri="{FF2B5EF4-FFF2-40B4-BE49-F238E27FC236}">
-                <a16:creationId xmlns:a16="http://schemas.microsoft.com/office/drawing/2014/main" id="{53E888D6-69F1-4ABA-9C70-9232C6C9EA22}"/>
+                <a16:creationId xmlns:a16="http://schemas.microsoft.com/office/drawing/2014/main" id="{7BC25DEF-DE6E-4A5E-9414-51208E732117}"/>
               </a:ext>
             </a:extLst>
           </p:cNvPr>
@@ -21001,7 +20999,7 @@
           <p:cNvPr id="12" name="">
             <a:extLst xmlns:a="http://schemas.openxmlformats.org/drawingml/2006/main">
               <a:ext uri="{FF2B5EF4-FFF2-40B4-BE49-F238E27FC236}">
-                <a16:creationId xmlns:a16="http://schemas.microsoft.com/office/drawing/2014/main" id="{301F57A5-F46D-4F4B-985C-C278B5B09C15}"/>
+                <a16:creationId xmlns:a16="http://schemas.microsoft.com/office/drawing/2014/main" id="{0833D8FF-5815-423A-BA6F-4F888A8A9852}"/>
               </a:ext>
             </a:extLst>
           </p:cNvPr>
@@ -21036,7 +21034,7 @@
           <p:cNvPr id="13" name="">
             <a:extLst xmlns:a="http://schemas.openxmlformats.org/drawingml/2006/main">
               <a:ext uri="{FF2B5EF4-FFF2-40B4-BE49-F238E27FC236}">
-                <a16:creationId xmlns:a16="http://schemas.microsoft.com/office/drawing/2014/main" id="{6AF63683-37BF-4E97-896E-B187C66023B0}"/>
+                <a16:creationId xmlns:a16="http://schemas.microsoft.com/office/drawing/2014/main" id="{1359BD22-9F14-49F9-B337-77717A86D1C5}"/>
               </a:ext>
             </a:extLst>
           </p:cNvPr>
@@ -21069,7 +21067,7 @@
           <p:cNvPr id="14" name="">
             <a:extLst xmlns:a="http://schemas.openxmlformats.org/drawingml/2006/main">
               <a:ext uri="{FF2B5EF4-FFF2-40B4-BE49-F238E27FC236}">
-                <a16:creationId xmlns:a16="http://schemas.microsoft.com/office/drawing/2014/main" id="{1434DE13-8A9A-409E-A042-1E52D42D3F96}"/>
+                <a16:creationId xmlns:a16="http://schemas.microsoft.com/office/drawing/2014/main" id="{30D3FB6D-5E6D-493C-875F-DB0EE5742A34}"/>
               </a:ext>
             </a:extLst>
           </p:cNvPr>
@@ -21104,7 +21102,7 @@
           <p:cNvPr id="15" name="">
             <a:extLst xmlns:a="http://schemas.openxmlformats.org/drawingml/2006/main">
               <a:ext uri="{FF2B5EF4-FFF2-40B4-BE49-F238E27FC236}">
-                <a16:creationId xmlns:a16="http://schemas.microsoft.com/office/drawing/2014/main" id="{70D4722F-4A82-4DC2-AAA0-03AACE2374A9}"/>
+                <a16:creationId xmlns:a16="http://schemas.microsoft.com/office/drawing/2014/main" id="{A04ABF22-9A32-4CE0-8DF1-CE4750B4CBEF}"/>
               </a:ext>
             </a:extLst>
           </p:cNvPr>
@@ -21168,7 +21166,7 @@
           <p:cNvPr id="16" name="">
             <a:extLst xmlns:a="http://schemas.openxmlformats.org/drawingml/2006/main">
               <a:ext uri="{FF2B5EF4-FFF2-40B4-BE49-F238E27FC236}">
-                <a16:creationId xmlns:a16="http://schemas.microsoft.com/office/drawing/2014/main" id="{C242B4C0-1E6B-4D04-B382-F6457A88819B}"/>
+                <a16:creationId xmlns:a16="http://schemas.microsoft.com/office/drawing/2014/main" id="{10C8A32F-B66B-46CA-B23F-F880C51DDA8A}"/>
               </a:ext>
             </a:extLst>
           </p:cNvPr>
@@ -21201,7 +21199,7 @@
           <p:cNvPr id="17" name="">
             <a:extLst xmlns:a="http://schemas.openxmlformats.org/drawingml/2006/main">
               <a:ext uri="{FF2B5EF4-FFF2-40B4-BE49-F238E27FC236}">
-                <a16:creationId xmlns:a16="http://schemas.microsoft.com/office/drawing/2014/main" id="{83F6C857-925D-4A62-959A-52A74182B5DD}"/>
+                <a16:creationId xmlns:a16="http://schemas.microsoft.com/office/drawing/2014/main" id="{CA7D1215-6807-4365-89C1-F6661C7B24D7}"/>
               </a:ext>
             </a:extLst>
           </p:cNvPr>
@@ -21236,7 +21234,7 @@
           <p:cNvPr id="18" name="">
             <a:extLst xmlns:a="http://schemas.openxmlformats.org/drawingml/2006/main">
               <a:ext uri="{FF2B5EF4-FFF2-40B4-BE49-F238E27FC236}">
-                <a16:creationId xmlns:a16="http://schemas.microsoft.com/office/drawing/2014/main" id="{7942512D-95B0-403C-A2DB-F943D0236DD7}"/>
+                <a16:creationId xmlns:a16="http://schemas.microsoft.com/office/drawing/2014/main" id="{3B79F927-6410-411B-BF0B-765A30E660B1}"/>
               </a:ext>
             </a:extLst>
           </p:cNvPr>
@@ -21300,7 +21298,7 @@
           <p:cNvPr id="19" name="">
             <a:extLst xmlns:a="http://schemas.openxmlformats.org/drawingml/2006/main">
               <a:ext uri="{FF2B5EF4-FFF2-40B4-BE49-F238E27FC236}">
-                <a16:creationId xmlns:a16="http://schemas.microsoft.com/office/drawing/2014/main" id="{0A0DCCDE-BAD3-4FF4-A937-61D592F7135B}"/>
+                <a16:creationId xmlns:a16="http://schemas.microsoft.com/office/drawing/2014/main" id="{C685E825-40F8-41BC-B75E-B738C656ED54}"/>
               </a:ext>
             </a:extLst>
           </p:cNvPr>
@@ -21364,7 +21362,7 @@
           <p:cNvPr id="20" name="">
             <a:extLst xmlns:a="http://schemas.openxmlformats.org/drawingml/2006/main">
               <a:ext uri="{FF2B5EF4-FFF2-40B4-BE49-F238E27FC236}">
-                <a16:creationId xmlns:a16="http://schemas.microsoft.com/office/drawing/2014/main" id="{B1361C0E-F47B-4589-B9D4-022BB2F3BB3D}"/>
+                <a16:creationId xmlns:a16="http://schemas.microsoft.com/office/drawing/2014/main" id="{EF9B3769-6995-46AB-A9FB-B4085AEE9271}"/>
               </a:ext>
             </a:extLst>
           </p:cNvPr>
@@ -21399,7 +21397,7 @@
           <p:cNvPr id="21" name="">
             <a:extLst xmlns:a="http://schemas.openxmlformats.org/drawingml/2006/main">
               <a:ext uri="{FF2B5EF4-FFF2-40B4-BE49-F238E27FC236}">
-                <a16:creationId xmlns:a16="http://schemas.microsoft.com/office/drawing/2014/main" id="{661E5AF6-BB85-4F8D-8C85-AADD8D120908}"/>
+                <a16:creationId xmlns:a16="http://schemas.microsoft.com/office/drawing/2014/main" id="{B69E3C04-6048-4AF1-9365-C4A290A196C2}"/>
               </a:ext>
             </a:extLst>
           </p:cNvPr>
@@ -21432,7 +21430,7 @@
           <p:cNvPr id="22" name="">
             <a:extLst xmlns:a="http://schemas.openxmlformats.org/drawingml/2006/main">
               <a:ext uri="{FF2B5EF4-FFF2-40B4-BE49-F238E27FC236}">
-                <a16:creationId xmlns:a16="http://schemas.microsoft.com/office/drawing/2014/main" id="{7B48C075-BD27-4F59-9216-5AF8B07844BC}"/>
+                <a16:creationId xmlns:a16="http://schemas.microsoft.com/office/drawing/2014/main" id="{4D3A63BF-FB2A-4286-B1AF-66D1478848EC}"/>
               </a:ext>
             </a:extLst>
           </p:cNvPr>
@@ -21467,7 +21465,7 @@
           <p:cNvPr id="23" name="">
             <a:extLst xmlns:a="http://schemas.openxmlformats.org/drawingml/2006/main">
               <a:ext uri="{FF2B5EF4-FFF2-40B4-BE49-F238E27FC236}">
-                <a16:creationId xmlns:a16="http://schemas.microsoft.com/office/drawing/2014/main" id="{63956521-8161-4B61-935F-8AD08154CEA1}"/>
+                <a16:creationId xmlns:a16="http://schemas.microsoft.com/office/drawing/2014/main" id="{2E95A9A7-EC0E-4868-9B6B-C80CE409B171}"/>
               </a:ext>
             </a:extLst>
           </p:cNvPr>
@@ -21531,7 +21529,7 @@
           <p:cNvPr id="24" name="">
             <a:extLst xmlns:a="http://schemas.openxmlformats.org/drawingml/2006/main">
               <a:ext uri="{FF2B5EF4-FFF2-40B4-BE49-F238E27FC236}">
-                <a16:creationId xmlns:a16="http://schemas.microsoft.com/office/drawing/2014/main" id="{6C3BB63D-1BEF-433E-A750-E93DC4A9EE2D}"/>
+                <a16:creationId xmlns:a16="http://schemas.microsoft.com/office/drawing/2014/main" id="{69C3A06E-E3BE-4420-9723-64E694356FBF}"/>
               </a:ext>
             </a:extLst>
           </p:cNvPr>
@@ -21595,7 +21593,7 @@
           <p:cNvPr id="25" name="">
             <a:extLst xmlns:a="http://schemas.openxmlformats.org/drawingml/2006/main">
               <a:ext uri="{FF2B5EF4-FFF2-40B4-BE49-F238E27FC236}">
-                <a16:creationId xmlns:a16="http://schemas.microsoft.com/office/drawing/2014/main" id="{43F708DC-6B9A-4CD7-92EA-DD2CDF40EB30}"/>
+                <a16:creationId xmlns:a16="http://schemas.microsoft.com/office/drawing/2014/main" id="{1A2C66BD-1B72-4E89-8882-2EF36736A2E6}"/>
               </a:ext>
             </a:extLst>
           </p:cNvPr>
@@ -21630,7 +21628,7 @@
           <p:cNvPr id="26" name="">
             <a:extLst xmlns:a="http://schemas.openxmlformats.org/drawingml/2006/main">
               <a:ext uri="{FF2B5EF4-FFF2-40B4-BE49-F238E27FC236}">
-                <a16:creationId xmlns:a16="http://schemas.microsoft.com/office/drawing/2014/main" id="{629CF3C6-FC9F-4A14-A6BA-249046488334}"/>
+                <a16:creationId xmlns:a16="http://schemas.microsoft.com/office/drawing/2014/main" id="{244408C9-9DE4-4627-AFBE-693C082AF6C7}"/>
               </a:ext>
             </a:extLst>
           </p:cNvPr>
@@ -21663,7 +21661,7 @@
           <p:cNvPr id="27" name="">
             <a:extLst xmlns:a="http://schemas.openxmlformats.org/drawingml/2006/main">
               <a:ext uri="{FF2B5EF4-FFF2-40B4-BE49-F238E27FC236}">
-                <a16:creationId xmlns:a16="http://schemas.microsoft.com/office/drawing/2014/main" id="{835F6964-57FC-4A43-81AC-778D9B846EC9}"/>
+                <a16:creationId xmlns:a16="http://schemas.microsoft.com/office/drawing/2014/main" id="{B8B86D27-F81E-4E8D-96B6-6B29AEF7A859}"/>
               </a:ext>
             </a:extLst>
           </p:cNvPr>
@@ -21698,7 +21696,7 @@
           <p:cNvPr id="28" name="">
             <a:extLst xmlns:a="http://schemas.openxmlformats.org/drawingml/2006/main">
               <a:ext uri="{FF2B5EF4-FFF2-40B4-BE49-F238E27FC236}">
-                <a16:creationId xmlns:a16="http://schemas.microsoft.com/office/drawing/2014/main" id="{092071F3-99A8-4F04-B237-5623C5443C90}"/>
+                <a16:creationId xmlns:a16="http://schemas.microsoft.com/office/drawing/2014/main" id="{B1E5D025-F7A6-4073-9254-4001BF41C7BD}"/>
               </a:ext>
             </a:extLst>
           </p:cNvPr>
@@ -21762,7 +21760,7 @@
           <p:cNvPr id="29" name="">
             <a:extLst xmlns:a="http://schemas.openxmlformats.org/drawingml/2006/main">
               <a:ext uri="{FF2B5EF4-FFF2-40B4-BE49-F238E27FC236}">
-                <a16:creationId xmlns:a16="http://schemas.microsoft.com/office/drawing/2014/main" id="{93CCAC4D-83BE-4711-830F-49DB036A300A}"/>
+                <a16:creationId xmlns:a16="http://schemas.microsoft.com/office/drawing/2014/main" id="{8837778C-09AA-48D1-9817-D800345091CD}"/>
               </a:ext>
             </a:extLst>
           </p:cNvPr>
@@ -21826,7 +21824,7 @@
           <p:cNvPr id="30" name="">
             <a:extLst xmlns:a="http://schemas.openxmlformats.org/drawingml/2006/main">
               <a:ext uri="{FF2B5EF4-FFF2-40B4-BE49-F238E27FC236}">
-                <a16:creationId xmlns:a16="http://schemas.microsoft.com/office/drawing/2014/main" id="{4788E9D1-6497-4D48-A4BE-B453FF217C16}"/>
+                <a16:creationId xmlns:a16="http://schemas.microsoft.com/office/drawing/2014/main" id="{90AE2A2B-6082-4C05-A1CC-A9F0A7C6742E}"/>
               </a:ext>
             </a:extLst>
           </p:cNvPr>
@@ -21861,7 +21859,7 @@
           <p:cNvPr id="31" name="">
             <a:extLst xmlns:a="http://schemas.openxmlformats.org/drawingml/2006/main">
               <a:ext uri="{FF2B5EF4-FFF2-40B4-BE49-F238E27FC236}">
-                <a16:creationId xmlns:a16="http://schemas.microsoft.com/office/drawing/2014/main" id="{94783068-3A08-4A79-A05F-3B477E141711}"/>
+                <a16:creationId xmlns:a16="http://schemas.microsoft.com/office/drawing/2014/main" id="{945A7344-830E-4C4B-A8F1-8D0DDF0234A3}"/>
               </a:ext>
             </a:extLst>
           </p:cNvPr>
@@ -21894,7 +21892,7 @@
           <p:cNvPr id="32" name="">
             <a:extLst xmlns:a="http://schemas.openxmlformats.org/drawingml/2006/main">
               <a:ext uri="{FF2B5EF4-FFF2-40B4-BE49-F238E27FC236}">
-                <a16:creationId xmlns:a16="http://schemas.microsoft.com/office/drawing/2014/main" id="{B9962F53-0F91-41BE-9E64-DE30D81D42C3}"/>
+                <a16:creationId xmlns:a16="http://schemas.microsoft.com/office/drawing/2014/main" id="{92AD88AC-B607-477C-A72D-245E129BFC33}"/>
               </a:ext>
             </a:extLst>
           </p:cNvPr>
@@ -21929,7 +21927,7 @@
           <p:cNvPr id="33" name="">
             <a:extLst xmlns:a="http://schemas.openxmlformats.org/drawingml/2006/main">
               <a:ext uri="{FF2B5EF4-FFF2-40B4-BE49-F238E27FC236}">
-                <a16:creationId xmlns:a16="http://schemas.microsoft.com/office/drawing/2014/main" id="{459F08E7-A424-45A7-AEFB-AE5C6A16DC92}"/>
+                <a16:creationId xmlns:a16="http://schemas.microsoft.com/office/drawing/2014/main" id="{62C2F953-45C7-44BC-B520-E3AF37D7A2B1}"/>
               </a:ext>
             </a:extLst>
           </p:cNvPr>
@@ -21993,7 +21991,7 @@
           <p:cNvPr id="34" name="">
             <a:extLst xmlns:a="http://schemas.openxmlformats.org/drawingml/2006/main">
               <a:ext uri="{FF2B5EF4-FFF2-40B4-BE49-F238E27FC236}">
-                <a16:creationId xmlns:a16="http://schemas.microsoft.com/office/drawing/2014/main" id="{3DAA7991-917B-4691-9273-3AB7F3DBEEC2}"/>
+                <a16:creationId xmlns:a16="http://schemas.microsoft.com/office/drawing/2014/main" id="{8AC3F978-E92E-4F0D-8A4A-98B325D16913}"/>
               </a:ext>
             </a:extLst>
           </p:cNvPr>
@@ -22057,7 +22055,7 @@
           <p:cNvPr id="35" name="">
             <a:extLst xmlns:a="http://schemas.openxmlformats.org/drawingml/2006/main">
               <a:ext uri="{FF2B5EF4-FFF2-40B4-BE49-F238E27FC236}">
-                <a16:creationId xmlns:a16="http://schemas.microsoft.com/office/drawing/2014/main" id="{42DD8944-91C1-40BE-8D29-3D7C5A69BF55}"/>
+                <a16:creationId xmlns:a16="http://schemas.microsoft.com/office/drawing/2014/main" id="{B72D65D3-64AA-4F64-83A5-247BD93ADA58}"/>
               </a:ext>
             </a:extLst>
           </p:cNvPr>
@@ -22090,7 +22088,7 @@
           <p:cNvPr id="36" name="">
             <a:extLst xmlns:a="http://schemas.openxmlformats.org/drawingml/2006/main">
               <a:ext uri="{FF2B5EF4-FFF2-40B4-BE49-F238E27FC236}">
-                <a16:creationId xmlns:a16="http://schemas.microsoft.com/office/drawing/2014/main" id="{683A9603-D159-4A7C-A636-6CDE590687B7}"/>
+                <a16:creationId xmlns:a16="http://schemas.microsoft.com/office/drawing/2014/main" id="{B2CF3C39-1F93-4E57-976A-6D5A88BE923A}"/>
               </a:ext>
             </a:extLst>
           </p:cNvPr>
@@ -22125,7 +22123,7 @@
           <p:cNvPr id="37" name="">
             <a:extLst xmlns:a="http://schemas.openxmlformats.org/drawingml/2006/main">
               <a:ext uri="{FF2B5EF4-FFF2-40B4-BE49-F238E27FC236}">
-                <a16:creationId xmlns:a16="http://schemas.microsoft.com/office/drawing/2014/main" id="{41F61465-45BD-4A91-BA12-A1B6D32B5C9F}"/>
+                <a16:creationId xmlns:a16="http://schemas.microsoft.com/office/drawing/2014/main" id="{92A31725-2134-441D-B786-5E962FA53688}"/>
               </a:ext>
             </a:extLst>
           </p:cNvPr>
@@ -22189,7 +22187,7 @@
           <p:cNvPr id="38" name="">
             <a:extLst xmlns:a="http://schemas.openxmlformats.org/drawingml/2006/main">
               <a:ext uri="{FF2B5EF4-FFF2-40B4-BE49-F238E27FC236}">
-                <a16:creationId xmlns:a16="http://schemas.microsoft.com/office/drawing/2014/main" id="{6E700456-0476-49D8-B03B-6B7E9A52AFC1}"/>
+                <a16:creationId xmlns:a16="http://schemas.microsoft.com/office/drawing/2014/main" id="{B9DC0BA3-9842-4314-961B-3855050CCB63}"/>
               </a:ext>
             </a:extLst>
           </p:cNvPr>
@@ -22253,7 +22251,7 @@
           <p:cNvPr id="39" name="">
             <a:extLst xmlns:a="http://schemas.openxmlformats.org/drawingml/2006/main">
               <a:ext uri="{FF2B5EF4-FFF2-40B4-BE49-F238E27FC236}">
-                <a16:creationId xmlns:a16="http://schemas.microsoft.com/office/drawing/2014/main" id="{B851EF13-6E93-4F38-8957-BA9C4C7EBEAB}"/>
+                <a16:creationId xmlns:a16="http://schemas.microsoft.com/office/drawing/2014/main" id="{74803784-970D-4D20-9CA8-4351DEED4E0A}"/>
               </a:ext>
             </a:extLst>
           </p:cNvPr>
@@ -22288,7 +22286,7 @@
           <p:cNvPr id="40" name="">
             <a:extLst xmlns:a="http://schemas.openxmlformats.org/drawingml/2006/main">
               <a:ext uri="{FF2B5EF4-FFF2-40B4-BE49-F238E27FC236}">
-                <a16:creationId xmlns:a16="http://schemas.microsoft.com/office/drawing/2014/main" id="{E7DF6ACF-02BE-4661-BED7-429682D9EFD7}"/>
+                <a16:creationId xmlns:a16="http://schemas.microsoft.com/office/drawing/2014/main" id="{51EFC483-402C-4EC8-8554-437B06AF8BA2}"/>
               </a:ext>
             </a:extLst>
           </p:cNvPr>
@@ -22321,7 +22319,7 @@
           <p:cNvPr id="41" name="">
             <a:extLst xmlns:a="http://schemas.openxmlformats.org/drawingml/2006/main">
               <a:ext uri="{FF2B5EF4-FFF2-40B4-BE49-F238E27FC236}">
-                <a16:creationId xmlns:a16="http://schemas.microsoft.com/office/drawing/2014/main" id="{B958845E-1254-42D9-B5F4-DC274276C5BE}"/>
+                <a16:creationId xmlns:a16="http://schemas.microsoft.com/office/drawing/2014/main" id="{F6D45BDD-E607-4909-94B8-53996427CBF4}"/>
               </a:ext>
             </a:extLst>
           </p:cNvPr>
@@ -22356,7 +22354,7 @@
           <p:cNvPr id="42" name="">
             <a:extLst xmlns:a="http://schemas.openxmlformats.org/drawingml/2006/main">
               <a:ext uri="{FF2B5EF4-FFF2-40B4-BE49-F238E27FC236}">
-                <a16:creationId xmlns:a16="http://schemas.microsoft.com/office/drawing/2014/main" id="{6E34D925-F11A-4AAB-A9C5-1EF5828802C3}"/>
+                <a16:creationId xmlns:a16="http://schemas.microsoft.com/office/drawing/2014/main" id="{45E87F47-6AF1-4347-BBB9-8E641B6DB69C}"/>
               </a:ext>
             </a:extLst>
           </p:cNvPr>
@@ -22420,7 +22418,7 @@
           <p:cNvPr id="43" name="">
             <a:extLst xmlns:a="http://schemas.openxmlformats.org/drawingml/2006/main">
               <a:ext uri="{FF2B5EF4-FFF2-40B4-BE49-F238E27FC236}">
-                <a16:creationId xmlns:a16="http://schemas.microsoft.com/office/drawing/2014/main" id="{C183CCEC-6C89-40C0-961D-5A7E4E0EB172}"/>
+                <a16:creationId xmlns:a16="http://schemas.microsoft.com/office/drawing/2014/main" id="{7E34B459-935E-4503-AEAC-7B917542AB38}"/>
               </a:ext>
             </a:extLst>
           </p:cNvPr>
@@ -22484,7 +22482,7 @@
           <p:cNvPr id="44" name="">
             <a:extLst xmlns:a="http://schemas.openxmlformats.org/drawingml/2006/main">
               <a:ext uri="{FF2B5EF4-FFF2-40B4-BE49-F238E27FC236}">
-                <a16:creationId xmlns:a16="http://schemas.microsoft.com/office/drawing/2014/main" id="{6CC2E2F5-A53E-4BF9-A9C9-979EB2837EC4}"/>
+                <a16:creationId xmlns:a16="http://schemas.microsoft.com/office/drawing/2014/main" id="{5E3A2D6E-F035-4548-A914-5648C350442D}"/>
               </a:ext>
             </a:extLst>
           </p:cNvPr>
@@ -22519,7 +22517,7 @@
           <p:cNvPr id="45" name="">
             <a:extLst xmlns:a="http://schemas.openxmlformats.org/drawingml/2006/main">
               <a:ext uri="{FF2B5EF4-FFF2-40B4-BE49-F238E27FC236}">
-                <a16:creationId xmlns:a16="http://schemas.microsoft.com/office/drawing/2014/main" id="{445D76F8-1777-45E4-883C-438218CFDBFD}"/>
+                <a16:creationId xmlns:a16="http://schemas.microsoft.com/office/drawing/2014/main" id="{91ECAE20-3032-44F3-AA86-405D3A5160EC}"/>
               </a:ext>
             </a:extLst>
           </p:cNvPr>
@@ -22552,7 +22550,7 @@
           <p:cNvPr id="46" name="">
             <a:extLst xmlns:a="http://schemas.openxmlformats.org/drawingml/2006/main">
               <a:ext uri="{FF2B5EF4-FFF2-40B4-BE49-F238E27FC236}">
-                <a16:creationId xmlns:a16="http://schemas.microsoft.com/office/drawing/2014/main" id="{0140F4DA-72B1-4E4A-8BC8-DD230A44DCE3}"/>
+                <a16:creationId xmlns:a16="http://schemas.microsoft.com/office/drawing/2014/main" id="{C98DAAEE-5E5B-443F-8AC6-3907020F4D20}"/>
               </a:ext>
             </a:extLst>
           </p:cNvPr>
@@ -22587,7 +22585,7 @@
           <p:cNvPr id="47" name="">
             <a:extLst xmlns:a="http://schemas.openxmlformats.org/drawingml/2006/main">
               <a:ext uri="{FF2B5EF4-FFF2-40B4-BE49-F238E27FC236}">
-                <a16:creationId xmlns:a16="http://schemas.microsoft.com/office/drawing/2014/main" id="{6D308D06-D99B-43E0-AD09-F57D0EF6D2A0}"/>
+                <a16:creationId xmlns:a16="http://schemas.microsoft.com/office/drawing/2014/main" id="{57A04E7D-E1E8-4B2F-9C31-2C02BA42AAFD}"/>
               </a:ext>
             </a:extLst>
           </p:cNvPr>
@@ -22651,7 +22649,7 @@
           <p:cNvPr id="48" name="">
             <a:extLst xmlns:a="http://schemas.openxmlformats.org/drawingml/2006/main">
               <a:ext uri="{FF2B5EF4-FFF2-40B4-BE49-F238E27FC236}">
-                <a16:creationId xmlns:a16="http://schemas.microsoft.com/office/drawing/2014/main" id="{CC5F0A56-FA68-4231-9DDF-12C02A3D713C}"/>
+                <a16:creationId xmlns:a16="http://schemas.microsoft.com/office/drawing/2014/main" id="{0AB34F7D-10B1-4F25-92CE-2C264C5EA974}"/>
               </a:ext>
             </a:extLst>
           </p:cNvPr>
@@ -22715,7 +22713,7 @@
           <p:cNvPr id="49" name="">
             <a:extLst xmlns:a="http://schemas.openxmlformats.org/drawingml/2006/main">
               <a:ext uri="{FF2B5EF4-FFF2-40B4-BE49-F238E27FC236}">
-                <a16:creationId xmlns:a16="http://schemas.microsoft.com/office/drawing/2014/main" id="{F44653B2-9456-499E-BF24-93E55BA2F47F}"/>
+                <a16:creationId xmlns:a16="http://schemas.microsoft.com/office/drawing/2014/main" id="{661C427E-D9F8-4710-A4D7-FE6957F6C9D3}"/>
               </a:ext>
             </a:extLst>
           </p:cNvPr>
@@ -22748,7 +22746,7 @@
           <p:cNvPr id="50" name="">
             <a:extLst xmlns:a="http://schemas.openxmlformats.org/drawingml/2006/main">
               <a:ext uri="{FF2B5EF4-FFF2-40B4-BE49-F238E27FC236}">
-                <a16:creationId xmlns:a16="http://schemas.microsoft.com/office/drawing/2014/main" id="{F3E101E2-8FDC-488D-9EA5-5B38000AAD15}"/>
+                <a16:creationId xmlns:a16="http://schemas.microsoft.com/office/drawing/2014/main" id="{DE5705F8-8E5A-4E33-9230-8C88D95843A6}"/>
               </a:ext>
             </a:extLst>
           </p:cNvPr>
@@ -22812,7 +22810,7 @@
           <p:cNvPr id="51" name="">
             <a:extLst xmlns:a="http://schemas.openxmlformats.org/drawingml/2006/main">
               <a:ext uri="{FF2B5EF4-FFF2-40B4-BE49-F238E27FC236}">
-                <a16:creationId xmlns:a16="http://schemas.microsoft.com/office/drawing/2014/main" id="{C701BE4E-1268-4EBD-BCF4-E2A4FF6B8153}"/>
+                <a16:creationId xmlns:a16="http://schemas.microsoft.com/office/drawing/2014/main" id="{3CFAA841-DC04-4AF8-B37D-AE97A8B95810}"/>
               </a:ext>
             </a:extLst>
           </p:cNvPr>
@@ -22847,7 +22845,7 @@
           <p:cNvPr id="52" name="">
             <a:extLst xmlns:a="http://schemas.openxmlformats.org/drawingml/2006/main">
               <a:ext uri="{FF2B5EF4-FFF2-40B4-BE49-F238E27FC236}">
-                <a16:creationId xmlns:a16="http://schemas.microsoft.com/office/drawing/2014/main" id="{6412B32B-AB10-453B-81C5-97301C90098E}"/>
+                <a16:creationId xmlns:a16="http://schemas.microsoft.com/office/drawing/2014/main" id="{CE47497E-E23A-4918-AE91-4129612A9F9B}"/>
               </a:ext>
             </a:extLst>
           </p:cNvPr>
@@ -22911,7 +22909,7 @@
           <p:cNvPr id="53" name="">
             <a:extLst xmlns:a="http://schemas.openxmlformats.org/drawingml/2006/main">
               <a:ext uri="{FF2B5EF4-FFF2-40B4-BE49-F238E27FC236}">
-                <a16:creationId xmlns:a16="http://schemas.microsoft.com/office/drawing/2014/main" id="{26CE810F-7FCA-4DFB-B1A3-E1BB4A0C0587}"/>
+                <a16:creationId xmlns:a16="http://schemas.microsoft.com/office/drawing/2014/main" id="{91D797CF-993F-46CB-AE53-41DBD2BC22F7}"/>
               </a:ext>
             </a:extLst>
           </p:cNvPr>
@@ -22975,7 +22973,7 @@
           <p:cNvPr id="54" name="">
             <a:extLst xmlns:a="http://schemas.openxmlformats.org/drawingml/2006/main">
               <a:ext uri="{FF2B5EF4-FFF2-40B4-BE49-F238E27FC236}">
-                <a16:creationId xmlns:a16="http://schemas.microsoft.com/office/drawing/2014/main" id="{C3595C32-26C9-408E-A720-0DE2ACA8F9FA}"/>
+                <a16:creationId xmlns:a16="http://schemas.microsoft.com/office/drawing/2014/main" id="{51D43B8D-4820-4BD5-823E-22C55A2DA0DD}"/>
               </a:ext>
             </a:extLst>
           </p:cNvPr>
@@ -23039,7 +23037,7 @@
           <p:cNvPr id="55" name="">
             <a:extLst xmlns:a="http://schemas.openxmlformats.org/drawingml/2006/main">
               <a:ext uri="{FF2B5EF4-FFF2-40B4-BE49-F238E27FC236}">
-                <a16:creationId xmlns:a16="http://schemas.microsoft.com/office/drawing/2014/main" id="{33D4A2DF-4F72-4FF9-81EF-0710CCB5866B}"/>
+                <a16:creationId xmlns:a16="http://schemas.microsoft.com/office/drawing/2014/main" id="{3C7D5AE7-D963-4E75-8167-17460E3F7620}"/>
               </a:ext>
             </a:extLst>
           </p:cNvPr>
@@ -23074,7 +23072,7 @@
           <p:cNvPr id="56" name="">
             <a:extLst xmlns:a="http://schemas.openxmlformats.org/drawingml/2006/main">
               <a:ext uri="{FF2B5EF4-FFF2-40B4-BE49-F238E27FC236}">
-                <a16:creationId xmlns:a16="http://schemas.microsoft.com/office/drawing/2014/main" id="{3D5ACB2C-DA75-43F3-961F-CE4408568B4D}"/>
+                <a16:creationId xmlns:a16="http://schemas.microsoft.com/office/drawing/2014/main" id="{FAE68A39-CCE4-4BB8-8AE8-70A4A23DD501}"/>
               </a:ext>
             </a:extLst>
           </p:cNvPr>
@@ -23109,7 +23107,7 @@
           <p:cNvPr id="57" name="">
             <a:extLst xmlns:a="http://schemas.openxmlformats.org/drawingml/2006/main">
               <a:ext uri="{FF2B5EF4-FFF2-40B4-BE49-F238E27FC236}">
-                <a16:creationId xmlns:a16="http://schemas.microsoft.com/office/drawing/2014/main" id="{797668EF-6259-410A-BBC7-589F23950595}"/>
+                <a16:creationId xmlns:a16="http://schemas.microsoft.com/office/drawing/2014/main" id="{DAFE7CFB-FDC2-46EA-AD0D-020649E46F0A}"/>
               </a:ext>
             </a:extLst>
           </p:cNvPr>
@@ -23144,7 +23142,7 @@
           <p:cNvPr id="58" name="kicker-08-marker">
             <a:extLst xmlns:a="http://schemas.openxmlformats.org/drawingml/2006/main">
               <a:ext uri="{FF2B5EF4-FFF2-40B4-BE49-F238E27FC236}">
-                <a16:creationId xmlns:a16="http://schemas.microsoft.com/office/drawing/2014/main" id="{F201B00E-1D34-407B-A0E2-22086335422C}"/>
+                <a16:creationId xmlns:a16="http://schemas.microsoft.com/office/drawing/2014/main" id="{A1762AEF-32D9-40DD-8FE1-FA745968ADD8}"/>
               </a:ext>
             </a:extLst>
           </p:cNvPr>
@@ -23179,7 +23177,7 @@
           <p:cNvPr id="59" name="kicker-08-label">
             <a:extLst xmlns:a="http://schemas.openxmlformats.org/drawingml/2006/main">
               <a:ext uri="{FF2B5EF4-FFF2-40B4-BE49-F238E27FC236}">
-                <a16:creationId xmlns:a16="http://schemas.microsoft.com/office/drawing/2014/main" id="{FC97130C-3869-4476-BB15-63C46D2F10AB}"/>
+                <a16:creationId xmlns:a16="http://schemas.microsoft.com/office/drawing/2014/main" id="{348D6081-86EA-477C-A6A6-4BAC826FF223}"/>
               </a:ext>
             </a:extLst>
           </p:cNvPr>
@@ -23243,7 +23241,7 @@
           <p:cNvPr id="60" name="">
             <a:extLst xmlns:a="http://schemas.openxmlformats.org/drawingml/2006/main">
               <a:ext uri="{FF2B5EF4-FFF2-40B4-BE49-F238E27FC236}">
-                <a16:creationId xmlns:a16="http://schemas.microsoft.com/office/drawing/2014/main" id="{E65201CA-702E-480F-AADC-5596ABBCA9E4}"/>
+                <a16:creationId xmlns:a16="http://schemas.microsoft.com/office/drawing/2014/main" id="{F92D11A5-73D9-40E9-B209-C684F2D48748}"/>
               </a:ext>
             </a:extLst>
           </p:cNvPr>
@@ -23307,7 +23305,7 @@
           <p:cNvPr id="61" name="">
             <a:extLst xmlns:a="http://schemas.openxmlformats.org/drawingml/2006/main">
               <a:ext uri="{FF2B5EF4-FFF2-40B4-BE49-F238E27FC236}">
-                <a16:creationId xmlns:a16="http://schemas.microsoft.com/office/drawing/2014/main" id="{954237FB-A8D4-48C5-9634-9A0D8D7A4EB2}"/>
+                <a16:creationId xmlns:a16="http://schemas.microsoft.com/office/drawing/2014/main" id="{9F339ECF-A7C9-4733-AD07-18A3FF0991F5}"/>
               </a:ext>
             </a:extLst>
           </p:cNvPr>
@@ -23371,7 +23369,7 @@
           <p:cNvPr id="62" name="">
             <a:extLst xmlns:a="http://schemas.openxmlformats.org/drawingml/2006/main">
               <a:ext uri="{FF2B5EF4-FFF2-40B4-BE49-F238E27FC236}">
-                <a16:creationId xmlns:a16="http://schemas.microsoft.com/office/drawing/2014/main" id="{2E2692E9-1177-4B47-A9E0-E00447A40B9C}"/>
+                <a16:creationId xmlns:a16="http://schemas.microsoft.com/office/drawing/2014/main" id="{7FBFB9E4-6A26-40B3-9138-76E422881234}"/>
               </a:ext>
             </a:extLst>
           </p:cNvPr>
@@ -23406,7 +23404,7 @@
           <p:cNvPr id="63" name="">
             <a:extLst xmlns:a="http://schemas.openxmlformats.org/drawingml/2006/main">
               <a:ext uri="{FF2B5EF4-FFF2-40B4-BE49-F238E27FC236}">
-                <a16:creationId xmlns:a16="http://schemas.microsoft.com/office/drawing/2014/main" id="{EC3157AB-B993-49AC-9950-F3889D60CBC6}"/>
+                <a16:creationId xmlns:a16="http://schemas.microsoft.com/office/drawing/2014/main" id="{629E38DF-4B7B-40BF-9800-1BA8A5B07971}"/>
               </a:ext>
             </a:extLst>
           </p:cNvPr>
@@ -23441,7 +23439,7 @@
           <p:cNvPr id="64" name="">
             <a:extLst xmlns:a="http://schemas.openxmlformats.org/drawingml/2006/main">
               <a:ext uri="{FF2B5EF4-FFF2-40B4-BE49-F238E27FC236}">
-                <a16:creationId xmlns:a16="http://schemas.microsoft.com/office/drawing/2014/main" id="{B9C8568A-77D7-41B4-A7AC-248FF4A56793}"/>
+                <a16:creationId xmlns:a16="http://schemas.microsoft.com/office/drawing/2014/main" id="{9E8596CC-2B4E-40DC-A374-4C7403A90538}"/>
               </a:ext>
             </a:extLst>
           </p:cNvPr>
@@ -23476,7 +23474,7 @@
           <p:cNvPr id="65" name="">
             <a:extLst xmlns:a="http://schemas.openxmlformats.org/drawingml/2006/main">
               <a:ext uri="{FF2B5EF4-FFF2-40B4-BE49-F238E27FC236}">
-                <a16:creationId xmlns:a16="http://schemas.microsoft.com/office/drawing/2014/main" id="{0FDF93B7-8702-4199-BDC5-1458C088F8C0}"/>
+                <a16:creationId xmlns:a16="http://schemas.microsoft.com/office/drawing/2014/main" id="{BC9B167F-04BD-4760-8A64-03A6E673C15F}"/>
               </a:ext>
             </a:extLst>
           </p:cNvPr>
@@ -23511,7 +23509,7 @@
           <p:cNvPr id="66" name="">
             <a:extLst xmlns:a="http://schemas.openxmlformats.org/drawingml/2006/main">
               <a:ext uri="{FF2B5EF4-FFF2-40B4-BE49-F238E27FC236}">
-                <a16:creationId xmlns:a16="http://schemas.microsoft.com/office/drawing/2014/main" id="{8EECBB39-1256-44BF-BCE2-BB5CC87DEC85}"/>
+                <a16:creationId xmlns:a16="http://schemas.microsoft.com/office/drawing/2014/main" id="{838C981A-92AB-4A31-9015-D2FBD59F2878}"/>
               </a:ext>
             </a:extLst>
           </p:cNvPr>
@@ -23575,7 +23573,7 @@
           <p:cNvPr id="67" name="">
             <a:extLst xmlns:a="http://schemas.openxmlformats.org/drawingml/2006/main">
               <a:ext uri="{FF2B5EF4-FFF2-40B4-BE49-F238E27FC236}">
-                <a16:creationId xmlns:a16="http://schemas.microsoft.com/office/drawing/2014/main" id="{0B2F5B5B-96BA-4AA1-87E7-E3031FAAEEF6}"/>
+                <a16:creationId xmlns:a16="http://schemas.microsoft.com/office/drawing/2014/main" id="{78F14036-B191-4257-9DB9-369C88B16179}"/>
               </a:ext>
             </a:extLst>
           </p:cNvPr>
@@ -23639,7 +23637,7 @@
           <p:cNvPr id="68" name="">
             <a:extLst xmlns:a="http://schemas.openxmlformats.org/drawingml/2006/main">
               <a:ext uri="{FF2B5EF4-FFF2-40B4-BE49-F238E27FC236}">
-                <a16:creationId xmlns:a16="http://schemas.microsoft.com/office/drawing/2014/main" id="{75619CEA-6D13-4F6E-8C29-C806390C35F7}"/>
+                <a16:creationId xmlns:a16="http://schemas.microsoft.com/office/drawing/2014/main" id="{F0370B3B-3D27-46AB-83D8-B84E7D7B7879}"/>
               </a:ext>
             </a:extLst>
           </p:cNvPr>
@@ -23701,7 +23699,7 @@
     </p:spTree>
     <p:extLst>
       <p:ext uri="{BB962C8B-B14F-4D97-AF65-F5344CB8AC3E}">
-        <p14:creationId xmlns:p14="http://schemas.microsoft.com/office/powerpoint/2010/main" val="387457727"/>
+        <p14:creationId xmlns:p14="http://schemas.microsoft.com/office/powerpoint/2010/main" val="996060345"/>
       </p:ext>
     </p:extLst>
   </p:cSld>
@@ -23725,7 +23723,7 @@
           <p:cNvPr id="1" name="">
             <a:extLst xmlns:a="http://schemas.openxmlformats.org/drawingml/2006/main">
               <a:ext uri="{FF2B5EF4-FFF2-40B4-BE49-F238E27FC236}">
-                <a16:creationId xmlns:a16="http://schemas.microsoft.com/office/drawing/2014/main" id="{636EA706-5732-4C29-9C4C-1580B47668C2}"/>
+                <a16:creationId xmlns:a16="http://schemas.microsoft.com/office/drawing/2014/main" id="{E65716AE-319C-46C6-A27D-9933ABF5FCB2}"/>
               </a:ext>
             </a:extLst>
           </p:cNvPr>
@@ -23760,7 +23758,7 @@
           <p:cNvPr id="2" name="">
             <a:extLst xmlns:a="http://schemas.openxmlformats.org/drawingml/2006/main">
               <a:ext uri="{FF2B5EF4-FFF2-40B4-BE49-F238E27FC236}">
-                <a16:creationId xmlns:a16="http://schemas.microsoft.com/office/drawing/2014/main" id="{64CC9ECE-4DE6-49E3-A395-3BE65915261A}"/>
+                <a16:creationId xmlns:a16="http://schemas.microsoft.com/office/drawing/2014/main" id="{7A472BAC-F9A4-4F6F-A8B5-7F8857E674D6}"/>
               </a:ext>
             </a:extLst>
           </p:cNvPr>
@@ -23795,7 +23793,7 @@
           <p:cNvPr id="3" name="">
             <a:extLst xmlns:a="http://schemas.openxmlformats.org/drawingml/2006/main">
               <a:ext uri="{FF2B5EF4-FFF2-40B4-BE49-F238E27FC236}">
-                <a16:creationId xmlns:a16="http://schemas.microsoft.com/office/drawing/2014/main" id="{414C4310-7A98-4F10-9F9F-DA4EB087B12A}"/>
+                <a16:creationId xmlns:a16="http://schemas.microsoft.com/office/drawing/2014/main" id="{8BCB3B6A-9DB2-4E92-BDAE-1BE36BE269F2}"/>
               </a:ext>
             </a:extLst>
           </p:cNvPr>
@@ -23830,7 +23828,7 @@
           <p:cNvPr id="4" name="kicker-08-marker">
             <a:extLst xmlns:a="http://schemas.openxmlformats.org/drawingml/2006/main">
               <a:ext uri="{FF2B5EF4-FFF2-40B4-BE49-F238E27FC236}">
-                <a16:creationId xmlns:a16="http://schemas.microsoft.com/office/drawing/2014/main" id="{12ABE597-3B6F-40C1-BA0E-B9A962C7DF79}"/>
+                <a16:creationId xmlns:a16="http://schemas.microsoft.com/office/drawing/2014/main" id="{815D3D61-F50C-4445-A9D6-40A41045FD86}"/>
               </a:ext>
             </a:extLst>
           </p:cNvPr>
@@ -23865,7 +23863,7 @@
           <p:cNvPr id="5" name="kicker-08-label">
             <a:extLst xmlns:a="http://schemas.openxmlformats.org/drawingml/2006/main">
               <a:ext uri="{FF2B5EF4-FFF2-40B4-BE49-F238E27FC236}">
-                <a16:creationId xmlns:a16="http://schemas.microsoft.com/office/drawing/2014/main" id="{AD4CA4FE-EDFA-45C8-906A-1A1335FD7F34}"/>
+                <a16:creationId xmlns:a16="http://schemas.microsoft.com/office/drawing/2014/main" id="{E6F6AFD8-EE0A-4F65-82C0-FEBD880C5BB3}"/>
               </a:ext>
             </a:extLst>
           </p:cNvPr>
@@ -23929,7 +23927,7 @@
           <p:cNvPr id="6" name="">
             <a:extLst xmlns:a="http://schemas.openxmlformats.org/drawingml/2006/main">
               <a:ext uri="{FF2B5EF4-FFF2-40B4-BE49-F238E27FC236}">
-                <a16:creationId xmlns:a16="http://schemas.microsoft.com/office/drawing/2014/main" id="{974ECF4D-54BB-4C6F-8096-37166BA9D3FF}"/>
+                <a16:creationId xmlns:a16="http://schemas.microsoft.com/office/drawing/2014/main" id="{C07EE36B-3B69-4588-9E1E-694466212318}"/>
               </a:ext>
             </a:extLst>
           </p:cNvPr>
@@ -23993,7 +23991,7 @@
           <p:cNvPr id="7" name="">
             <a:extLst xmlns:a="http://schemas.openxmlformats.org/drawingml/2006/main">
               <a:ext uri="{FF2B5EF4-FFF2-40B4-BE49-F238E27FC236}">
-                <a16:creationId xmlns:a16="http://schemas.microsoft.com/office/drawing/2014/main" id="{9562DCBD-20B5-46F0-A689-CFCF10088997}"/>
+                <a16:creationId xmlns:a16="http://schemas.microsoft.com/office/drawing/2014/main" id="{F5BC215F-93E0-449F-88FB-C6114E4B6A80}"/>
               </a:ext>
             </a:extLst>
           </p:cNvPr>
@@ -24057,7 +24055,7 @@
           <p:cNvPr id="8" name="">
             <a:extLst xmlns:a="http://schemas.openxmlformats.org/drawingml/2006/main">
               <a:ext uri="{FF2B5EF4-FFF2-40B4-BE49-F238E27FC236}">
-                <a16:creationId xmlns:a16="http://schemas.microsoft.com/office/drawing/2014/main" id="{BFB9293E-E563-47ED-ADC1-3032C6F174D1}"/>
+                <a16:creationId xmlns:a16="http://schemas.microsoft.com/office/drawing/2014/main" id="{EA17048D-2DB0-407F-962D-6AB94DE1B0B7}"/>
               </a:ext>
             </a:extLst>
           </p:cNvPr>
@@ -24092,7 +24090,7 @@
           <p:cNvPr id="9" name="">
             <a:extLst xmlns:a="http://schemas.openxmlformats.org/drawingml/2006/main">
               <a:ext uri="{FF2B5EF4-FFF2-40B4-BE49-F238E27FC236}">
-                <a16:creationId xmlns:a16="http://schemas.microsoft.com/office/drawing/2014/main" id="{8D921B9D-A6E7-4F21-9200-4C40301D1B49}"/>
+                <a16:creationId xmlns:a16="http://schemas.microsoft.com/office/drawing/2014/main" id="{44FA0395-F0B9-4A85-9C3C-172B65F108EF}"/>
               </a:ext>
             </a:extLst>
           </p:cNvPr>
@@ -24156,7 +24154,7 @@
           <p:cNvPr id="10" name="">
             <a:extLst xmlns:a="http://schemas.openxmlformats.org/drawingml/2006/main">
               <a:ext uri="{FF2B5EF4-FFF2-40B4-BE49-F238E27FC236}">
-                <a16:creationId xmlns:a16="http://schemas.microsoft.com/office/drawing/2014/main" id="{8EFF8ACD-E0B3-492D-A648-7654259FF401}"/>
+                <a16:creationId xmlns:a16="http://schemas.microsoft.com/office/drawing/2014/main" id="{D5EB57D2-F66C-4C3E-ACCB-C8F1FE54932C}"/>
               </a:ext>
             </a:extLst>
           </p:cNvPr>
@@ -24220,7 +24218,7 @@
           <p:cNvPr id="11" name="">
             <a:extLst xmlns:a="http://schemas.openxmlformats.org/drawingml/2006/main">
               <a:ext uri="{FF2B5EF4-FFF2-40B4-BE49-F238E27FC236}">
-                <a16:creationId xmlns:a16="http://schemas.microsoft.com/office/drawing/2014/main" id="{22AC9914-1BFF-46A7-950C-6E3417E3F742}"/>
+                <a16:creationId xmlns:a16="http://schemas.microsoft.com/office/drawing/2014/main" id="{9634FEA2-4F28-449D-BFD6-9DC1E9BB2241}"/>
               </a:ext>
             </a:extLst>
           </p:cNvPr>
@@ -24284,7 +24282,7 @@
           <p:cNvPr id="12" name="">
             <a:extLst xmlns:a="http://schemas.openxmlformats.org/drawingml/2006/main">
               <a:ext uri="{FF2B5EF4-FFF2-40B4-BE49-F238E27FC236}">
-                <a16:creationId xmlns:a16="http://schemas.microsoft.com/office/drawing/2014/main" id="{9C910B04-4D6F-4C35-BC9D-E84FEB12DB26}"/>
+                <a16:creationId xmlns:a16="http://schemas.microsoft.com/office/drawing/2014/main" id="{D6141164-F6DC-4F7B-9FF0-97DCB0BD3A27}"/>
               </a:ext>
             </a:extLst>
           </p:cNvPr>
@@ -24317,7 +24315,7 @@
           <p:cNvPr id="13" name="">
             <a:extLst xmlns:a="http://schemas.openxmlformats.org/drawingml/2006/main">
               <a:ext uri="{FF2B5EF4-FFF2-40B4-BE49-F238E27FC236}">
-                <a16:creationId xmlns:a16="http://schemas.microsoft.com/office/drawing/2014/main" id="{E99FFEB4-59F4-4D45-84D2-A347EDE65F20}"/>
+                <a16:creationId xmlns:a16="http://schemas.microsoft.com/office/drawing/2014/main" id="{72DC3969-2DE3-444A-BDFA-B8A850F47845}"/>
               </a:ext>
             </a:extLst>
           </p:cNvPr>
@@ -24352,7 +24350,7 @@
           <p:cNvPr id="14" name="">
             <a:extLst xmlns:a="http://schemas.openxmlformats.org/drawingml/2006/main">
               <a:ext uri="{FF2B5EF4-FFF2-40B4-BE49-F238E27FC236}">
-                <a16:creationId xmlns:a16="http://schemas.microsoft.com/office/drawing/2014/main" id="{797FCEA1-5C78-4456-BAB5-643C88671DB3}"/>
+                <a16:creationId xmlns:a16="http://schemas.microsoft.com/office/drawing/2014/main" id="{32B6B302-BC4C-42F3-8E3E-6996F4EC1EE9}"/>
               </a:ext>
             </a:extLst>
           </p:cNvPr>
@@ -24416,7 +24414,7 @@
           <p:cNvPr id="15" name="">
             <a:extLst xmlns:a="http://schemas.openxmlformats.org/drawingml/2006/main">
               <a:ext uri="{FF2B5EF4-FFF2-40B4-BE49-F238E27FC236}">
-                <a16:creationId xmlns:a16="http://schemas.microsoft.com/office/drawing/2014/main" id="{C8154BB3-77C5-4F0D-B36D-A79B9096FA72}"/>
+                <a16:creationId xmlns:a16="http://schemas.microsoft.com/office/drawing/2014/main" id="{2ED9D98B-31D7-4BE0-A49E-084423030B42}"/>
               </a:ext>
             </a:extLst>
           </p:cNvPr>
@@ -24480,7 +24478,7 @@
           <p:cNvPr id="16" name="">
             <a:extLst xmlns:a="http://schemas.openxmlformats.org/drawingml/2006/main">
               <a:ext uri="{FF2B5EF4-FFF2-40B4-BE49-F238E27FC236}">
-                <a16:creationId xmlns:a16="http://schemas.microsoft.com/office/drawing/2014/main" id="{B4856D8B-E78C-4B09-B90A-0FBE5CBCEFF4}"/>
+                <a16:creationId xmlns:a16="http://schemas.microsoft.com/office/drawing/2014/main" id="{846C3379-8A3E-4F82-ADB7-797AFB9C0EE8}"/>
               </a:ext>
             </a:extLst>
           </p:cNvPr>
@@ -24513,7 +24511,7 @@
           <p:cNvPr id="17" name="">
             <a:extLst xmlns:a="http://schemas.openxmlformats.org/drawingml/2006/main">
               <a:ext uri="{FF2B5EF4-FFF2-40B4-BE49-F238E27FC236}">
-                <a16:creationId xmlns:a16="http://schemas.microsoft.com/office/drawing/2014/main" id="{D47FBAB9-ABC1-4AD7-B0C1-7B207409CAC7}"/>
+                <a16:creationId xmlns:a16="http://schemas.microsoft.com/office/drawing/2014/main" id="{A1675FA9-59AE-4C5A-A2D4-CD4FE2AD5007}"/>
               </a:ext>
             </a:extLst>
           </p:cNvPr>
@@ -24548,7 +24546,7 @@
           <p:cNvPr id="18" name="">
             <a:extLst xmlns:a="http://schemas.openxmlformats.org/drawingml/2006/main">
               <a:ext uri="{FF2B5EF4-FFF2-40B4-BE49-F238E27FC236}">
-                <a16:creationId xmlns:a16="http://schemas.microsoft.com/office/drawing/2014/main" id="{7693646D-31D1-42DC-BE6A-C9E0A60F67D3}"/>
+                <a16:creationId xmlns:a16="http://schemas.microsoft.com/office/drawing/2014/main" id="{BDC05301-5473-43A2-A811-D3B9D8EF5A5A}"/>
               </a:ext>
             </a:extLst>
           </p:cNvPr>
@@ -24612,7 +24610,7 @@
           <p:cNvPr id="19" name="">
             <a:extLst xmlns:a="http://schemas.openxmlformats.org/drawingml/2006/main">
               <a:ext uri="{FF2B5EF4-FFF2-40B4-BE49-F238E27FC236}">
-                <a16:creationId xmlns:a16="http://schemas.microsoft.com/office/drawing/2014/main" id="{C0CB0CF2-A927-463D-A7AA-AAF7FDA867B5}"/>
+                <a16:creationId xmlns:a16="http://schemas.microsoft.com/office/drawing/2014/main" id="{D91C607C-54B8-45AB-B7DD-1731DA3D9DD2}"/>
               </a:ext>
             </a:extLst>
           </p:cNvPr>
@@ -24676,7 +24674,7 @@
           <p:cNvPr id="20" name="">
             <a:extLst xmlns:a="http://schemas.openxmlformats.org/drawingml/2006/main">
               <a:ext uri="{FF2B5EF4-FFF2-40B4-BE49-F238E27FC236}">
-                <a16:creationId xmlns:a16="http://schemas.microsoft.com/office/drawing/2014/main" id="{DD678488-E9C3-4764-98F3-29DE75404E71}"/>
+                <a16:creationId xmlns:a16="http://schemas.microsoft.com/office/drawing/2014/main" id="{495A447E-3B62-4F31-8F93-FD679072126A}"/>
               </a:ext>
             </a:extLst>
           </p:cNvPr>
@@ -24709,7 +24707,7 @@
           <p:cNvPr id="21" name="">
             <a:extLst xmlns:a="http://schemas.openxmlformats.org/drawingml/2006/main">
               <a:ext uri="{FF2B5EF4-FFF2-40B4-BE49-F238E27FC236}">
-                <a16:creationId xmlns:a16="http://schemas.microsoft.com/office/drawing/2014/main" id="{75C4C1BE-B53F-44C6-AF92-540FB401EDF9}"/>
+                <a16:creationId xmlns:a16="http://schemas.microsoft.com/office/drawing/2014/main" id="{E362A9E6-A32C-414E-8C80-D7C0840DBFAE}"/>
               </a:ext>
             </a:extLst>
           </p:cNvPr>
@@ -24744,7 +24742,7 @@
           <p:cNvPr id="22" name="">
             <a:extLst xmlns:a="http://schemas.openxmlformats.org/drawingml/2006/main">
               <a:ext uri="{FF2B5EF4-FFF2-40B4-BE49-F238E27FC236}">
-                <a16:creationId xmlns:a16="http://schemas.microsoft.com/office/drawing/2014/main" id="{D3571F0E-D081-4952-99CC-E5936B50A53F}"/>
+                <a16:creationId xmlns:a16="http://schemas.microsoft.com/office/drawing/2014/main" id="{0760A925-DB1C-4AD6-994D-036063BE946B}"/>
               </a:ext>
             </a:extLst>
           </p:cNvPr>
@@ -24808,7 +24806,7 @@
           <p:cNvPr id="23" name="">
             <a:extLst xmlns:a="http://schemas.openxmlformats.org/drawingml/2006/main">
               <a:ext uri="{FF2B5EF4-FFF2-40B4-BE49-F238E27FC236}">
-                <a16:creationId xmlns:a16="http://schemas.microsoft.com/office/drawing/2014/main" id="{8BBF533A-B3F6-4D71-B980-F6F84E662F45}"/>
+                <a16:creationId xmlns:a16="http://schemas.microsoft.com/office/drawing/2014/main" id="{23A2737C-6A0F-4F10-8C8B-1254426DCF36}"/>
               </a:ext>
             </a:extLst>
           </p:cNvPr>
@@ -24872,7 +24870,7 @@
           <p:cNvPr id="24" name="">
             <a:extLst xmlns:a="http://schemas.openxmlformats.org/drawingml/2006/main">
               <a:ext uri="{FF2B5EF4-FFF2-40B4-BE49-F238E27FC236}">
-                <a16:creationId xmlns:a16="http://schemas.microsoft.com/office/drawing/2014/main" id="{90D1631E-C85E-4A5A-8308-35F2D33082EB}"/>
+                <a16:creationId xmlns:a16="http://schemas.microsoft.com/office/drawing/2014/main" id="{A3D93B61-091C-4E4D-A052-AB3D2910AE6C}"/>
               </a:ext>
             </a:extLst>
           </p:cNvPr>
@@ -24905,7 +24903,7 @@
           <p:cNvPr id="25" name="">
             <a:extLst xmlns:a="http://schemas.openxmlformats.org/drawingml/2006/main">
               <a:ext uri="{FF2B5EF4-FFF2-40B4-BE49-F238E27FC236}">
-                <a16:creationId xmlns:a16="http://schemas.microsoft.com/office/drawing/2014/main" id="{4EA15811-0F6D-4B01-8D9D-CB517F3203AB}"/>
+                <a16:creationId xmlns:a16="http://schemas.microsoft.com/office/drawing/2014/main" id="{E23288BF-53C2-4503-8B83-0557A7D845E3}"/>
               </a:ext>
             </a:extLst>
           </p:cNvPr>
@@ -24940,7 +24938,7 @@
           <p:cNvPr id="26" name="">
             <a:extLst xmlns:a="http://schemas.openxmlformats.org/drawingml/2006/main">
               <a:ext uri="{FF2B5EF4-FFF2-40B4-BE49-F238E27FC236}">
-                <a16:creationId xmlns:a16="http://schemas.microsoft.com/office/drawing/2014/main" id="{DE70B23E-B0FB-48C0-A0B4-53536944EB3B}"/>
+                <a16:creationId xmlns:a16="http://schemas.microsoft.com/office/drawing/2014/main" id="{7BC9A29A-581B-484C-995C-B1A3F67A51D3}"/>
               </a:ext>
             </a:extLst>
           </p:cNvPr>
@@ -25004,7 +25002,7 @@
           <p:cNvPr id="27" name="">
             <a:extLst xmlns:a="http://schemas.openxmlformats.org/drawingml/2006/main">
               <a:ext uri="{FF2B5EF4-FFF2-40B4-BE49-F238E27FC236}">
-                <a16:creationId xmlns:a16="http://schemas.microsoft.com/office/drawing/2014/main" id="{F1F002F1-BBB5-42D1-9793-8B9B484B3BBE}"/>
+                <a16:creationId xmlns:a16="http://schemas.microsoft.com/office/drawing/2014/main" id="{DB9527E0-37D9-456B-AAE2-7A151ACF9B3B}"/>
               </a:ext>
             </a:extLst>
           </p:cNvPr>
@@ -25068,7 +25066,7 @@
           <p:cNvPr id="28" name="">
             <a:extLst xmlns:a="http://schemas.openxmlformats.org/drawingml/2006/main">
               <a:ext uri="{FF2B5EF4-FFF2-40B4-BE49-F238E27FC236}">
-                <a16:creationId xmlns:a16="http://schemas.microsoft.com/office/drawing/2014/main" id="{4140556F-1971-4D9C-92ED-114226D68AF0}"/>
+                <a16:creationId xmlns:a16="http://schemas.microsoft.com/office/drawing/2014/main" id="{D5A57849-D6F0-4121-9B7C-8E17B057350A}"/>
               </a:ext>
             </a:extLst>
           </p:cNvPr>
@@ -25101,7 +25099,7 @@
           <p:cNvPr id="29" name="">
             <a:extLst xmlns:a="http://schemas.openxmlformats.org/drawingml/2006/main">
               <a:ext uri="{FF2B5EF4-FFF2-40B4-BE49-F238E27FC236}">
-                <a16:creationId xmlns:a16="http://schemas.microsoft.com/office/drawing/2014/main" id="{F5F3C3FE-9026-4A19-863E-2EE5FBD94308}"/>
+                <a16:creationId xmlns:a16="http://schemas.microsoft.com/office/drawing/2014/main" id="{1DB69006-4C48-417E-BE8C-97949DF1C6FD}"/>
               </a:ext>
             </a:extLst>
           </p:cNvPr>
@@ -25165,7 +25163,7 @@
           <p:cNvPr id="30" name="">
             <a:extLst xmlns:a="http://schemas.openxmlformats.org/drawingml/2006/main">
               <a:ext uri="{FF2B5EF4-FFF2-40B4-BE49-F238E27FC236}">
-                <a16:creationId xmlns:a16="http://schemas.microsoft.com/office/drawing/2014/main" id="{8BDA8757-2F8A-47EF-A248-C7DFB3929362}"/>
+                <a16:creationId xmlns:a16="http://schemas.microsoft.com/office/drawing/2014/main" id="{4B106716-9242-4F9A-9153-E2C402132865}"/>
               </a:ext>
             </a:extLst>
           </p:cNvPr>
@@ -25229,7 +25227,7 @@
           <p:cNvPr id="31" name="">
             <a:extLst xmlns:a="http://schemas.openxmlformats.org/drawingml/2006/main">
               <a:ext uri="{FF2B5EF4-FFF2-40B4-BE49-F238E27FC236}">
-                <a16:creationId xmlns:a16="http://schemas.microsoft.com/office/drawing/2014/main" id="{11639553-AA90-461C-90E0-BC4A769DE5B6}"/>
+                <a16:creationId xmlns:a16="http://schemas.microsoft.com/office/drawing/2014/main" id="{C4A90A2A-4BD1-470C-AFA3-A5A18F2C46AC}"/>
               </a:ext>
             </a:extLst>
           </p:cNvPr>
@@ -25264,7 +25262,7 @@
           <p:cNvPr id="32" name="">
             <a:extLst xmlns:a="http://schemas.openxmlformats.org/drawingml/2006/main">
               <a:ext uri="{FF2B5EF4-FFF2-40B4-BE49-F238E27FC236}">
-                <a16:creationId xmlns:a16="http://schemas.microsoft.com/office/drawing/2014/main" id="{C39171D9-AD79-44C7-B03E-49AD3A5B12DB}"/>
+                <a16:creationId xmlns:a16="http://schemas.microsoft.com/office/drawing/2014/main" id="{C2993FCA-BB1F-4FCC-8C51-C018BEF3EAC8}"/>
               </a:ext>
             </a:extLst>
           </p:cNvPr>
@@ -25328,7 +25326,7 @@
           <p:cNvPr id="33" name="">
             <a:extLst xmlns:a="http://schemas.openxmlformats.org/drawingml/2006/main">
               <a:ext uri="{FF2B5EF4-FFF2-40B4-BE49-F238E27FC236}">
-                <a16:creationId xmlns:a16="http://schemas.microsoft.com/office/drawing/2014/main" id="{1CB6CBAA-3274-40EA-9D59-3CF9DD78BCD9}"/>
+                <a16:creationId xmlns:a16="http://schemas.microsoft.com/office/drawing/2014/main" id="{7B276339-D7F8-4B6F-AAEC-A68379CCF9E5}"/>
               </a:ext>
             </a:extLst>
           </p:cNvPr>
@@ -25392,7 +25390,7 @@
           <p:cNvPr id="34" name="">
             <a:extLst xmlns:a="http://schemas.openxmlformats.org/drawingml/2006/main">
               <a:ext uri="{FF2B5EF4-FFF2-40B4-BE49-F238E27FC236}">
-                <a16:creationId xmlns:a16="http://schemas.microsoft.com/office/drawing/2014/main" id="{739749E7-66FC-42FF-B955-D161A43BDE4D}"/>
+                <a16:creationId xmlns:a16="http://schemas.microsoft.com/office/drawing/2014/main" id="{6CBAD557-44C7-449B-827E-EFCF338032C6}"/>
               </a:ext>
             </a:extLst>
           </p:cNvPr>
@@ -25454,7 +25452,7 @@
     </p:spTree>
     <p:extLst>
       <p:ext uri="{BB962C8B-B14F-4D97-AF65-F5344CB8AC3E}">
-        <p14:creationId xmlns:p14="http://schemas.microsoft.com/office/powerpoint/2010/main" val="168627103"/>
+        <p14:creationId xmlns:p14="http://schemas.microsoft.com/office/powerpoint/2010/main" val="1438686141"/>
       </p:ext>
     </p:extLst>
   </p:cSld>
@@ -25478,7 +25476,7 @@
           <p:cNvPr id="1" name="">
             <a:extLst xmlns:a="http://schemas.openxmlformats.org/drawingml/2006/main">
               <a:ext uri="{FF2B5EF4-FFF2-40B4-BE49-F238E27FC236}">
-                <a16:creationId xmlns:a16="http://schemas.microsoft.com/office/drawing/2014/main" id="{81692EE4-8985-48B9-9AEC-72A5875D8C05}"/>
+                <a16:creationId xmlns:a16="http://schemas.microsoft.com/office/drawing/2014/main" id="{B0EA396E-EA4F-45D9-9D69-A9F09AB907D7}"/>
               </a:ext>
             </a:extLst>
           </p:cNvPr>
@@ -25513,7 +25511,7 @@
           <p:cNvPr id="2" name="">
             <a:extLst xmlns:a="http://schemas.openxmlformats.org/drawingml/2006/main">
               <a:ext uri="{FF2B5EF4-FFF2-40B4-BE49-F238E27FC236}">
-                <a16:creationId xmlns:a16="http://schemas.microsoft.com/office/drawing/2014/main" id="{D522DD05-C4E4-431F-9CB2-EAA34216AD4E}"/>
+                <a16:creationId xmlns:a16="http://schemas.microsoft.com/office/drawing/2014/main" id="{FD04644C-8718-4F28-8B84-9EB5785D1A2A}"/>
               </a:ext>
             </a:extLst>
           </p:cNvPr>
@@ -25548,7 +25546,7 @@
           <p:cNvPr id="3" name="">
             <a:extLst xmlns:a="http://schemas.openxmlformats.org/drawingml/2006/main">
               <a:ext uri="{FF2B5EF4-FFF2-40B4-BE49-F238E27FC236}">
-                <a16:creationId xmlns:a16="http://schemas.microsoft.com/office/drawing/2014/main" id="{CDCE6A99-5F71-4C0F-B04D-7D7946224A0A}"/>
+                <a16:creationId xmlns:a16="http://schemas.microsoft.com/office/drawing/2014/main" id="{FECB2624-D86B-4DB4-95FD-A1141CA2E772}"/>
               </a:ext>
             </a:extLst>
           </p:cNvPr>
@@ -25583,7 +25581,7 @@
           <p:cNvPr id="4" name="kicker-08-marker">
             <a:extLst xmlns:a="http://schemas.openxmlformats.org/drawingml/2006/main">
               <a:ext uri="{FF2B5EF4-FFF2-40B4-BE49-F238E27FC236}">
-                <a16:creationId xmlns:a16="http://schemas.microsoft.com/office/drawing/2014/main" id="{D0E33811-C737-4589-8ACA-7CC92B9E69BA}"/>
+                <a16:creationId xmlns:a16="http://schemas.microsoft.com/office/drawing/2014/main" id="{BB2CC41E-C70C-4AD0-8CC1-258845A01773}"/>
               </a:ext>
             </a:extLst>
           </p:cNvPr>
@@ -25618,7 +25616,7 @@
           <p:cNvPr id="5" name="kicker-08-label">
             <a:extLst xmlns:a="http://schemas.openxmlformats.org/drawingml/2006/main">
               <a:ext uri="{FF2B5EF4-FFF2-40B4-BE49-F238E27FC236}">
-                <a16:creationId xmlns:a16="http://schemas.microsoft.com/office/drawing/2014/main" id="{84E5A6FF-E67D-4634-AB17-821737571F76}"/>
+                <a16:creationId xmlns:a16="http://schemas.microsoft.com/office/drawing/2014/main" id="{B0EAAEE5-EF95-4C38-B443-421FB5839C5E}"/>
               </a:ext>
             </a:extLst>
           </p:cNvPr>
@@ -25682,7 +25680,7 @@
           <p:cNvPr id="6" name="">
             <a:extLst xmlns:a="http://schemas.openxmlformats.org/drawingml/2006/main">
               <a:ext uri="{FF2B5EF4-FFF2-40B4-BE49-F238E27FC236}">
-                <a16:creationId xmlns:a16="http://schemas.microsoft.com/office/drawing/2014/main" id="{EC7DF98C-9357-44ED-A7AB-628CF6685F2E}"/>
+                <a16:creationId xmlns:a16="http://schemas.microsoft.com/office/drawing/2014/main" id="{E41E07B8-6649-48D9-8A22-0E687876E612}"/>
               </a:ext>
             </a:extLst>
           </p:cNvPr>
@@ -25746,7 +25744,7 @@
           <p:cNvPr id="7" name="">
             <a:extLst xmlns:a="http://schemas.openxmlformats.org/drawingml/2006/main">
               <a:ext uri="{FF2B5EF4-FFF2-40B4-BE49-F238E27FC236}">
-                <a16:creationId xmlns:a16="http://schemas.microsoft.com/office/drawing/2014/main" id="{4E2AB8E5-3957-4E99-9376-B79E08BC8C1B}"/>
+                <a16:creationId xmlns:a16="http://schemas.microsoft.com/office/drawing/2014/main" id="{48ABDE23-48C1-4B8E-8B09-1F8FBCD2B6CE}"/>
               </a:ext>
             </a:extLst>
           </p:cNvPr>
@@ -25810,7 +25808,7 @@
           <p:cNvPr id="8" name="">
             <a:extLst xmlns:a="http://schemas.openxmlformats.org/drawingml/2006/main">
               <a:ext uri="{FF2B5EF4-FFF2-40B4-BE49-F238E27FC236}">
-                <a16:creationId xmlns:a16="http://schemas.microsoft.com/office/drawing/2014/main" id="{5B786AF1-FEDC-4452-8EB2-4EC36B4C3D9C}"/>
+                <a16:creationId xmlns:a16="http://schemas.microsoft.com/office/drawing/2014/main" id="{9588661C-23DE-4399-8327-CD11B15CB383}"/>
               </a:ext>
             </a:extLst>
           </p:cNvPr>
@@ -25845,7 +25843,7 @@
           <p:cNvPr id="9" name="">
             <a:extLst xmlns:a="http://schemas.openxmlformats.org/drawingml/2006/main">
               <a:ext uri="{FF2B5EF4-FFF2-40B4-BE49-F238E27FC236}">
-                <a16:creationId xmlns:a16="http://schemas.microsoft.com/office/drawing/2014/main" id="{81F4A9A3-47D9-4FB4-A66A-7061CAC44B40}"/>
+                <a16:creationId xmlns:a16="http://schemas.microsoft.com/office/drawing/2014/main" id="{416F6B00-76EE-4880-B578-6187FC5266F0}"/>
               </a:ext>
             </a:extLst>
           </p:cNvPr>
@@ -25909,7 +25907,7 @@
           <p:cNvPr id="10" name="">
             <a:extLst xmlns:a="http://schemas.openxmlformats.org/drawingml/2006/main">
               <a:ext uri="{FF2B5EF4-FFF2-40B4-BE49-F238E27FC236}">
-                <a16:creationId xmlns:a16="http://schemas.microsoft.com/office/drawing/2014/main" id="{4BCFEF84-DA17-45E9-A130-9850D643B40E}"/>
+                <a16:creationId xmlns:a16="http://schemas.microsoft.com/office/drawing/2014/main" id="{8D968511-CAD1-43DD-933A-8E28FD961331}"/>
               </a:ext>
             </a:extLst>
           </p:cNvPr>
@@ -25973,7 +25971,7 @@
           <p:cNvPr id="11" name="">
             <a:extLst xmlns:a="http://schemas.openxmlformats.org/drawingml/2006/main">
               <a:ext uri="{FF2B5EF4-FFF2-40B4-BE49-F238E27FC236}">
-                <a16:creationId xmlns:a16="http://schemas.microsoft.com/office/drawing/2014/main" id="{7DFCF5F3-C1D4-4789-9293-45D0FFD386A1}"/>
+                <a16:creationId xmlns:a16="http://schemas.microsoft.com/office/drawing/2014/main" id="{4AA04862-5157-4D85-B05C-67184AE6FEE1}"/>
               </a:ext>
             </a:extLst>
           </p:cNvPr>
@@ -26037,7 +26035,7 @@
           <p:cNvPr id="12" name="">
             <a:extLst xmlns:a="http://schemas.openxmlformats.org/drawingml/2006/main">
               <a:ext uri="{FF2B5EF4-FFF2-40B4-BE49-F238E27FC236}">
-                <a16:creationId xmlns:a16="http://schemas.microsoft.com/office/drawing/2014/main" id="{AD581947-D04A-4316-B4C5-EF71845945E6}"/>
+                <a16:creationId xmlns:a16="http://schemas.microsoft.com/office/drawing/2014/main" id="{DB8B3B1F-92EB-40D2-92EE-1961808E09E2}"/>
               </a:ext>
             </a:extLst>
           </p:cNvPr>
@@ -26072,7 +26070,7 @@
           <p:cNvPr id="13" name="">
             <a:extLst xmlns:a="http://schemas.openxmlformats.org/drawingml/2006/main">
               <a:ext uri="{FF2B5EF4-FFF2-40B4-BE49-F238E27FC236}">
-                <a16:creationId xmlns:a16="http://schemas.microsoft.com/office/drawing/2014/main" id="{EF67F899-2A91-4C0A-B3BC-3400C9371139}"/>
+                <a16:creationId xmlns:a16="http://schemas.microsoft.com/office/drawing/2014/main" id="{CAA64215-81E2-4DAE-82C8-9ECD1431CFA3}"/>
               </a:ext>
             </a:extLst>
           </p:cNvPr>
@@ -26105,7 +26103,7 @@
           <p:cNvPr id="14" name="">
             <a:extLst xmlns:a="http://schemas.openxmlformats.org/drawingml/2006/main">
               <a:ext uri="{FF2B5EF4-FFF2-40B4-BE49-F238E27FC236}">
-                <a16:creationId xmlns:a16="http://schemas.microsoft.com/office/drawing/2014/main" id="{8F5E6875-C86D-4445-A6FF-3762AA05E42E}"/>
+                <a16:creationId xmlns:a16="http://schemas.microsoft.com/office/drawing/2014/main" id="{5F5E0B26-A492-4379-93AB-EDF938562B23}"/>
               </a:ext>
             </a:extLst>
           </p:cNvPr>
@@ -26140,7 +26138,7 @@
           <p:cNvPr id="15" name="">
             <a:extLst xmlns:a="http://schemas.openxmlformats.org/drawingml/2006/main">
               <a:ext uri="{FF2B5EF4-FFF2-40B4-BE49-F238E27FC236}">
-                <a16:creationId xmlns:a16="http://schemas.microsoft.com/office/drawing/2014/main" id="{895B674A-E96F-4D4D-8E49-A33B8076645A}"/>
+                <a16:creationId xmlns:a16="http://schemas.microsoft.com/office/drawing/2014/main" id="{8F041224-AB08-41CD-9DD0-9D9F0534DD08}"/>
               </a:ext>
             </a:extLst>
           </p:cNvPr>
@@ -26204,7 +26202,7 @@
           <p:cNvPr id="16" name="">
             <a:extLst xmlns:a="http://schemas.openxmlformats.org/drawingml/2006/main">
               <a:ext uri="{FF2B5EF4-FFF2-40B4-BE49-F238E27FC236}">
-                <a16:creationId xmlns:a16="http://schemas.microsoft.com/office/drawing/2014/main" id="{A77820F8-A18F-4675-8F80-47B4186C0C2F}"/>
+                <a16:creationId xmlns:a16="http://schemas.microsoft.com/office/drawing/2014/main" id="{2D6D0227-C015-46EC-BC65-6463E12E4EEE}"/>
               </a:ext>
             </a:extLst>
           </p:cNvPr>
@@ -26239,7 +26237,7 @@
           <p:cNvPr id="17" name="">
             <a:extLst xmlns:a="http://schemas.openxmlformats.org/drawingml/2006/main">
               <a:ext uri="{FF2B5EF4-FFF2-40B4-BE49-F238E27FC236}">
-                <a16:creationId xmlns:a16="http://schemas.microsoft.com/office/drawing/2014/main" id="{FC144477-DC31-4143-A232-96D06F079FAC}"/>
+                <a16:creationId xmlns:a16="http://schemas.microsoft.com/office/drawing/2014/main" id="{DD5B5A94-AE1B-4482-A558-6271721A04AC}"/>
               </a:ext>
             </a:extLst>
           </p:cNvPr>
@@ -26303,7 +26301,7 @@
           <p:cNvPr id="18" name="">
             <a:extLst xmlns:a="http://schemas.openxmlformats.org/drawingml/2006/main">
               <a:ext uri="{FF2B5EF4-FFF2-40B4-BE49-F238E27FC236}">
-                <a16:creationId xmlns:a16="http://schemas.microsoft.com/office/drawing/2014/main" id="{666286B8-A1A1-43E9-9D39-7D977B862CBB}"/>
+                <a16:creationId xmlns:a16="http://schemas.microsoft.com/office/drawing/2014/main" id="{C13A4D56-F92F-4A79-9113-FC0F9086A57E}"/>
               </a:ext>
             </a:extLst>
           </p:cNvPr>
@@ -26338,7 +26336,7 @@
           <p:cNvPr id="19" name="">
             <a:extLst xmlns:a="http://schemas.openxmlformats.org/drawingml/2006/main">
               <a:ext uri="{FF2B5EF4-FFF2-40B4-BE49-F238E27FC236}">
-                <a16:creationId xmlns:a16="http://schemas.microsoft.com/office/drawing/2014/main" id="{456BBAF1-70CD-45BC-8A14-B1D89B0938C0}"/>
+                <a16:creationId xmlns:a16="http://schemas.microsoft.com/office/drawing/2014/main" id="{A269619C-C1F9-459B-8E24-13043EB43EEA}"/>
               </a:ext>
             </a:extLst>
           </p:cNvPr>
@@ -26402,7 +26400,7 @@
           <p:cNvPr id="20" name="">
             <a:extLst xmlns:a="http://schemas.openxmlformats.org/drawingml/2006/main">
               <a:ext uri="{FF2B5EF4-FFF2-40B4-BE49-F238E27FC236}">
-                <a16:creationId xmlns:a16="http://schemas.microsoft.com/office/drawing/2014/main" id="{25208A5D-88B2-4DFE-A234-25130D255984}"/>
+                <a16:creationId xmlns:a16="http://schemas.microsoft.com/office/drawing/2014/main" id="{39731A04-560F-4E21-96D5-24570619E89B}"/>
               </a:ext>
             </a:extLst>
           </p:cNvPr>
@@ -26437,7 +26435,7 @@
           <p:cNvPr id="21" name="">
             <a:extLst xmlns:a="http://schemas.openxmlformats.org/drawingml/2006/main">
               <a:ext uri="{FF2B5EF4-FFF2-40B4-BE49-F238E27FC236}">
-                <a16:creationId xmlns:a16="http://schemas.microsoft.com/office/drawing/2014/main" id="{B0D6B8B4-D291-481F-9908-2557C91A7FF9}"/>
+                <a16:creationId xmlns:a16="http://schemas.microsoft.com/office/drawing/2014/main" id="{173CB324-FC4E-4967-ABA5-C7427BE54FA3}"/>
               </a:ext>
             </a:extLst>
           </p:cNvPr>
@@ -26501,7 +26499,7 @@
           <p:cNvPr id="22" name="">
             <a:extLst xmlns:a="http://schemas.openxmlformats.org/drawingml/2006/main">
               <a:ext uri="{FF2B5EF4-FFF2-40B4-BE49-F238E27FC236}">
-                <a16:creationId xmlns:a16="http://schemas.microsoft.com/office/drawing/2014/main" id="{FBBCCCB0-FD0E-4EC7-89D8-2A6F47D15411}"/>
+                <a16:creationId xmlns:a16="http://schemas.microsoft.com/office/drawing/2014/main" id="{20328BB3-B62C-47FB-A5E5-A1C8992E509A}"/>
               </a:ext>
             </a:extLst>
           </p:cNvPr>
@@ -26536,7 +26534,7 @@
           <p:cNvPr id="23" name="">
             <a:extLst xmlns:a="http://schemas.openxmlformats.org/drawingml/2006/main">
               <a:ext uri="{FF2B5EF4-FFF2-40B4-BE49-F238E27FC236}">
-                <a16:creationId xmlns:a16="http://schemas.microsoft.com/office/drawing/2014/main" id="{6C7B6D64-FA41-4013-B804-2E72F4C05EBF}"/>
+                <a16:creationId xmlns:a16="http://schemas.microsoft.com/office/drawing/2014/main" id="{9BB40A5D-7F5C-4127-B160-C00A05D1223A}"/>
               </a:ext>
             </a:extLst>
           </p:cNvPr>
@@ -26600,7 +26598,7 @@
           <p:cNvPr id="24" name="">
             <a:extLst xmlns:a="http://schemas.openxmlformats.org/drawingml/2006/main">
               <a:ext uri="{FF2B5EF4-FFF2-40B4-BE49-F238E27FC236}">
-                <a16:creationId xmlns:a16="http://schemas.microsoft.com/office/drawing/2014/main" id="{F5ACBC37-C0C0-4886-9C20-58BE3D7E011D}"/>
+                <a16:creationId xmlns:a16="http://schemas.microsoft.com/office/drawing/2014/main" id="{94864515-D5ED-404F-B2CA-8ADE1FD31E48}"/>
               </a:ext>
             </a:extLst>
           </p:cNvPr>
@@ -26664,7 +26662,7 @@
           <p:cNvPr id="25" name="">
             <a:extLst xmlns:a="http://schemas.openxmlformats.org/drawingml/2006/main">
               <a:ext uri="{FF2B5EF4-FFF2-40B4-BE49-F238E27FC236}">
-                <a16:creationId xmlns:a16="http://schemas.microsoft.com/office/drawing/2014/main" id="{D4C94EE6-CA6F-4D78-85CF-BE5168E47361}"/>
+                <a16:creationId xmlns:a16="http://schemas.microsoft.com/office/drawing/2014/main" id="{6E7C9DDA-BDB2-4E56-BD24-2D27749D19BA}"/>
               </a:ext>
             </a:extLst>
           </p:cNvPr>
@@ -26728,7 +26726,7 @@
           <p:cNvPr id="26" name="">
             <a:extLst xmlns:a="http://schemas.openxmlformats.org/drawingml/2006/main">
               <a:ext uri="{FF2B5EF4-FFF2-40B4-BE49-F238E27FC236}">
-                <a16:creationId xmlns:a16="http://schemas.microsoft.com/office/drawing/2014/main" id="{0C5A9558-C94B-404E-A7B9-42A125EF3805}"/>
+                <a16:creationId xmlns:a16="http://schemas.microsoft.com/office/drawing/2014/main" id="{48B6929A-1E86-40EF-A94B-02150FE05B42}"/>
               </a:ext>
             </a:extLst>
           </p:cNvPr>
@@ -26763,7 +26761,7 @@
           <p:cNvPr id="27" name="">
             <a:extLst xmlns:a="http://schemas.openxmlformats.org/drawingml/2006/main">
               <a:ext uri="{FF2B5EF4-FFF2-40B4-BE49-F238E27FC236}">
-                <a16:creationId xmlns:a16="http://schemas.microsoft.com/office/drawing/2014/main" id="{6B65CFE6-DC1A-4884-90FA-5A890EDE9CAB}"/>
+                <a16:creationId xmlns:a16="http://schemas.microsoft.com/office/drawing/2014/main" id="{F3BF145B-DAD4-45F0-9AF7-78C8158085D6}"/>
               </a:ext>
             </a:extLst>
           </p:cNvPr>
@@ -26798,7 +26796,7 @@
           <p:cNvPr id="28" name="">
             <a:extLst xmlns:a="http://schemas.openxmlformats.org/drawingml/2006/main">
               <a:ext uri="{FF2B5EF4-FFF2-40B4-BE49-F238E27FC236}">
-                <a16:creationId xmlns:a16="http://schemas.microsoft.com/office/drawing/2014/main" id="{7FF0AF1C-D890-433F-AF3E-2EE728D5AB5C}"/>
+                <a16:creationId xmlns:a16="http://schemas.microsoft.com/office/drawing/2014/main" id="{E89911DA-DF60-4ABD-8AC4-E0A9D7721F17}"/>
               </a:ext>
             </a:extLst>
           </p:cNvPr>
@@ -26833,7 +26831,7 @@
           <p:cNvPr id="29" name="kicker-08-marker">
             <a:extLst xmlns:a="http://schemas.openxmlformats.org/drawingml/2006/main">
               <a:ext uri="{FF2B5EF4-FFF2-40B4-BE49-F238E27FC236}">
-                <a16:creationId xmlns:a16="http://schemas.microsoft.com/office/drawing/2014/main" id="{06700CFF-A7F3-4505-9BC7-26B058A60178}"/>
+                <a16:creationId xmlns:a16="http://schemas.microsoft.com/office/drawing/2014/main" id="{17C24E40-22F4-4DEC-BBA5-B2E8A425F90E}"/>
               </a:ext>
             </a:extLst>
           </p:cNvPr>
@@ -26868,7 +26866,7 @@
           <p:cNvPr id="30" name="kicker-08-label">
             <a:extLst xmlns:a="http://schemas.openxmlformats.org/drawingml/2006/main">
               <a:ext uri="{FF2B5EF4-FFF2-40B4-BE49-F238E27FC236}">
-                <a16:creationId xmlns:a16="http://schemas.microsoft.com/office/drawing/2014/main" id="{BFDABAB5-E1CB-4582-9D6B-668811AA73F4}"/>
+                <a16:creationId xmlns:a16="http://schemas.microsoft.com/office/drawing/2014/main" id="{E80EE816-E33E-4FEA-89E6-EFC1D3DB9C25}"/>
               </a:ext>
             </a:extLst>
           </p:cNvPr>
@@ -26932,7 +26930,7 @@
           <p:cNvPr id="31" name="">
             <a:extLst xmlns:a="http://schemas.openxmlformats.org/drawingml/2006/main">
               <a:ext uri="{FF2B5EF4-FFF2-40B4-BE49-F238E27FC236}">
-                <a16:creationId xmlns:a16="http://schemas.microsoft.com/office/drawing/2014/main" id="{88F05653-A0EE-4E72-8340-C1678FD253A4}"/>
+                <a16:creationId xmlns:a16="http://schemas.microsoft.com/office/drawing/2014/main" id="{97F31F13-2D10-4FAC-9296-D695CED53671}"/>
               </a:ext>
             </a:extLst>
           </p:cNvPr>
@@ -26996,7 +26994,7 @@
           <p:cNvPr id="32" name="">
             <a:extLst xmlns:a="http://schemas.openxmlformats.org/drawingml/2006/main">
               <a:ext uri="{FF2B5EF4-FFF2-40B4-BE49-F238E27FC236}">
-                <a16:creationId xmlns:a16="http://schemas.microsoft.com/office/drawing/2014/main" id="{54F77C39-295E-433D-AA92-D9208489431A}"/>
+                <a16:creationId xmlns:a16="http://schemas.microsoft.com/office/drawing/2014/main" id="{6625BE19-4EA1-4A14-A24C-1B85648CDBA2}"/>
               </a:ext>
             </a:extLst>
           </p:cNvPr>
@@ -27060,7 +27058,7 @@
           <p:cNvPr id="33" name="">
             <a:extLst xmlns:a="http://schemas.openxmlformats.org/drawingml/2006/main">
               <a:ext uri="{FF2B5EF4-FFF2-40B4-BE49-F238E27FC236}">
-                <a16:creationId xmlns:a16="http://schemas.microsoft.com/office/drawing/2014/main" id="{0DDA7D40-8E75-4003-BAD5-855F1C81711C}"/>
+                <a16:creationId xmlns:a16="http://schemas.microsoft.com/office/drawing/2014/main" id="{16EB3EA8-9FC4-472B-8118-3242905AB520}"/>
               </a:ext>
             </a:extLst>
           </p:cNvPr>
@@ -27095,7 +27093,7 @@
           <p:cNvPr id="34" name="">
             <a:extLst xmlns:a="http://schemas.openxmlformats.org/drawingml/2006/main">
               <a:ext uri="{FF2B5EF4-FFF2-40B4-BE49-F238E27FC236}">
-                <a16:creationId xmlns:a16="http://schemas.microsoft.com/office/drawing/2014/main" id="{BB4D3D93-CE38-471A-B7DC-BFD4CA96D730}"/>
+                <a16:creationId xmlns:a16="http://schemas.microsoft.com/office/drawing/2014/main" id="{7EA5E2E0-7BBB-471F-A2E0-7D8DC6BAA476}"/>
               </a:ext>
             </a:extLst>
           </p:cNvPr>
@@ -27130,7 +27128,7 @@
           <p:cNvPr id="35" name="">
             <a:extLst xmlns:a="http://schemas.openxmlformats.org/drawingml/2006/main">
               <a:ext uri="{FF2B5EF4-FFF2-40B4-BE49-F238E27FC236}">
-                <a16:creationId xmlns:a16="http://schemas.microsoft.com/office/drawing/2014/main" id="{14BE7B04-59AE-41F7-B2D7-DE78899A1565}"/>
+                <a16:creationId xmlns:a16="http://schemas.microsoft.com/office/drawing/2014/main" id="{5E293515-8DE1-4E78-AE7D-7C90FBC85C2F}"/>
               </a:ext>
             </a:extLst>
           </p:cNvPr>
@@ -27165,7 +27163,7 @@
           <p:cNvPr id="36" name="">
             <a:extLst xmlns:a="http://schemas.openxmlformats.org/drawingml/2006/main">
               <a:ext uri="{FF2B5EF4-FFF2-40B4-BE49-F238E27FC236}">
-                <a16:creationId xmlns:a16="http://schemas.microsoft.com/office/drawing/2014/main" id="{2C25341D-8E98-43B7-B284-78DBF6F208C0}"/>
+                <a16:creationId xmlns:a16="http://schemas.microsoft.com/office/drawing/2014/main" id="{078D6FDD-6F90-473A-9B78-3490C6443675}"/>
               </a:ext>
             </a:extLst>
           </p:cNvPr>
@@ -27200,7 +27198,7 @@
           <p:cNvPr id="37" name="">
             <a:extLst xmlns:a="http://schemas.openxmlformats.org/drawingml/2006/main">
               <a:ext uri="{FF2B5EF4-FFF2-40B4-BE49-F238E27FC236}">
-                <a16:creationId xmlns:a16="http://schemas.microsoft.com/office/drawing/2014/main" id="{3D729DE4-5FCD-4A85-8C42-21095420137E}"/>
+                <a16:creationId xmlns:a16="http://schemas.microsoft.com/office/drawing/2014/main" id="{D416D80C-5BCB-464C-BD46-DABFEAC714AC}"/>
               </a:ext>
             </a:extLst>
           </p:cNvPr>
@@ -27264,7 +27262,7 @@
           <p:cNvPr id="38" name="">
             <a:extLst xmlns:a="http://schemas.openxmlformats.org/drawingml/2006/main">
               <a:ext uri="{FF2B5EF4-FFF2-40B4-BE49-F238E27FC236}">
-                <a16:creationId xmlns:a16="http://schemas.microsoft.com/office/drawing/2014/main" id="{05B9CD02-9760-430B-BAB4-D319E78BAE7A}"/>
+                <a16:creationId xmlns:a16="http://schemas.microsoft.com/office/drawing/2014/main" id="{41760967-9637-476D-A2AF-547033FEE22F}"/>
               </a:ext>
             </a:extLst>
           </p:cNvPr>
@@ -27328,7 +27326,7 @@
           <p:cNvPr id="39" name="">
             <a:extLst xmlns:a="http://schemas.openxmlformats.org/drawingml/2006/main">
               <a:ext uri="{FF2B5EF4-FFF2-40B4-BE49-F238E27FC236}">
-                <a16:creationId xmlns:a16="http://schemas.microsoft.com/office/drawing/2014/main" id="{4DDB2E11-B8D7-4DA7-92B7-5C29DA74DD3F}"/>
+                <a16:creationId xmlns:a16="http://schemas.microsoft.com/office/drawing/2014/main" id="{B919D695-B202-467B-B5A9-CD62BE7F6784}"/>
               </a:ext>
             </a:extLst>
           </p:cNvPr>
@@ -27390,7 +27388,7 @@
     </p:spTree>
     <p:extLst>
       <p:ext uri="{BB962C8B-B14F-4D97-AF65-F5344CB8AC3E}">
-        <p14:creationId xmlns:p14="http://schemas.microsoft.com/office/powerpoint/2010/main" val="1672408572"/>
+        <p14:creationId xmlns:p14="http://schemas.microsoft.com/office/powerpoint/2010/main" val="1521284967"/>
       </p:ext>
     </p:extLst>
   </p:cSld>
@@ -27414,7 +27412,7 @@
           <p:cNvPr id="1" name="">
             <a:extLst xmlns:a="http://schemas.openxmlformats.org/drawingml/2006/main">
               <a:ext uri="{FF2B5EF4-FFF2-40B4-BE49-F238E27FC236}">
-                <a16:creationId xmlns:a16="http://schemas.microsoft.com/office/drawing/2014/main" id="{6FADE318-2EB1-431D-A2B2-B9D4FCF48038}"/>
+                <a16:creationId xmlns:a16="http://schemas.microsoft.com/office/drawing/2014/main" id="{F61867F0-E74E-4EB2-8862-71857CBCA548}"/>
               </a:ext>
             </a:extLst>
           </p:cNvPr>
@@ -27449,7 +27447,7 @@
           <p:cNvPr id="2" name="">
             <a:extLst xmlns:a="http://schemas.openxmlformats.org/drawingml/2006/main">
               <a:ext uri="{FF2B5EF4-FFF2-40B4-BE49-F238E27FC236}">
-                <a16:creationId xmlns:a16="http://schemas.microsoft.com/office/drawing/2014/main" id="{B653C05E-66E5-4A71-80F0-A759723964A6}"/>
+                <a16:creationId xmlns:a16="http://schemas.microsoft.com/office/drawing/2014/main" id="{4EEF9740-C397-4976-8291-36111B67FAD6}"/>
               </a:ext>
             </a:extLst>
           </p:cNvPr>
@@ -27484,7 +27482,7 @@
           <p:cNvPr id="3" name="">
             <a:extLst xmlns:a="http://schemas.openxmlformats.org/drawingml/2006/main">
               <a:ext uri="{FF2B5EF4-FFF2-40B4-BE49-F238E27FC236}">
-                <a16:creationId xmlns:a16="http://schemas.microsoft.com/office/drawing/2014/main" id="{2BD01024-BD1B-4536-8BC7-3A19C4B232B3}"/>
+                <a16:creationId xmlns:a16="http://schemas.microsoft.com/office/drawing/2014/main" id="{AC99E1AE-D431-43FE-A6FB-3C81D63FD8D9}"/>
               </a:ext>
             </a:extLst>
           </p:cNvPr>
@@ -27519,7 +27517,7 @@
           <p:cNvPr id="4" name="kicker-08-marker">
             <a:extLst xmlns:a="http://schemas.openxmlformats.org/drawingml/2006/main">
               <a:ext uri="{FF2B5EF4-FFF2-40B4-BE49-F238E27FC236}">
-                <a16:creationId xmlns:a16="http://schemas.microsoft.com/office/drawing/2014/main" id="{D32A9BC1-6230-4F23-B3F9-64177EAE0706}"/>
+                <a16:creationId xmlns:a16="http://schemas.microsoft.com/office/drawing/2014/main" id="{E4E35F01-29C0-4FF5-8D81-F5D3D0D88B75}"/>
               </a:ext>
             </a:extLst>
           </p:cNvPr>
@@ -27554,7 +27552,7 @@
           <p:cNvPr id="5" name="kicker-08-label">
             <a:extLst xmlns:a="http://schemas.openxmlformats.org/drawingml/2006/main">
               <a:ext uri="{FF2B5EF4-FFF2-40B4-BE49-F238E27FC236}">
-                <a16:creationId xmlns:a16="http://schemas.microsoft.com/office/drawing/2014/main" id="{78451901-2D2C-43BE-B52A-DBDCE0F25E31}"/>
+                <a16:creationId xmlns:a16="http://schemas.microsoft.com/office/drawing/2014/main" id="{13CB6958-FD2B-42AC-9240-12C28495B3B8}"/>
               </a:ext>
             </a:extLst>
           </p:cNvPr>
@@ -27618,7 +27616,7 @@
           <p:cNvPr id="6" name="">
             <a:extLst xmlns:a="http://schemas.openxmlformats.org/drawingml/2006/main">
               <a:ext uri="{FF2B5EF4-FFF2-40B4-BE49-F238E27FC236}">
-                <a16:creationId xmlns:a16="http://schemas.microsoft.com/office/drawing/2014/main" id="{279D0F98-7EE8-4A7C-AB74-9C9C27BAA416}"/>
+                <a16:creationId xmlns:a16="http://schemas.microsoft.com/office/drawing/2014/main" id="{70A6D953-8C9F-482E-AB7F-D960EB211824}"/>
               </a:ext>
             </a:extLst>
           </p:cNvPr>
@@ -27682,7 +27680,7 @@
           <p:cNvPr id="7" name="">
             <a:extLst xmlns:a="http://schemas.openxmlformats.org/drawingml/2006/main">
               <a:ext uri="{FF2B5EF4-FFF2-40B4-BE49-F238E27FC236}">
-                <a16:creationId xmlns:a16="http://schemas.microsoft.com/office/drawing/2014/main" id="{FCF85166-F068-4793-8AC2-2013A3E60AB6}"/>
+                <a16:creationId xmlns:a16="http://schemas.microsoft.com/office/drawing/2014/main" id="{260390A2-29E7-4FC0-9F5E-E0085C5EAA7B}"/>
               </a:ext>
             </a:extLst>
           </p:cNvPr>
@@ -27746,7 +27744,7 @@
           <p:cNvPr id="8" name="">
             <a:extLst xmlns:a="http://schemas.openxmlformats.org/drawingml/2006/main">
               <a:ext uri="{FF2B5EF4-FFF2-40B4-BE49-F238E27FC236}">
-                <a16:creationId xmlns:a16="http://schemas.microsoft.com/office/drawing/2014/main" id="{62C317EC-F0CC-4B0F-B4F2-E40CEE412E0C}"/>
+                <a16:creationId xmlns:a16="http://schemas.microsoft.com/office/drawing/2014/main" id="{43D385AB-B0CE-4582-A84C-537002C7FA2D}"/>
               </a:ext>
             </a:extLst>
           </p:cNvPr>
@@ -27781,7 +27779,7 @@
           <p:cNvPr id="9" name="">
             <a:extLst xmlns:a="http://schemas.openxmlformats.org/drawingml/2006/main">
               <a:ext uri="{FF2B5EF4-FFF2-40B4-BE49-F238E27FC236}">
-                <a16:creationId xmlns:a16="http://schemas.microsoft.com/office/drawing/2014/main" id="{CD9FFA96-5115-4D89-B38E-ED7508EED56C}"/>
+                <a16:creationId xmlns:a16="http://schemas.microsoft.com/office/drawing/2014/main" id="{E2109686-70D3-44A4-A69A-D763C373B93D}"/>
               </a:ext>
             </a:extLst>
           </p:cNvPr>
@@ -27845,7 +27843,7 @@
           <p:cNvPr id="10" name="">
             <a:extLst xmlns:a="http://schemas.openxmlformats.org/drawingml/2006/main">
               <a:ext uri="{FF2B5EF4-FFF2-40B4-BE49-F238E27FC236}">
-                <a16:creationId xmlns:a16="http://schemas.microsoft.com/office/drawing/2014/main" id="{2BA91430-65A3-47A5-831D-64C016E17D6D}"/>
+                <a16:creationId xmlns:a16="http://schemas.microsoft.com/office/drawing/2014/main" id="{0C3C9833-1983-4C9D-8545-238BC5610133}"/>
               </a:ext>
             </a:extLst>
           </p:cNvPr>
@@ -27909,7 +27907,7 @@
           <p:cNvPr id="11" name="">
             <a:extLst xmlns:a="http://schemas.openxmlformats.org/drawingml/2006/main">
               <a:ext uri="{FF2B5EF4-FFF2-40B4-BE49-F238E27FC236}">
-                <a16:creationId xmlns:a16="http://schemas.microsoft.com/office/drawing/2014/main" id="{80880794-D8F1-44B1-87C8-603586C1669E}"/>
+                <a16:creationId xmlns:a16="http://schemas.microsoft.com/office/drawing/2014/main" id="{0748F566-4543-428E-9CA4-23E51907A735}"/>
               </a:ext>
             </a:extLst>
           </p:cNvPr>
@@ -27973,7 +27971,7 @@
           <p:cNvPr id="12" name="">
             <a:extLst xmlns:a="http://schemas.openxmlformats.org/drawingml/2006/main">
               <a:ext uri="{FF2B5EF4-FFF2-40B4-BE49-F238E27FC236}">
-                <a16:creationId xmlns:a16="http://schemas.microsoft.com/office/drawing/2014/main" id="{0E9B4678-DFD8-425C-84B8-9B84AE97D94D}"/>
+                <a16:creationId xmlns:a16="http://schemas.microsoft.com/office/drawing/2014/main" id="{03F72A03-1572-4E4B-8B0D-168F31683C0C}"/>
               </a:ext>
             </a:extLst>
           </p:cNvPr>
@@ -28006,7 +28004,7 @@
           <p:cNvPr id="13" name="">
             <a:extLst xmlns:a="http://schemas.openxmlformats.org/drawingml/2006/main">
               <a:ext uri="{FF2B5EF4-FFF2-40B4-BE49-F238E27FC236}">
-                <a16:creationId xmlns:a16="http://schemas.microsoft.com/office/drawing/2014/main" id="{21D764D9-EFB6-48B3-AA31-5079B6CABDAA}"/>
+                <a16:creationId xmlns:a16="http://schemas.microsoft.com/office/drawing/2014/main" id="{4739B7E1-E65D-48C7-9E0B-BC52D5E78354}"/>
               </a:ext>
             </a:extLst>
           </p:cNvPr>
@@ -28070,7 +28068,7 @@
           <p:cNvPr id="14" name="">
             <a:extLst xmlns:a="http://schemas.openxmlformats.org/drawingml/2006/main">
               <a:ext uri="{FF2B5EF4-FFF2-40B4-BE49-F238E27FC236}">
-                <a16:creationId xmlns:a16="http://schemas.microsoft.com/office/drawing/2014/main" id="{33FFACD3-FB51-415E-B696-829227236EC6}"/>
+                <a16:creationId xmlns:a16="http://schemas.microsoft.com/office/drawing/2014/main" id="{4517FDDC-35E1-49D6-A588-5FBF050D6336}"/>
               </a:ext>
             </a:extLst>
           </p:cNvPr>
@@ -28105,7 +28103,7 @@
           <p:cNvPr id="15" name="">
             <a:extLst xmlns:a="http://schemas.openxmlformats.org/drawingml/2006/main">
               <a:ext uri="{FF2B5EF4-FFF2-40B4-BE49-F238E27FC236}">
-                <a16:creationId xmlns:a16="http://schemas.microsoft.com/office/drawing/2014/main" id="{71B0E9E2-00CA-41F4-83FA-E5C6DEAB8941}"/>
+                <a16:creationId xmlns:a16="http://schemas.microsoft.com/office/drawing/2014/main" id="{3E54D977-D1F2-4AB9-AB89-223EC9D583B4}"/>
               </a:ext>
             </a:extLst>
           </p:cNvPr>
@@ -28159,7 +28157,7 @@
                 <a:ea typeface="Aptos"/>
                 <a:cs typeface="Aptos"/>
               </a:rPr>
-              <a:t>PROMPT STACK</a:t>
+              <a:t>QUESTION STACK</a:t>
             </a:r>
           </a:p>
         </p:txBody>
@@ -28169,7 +28167,7 @@
           <p:cNvPr id="16" name="">
             <a:extLst xmlns:a="http://schemas.openxmlformats.org/drawingml/2006/main">
               <a:ext uri="{FF2B5EF4-FFF2-40B4-BE49-F238E27FC236}">
-                <a16:creationId xmlns:a16="http://schemas.microsoft.com/office/drawing/2014/main" id="{0CAF2321-5F25-4011-A2EF-3B4ADA677A21}"/>
+                <a16:creationId xmlns:a16="http://schemas.microsoft.com/office/drawing/2014/main" id="{7245CCF2-428F-4C09-84F6-2256B31080D9}"/>
               </a:ext>
             </a:extLst>
           </p:cNvPr>
@@ -28204,7 +28202,7 @@
           <p:cNvPr id="17" name="">
             <a:extLst xmlns:a="http://schemas.openxmlformats.org/drawingml/2006/main">
               <a:ext uri="{FF2B5EF4-FFF2-40B4-BE49-F238E27FC236}">
-                <a16:creationId xmlns:a16="http://schemas.microsoft.com/office/drawing/2014/main" id="{44EF888A-3052-496D-A396-174F2F971A3E}"/>
+                <a16:creationId xmlns:a16="http://schemas.microsoft.com/office/drawing/2014/main" id="{9FFC422D-53C5-4A0B-BC73-883A7DA988AC}"/>
               </a:ext>
             </a:extLst>
           </p:cNvPr>
@@ -28268,7 +28266,7 @@
           <p:cNvPr id="18" name="">
             <a:extLst xmlns:a="http://schemas.openxmlformats.org/drawingml/2006/main">
               <a:ext uri="{FF2B5EF4-FFF2-40B4-BE49-F238E27FC236}">
-                <a16:creationId xmlns:a16="http://schemas.microsoft.com/office/drawing/2014/main" id="{1C5415DA-3CD0-442C-9085-5DC2992F0207}"/>
+                <a16:creationId xmlns:a16="http://schemas.microsoft.com/office/drawing/2014/main" id="{0A1F3682-863C-45E8-9744-3B62DAA4647F}"/>
               </a:ext>
             </a:extLst>
           </p:cNvPr>
@@ -28303,7 +28301,7 @@
           <p:cNvPr id="19" name="">
             <a:extLst xmlns:a="http://schemas.openxmlformats.org/drawingml/2006/main">
               <a:ext uri="{FF2B5EF4-FFF2-40B4-BE49-F238E27FC236}">
-                <a16:creationId xmlns:a16="http://schemas.microsoft.com/office/drawing/2014/main" id="{9AAFD48D-EFF2-4F40-885B-BE67D1698DCB}"/>
+                <a16:creationId xmlns:a16="http://schemas.microsoft.com/office/drawing/2014/main" id="{6FA62AE5-FCE7-4D0C-BE04-94AFD7FF52DE}"/>
               </a:ext>
             </a:extLst>
           </p:cNvPr>
@@ -28367,7 +28365,7 @@
           <p:cNvPr id="20" name="">
             <a:extLst xmlns:a="http://schemas.openxmlformats.org/drawingml/2006/main">
               <a:ext uri="{FF2B5EF4-FFF2-40B4-BE49-F238E27FC236}">
-                <a16:creationId xmlns:a16="http://schemas.microsoft.com/office/drawing/2014/main" id="{73D9E49D-709E-470D-8721-D4D063079B3C}"/>
+                <a16:creationId xmlns:a16="http://schemas.microsoft.com/office/drawing/2014/main" id="{EDD36EB4-B645-4E92-98D0-198FFC489A26}"/>
               </a:ext>
             </a:extLst>
           </p:cNvPr>
@@ -28402,7 +28400,7 @@
           <p:cNvPr id="21" name="">
             <a:extLst xmlns:a="http://schemas.openxmlformats.org/drawingml/2006/main">
               <a:ext uri="{FF2B5EF4-FFF2-40B4-BE49-F238E27FC236}">
-                <a16:creationId xmlns:a16="http://schemas.microsoft.com/office/drawing/2014/main" id="{039178FB-5674-451B-871E-DB2C663F187E}"/>
+                <a16:creationId xmlns:a16="http://schemas.microsoft.com/office/drawing/2014/main" id="{4FC9108D-D6DC-47E0-BFDF-3E047946287C}"/>
               </a:ext>
             </a:extLst>
           </p:cNvPr>
@@ -28466,7 +28464,7 @@
           <p:cNvPr id="22" name="">
             <a:extLst xmlns:a="http://schemas.openxmlformats.org/drawingml/2006/main">
               <a:ext uri="{FF2B5EF4-FFF2-40B4-BE49-F238E27FC236}">
-                <a16:creationId xmlns:a16="http://schemas.microsoft.com/office/drawing/2014/main" id="{01B13057-7708-490C-B07C-31BEC00F1BBA}"/>
+                <a16:creationId xmlns:a16="http://schemas.microsoft.com/office/drawing/2014/main" id="{2EE2BE6F-BE72-4CB1-BB53-49E3FC3FC522}"/>
               </a:ext>
             </a:extLst>
           </p:cNvPr>
@@ -28501,7 +28499,7 @@
           <p:cNvPr id="23" name="">
             <a:extLst xmlns:a="http://schemas.openxmlformats.org/drawingml/2006/main">
               <a:ext uri="{FF2B5EF4-FFF2-40B4-BE49-F238E27FC236}">
-                <a16:creationId xmlns:a16="http://schemas.microsoft.com/office/drawing/2014/main" id="{67AE268E-4E6B-4C3B-8B2E-AFAFFF30CA1E}"/>
+                <a16:creationId xmlns:a16="http://schemas.microsoft.com/office/drawing/2014/main" id="{C410E9E4-72D1-4678-8CFA-2C93C9B1DCF1}"/>
               </a:ext>
             </a:extLst>
           </p:cNvPr>
@@ -28565,7 +28563,7 @@
           <p:cNvPr id="24" name="">
             <a:extLst xmlns:a="http://schemas.openxmlformats.org/drawingml/2006/main">
               <a:ext uri="{FF2B5EF4-FFF2-40B4-BE49-F238E27FC236}">
-                <a16:creationId xmlns:a16="http://schemas.microsoft.com/office/drawing/2014/main" id="{BC11D3C4-FC3D-4B24-9466-8F8C6AAFC36B}"/>
+                <a16:creationId xmlns:a16="http://schemas.microsoft.com/office/drawing/2014/main" id="{061A26EE-311A-4AD8-A33D-2A8BCEFE8081}"/>
               </a:ext>
             </a:extLst>
           </p:cNvPr>
@@ -28600,7 +28598,7 @@
           <p:cNvPr id="25" name="">
             <a:extLst xmlns:a="http://schemas.openxmlformats.org/drawingml/2006/main">
               <a:ext uri="{FF2B5EF4-FFF2-40B4-BE49-F238E27FC236}">
-                <a16:creationId xmlns:a16="http://schemas.microsoft.com/office/drawing/2014/main" id="{D9DBBD94-F8A2-4C77-AA79-7059BDA1D297}"/>
+                <a16:creationId xmlns:a16="http://schemas.microsoft.com/office/drawing/2014/main" id="{F6E315C0-4440-404E-8E95-3C5B3A811969}"/>
               </a:ext>
             </a:extLst>
           </p:cNvPr>
@@ -28664,7 +28662,7 @@
           <p:cNvPr id="26" name="">
             <a:extLst xmlns:a="http://schemas.openxmlformats.org/drawingml/2006/main">
               <a:ext uri="{FF2B5EF4-FFF2-40B4-BE49-F238E27FC236}">
-                <a16:creationId xmlns:a16="http://schemas.microsoft.com/office/drawing/2014/main" id="{D30E06DA-CB64-4A1F-AD02-2A8643AA7BE9}"/>
+                <a16:creationId xmlns:a16="http://schemas.microsoft.com/office/drawing/2014/main" id="{8928EC2B-DCBB-4AE6-9782-12B93119CD3E}"/>
               </a:ext>
             </a:extLst>
           </p:cNvPr>
@@ -28699,7 +28697,7 @@
           <p:cNvPr id="27" name="">
             <a:extLst xmlns:a="http://schemas.openxmlformats.org/drawingml/2006/main">
               <a:ext uri="{FF2B5EF4-FFF2-40B4-BE49-F238E27FC236}">
-                <a16:creationId xmlns:a16="http://schemas.microsoft.com/office/drawing/2014/main" id="{C11CAD88-4363-4C28-BC4B-FFD43A0FB0F8}"/>
+                <a16:creationId xmlns:a16="http://schemas.microsoft.com/office/drawing/2014/main" id="{6D346354-7554-4223-9131-88529085360E}"/>
               </a:ext>
             </a:extLst>
           </p:cNvPr>
@@ -28763,7 +28761,7 @@
           <p:cNvPr id="28" name="">
             <a:extLst xmlns:a="http://schemas.openxmlformats.org/drawingml/2006/main">
               <a:ext uri="{FF2B5EF4-FFF2-40B4-BE49-F238E27FC236}">
-                <a16:creationId xmlns:a16="http://schemas.microsoft.com/office/drawing/2014/main" id="{24985F85-2674-44D8-811B-5275B0855D36}"/>
+                <a16:creationId xmlns:a16="http://schemas.microsoft.com/office/drawing/2014/main" id="{B14FAF92-EBE2-4329-A1B5-D22BDC0CF1E0}"/>
               </a:ext>
             </a:extLst>
           </p:cNvPr>
@@ -28798,7 +28796,7 @@
           <p:cNvPr id="29" name="">
             <a:extLst xmlns:a="http://schemas.openxmlformats.org/drawingml/2006/main">
               <a:ext uri="{FF2B5EF4-FFF2-40B4-BE49-F238E27FC236}">
-                <a16:creationId xmlns:a16="http://schemas.microsoft.com/office/drawing/2014/main" id="{69607B27-15F0-4049-8894-3668A4BC20E1}"/>
+                <a16:creationId xmlns:a16="http://schemas.microsoft.com/office/drawing/2014/main" id="{329E4C12-BA4B-49F6-B236-8F5D049F6CB1}"/>
               </a:ext>
             </a:extLst>
           </p:cNvPr>
@@ -28862,7 +28860,7 @@
           <p:cNvPr id="30" name="">
             <a:extLst xmlns:a="http://schemas.openxmlformats.org/drawingml/2006/main">
               <a:ext uri="{FF2B5EF4-FFF2-40B4-BE49-F238E27FC236}">
-                <a16:creationId xmlns:a16="http://schemas.microsoft.com/office/drawing/2014/main" id="{373E2EDB-B6C5-42C9-A66F-8CED2397C370}"/>
+                <a16:creationId xmlns:a16="http://schemas.microsoft.com/office/drawing/2014/main" id="{F315FA16-8523-454C-BBAD-A14D5A83A1D1}"/>
               </a:ext>
             </a:extLst>
           </p:cNvPr>
@@ -28926,7 +28924,7 @@
           <p:cNvPr id="31" name="">
             <a:extLst xmlns:a="http://schemas.openxmlformats.org/drawingml/2006/main">
               <a:ext uri="{FF2B5EF4-FFF2-40B4-BE49-F238E27FC236}">
-                <a16:creationId xmlns:a16="http://schemas.microsoft.com/office/drawing/2014/main" id="{05D7AF1A-3120-4695-8EA8-094960F4266E}"/>
+                <a16:creationId xmlns:a16="http://schemas.microsoft.com/office/drawing/2014/main" id="{1BAD1C65-BFFD-40DF-89F2-7ECC106499C7}"/>
               </a:ext>
             </a:extLst>
           </p:cNvPr>
@@ -28988,7 +28986,7 @@
     </p:spTree>
     <p:extLst>
       <p:ext uri="{BB962C8B-B14F-4D97-AF65-F5344CB8AC3E}">
-        <p14:creationId xmlns:p14="http://schemas.microsoft.com/office/powerpoint/2010/main" val="1543423076"/>
+        <p14:creationId xmlns:p14="http://schemas.microsoft.com/office/powerpoint/2010/main" val="477067813"/>
       </p:ext>
     </p:extLst>
   </p:cSld>
@@ -29012,7 +29010,7 @@
           <p:cNvPr id="1" name="">
             <a:extLst xmlns:a="http://schemas.openxmlformats.org/drawingml/2006/main">
               <a:ext uri="{FF2B5EF4-FFF2-40B4-BE49-F238E27FC236}">
-                <a16:creationId xmlns:a16="http://schemas.microsoft.com/office/drawing/2014/main" id="{40453B17-DA56-4BB6-AB2C-F40A264C2E24}"/>
+                <a16:creationId xmlns:a16="http://schemas.microsoft.com/office/drawing/2014/main" id="{D0948AAA-42C8-46CB-A446-0C77880E95D3}"/>
               </a:ext>
             </a:extLst>
           </p:cNvPr>
@@ -29047,7 +29045,7 @@
           <p:cNvPr id="2" name="">
             <a:extLst xmlns:a="http://schemas.openxmlformats.org/drawingml/2006/main">
               <a:ext uri="{FF2B5EF4-FFF2-40B4-BE49-F238E27FC236}">
-                <a16:creationId xmlns:a16="http://schemas.microsoft.com/office/drawing/2014/main" id="{DD6E3800-3ECF-4323-9158-10F934A9E9F0}"/>
+                <a16:creationId xmlns:a16="http://schemas.microsoft.com/office/drawing/2014/main" id="{F0553BDE-EA37-4A1F-A227-DA863A0AE65C}"/>
               </a:ext>
             </a:extLst>
           </p:cNvPr>
@@ -29082,7 +29080,7 @@
           <p:cNvPr id="3" name="">
             <a:extLst xmlns:a="http://schemas.openxmlformats.org/drawingml/2006/main">
               <a:ext uri="{FF2B5EF4-FFF2-40B4-BE49-F238E27FC236}">
-                <a16:creationId xmlns:a16="http://schemas.microsoft.com/office/drawing/2014/main" id="{9713C8FF-8BE3-449D-ADDD-43C532A60324}"/>
+                <a16:creationId xmlns:a16="http://schemas.microsoft.com/office/drawing/2014/main" id="{7BC95F92-C98E-4FEB-926D-7450CB9A30B9}"/>
               </a:ext>
             </a:extLst>
           </p:cNvPr>
@@ -29117,7 +29115,7 @@
           <p:cNvPr id="4" name="kicker-08-marker">
             <a:extLst xmlns:a="http://schemas.openxmlformats.org/drawingml/2006/main">
               <a:ext uri="{FF2B5EF4-FFF2-40B4-BE49-F238E27FC236}">
-                <a16:creationId xmlns:a16="http://schemas.microsoft.com/office/drawing/2014/main" id="{32B972A8-29CA-4684-B26D-8132DC3E9EE8}"/>
+                <a16:creationId xmlns:a16="http://schemas.microsoft.com/office/drawing/2014/main" id="{765BED55-8AE3-4388-AC2F-EADF25838B43}"/>
               </a:ext>
             </a:extLst>
           </p:cNvPr>
@@ -29152,7 +29150,7 @@
           <p:cNvPr id="5" name="kicker-08-label">
             <a:extLst xmlns:a="http://schemas.openxmlformats.org/drawingml/2006/main">
               <a:ext uri="{FF2B5EF4-FFF2-40B4-BE49-F238E27FC236}">
-                <a16:creationId xmlns:a16="http://schemas.microsoft.com/office/drawing/2014/main" id="{76D8FAC8-C248-4128-BC28-8FFEA6001C5D}"/>
+                <a16:creationId xmlns:a16="http://schemas.microsoft.com/office/drawing/2014/main" id="{76317FDD-74A7-46FD-BD29-EBF5DD6EB818}"/>
               </a:ext>
             </a:extLst>
           </p:cNvPr>
@@ -29216,7 +29214,7 @@
           <p:cNvPr id="6" name="">
             <a:extLst xmlns:a="http://schemas.openxmlformats.org/drawingml/2006/main">
               <a:ext uri="{FF2B5EF4-FFF2-40B4-BE49-F238E27FC236}">
-                <a16:creationId xmlns:a16="http://schemas.microsoft.com/office/drawing/2014/main" id="{DEE84BF5-23F2-4FB2-A086-190B7863258A}"/>
+                <a16:creationId xmlns:a16="http://schemas.microsoft.com/office/drawing/2014/main" id="{E2CFA6DD-A588-434A-B26F-E96B9F4E388C}"/>
               </a:ext>
             </a:extLst>
           </p:cNvPr>
@@ -29280,7 +29278,7 @@
           <p:cNvPr id="7" name="">
             <a:extLst xmlns:a="http://schemas.openxmlformats.org/drawingml/2006/main">
               <a:ext uri="{FF2B5EF4-FFF2-40B4-BE49-F238E27FC236}">
-                <a16:creationId xmlns:a16="http://schemas.microsoft.com/office/drawing/2014/main" id="{1EA09335-9015-407D-B25B-08FE13AE5DC5}"/>
+                <a16:creationId xmlns:a16="http://schemas.microsoft.com/office/drawing/2014/main" id="{1CF82B29-EFC1-497D-890E-C475587DF6BD}"/>
               </a:ext>
             </a:extLst>
           </p:cNvPr>
@@ -29344,7 +29342,7 @@
           <p:cNvPr id="8" name="">
             <a:extLst xmlns:a="http://schemas.openxmlformats.org/drawingml/2006/main">
               <a:ext uri="{FF2B5EF4-FFF2-40B4-BE49-F238E27FC236}">
-                <a16:creationId xmlns:a16="http://schemas.microsoft.com/office/drawing/2014/main" id="{E8F362B7-F187-476E-BAE8-1E3AE11C677B}"/>
+                <a16:creationId xmlns:a16="http://schemas.microsoft.com/office/drawing/2014/main" id="{1DBA650E-29D1-402C-B62E-56757A529456}"/>
               </a:ext>
             </a:extLst>
           </p:cNvPr>
@@ -29379,7 +29377,7 @@
           <p:cNvPr id="9" name="">
             <a:extLst xmlns:a="http://schemas.openxmlformats.org/drawingml/2006/main">
               <a:ext uri="{FF2B5EF4-FFF2-40B4-BE49-F238E27FC236}">
-                <a16:creationId xmlns:a16="http://schemas.microsoft.com/office/drawing/2014/main" id="{0A8850A6-712E-450C-BBBE-225C77F2F3DC}"/>
+                <a16:creationId xmlns:a16="http://schemas.microsoft.com/office/drawing/2014/main" id="{4EC5097B-3B6B-40B8-9185-FA44FB133E6B}"/>
               </a:ext>
             </a:extLst>
           </p:cNvPr>
@@ -29443,7 +29441,7 @@
           <p:cNvPr id="10" name="">
             <a:extLst xmlns:a="http://schemas.openxmlformats.org/drawingml/2006/main">
               <a:ext uri="{FF2B5EF4-FFF2-40B4-BE49-F238E27FC236}">
-                <a16:creationId xmlns:a16="http://schemas.microsoft.com/office/drawing/2014/main" id="{7CAB0A21-C095-498C-826C-C6A941BEB5F5}"/>
+                <a16:creationId xmlns:a16="http://schemas.microsoft.com/office/drawing/2014/main" id="{63A19A5E-50C0-4582-81B4-B51AA733991A}"/>
               </a:ext>
             </a:extLst>
           </p:cNvPr>
@@ -29507,7 +29505,7 @@
           <p:cNvPr id="11" name="">
             <a:extLst xmlns:a="http://schemas.openxmlformats.org/drawingml/2006/main">
               <a:ext uri="{FF2B5EF4-FFF2-40B4-BE49-F238E27FC236}">
-                <a16:creationId xmlns:a16="http://schemas.microsoft.com/office/drawing/2014/main" id="{460A35C6-1925-4009-9D45-18D5746E27CD}"/>
+                <a16:creationId xmlns:a16="http://schemas.microsoft.com/office/drawing/2014/main" id="{8EF62DB3-ED4F-4A48-B1A3-F394667ED3C0}"/>
               </a:ext>
             </a:extLst>
           </p:cNvPr>
@@ -29571,7 +29569,7 @@
           <p:cNvPr id="12" name="">
             <a:extLst xmlns:a="http://schemas.openxmlformats.org/drawingml/2006/main">
               <a:ext uri="{FF2B5EF4-FFF2-40B4-BE49-F238E27FC236}">
-                <a16:creationId xmlns:a16="http://schemas.microsoft.com/office/drawing/2014/main" id="{A1EEE60C-D7D9-4B1D-A606-1A92F1DA25AD}"/>
+                <a16:creationId xmlns:a16="http://schemas.microsoft.com/office/drawing/2014/main" id="{8194C62A-A3E9-4468-8F8A-22731075032F}"/>
               </a:ext>
             </a:extLst>
           </p:cNvPr>
@@ -29604,7 +29602,7 @@
           <p:cNvPr id="13" name="">
             <a:extLst xmlns:a="http://schemas.openxmlformats.org/drawingml/2006/main">
               <a:ext uri="{FF2B5EF4-FFF2-40B4-BE49-F238E27FC236}">
-                <a16:creationId xmlns:a16="http://schemas.microsoft.com/office/drawing/2014/main" id="{64013F21-AB4C-4376-80EE-AA67F8B2189F}"/>
+                <a16:creationId xmlns:a16="http://schemas.microsoft.com/office/drawing/2014/main" id="{F42C8F51-FE53-4EDF-B1CC-1F43E7C54C6B}"/>
               </a:ext>
             </a:extLst>
           </p:cNvPr>
@@ -29639,7 +29637,7 @@
           <p:cNvPr id="14" name="">
             <a:extLst xmlns:a="http://schemas.openxmlformats.org/drawingml/2006/main">
               <a:ext uri="{FF2B5EF4-FFF2-40B4-BE49-F238E27FC236}">
-                <a16:creationId xmlns:a16="http://schemas.microsoft.com/office/drawing/2014/main" id="{01E9B230-E02E-40E8-9018-1A7ADE994ADB}"/>
+                <a16:creationId xmlns:a16="http://schemas.microsoft.com/office/drawing/2014/main" id="{885FA433-BA9E-4C41-B978-455AEA4E4A2A}"/>
               </a:ext>
             </a:extLst>
           </p:cNvPr>
@@ -29703,7 +29701,7 @@
           <p:cNvPr id="15" name="">
             <a:extLst xmlns:a="http://schemas.openxmlformats.org/drawingml/2006/main">
               <a:ext uri="{FF2B5EF4-FFF2-40B4-BE49-F238E27FC236}">
-                <a16:creationId xmlns:a16="http://schemas.microsoft.com/office/drawing/2014/main" id="{872E0724-897D-4FC7-9914-6D90323E0A0A}"/>
+                <a16:creationId xmlns:a16="http://schemas.microsoft.com/office/drawing/2014/main" id="{8970CA18-5F59-4F15-AF28-82DE9942AAF4}"/>
               </a:ext>
             </a:extLst>
           </p:cNvPr>
@@ -29767,7 +29765,7 @@
           <p:cNvPr id="16" name="">
             <a:extLst xmlns:a="http://schemas.openxmlformats.org/drawingml/2006/main">
               <a:ext uri="{FF2B5EF4-FFF2-40B4-BE49-F238E27FC236}">
-                <a16:creationId xmlns:a16="http://schemas.microsoft.com/office/drawing/2014/main" id="{510FC622-0541-4BA8-8298-7F01052F5B44}"/>
+                <a16:creationId xmlns:a16="http://schemas.microsoft.com/office/drawing/2014/main" id="{7A8B57BA-67C4-4EDB-90E1-22CD3D08DC6F}"/>
               </a:ext>
             </a:extLst>
           </p:cNvPr>
@@ -29802,7 +29800,7 @@
           <p:cNvPr id="17" name="">
             <a:extLst xmlns:a="http://schemas.openxmlformats.org/drawingml/2006/main">
               <a:ext uri="{FF2B5EF4-FFF2-40B4-BE49-F238E27FC236}">
-                <a16:creationId xmlns:a16="http://schemas.microsoft.com/office/drawing/2014/main" id="{C21C14BF-BD92-4BAA-8EE5-6DA549364A4C}"/>
+                <a16:creationId xmlns:a16="http://schemas.microsoft.com/office/drawing/2014/main" id="{4A5DEC9A-7F57-4122-8AC3-E2837D989D5B}"/>
               </a:ext>
             </a:extLst>
           </p:cNvPr>
@@ -29866,7 +29864,7 @@
           <p:cNvPr id="18" name="">
             <a:extLst xmlns:a="http://schemas.openxmlformats.org/drawingml/2006/main">
               <a:ext uri="{FF2B5EF4-FFF2-40B4-BE49-F238E27FC236}">
-                <a16:creationId xmlns:a16="http://schemas.microsoft.com/office/drawing/2014/main" id="{BDC8D722-B0C9-41D4-BC1A-D8DABC90E9E3}"/>
+                <a16:creationId xmlns:a16="http://schemas.microsoft.com/office/drawing/2014/main" id="{13835D21-CE33-419C-8F2B-BD8BE0A1AE74}"/>
               </a:ext>
             </a:extLst>
           </p:cNvPr>
@@ -29930,7 +29928,7 @@
           <p:cNvPr id="19" name="">
             <a:extLst xmlns:a="http://schemas.openxmlformats.org/drawingml/2006/main">
               <a:ext uri="{FF2B5EF4-FFF2-40B4-BE49-F238E27FC236}">
-                <a16:creationId xmlns:a16="http://schemas.microsoft.com/office/drawing/2014/main" id="{B453DCB7-1D1E-4E4E-8790-544B43E79E76}"/>
+                <a16:creationId xmlns:a16="http://schemas.microsoft.com/office/drawing/2014/main" id="{227ED0A0-D0A0-4D20-B7B9-EE3D37704EF1}"/>
               </a:ext>
             </a:extLst>
           </p:cNvPr>
@@ -29963,7 +29961,7 @@
           <p:cNvPr id="20" name="">
             <a:extLst xmlns:a="http://schemas.openxmlformats.org/drawingml/2006/main">
               <a:ext uri="{FF2B5EF4-FFF2-40B4-BE49-F238E27FC236}">
-                <a16:creationId xmlns:a16="http://schemas.microsoft.com/office/drawing/2014/main" id="{C33E2736-D837-4ADD-8557-8754E01E34BF}"/>
+                <a16:creationId xmlns:a16="http://schemas.microsoft.com/office/drawing/2014/main" id="{E0FDA12C-3755-4C2D-AA77-87AA418E37ED}"/>
               </a:ext>
             </a:extLst>
           </p:cNvPr>
@@ -29998,7 +29996,7 @@
           <p:cNvPr id="21" name="">
             <a:extLst xmlns:a="http://schemas.openxmlformats.org/drawingml/2006/main">
               <a:ext uri="{FF2B5EF4-FFF2-40B4-BE49-F238E27FC236}">
-                <a16:creationId xmlns:a16="http://schemas.microsoft.com/office/drawing/2014/main" id="{2AB3304D-0C94-49A2-AF7E-A669CCE6031F}"/>
+                <a16:creationId xmlns:a16="http://schemas.microsoft.com/office/drawing/2014/main" id="{76C3C6F7-E4A1-41E8-86EF-2497797340EA}"/>
               </a:ext>
             </a:extLst>
           </p:cNvPr>
@@ -30062,7 +30060,7 @@
           <p:cNvPr id="22" name="">
             <a:extLst xmlns:a="http://schemas.openxmlformats.org/drawingml/2006/main">
               <a:ext uri="{FF2B5EF4-FFF2-40B4-BE49-F238E27FC236}">
-                <a16:creationId xmlns:a16="http://schemas.microsoft.com/office/drawing/2014/main" id="{A0072239-8FDA-42C2-92D5-658B809A39BD}"/>
+                <a16:creationId xmlns:a16="http://schemas.microsoft.com/office/drawing/2014/main" id="{DC11A0A5-2720-4559-8D8E-076AA90E5F5B}"/>
               </a:ext>
             </a:extLst>
           </p:cNvPr>
@@ -30095,7 +30093,7 @@
           <p:cNvPr id="23" name="">
             <a:extLst xmlns:a="http://schemas.openxmlformats.org/drawingml/2006/main">
               <a:ext uri="{FF2B5EF4-FFF2-40B4-BE49-F238E27FC236}">
-                <a16:creationId xmlns:a16="http://schemas.microsoft.com/office/drawing/2014/main" id="{F9580BC8-ECD8-445A-A5ED-38DCBEDB9EE1}"/>
+                <a16:creationId xmlns:a16="http://schemas.microsoft.com/office/drawing/2014/main" id="{A6B5505D-3AB6-4E13-A944-B50E90F48A65}"/>
               </a:ext>
             </a:extLst>
           </p:cNvPr>
@@ -30159,7 +30157,7 @@
           <p:cNvPr id="24" name="">
             <a:extLst xmlns:a="http://schemas.openxmlformats.org/drawingml/2006/main">
               <a:ext uri="{FF2B5EF4-FFF2-40B4-BE49-F238E27FC236}">
-                <a16:creationId xmlns:a16="http://schemas.microsoft.com/office/drawing/2014/main" id="{5241E44D-297F-4220-9D0B-458A1BA21ABF}"/>
+                <a16:creationId xmlns:a16="http://schemas.microsoft.com/office/drawing/2014/main" id="{60D1D142-513E-4DD4-BD2C-72324952A771}"/>
               </a:ext>
             </a:extLst>
           </p:cNvPr>
@@ -30223,7 +30221,7 @@
           <p:cNvPr id="25" name="">
             <a:extLst xmlns:a="http://schemas.openxmlformats.org/drawingml/2006/main">
               <a:ext uri="{FF2B5EF4-FFF2-40B4-BE49-F238E27FC236}">
-                <a16:creationId xmlns:a16="http://schemas.microsoft.com/office/drawing/2014/main" id="{1CB02748-A699-42AB-B513-CC6807DB5E42}"/>
+                <a16:creationId xmlns:a16="http://schemas.microsoft.com/office/drawing/2014/main" id="{65D06CF2-5772-436E-9F1C-0A577AE46656}"/>
               </a:ext>
             </a:extLst>
           </p:cNvPr>
@@ -30256,7 +30254,7 @@
           <p:cNvPr id="26" name="">
             <a:extLst xmlns:a="http://schemas.openxmlformats.org/drawingml/2006/main">
               <a:ext uri="{FF2B5EF4-FFF2-40B4-BE49-F238E27FC236}">
-                <a16:creationId xmlns:a16="http://schemas.microsoft.com/office/drawing/2014/main" id="{B427A792-3998-4B0B-B033-9C14FA7329EC}"/>
+                <a16:creationId xmlns:a16="http://schemas.microsoft.com/office/drawing/2014/main" id="{D598F35B-AE7E-4F5C-B779-756F9C54226C}"/>
               </a:ext>
             </a:extLst>
           </p:cNvPr>
@@ -30320,7 +30318,7 @@
           <p:cNvPr id="27" name="">
             <a:extLst xmlns:a="http://schemas.openxmlformats.org/drawingml/2006/main">
               <a:ext uri="{FF2B5EF4-FFF2-40B4-BE49-F238E27FC236}">
-                <a16:creationId xmlns:a16="http://schemas.microsoft.com/office/drawing/2014/main" id="{CC55088F-9653-4EFD-A550-11F073AAC9F0}"/>
+                <a16:creationId xmlns:a16="http://schemas.microsoft.com/office/drawing/2014/main" id="{322A9686-CC46-4375-87DC-1832F22567E4}"/>
               </a:ext>
             </a:extLst>
           </p:cNvPr>
@@ -30384,7 +30382,7 @@
           <p:cNvPr id="28" name="">
             <a:extLst xmlns:a="http://schemas.openxmlformats.org/drawingml/2006/main">
               <a:ext uri="{FF2B5EF4-FFF2-40B4-BE49-F238E27FC236}">
-                <a16:creationId xmlns:a16="http://schemas.microsoft.com/office/drawing/2014/main" id="{FDCB53D2-B9B4-4863-B03C-5F7830A5C6C8}"/>
+                <a16:creationId xmlns:a16="http://schemas.microsoft.com/office/drawing/2014/main" id="{DC4E4D05-728A-4214-8B38-E7D343D57013}"/>
               </a:ext>
             </a:extLst>
           </p:cNvPr>
@@ -30417,7 +30415,7 @@
           <p:cNvPr id="29" name="">
             <a:extLst xmlns:a="http://schemas.openxmlformats.org/drawingml/2006/main">
               <a:ext uri="{FF2B5EF4-FFF2-40B4-BE49-F238E27FC236}">
-                <a16:creationId xmlns:a16="http://schemas.microsoft.com/office/drawing/2014/main" id="{79A85D5B-923D-4F9D-88BD-61EC30F7CFBA}"/>
+                <a16:creationId xmlns:a16="http://schemas.microsoft.com/office/drawing/2014/main" id="{124C72E2-D611-415F-B3D5-F776B877DFFE}"/>
               </a:ext>
             </a:extLst>
           </p:cNvPr>
@@ -30481,7 +30479,7 @@
           <p:cNvPr id="30" name="">
             <a:extLst xmlns:a="http://schemas.openxmlformats.org/drawingml/2006/main">
               <a:ext uri="{FF2B5EF4-FFF2-40B4-BE49-F238E27FC236}">
-                <a16:creationId xmlns:a16="http://schemas.microsoft.com/office/drawing/2014/main" id="{F17C6930-AE64-4EEF-AE88-B647FCCC57EC}"/>
+                <a16:creationId xmlns:a16="http://schemas.microsoft.com/office/drawing/2014/main" id="{ECA3468E-1FF6-4174-A54C-99896F24372A}"/>
               </a:ext>
             </a:extLst>
           </p:cNvPr>
@@ -30545,7 +30543,7 @@
           <p:cNvPr id="31" name="">
             <a:extLst xmlns:a="http://schemas.openxmlformats.org/drawingml/2006/main">
               <a:ext uri="{FF2B5EF4-FFF2-40B4-BE49-F238E27FC236}">
-                <a16:creationId xmlns:a16="http://schemas.microsoft.com/office/drawing/2014/main" id="{82A6A388-6F17-4780-8C7B-E1630D6DA710}"/>
+                <a16:creationId xmlns:a16="http://schemas.microsoft.com/office/drawing/2014/main" id="{55D17F79-C30F-4952-B3A8-16ADF05CECF6}"/>
               </a:ext>
             </a:extLst>
           </p:cNvPr>
@@ -30580,7 +30578,7 @@
           <p:cNvPr id="32" name="">
             <a:extLst xmlns:a="http://schemas.openxmlformats.org/drawingml/2006/main">
               <a:ext uri="{FF2B5EF4-FFF2-40B4-BE49-F238E27FC236}">
-                <a16:creationId xmlns:a16="http://schemas.microsoft.com/office/drawing/2014/main" id="{369FCCB6-5907-4D86-923A-9DFE8592E0AB}"/>
+                <a16:creationId xmlns:a16="http://schemas.microsoft.com/office/drawing/2014/main" id="{82B7D8F5-591B-4D5A-8570-986537D42B25}"/>
               </a:ext>
             </a:extLst>
           </p:cNvPr>
@@ -30644,7 +30642,7 @@
           <p:cNvPr id="33" name="">
             <a:extLst xmlns:a="http://schemas.openxmlformats.org/drawingml/2006/main">
               <a:ext uri="{FF2B5EF4-FFF2-40B4-BE49-F238E27FC236}">
-                <a16:creationId xmlns:a16="http://schemas.microsoft.com/office/drawing/2014/main" id="{00A55083-DD37-4A3A-8072-7D14944E95A0}"/>
+                <a16:creationId xmlns:a16="http://schemas.microsoft.com/office/drawing/2014/main" id="{C847BA38-9006-4DE2-83C3-66610C51D3EA}"/>
               </a:ext>
             </a:extLst>
           </p:cNvPr>
@@ -30708,7 +30706,7 @@
           <p:cNvPr id="34" name="">
             <a:extLst xmlns:a="http://schemas.openxmlformats.org/drawingml/2006/main">
               <a:ext uri="{FF2B5EF4-FFF2-40B4-BE49-F238E27FC236}">
-                <a16:creationId xmlns:a16="http://schemas.microsoft.com/office/drawing/2014/main" id="{D17FB8A3-72CF-4B40-BF48-61728779C461}"/>
+                <a16:creationId xmlns:a16="http://schemas.microsoft.com/office/drawing/2014/main" id="{1611C9F2-A806-4A79-B7A9-DF4AFAEBB0B7}"/>
               </a:ext>
             </a:extLst>
           </p:cNvPr>
@@ -30770,7 +30768,7 @@
     </p:spTree>
     <p:extLst>
       <p:ext uri="{BB962C8B-B14F-4D97-AF65-F5344CB8AC3E}">
-        <p14:creationId xmlns:p14="http://schemas.microsoft.com/office/powerpoint/2010/main" val="93837435"/>
+        <p14:creationId xmlns:p14="http://schemas.microsoft.com/office/powerpoint/2010/main" val="1474047265"/>
       </p:ext>
     </p:extLst>
   </p:cSld>
@@ -30794,7 +30792,7 @@
           <p:cNvPr id="1" name="">
             <a:extLst xmlns:a="http://schemas.openxmlformats.org/drawingml/2006/main">
               <a:ext uri="{FF2B5EF4-FFF2-40B4-BE49-F238E27FC236}">
-                <a16:creationId xmlns:a16="http://schemas.microsoft.com/office/drawing/2014/main" id="{C4B79EB5-0B73-47EE-A7E8-FA9A9F3F274C}"/>
+                <a16:creationId xmlns:a16="http://schemas.microsoft.com/office/drawing/2014/main" id="{E116A775-ABD5-421A-AC4D-C11769B9C980}"/>
               </a:ext>
             </a:extLst>
           </p:cNvPr>
@@ -30829,7 +30827,7 @@
           <p:cNvPr id="2" name="">
             <a:extLst xmlns:a="http://schemas.openxmlformats.org/drawingml/2006/main">
               <a:ext uri="{FF2B5EF4-FFF2-40B4-BE49-F238E27FC236}">
-                <a16:creationId xmlns:a16="http://schemas.microsoft.com/office/drawing/2014/main" id="{C8EC591B-3690-4AE8-BE62-19FADFB654B6}"/>
+                <a16:creationId xmlns:a16="http://schemas.microsoft.com/office/drawing/2014/main" id="{EC4B9E62-2FF5-4D4D-9A1C-47AC632D25F8}"/>
               </a:ext>
             </a:extLst>
           </p:cNvPr>
@@ -30864,7 +30862,7 @@
           <p:cNvPr id="3" name="">
             <a:extLst xmlns:a="http://schemas.openxmlformats.org/drawingml/2006/main">
               <a:ext uri="{FF2B5EF4-FFF2-40B4-BE49-F238E27FC236}">
-                <a16:creationId xmlns:a16="http://schemas.microsoft.com/office/drawing/2014/main" id="{23E90848-3B37-46EB-A8A2-AB6FB4A73AAE}"/>
+                <a16:creationId xmlns:a16="http://schemas.microsoft.com/office/drawing/2014/main" id="{36695C1E-5816-4DC9-B427-322C36BBFA39}"/>
               </a:ext>
             </a:extLst>
           </p:cNvPr>
@@ -30899,7 +30897,7 @@
           <p:cNvPr id="4" name="kicker-08-marker">
             <a:extLst xmlns:a="http://schemas.openxmlformats.org/drawingml/2006/main">
               <a:ext uri="{FF2B5EF4-FFF2-40B4-BE49-F238E27FC236}">
-                <a16:creationId xmlns:a16="http://schemas.microsoft.com/office/drawing/2014/main" id="{E4D35479-7F7F-4544-B654-A90963CB4616}"/>
+                <a16:creationId xmlns:a16="http://schemas.microsoft.com/office/drawing/2014/main" id="{1B63094A-057E-4905-BE87-24A256E2ED24}"/>
               </a:ext>
             </a:extLst>
           </p:cNvPr>
@@ -30934,7 +30932,7 @@
           <p:cNvPr id="5" name="kicker-08-label">
             <a:extLst xmlns:a="http://schemas.openxmlformats.org/drawingml/2006/main">
               <a:ext uri="{FF2B5EF4-FFF2-40B4-BE49-F238E27FC236}">
-                <a16:creationId xmlns:a16="http://schemas.microsoft.com/office/drawing/2014/main" id="{180C5C35-906A-41E8-907E-2A8F3C204DE3}"/>
+                <a16:creationId xmlns:a16="http://schemas.microsoft.com/office/drawing/2014/main" id="{1CF1E190-3233-40E8-9D5F-04C4FF77468A}"/>
               </a:ext>
             </a:extLst>
           </p:cNvPr>
@@ -30998,7 +30996,7 @@
           <p:cNvPr id="6" name="">
             <a:extLst xmlns:a="http://schemas.openxmlformats.org/drawingml/2006/main">
               <a:ext uri="{FF2B5EF4-FFF2-40B4-BE49-F238E27FC236}">
-                <a16:creationId xmlns:a16="http://schemas.microsoft.com/office/drawing/2014/main" id="{3658156E-AEB5-4DF7-B44B-5AA529E05A7F}"/>
+                <a16:creationId xmlns:a16="http://schemas.microsoft.com/office/drawing/2014/main" id="{CAEDE518-4B14-4169-9C76-E6984B8F6C71}"/>
               </a:ext>
             </a:extLst>
           </p:cNvPr>
@@ -31062,7 +31060,7 @@
           <p:cNvPr id="7" name="">
             <a:extLst xmlns:a="http://schemas.openxmlformats.org/drawingml/2006/main">
               <a:ext uri="{FF2B5EF4-FFF2-40B4-BE49-F238E27FC236}">
-                <a16:creationId xmlns:a16="http://schemas.microsoft.com/office/drawing/2014/main" id="{4F0DDBBB-998D-4CEE-AF2D-E7D04EB59463}"/>
+                <a16:creationId xmlns:a16="http://schemas.microsoft.com/office/drawing/2014/main" id="{25493152-04B8-4647-9132-395ABB8760A0}"/>
               </a:ext>
             </a:extLst>
           </p:cNvPr>
@@ -31126,7 +31124,7 @@
           <p:cNvPr id="8" name="">
             <a:extLst xmlns:a="http://schemas.openxmlformats.org/drawingml/2006/main">
               <a:ext uri="{FF2B5EF4-FFF2-40B4-BE49-F238E27FC236}">
-                <a16:creationId xmlns:a16="http://schemas.microsoft.com/office/drawing/2014/main" id="{7CB7766F-8E9A-48EA-A339-9CEC7DC6F6C7}"/>
+                <a16:creationId xmlns:a16="http://schemas.microsoft.com/office/drawing/2014/main" id="{F45BE602-85C1-4397-BD09-14A45B76D4EA}"/>
               </a:ext>
             </a:extLst>
           </p:cNvPr>
@@ -31161,7 +31159,7 @@
           <p:cNvPr id="9" name="">
             <a:extLst xmlns:a="http://schemas.openxmlformats.org/drawingml/2006/main">
               <a:ext uri="{FF2B5EF4-FFF2-40B4-BE49-F238E27FC236}">
-                <a16:creationId xmlns:a16="http://schemas.microsoft.com/office/drawing/2014/main" id="{D2F3AF52-0494-459F-865E-89B858119431}"/>
+                <a16:creationId xmlns:a16="http://schemas.microsoft.com/office/drawing/2014/main" id="{E3565753-7645-447A-9CC8-BB5B6A12C9C5}"/>
               </a:ext>
             </a:extLst>
           </p:cNvPr>
@@ -31225,7 +31223,7 @@
           <p:cNvPr id="10" name="">
             <a:extLst xmlns:a="http://schemas.openxmlformats.org/drawingml/2006/main">
               <a:ext uri="{FF2B5EF4-FFF2-40B4-BE49-F238E27FC236}">
-                <a16:creationId xmlns:a16="http://schemas.microsoft.com/office/drawing/2014/main" id="{838274DE-72C5-4122-A646-7BEF1152F9A6}"/>
+                <a16:creationId xmlns:a16="http://schemas.microsoft.com/office/drawing/2014/main" id="{DE2EA4CC-29BE-4AD4-8FE2-8B0E978738B2}"/>
               </a:ext>
             </a:extLst>
           </p:cNvPr>
@@ -31289,7 +31287,7 @@
           <p:cNvPr id="11" name="">
             <a:extLst xmlns:a="http://schemas.openxmlformats.org/drawingml/2006/main">
               <a:ext uri="{FF2B5EF4-FFF2-40B4-BE49-F238E27FC236}">
-                <a16:creationId xmlns:a16="http://schemas.microsoft.com/office/drawing/2014/main" id="{30702623-11B1-4920-93E1-65667DA3B807}"/>
+                <a16:creationId xmlns:a16="http://schemas.microsoft.com/office/drawing/2014/main" id="{E1D88C76-B81D-4F46-A82F-8C633A13632E}"/>
               </a:ext>
             </a:extLst>
           </p:cNvPr>
@@ -31353,7 +31351,7 @@
           <p:cNvPr id="12" name="">
             <a:extLst xmlns:a="http://schemas.openxmlformats.org/drawingml/2006/main">
               <a:ext uri="{FF2B5EF4-FFF2-40B4-BE49-F238E27FC236}">
-                <a16:creationId xmlns:a16="http://schemas.microsoft.com/office/drawing/2014/main" id="{FF65B270-D33A-4133-8D04-E937284834D0}"/>
+                <a16:creationId xmlns:a16="http://schemas.microsoft.com/office/drawing/2014/main" id="{2CC3B990-8073-41BD-9D34-5DBF03C4B56D}"/>
               </a:ext>
             </a:extLst>
           </p:cNvPr>
@@ -31388,7 +31386,7 @@
           <p:cNvPr id="13" name="">
             <a:extLst xmlns:a="http://schemas.openxmlformats.org/drawingml/2006/main">
               <a:ext uri="{FF2B5EF4-FFF2-40B4-BE49-F238E27FC236}">
-                <a16:creationId xmlns:a16="http://schemas.microsoft.com/office/drawing/2014/main" id="{11D5B832-2218-41A7-9567-F2B803B51D4C}"/>
+                <a16:creationId xmlns:a16="http://schemas.microsoft.com/office/drawing/2014/main" id="{8AD4E4D2-5617-4E78-9B96-E144213B68FB}"/>
               </a:ext>
             </a:extLst>
           </p:cNvPr>
@@ -31421,7 +31419,7 @@
           <p:cNvPr id="14" name="">
             <a:extLst xmlns:a="http://schemas.openxmlformats.org/drawingml/2006/main">
               <a:ext uri="{FF2B5EF4-FFF2-40B4-BE49-F238E27FC236}">
-                <a16:creationId xmlns:a16="http://schemas.microsoft.com/office/drawing/2014/main" id="{90E7AD15-281C-4360-8454-75DCC5C993D4}"/>
+                <a16:creationId xmlns:a16="http://schemas.microsoft.com/office/drawing/2014/main" id="{F2B2F0BD-1777-47B7-AF9C-76AF831604DC}"/>
               </a:ext>
             </a:extLst>
           </p:cNvPr>
@@ -31456,7 +31454,7 @@
           <p:cNvPr id="15" name="">
             <a:extLst xmlns:a="http://schemas.openxmlformats.org/drawingml/2006/main">
               <a:ext uri="{FF2B5EF4-FFF2-40B4-BE49-F238E27FC236}">
-                <a16:creationId xmlns:a16="http://schemas.microsoft.com/office/drawing/2014/main" id="{CDE7EAA4-71B2-494F-A999-C9B97D817BDE}"/>
+                <a16:creationId xmlns:a16="http://schemas.microsoft.com/office/drawing/2014/main" id="{1E13E449-8CD6-4A00-9DA2-96261BE6015E}"/>
               </a:ext>
             </a:extLst>
           </p:cNvPr>
@@ -31520,7 +31518,7 @@
           <p:cNvPr id="16" name="">
             <a:extLst xmlns:a="http://schemas.openxmlformats.org/drawingml/2006/main">
               <a:ext uri="{FF2B5EF4-FFF2-40B4-BE49-F238E27FC236}">
-                <a16:creationId xmlns:a16="http://schemas.microsoft.com/office/drawing/2014/main" id="{6331E30A-D198-4ACA-99DD-F55A21A97538}"/>
+                <a16:creationId xmlns:a16="http://schemas.microsoft.com/office/drawing/2014/main" id="{2818BACB-5ED9-42F8-80FA-DA10FFEF25F5}"/>
               </a:ext>
             </a:extLst>
           </p:cNvPr>
@@ -31553,7 +31551,7 @@
           <p:cNvPr id="17" name="">
             <a:extLst xmlns:a="http://schemas.openxmlformats.org/drawingml/2006/main">
               <a:ext uri="{FF2B5EF4-FFF2-40B4-BE49-F238E27FC236}">
-                <a16:creationId xmlns:a16="http://schemas.microsoft.com/office/drawing/2014/main" id="{00C1748F-18C9-4FC0-B1F8-0914451E3E1D}"/>
+                <a16:creationId xmlns:a16="http://schemas.microsoft.com/office/drawing/2014/main" id="{17CAAF8D-ACE7-4BB3-8A6D-83143E6072CB}"/>
               </a:ext>
             </a:extLst>
           </p:cNvPr>
@@ -31617,7 +31615,7 @@
           <p:cNvPr id="18" name="">
             <a:extLst xmlns:a="http://schemas.openxmlformats.org/drawingml/2006/main">
               <a:ext uri="{FF2B5EF4-FFF2-40B4-BE49-F238E27FC236}">
-                <a16:creationId xmlns:a16="http://schemas.microsoft.com/office/drawing/2014/main" id="{DEB54CF2-8794-42FE-8BE7-38D99AE78F9B}"/>
+                <a16:creationId xmlns:a16="http://schemas.microsoft.com/office/drawing/2014/main" id="{F1ABA406-4CBA-427F-A324-4C4C5AC22753}"/>
               </a:ext>
             </a:extLst>
           </p:cNvPr>
@@ -31681,7 +31679,7 @@
           <p:cNvPr id="19" name="">
             <a:extLst xmlns:a="http://schemas.openxmlformats.org/drawingml/2006/main">
               <a:ext uri="{FF2B5EF4-FFF2-40B4-BE49-F238E27FC236}">
-                <a16:creationId xmlns:a16="http://schemas.microsoft.com/office/drawing/2014/main" id="{E5D6E361-2DF6-49F2-A21B-E472A51C8666}"/>
+                <a16:creationId xmlns:a16="http://schemas.microsoft.com/office/drawing/2014/main" id="{8AB03B2A-FFA1-40FE-B137-91D735422397}"/>
               </a:ext>
             </a:extLst>
           </p:cNvPr>
@@ -31714,7 +31712,7 @@
           <p:cNvPr id="20" name="">
             <a:extLst xmlns:a="http://schemas.openxmlformats.org/drawingml/2006/main">
               <a:ext uri="{FF2B5EF4-FFF2-40B4-BE49-F238E27FC236}">
-                <a16:creationId xmlns:a16="http://schemas.microsoft.com/office/drawing/2014/main" id="{067767F3-5C30-48F1-91D9-FE9FC22BB5A7}"/>
+                <a16:creationId xmlns:a16="http://schemas.microsoft.com/office/drawing/2014/main" id="{F1A5BB40-4A63-434B-B1ED-6712006A68A6}"/>
               </a:ext>
             </a:extLst>
           </p:cNvPr>
@@ -31778,7 +31776,7 @@
           <p:cNvPr id="21" name="">
             <a:extLst xmlns:a="http://schemas.openxmlformats.org/drawingml/2006/main">
               <a:ext uri="{FF2B5EF4-FFF2-40B4-BE49-F238E27FC236}">
-                <a16:creationId xmlns:a16="http://schemas.microsoft.com/office/drawing/2014/main" id="{8C90AD3C-55E2-4849-BDFC-8507C6A7FD65}"/>
+                <a16:creationId xmlns:a16="http://schemas.microsoft.com/office/drawing/2014/main" id="{C034B7AC-C585-4C3B-B34A-3C9CFD2AF18E}"/>
               </a:ext>
             </a:extLst>
           </p:cNvPr>
@@ -31842,7 +31840,7 @@
           <p:cNvPr id="22" name="">
             <a:extLst xmlns:a="http://schemas.openxmlformats.org/drawingml/2006/main">
               <a:ext uri="{FF2B5EF4-FFF2-40B4-BE49-F238E27FC236}">
-                <a16:creationId xmlns:a16="http://schemas.microsoft.com/office/drawing/2014/main" id="{13625AE7-F453-4600-A572-675EE4830847}"/>
+                <a16:creationId xmlns:a16="http://schemas.microsoft.com/office/drawing/2014/main" id="{746C330B-AD51-4055-A694-03DB74FC0428}"/>
               </a:ext>
             </a:extLst>
           </p:cNvPr>
@@ -31875,7 +31873,7 @@
           <p:cNvPr id="23" name="">
             <a:extLst xmlns:a="http://schemas.openxmlformats.org/drawingml/2006/main">
               <a:ext uri="{FF2B5EF4-FFF2-40B4-BE49-F238E27FC236}">
-                <a16:creationId xmlns:a16="http://schemas.microsoft.com/office/drawing/2014/main" id="{1C47B4FB-CDB8-47F6-9FF1-CCA42A5C8439}"/>
+                <a16:creationId xmlns:a16="http://schemas.microsoft.com/office/drawing/2014/main" id="{A63E23FD-F7FC-4072-BC44-9BC8E6C2F1E4}"/>
               </a:ext>
             </a:extLst>
           </p:cNvPr>
@@ -31939,7 +31937,7 @@
           <p:cNvPr id="24" name="">
             <a:extLst xmlns:a="http://schemas.openxmlformats.org/drawingml/2006/main">
               <a:ext uri="{FF2B5EF4-FFF2-40B4-BE49-F238E27FC236}">
-                <a16:creationId xmlns:a16="http://schemas.microsoft.com/office/drawing/2014/main" id="{73AA8FB5-8BD5-4279-A8FA-595883D33CA4}"/>
+                <a16:creationId xmlns:a16="http://schemas.microsoft.com/office/drawing/2014/main" id="{C614BE22-AF2D-4177-915D-247B7AFCD93B}"/>
               </a:ext>
             </a:extLst>
           </p:cNvPr>
@@ -32003,7 +32001,7 @@
           <p:cNvPr id="25" name="">
             <a:extLst xmlns:a="http://schemas.openxmlformats.org/drawingml/2006/main">
               <a:ext uri="{FF2B5EF4-FFF2-40B4-BE49-F238E27FC236}">
-                <a16:creationId xmlns:a16="http://schemas.microsoft.com/office/drawing/2014/main" id="{0CAC9C17-9B0B-4237-A0DC-01D72D090968}"/>
+                <a16:creationId xmlns:a16="http://schemas.microsoft.com/office/drawing/2014/main" id="{05554D7F-E71E-42A3-8B14-952DF401F136}"/>
               </a:ext>
             </a:extLst>
           </p:cNvPr>
@@ -32038,7 +32036,7 @@
           <p:cNvPr id="26" name="">
             <a:extLst xmlns:a="http://schemas.openxmlformats.org/drawingml/2006/main">
               <a:ext uri="{FF2B5EF4-FFF2-40B4-BE49-F238E27FC236}">
-                <a16:creationId xmlns:a16="http://schemas.microsoft.com/office/drawing/2014/main" id="{D7EDC744-F0A3-4929-870C-0F41257DB99B}"/>
+                <a16:creationId xmlns:a16="http://schemas.microsoft.com/office/drawing/2014/main" id="{3947C5B5-6AA3-42EF-97E3-F4F859064C20}"/>
               </a:ext>
             </a:extLst>
           </p:cNvPr>
@@ -32102,7 +32100,7 @@
           <p:cNvPr id="27" name="">
             <a:extLst xmlns:a="http://schemas.openxmlformats.org/drawingml/2006/main">
               <a:ext uri="{FF2B5EF4-FFF2-40B4-BE49-F238E27FC236}">
-                <a16:creationId xmlns:a16="http://schemas.microsoft.com/office/drawing/2014/main" id="{E3DB21E3-0484-4C3A-A76F-EED5BAAAC0FB}"/>
+                <a16:creationId xmlns:a16="http://schemas.microsoft.com/office/drawing/2014/main" id="{A1F8E43A-2CD1-4701-B370-32D5C615DF58}"/>
               </a:ext>
             </a:extLst>
           </p:cNvPr>
@@ -32135,7 +32133,7 @@
           <p:cNvPr id="28" name="">
             <a:extLst xmlns:a="http://schemas.openxmlformats.org/drawingml/2006/main">
               <a:ext uri="{FF2B5EF4-FFF2-40B4-BE49-F238E27FC236}">
-                <a16:creationId xmlns:a16="http://schemas.microsoft.com/office/drawing/2014/main" id="{6BCA447B-64DD-4B79-B4E1-62C88753A788}"/>
+                <a16:creationId xmlns:a16="http://schemas.microsoft.com/office/drawing/2014/main" id="{DF7D1620-9FDA-4527-A909-1FD102C705F3}"/>
               </a:ext>
             </a:extLst>
           </p:cNvPr>
@@ -32199,7 +32197,7 @@
           <p:cNvPr id="29" name="">
             <a:extLst xmlns:a="http://schemas.openxmlformats.org/drawingml/2006/main">
               <a:ext uri="{FF2B5EF4-FFF2-40B4-BE49-F238E27FC236}">
-                <a16:creationId xmlns:a16="http://schemas.microsoft.com/office/drawing/2014/main" id="{D72F1CE8-DE7A-47B6-9FC4-ECFC33A4DE04}"/>
+                <a16:creationId xmlns:a16="http://schemas.microsoft.com/office/drawing/2014/main" id="{103C58D1-C83B-477F-B1A7-FE54EC445394}"/>
               </a:ext>
             </a:extLst>
           </p:cNvPr>
@@ -32263,7 +32261,7 @@
           <p:cNvPr id="30" name="">
             <a:extLst xmlns:a="http://schemas.openxmlformats.org/drawingml/2006/main">
               <a:ext uri="{FF2B5EF4-FFF2-40B4-BE49-F238E27FC236}">
-                <a16:creationId xmlns:a16="http://schemas.microsoft.com/office/drawing/2014/main" id="{3384DA98-384E-4497-AF39-5A0F150D64E7}"/>
+                <a16:creationId xmlns:a16="http://schemas.microsoft.com/office/drawing/2014/main" id="{76D35CFD-4901-4CAF-9060-D8D9B3B21475}"/>
               </a:ext>
             </a:extLst>
           </p:cNvPr>
@@ -32296,7 +32294,7 @@
           <p:cNvPr id="31" name="">
             <a:extLst xmlns:a="http://schemas.openxmlformats.org/drawingml/2006/main">
               <a:ext uri="{FF2B5EF4-FFF2-40B4-BE49-F238E27FC236}">
-                <a16:creationId xmlns:a16="http://schemas.microsoft.com/office/drawing/2014/main" id="{A66E72A3-F318-4E65-8DCE-97043CA55E14}"/>
+                <a16:creationId xmlns:a16="http://schemas.microsoft.com/office/drawing/2014/main" id="{5569A60F-58BB-4915-8B93-91FC8FAEC03D}"/>
               </a:ext>
             </a:extLst>
           </p:cNvPr>
@@ -32360,7 +32358,7 @@
           <p:cNvPr id="32" name="">
             <a:extLst xmlns:a="http://schemas.openxmlformats.org/drawingml/2006/main">
               <a:ext uri="{FF2B5EF4-FFF2-40B4-BE49-F238E27FC236}">
-                <a16:creationId xmlns:a16="http://schemas.microsoft.com/office/drawing/2014/main" id="{B48FE221-677D-4752-87E1-9E31BE3A3375}"/>
+                <a16:creationId xmlns:a16="http://schemas.microsoft.com/office/drawing/2014/main" id="{CD7A5559-5FD8-42F1-9FCC-B6AF902D8908}"/>
               </a:ext>
             </a:extLst>
           </p:cNvPr>
@@ -32424,7 +32422,7 @@
           <p:cNvPr id="33" name="">
             <a:extLst xmlns:a="http://schemas.openxmlformats.org/drawingml/2006/main">
               <a:ext uri="{FF2B5EF4-FFF2-40B4-BE49-F238E27FC236}">
-                <a16:creationId xmlns:a16="http://schemas.microsoft.com/office/drawing/2014/main" id="{87C4DD83-F61C-43BD-A060-C764D55F8A1B}"/>
+                <a16:creationId xmlns:a16="http://schemas.microsoft.com/office/drawing/2014/main" id="{399FBD3D-B91B-4E4F-8AE5-1A9B80EFB0FF}"/>
               </a:ext>
             </a:extLst>
           </p:cNvPr>
@@ -32457,7 +32455,7 @@
           <p:cNvPr id="34" name="">
             <a:extLst xmlns:a="http://schemas.openxmlformats.org/drawingml/2006/main">
               <a:ext uri="{FF2B5EF4-FFF2-40B4-BE49-F238E27FC236}">
-                <a16:creationId xmlns:a16="http://schemas.microsoft.com/office/drawing/2014/main" id="{F8D881C8-1ECC-42C4-AEB8-81E54EB3A8D0}"/>
+                <a16:creationId xmlns:a16="http://schemas.microsoft.com/office/drawing/2014/main" id="{F6987675-5977-4B02-8A03-107C0A90928B}"/>
               </a:ext>
             </a:extLst>
           </p:cNvPr>
@@ -32521,7 +32519,7 @@
           <p:cNvPr id="35" name="">
             <a:extLst xmlns:a="http://schemas.openxmlformats.org/drawingml/2006/main">
               <a:ext uri="{FF2B5EF4-FFF2-40B4-BE49-F238E27FC236}">
-                <a16:creationId xmlns:a16="http://schemas.microsoft.com/office/drawing/2014/main" id="{6CBAEBF2-FDD6-4EAF-9985-8898FB4DDD9C}"/>
+                <a16:creationId xmlns:a16="http://schemas.microsoft.com/office/drawing/2014/main" id="{CDAEFB00-93E9-42D0-AE14-D7833906EE91}"/>
               </a:ext>
             </a:extLst>
           </p:cNvPr>
@@ -32585,7 +32583,7 @@
           <p:cNvPr id="36" name="">
             <a:extLst xmlns:a="http://schemas.openxmlformats.org/drawingml/2006/main">
               <a:ext uri="{FF2B5EF4-FFF2-40B4-BE49-F238E27FC236}">
-                <a16:creationId xmlns:a16="http://schemas.microsoft.com/office/drawing/2014/main" id="{679D6D95-3EAA-4993-A5B8-EDA3973C828B}"/>
+                <a16:creationId xmlns:a16="http://schemas.microsoft.com/office/drawing/2014/main" id="{07B7F886-700B-49E6-A015-C24439A448A5}"/>
               </a:ext>
             </a:extLst>
           </p:cNvPr>
@@ -32620,7 +32618,7 @@
           <p:cNvPr id="37" name="">
             <a:extLst xmlns:a="http://schemas.openxmlformats.org/drawingml/2006/main">
               <a:ext uri="{FF2B5EF4-FFF2-40B4-BE49-F238E27FC236}">
-                <a16:creationId xmlns:a16="http://schemas.microsoft.com/office/drawing/2014/main" id="{2548945F-1A6B-4F60-BA2B-F852E94C37C1}"/>
+                <a16:creationId xmlns:a16="http://schemas.microsoft.com/office/drawing/2014/main" id="{4B76E0B0-4DA9-4F60-896A-01B1177DEDDA}"/>
               </a:ext>
             </a:extLst>
           </p:cNvPr>
@@ -32684,7 +32682,7 @@
           <p:cNvPr id="38" name="">
             <a:extLst xmlns:a="http://schemas.openxmlformats.org/drawingml/2006/main">
               <a:ext uri="{FF2B5EF4-FFF2-40B4-BE49-F238E27FC236}">
-                <a16:creationId xmlns:a16="http://schemas.microsoft.com/office/drawing/2014/main" id="{85875CCB-5811-4DB8-9407-9339D10107AC}"/>
+                <a16:creationId xmlns:a16="http://schemas.microsoft.com/office/drawing/2014/main" id="{045E642F-77F4-4AF3-AB77-21896E07AC5D}"/>
               </a:ext>
             </a:extLst>
           </p:cNvPr>
@@ -32748,7 +32746,7 @@
           <p:cNvPr id="39" name="">
             <a:extLst xmlns:a="http://schemas.openxmlformats.org/drawingml/2006/main">
               <a:ext uri="{FF2B5EF4-FFF2-40B4-BE49-F238E27FC236}">
-                <a16:creationId xmlns:a16="http://schemas.microsoft.com/office/drawing/2014/main" id="{626CF24C-3750-4969-9CF0-CBDE7CD46940}"/>
+                <a16:creationId xmlns:a16="http://schemas.microsoft.com/office/drawing/2014/main" id="{29C01163-F330-4D28-A991-D9BFE182B6F1}"/>
               </a:ext>
             </a:extLst>
           </p:cNvPr>
@@ -32812,7 +32810,7 @@
           <p:cNvPr id="40" name="">
             <a:extLst xmlns:a="http://schemas.openxmlformats.org/drawingml/2006/main">
               <a:ext uri="{FF2B5EF4-FFF2-40B4-BE49-F238E27FC236}">
-                <a16:creationId xmlns:a16="http://schemas.microsoft.com/office/drawing/2014/main" id="{54E41FDC-ED09-41F5-A620-4BDE07BD8497}"/>
+                <a16:creationId xmlns:a16="http://schemas.microsoft.com/office/drawing/2014/main" id="{F33D4AB2-A709-49B2-A37F-70E8610335AB}"/>
               </a:ext>
             </a:extLst>
           </p:cNvPr>
@@ -32847,7 +32845,7 @@
           <p:cNvPr id="41" name="">
             <a:extLst xmlns:a="http://schemas.openxmlformats.org/drawingml/2006/main">
               <a:ext uri="{FF2B5EF4-FFF2-40B4-BE49-F238E27FC236}">
-                <a16:creationId xmlns:a16="http://schemas.microsoft.com/office/drawing/2014/main" id="{DAA82BEC-BE0A-4ED2-8819-892F605BFBD0}"/>
+                <a16:creationId xmlns:a16="http://schemas.microsoft.com/office/drawing/2014/main" id="{BB5E5AE7-A61B-4DE5-A9B8-5FC3FCBB8149}"/>
               </a:ext>
             </a:extLst>
           </p:cNvPr>
@@ -32882,7 +32880,7 @@
           <p:cNvPr id="42" name="">
             <a:extLst xmlns:a="http://schemas.openxmlformats.org/drawingml/2006/main">
               <a:ext uri="{FF2B5EF4-FFF2-40B4-BE49-F238E27FC236}">
-                <a16:creationId xmlns:a16="http://schemas.microsoft.com/office/drawing/2014/main" id="{984B3248-E7EF-417E-AC93-1275EDA8CF60}"/>
+                <a16:creationId xmlns:a16="http://schemas.microsoft.com/office/drawing/2014/main" id="{F599F91D-4618-4C7A-93B0-B24E0D45E582}"/>
               </a:ext>
             </a:extLst>
           </p:cNvPr>
@@ -32917,7 +32915,7 @@
           <p:cNvPr id="43" name="kicker-08-marker">
             <a:extLst xmlns:a="http://schemas.openxmlformats.org/drawingml/2006/main">
               <a:ext uri="{FF2B5EF4-FFF2-40B4-BE49-F238E27FC236}">
-                <a16:creationId xmlns:a16="http://schemas.microsoft.com/office/drawing/2014/main" id="{0A1F67B7-54DD-417B-AFB2-170A2B708D02}"/>
+                <a16:creationId xmlns:a16="http://schemas.microsoft.com/office/drawing/2014/main" id="{A350D1E2-B3B7-4FE7-8935-81CF6525BC16}"/>
               </a:ext>
             </a:extLst>
           </p:cNvPr>
@@ -32952,7 +32950,7 @@
           <p:cNvPr id="44" name="kicker-08-label">
             <a:extLst xmlns:a="http://schemas.openxmlformats.org/drawingml/2006/main">
               <a:ext uri="{FF2B5EF4-FFF2-40B4-BE49-F238E27FC236}">
-                <a16:creationId xmlns:a16="http://schemas.microsoft.com/office/drawing/2014/main" id="{224724F0-88CD-40F1-8EB8-ADB2D7D757E8}"/>
+                <a16:creationId xmlns:a16="http://schemas.microsoft.com/office/drawing/2014/main" id="{8A7FA0D9-DD83-423E-A11D-C47A301D8904}"/>
               </a:ext>
             </a:extLst>
           </p:cNvPr>
@@ -33016,7 +33014,7 @@
           <p:cNvPr id="45" name="">
             <a:extLst xmlns:a="http://schemas.openxmlformats.org/drawingml/2006/main">
               <a:ext uri="{FF2B5EF4-FFF2-40B4-BE49-F238E27FC236}">
-                <a16:creationId xmlns:a16="http://schemas.microsoft.com/office/drawing/2014/main" id="{D4DC84E9-8395-49DD-8621-A1B3D75D6C88}"/>
+                <a16:creationId xmlns:a16="http://schemas.microsoft.com/office/drawing/2014/main" id="{6FC7AAC6-11A7-4AD6-A611-B50A691AE7D9}"/>
               </a:ext>
             </a:extLst>
           </p:cNvPr>
@@ -33080,7 +33078,7 @@
           <p:cNvPr id="46" name="">
             <a:extLst xmlns:a="http://schemas.openxmlformats.org/drawingml/2006/main">
               <a:ext uri="{FF2B5EF4-FFF2-40B4-BE49-F238E27FC236}">
-                <a16:creationId xmlns:a16="http://schemas.microsoft.com/office/drawing/2014/main" id="{8271A7CA-0CAA-476C-A41B-61EEC54FCED2}"/>
+                <a16:creationId xmlns:a16="http://schemas.microsoft.com/office/drawing/2014/main" id="{A82CED96-1C11-4274-93B3-61B252D04743}"/>
               </a:ext>
             </a:extLst>
           </p:cNvPr>
@@ -33144,7 +33142,7 @@
           <p:cNvPr id="47" name="">
             <a:extLst xmlns:a="http://schemas.openxmlformats.org/drawingml/2006/main">
               <a:ext uri="{FF2B5EF4-FFF2-40B4-BE49-F238E27FC236}">
-                <a16:creationId xmlns:a16="http://schemas.microsoft.com/office/drawing/2014/main" id="{C42A01F3-4B4B-4013-923D-30C6187B9639}"/>
+                <a16:creationId xmlns:a16="http://schemas.microsoft.com/office/drawing/2014/main" id="{B24D5A4E-18DA-4E1C-AB44-349C8C0AD43B}"/>
               </a:ext>
             </a:extLst>
           </p:cNvPr>
@@ -33179,7 +33177,7 @@
           <p:cNvPr id="48" name="">
             <a:extLst xmlns:a="http://schemas.openxmlformats.org/drawingml/2006/main">
               <a:ext uri="{FF2B5EF4-FFF2-40B4-BE49-F238E27FC236}">
-                <a16:creationId xmlns:a16="http://schemas.microsoft.com/office/drawing/2014/main" id="{44B2B727-A847-40AB-938C-7B635A37E2BE}"/>
+                <a16:creationId xmlns:a16="http://schemas.microsoft.com/office/drawing/2014/main" id="{B4C6BF69-BD2D-49B7-A3E2-2D7383553A26}"/>
               </a:ext>
             </a:extLst>
           </p:cNvPr>
@@ -33214,7 +33212,7 @@
           <p:cNvPr id="49" name="">
             <a:extLst xmlns:a="http://schemas.openxmlformats.org/drawingml/2006/main">
               <a:ext uri="{FF2B5EF4-FFF2-40B4-BE49-F238E27FC236}">
-                <a16:creationId xmlns:a16="http://schemas.microsoft.com/office/drawing/2014/main" id="{7E95DDC0-6339-4B18-8D04-78D78C40FE03}"/>
+                <a16:creationId xmlns:a16="http://schemas.microsoft.com/office/drawing/2014/main" id="{5D2C54F1-6451-4211-9DB7-398E9357B4D2}"/>
               </a:ext>
             </a:extLst>
           </p:cNvPr>
@@ -33249,7 +33247,7 @@
           <p:cNvPr id="50" name="">
             <a:extLst xmlns:a="http://schemas.openxmlformats.org/drawingml/2006/main">
               <a:ext uri="{FF2B5EF4-FFF2-40B4-BE49-F238E27FC236}">
-                <a16:creationId xmlns:a16="http://schemas.microsoft.com/office/drawing/2014/main" id="{46E15EB3-D3DA-43FF-B1D8-BAD425083AE6}"/>
+                <a16:creationId xmlns:a16="http://schemas.microsoft.com/office/drawing/2014/main" id="{8CA62B9B-9EC0-43B9-A9A0-3766F48C153D}"/>
               </a:ext>
             </a:extLst>
           </p:cNvPr>
@@ -33284,7 +33282,7 @@
           <p:cNvPr id="51" name="">
             <a:extLst xmlns:a="http://schemas.openxmlformats.org/drawingml/2006/main">
               <a:ext uri="{FF2B5EF4-FFF2-40B4-BE49-F238E27FC236}">
-                <a16:creationId xmlns:a16="http://schemas.microsoft.com/office/drawing/2014/main" id="{9A2C418E-D0E2-469C-9FCA-66CF5C05A8D6}"/>
+                <a16:creationId xmlns:a16="http://schemas.microsoft.com/office/drawing/2014/main" id="{B2AF4A00-C68B-4497-A12D-2CD304C7A301}"/>
               </a:ext>
             </a:extLst>
           </p:cNvPr>
@@ -33348,7 +33346,7 @@
           <p:cNvPr id="52" name="">
             <a:extLst xmlns:a="http://schemas.openxmlformats.org/drawingml/2006/main">
               <a:ext uri="{FF2B5EF4-FFF2-40B4-BE49-F238E27FC236}">
-                <a16:creationId xmlns:a16="http://schemas.microsoft.com/office/drawing/2014/main" id="{12566BB5-FC5F-4C3E-895C-463695269C19}"/>
+                <a16:creationId xmlns:a16="http://schemas.microsoft.com/office/drawing/2014/main" id="{BE961FDC-7173-44E7-AC8B-8BB8C45128B9}"/>
               </a:ext>
             </a:extLst>
           </p:cNvPr>
@@ -33412,7 +33410,7 @@
           <p:cNvPr id="53" name="">
             <a:extLst xmlns:a="http://schemas.openxmlformats.org/drawingml/2006/main">
               <a:ext uri="{FF2B5EF4-FFF2-40B4-BE49-F238E27FC236}">
-                <a16:creationId xmlns:a16="http://schemas.microsoft.com/office/drawing/2014/main" id="{38945DE0-167C-4EDE-9451-0A41103735D3}"/>
+                <a16:creationId xmlns:a16="http://schemas.microsoft.com/office/drawing/2014/main" id="{9C6F32FF-2750-40B2-AF15-C9C46DA15F00}"/>
               </a:ext>
             </a:extLst>
           </p:cNvPr>
@@ -33474,7 +33472,7 @@
     </p:spTree>
     <p:extLst>
       <p:ext uri="{BB962C8B-B14F-4D97-AF65-F5344CB8AC3E}">
-        <p14:creationId xmlns:p14="http://schemas.microsoft.com/office/powerpoint/2010/main" val="471300484"/>
+        <p14:creationId xmlns:p14="http://schemas.microsoft.com/office/powerpoint/2010/main" val="1584191275"/>
       </p:ext>
     </p:extLst>
   </p:cSld>
